--- a/comparativa_motores/tapia_c1_c5/Tapia_C1_C5.pptx
+++ b/comparativa_motores/tapia_c1_c5/Tapia_C1_C5.pptx
@@ -18,9 +18,11 @@
     <p:sldId id="266" r:id="rId12"/>
     <p:sldId id="267" r:id="rId13"/>
     <p:sldId id="268" r:id="rId14"/>
+    <p:sldId id="269" r:id="rId15"/>
+    <p:sldId id="270" r:id="rId16"/>
   </p:sldIdLst>
   <p:notesMasterIdLst>
-    <p:notesMasterId r:id="rId15"/>
+    <p:notesMasterId r:id="rId17"/>
   </p:notesMasterIdLst>
   <p:sldSz cx="12192000" cy="6858000"/>
   <p:notesSz cx="6858000" cy="12192000"/>
@@ -119,37 +121,39 @@
   <p:extLst>
     <p:ext uri="{521415D9-36F7-43E2-AB2F-B90AF26B5E84}">
       <p14:sectionLst xmlns:p14="http://schemas.microsoft.com/office/powerpoint/2010/main">
-        <p14:section name="Apertura" id="{bedc1929-7fbf-3024-0f49-3fc3d7ae1285}">
+        <p14:section name="Apertura" id="{a7a1f8ea-65dc-15de-8a7b-459a16700fa1}">
           <p14:sldIdLst>
             <p14:sldId id="256"/>
           </p14:sldIdLst>
         </p14:section>
-        <p14:section name="Experimento y método" id="{5a0486ea-8d3e-0707-7fe6-a7fee25abc25}">
+        <p14:section name="Experimento y método" id="{499b2d92-e6a1-56a2-d05e-f5903b899861}">
           <p14:sldIdLst>
             <p14:sldId id="257"/>
             <p14:sldId id="258"/>
             <p14:sldId id="259"/>
           </p14:sldIdLst>
         </p14:section>
-        <p14:section name="Chequeo con el cubo macizo" id="{096d94b8-9e1c-66f6-012f-8370bc9ef768}">
+        <p14:section name="Chequeo con el cubo macizo" id="{b7f32af3-7238-a01a-5e7f-5801f03d909c}">
           <p14:sldIdLst>
             <p14:sldId id="260"/>
             <p14:sldId id="261"/>
           </p14:sldIdLst>
         </p14:section>
-        <p14:section name="Resultados" id="{be672b64-f94b-7591-3314-72c846526bbe}">
+        <p14:section name="Resultados" id="{e62a197e-5b54-db1f-1938-5d3ace4413b6}">
           <p14:sldIdLst>
             <p14:sldId id="262"/>
             <p14:sldId id="263"/>
             <p14:sldId id="264"/>
             <p14:sldId id="265"/>
+            <p14:sldId id="266"/>
+            <p14:sldId id="267"/>
           </p14:sldIdLst>
         </p14:section>
-        <p14:section name="Cierre" id="{8af1dfa3-0058-68e7-2397-26c03ff42bb7}">
+        <p14:section name="Cierre" id="{143eff25-00e4-b66d-2395-50d9109e334b}">
           <p14:sldIdLst>
-            <p14:sldId id="266"/>
-            <p14:sldId id="267"/>
             <p14:sldId id="268"/>
+            <p14:sldId id="269"/>
+            <p14:sldId id="270"/>
           </p14:sldIdLst>
         </p14:section>
       </p14:sectionLst>
@@ -1714,7 +1718,7 @@
           <a:p>
             <a:r>
               <a:rPr lang="en-US" dirty="0"/>
-              <a:t>El resultado son comparaciones relativas entre estructuras bajo una misma condición de carga, no predicciones de resistencia de un espécimen. El caso C3 spinodoide es el más blando y es el que más se aparta de la linealidad.</a:t>
+              <a:t>NGSolve con solver directo, misma carga y misma condición de apoyo, remuestreando cada estructura a distintas mallas. Las razones entre estructuras dependen de la resolución; la que se cita a 40 elementos por lado es una primera aproximación, no un valor convergido. El p99 de von Mises del spinodoide sube con la malla porque los puntales finos quedan mejor resueltos.</a:t>
             </a:r>
             <a:endParaRPr lang="en-US" dirty="0"/>
           </a:p>
@@ -1802,7 +1806,7 @@
           <a:p>
             <a:r>
               <a:rPr lang="en-US" dirty="0"/>
-              <a:t>Próximos pasos: obtener los datos mecánicos del conjunto de Koria et al. si están publicados, o ensayar piezas propias, y repetir el contraste con spinpy-validar-exp con criterios declarados antes de mirar los datos.</a:t>
+              <a:t>Sensibilidad a 40 elementos por lado. Tres esquemas de carga en la cima: presión uniforme sobre las caras óseas (usada en todo el documento), plato rígido (uz uniforme en la cima) y plato rígido con el módulo del núcleo corregido. Las razones respecto del VOI varían, lo que muestra que la magnitud de las diferencias entre estructuras no es independiente del protocolo.</a:t>
             </a:r>
             <a:endParaRPr lang="en-US" dirty="0"/>
           </a:p>
@@ -1890,7 +1894,7 @@
           <a:p>
             <a:r>
               <a:rPr lang="en-US" dirty="0"/>
-              <a:t>Cifras de NGSolve con solver directo. El von Mises máximo se da a título informativo: no converge con la malla y no debe citarse.</a:t>
+              <a:t>El resultado son comparaciones relativas entre estructuras bajo una misma condición de carga, no predicciones de resistencia de un espécimen. El caso C3 spinodoide es el más blando y es el que más se aparta de la linealidad.</a:t>
             </a:r>
             <a:endParaRPr lang="en-US" dirty="0"/>
           </a:p>
@@ -1914,6 +1918,182 @@
             <a:fld id="{F7021451-1387-4CA6-816F-3879F97B5CBC}" type="slidenum">
               <a:rPr lang="en-US"/>
               <a:t>13</a:t>
+            </a:fld>
+            <a:endParaRPr lang="en-US"/>
+          </a:p>
+        </p:txBody>
+      </p:sp>
+    </p:spTree>
+    <p:extLst>
+      <p:ext uri="{BB962C8B-B14F-4D97-AF65-F5344CB8AC3E}">
+        <p14:creationId xmlns:p14="http://schemas.microsoft.com/office/powerpoint/2010/main" val="1024086991"/>
+      </p:ext>
+    </p:extLst>
+  </p:cSld>
+  <p:clrMapOvr>
+    <a:masterClrMapping/>
+  </p:clrMapOvr>
+</p:notes>
+</file>
+
+<file path=ppt/notesSlides/notesSlide14.xml><?xml version="1.0" encoding="utf-8"?>
+<p:notes xmlns:a="http://schemas.openxmlformats.org/drawingml/2006/main" xmlns:r="http://schemas.openxmlformats.org/officeDocument/2006/relationships" xmlns:p="http://schemas.openxmlformats.org/presentationml/2006/main">
+  <p:cSld>
+    <p:spTree>
+      <p:nvGrpSpPr>
+        <p:cNvPr id="1" name=""/>
+        <p:cNvGrpSpPr/>
+        <p:nvPr/>
+      </p:nvGrpSpPr>
+      <p:grpSpPr>
+        <a:xfrm>
+          <a:off x="0" y="0"/>
+          <a:ext cx="0" cy="0"/>
+          <a:chOff x="0" y="0"/>
+          <a:chExt cx="0" cy="0"/>
+        </a:xfrm>
+      </p:grpSpPr>
+      <p:sp>
+        <p:nvSpPr>
+          <p:cNvPr id="2" name="Slide Image Placeholder 1"/>
+          <p:cNvSpPr>
+            <a:spLocks noGrp="1" noRot="1" noChangeAspect="1"/>
+          </p:cNvSpPr>
+          <p:nvPr>
+            <p:ph type="sldImg"/>
+          </p:nvPr>
+        </p:nvSpPr>
+        <p:spPr/>
+      </p:sp>
+      <p:sp>
+        <p:nvSpPr>
+          <p:cNvPr id="3" name="Notes Placeholder 2"/>
+          <p:cNvSpPr>
+            <a:spLocks noGrp="1"/>
+          </p:cNvSpPr>
+          <p:nvPr>
+            <p:ph type="body" idx="1"/>
+          </p:nvPr>
+        </p:nvSpPr>
+        <p:spPr/>
+        <p:txBody>
+          <a:bodyPr/>
+          <a:lstStyle/>
+          <a:p>
+            <a:r>
+              <a:rPr lang="en-US" dirty="0"/>
+              <a:t>Próximos pasos: obtener los datos mecánicos del conjunto de Koria et al. si están publicados, o ensayar piezas propias, y repetir el contraste con spinpy-validar-exp con criterios declarados antes de mirar los datos.</a:t>
+            </a:r>
+            <a:endParaRPr lang="en-US" dirty="0"/>
+          </a:p>
+        </p:txBody>
+      </p:sp>
+      <p:sp>
+        <p:nvSpPr>
+          <p:cNvPr id="4" name="Slide Number Placeholder 3"/>
+          <p:cNvSpPr>
+            <a:spLocks noGrp="1"/>
+          </p:cNvSpPr>
+          <p:nvPr>
+            <p:ph type="sldNum" sz="quarter" idx="10"/>
+          </p:nvPr>
+        </p:nvSpPr>
+        <p:spPr/>
+        <p:txBody>
+          <a:bodyPr/>
+          <a:lstStyle/>
+          <a:p>
+            <a:fld id="{F7021451-1387-4CA6-816F-3879F97B5CBC}" type="slidenum">
+              <a:rPr lang="en-US"/>
+              <a:t>14</a:t>
+            </a:fld>
+            <a:endParaRPr lang="en-US"/>
+          </a:p>
+        </p:txBody>
+      </p:sp>
+    </p:spTree>
+    <p:extLst>
+      <p:ext uri="{BB962C8B-B14F-4D97-AF65-F5344CB8AC3E}">
+        <p14:creationId xmlns:p14="http://schemas.microsoft.com/office/powerpoint/2010/main" val="1024086991"/>
+      </p:ext>
+    </p:extLst>
+  </p:cSld>
+  <p:clrMapOvr>
+    <a:masterClrMapping/>
+  </p:clrMapOvr>
+</p:notes>
+</file>
+
+<file path=ppt/notesSlides/notesSlide15.xml><?xml version="1.0" encoding="utf-8"?>
+<p:notes xmlns:a="http://schemas.openxmlformats.org/drawingml/2006/main" xmlns:r="http://schemas.openxmlformats.org/officeDocument/2006/relationships" xmlns:p="http://schemas.openxmlformats.org/presentationml/2006/main">
+  <p:cSld>
+    <p:spTree>
+      <p:nvGrpSpPr>
+        <p:cNvPr id="1" name=""/>
+        <p:cNvGrpSpPr/>
+        <p:nvPr/>
+      </p:nvGrpSpPr>
+      <p:grpSpPr>
+        <a:xfrm>
+          <a:off x="0" y="0"/>
+          <a:ext cx="0" cy="0"/>
+          <a:chOff x="0" y="0"/>
+          <a:chExt cx="0" cy="0"/>
+        </a:xfrm>
+      </p:grpSpPr>
+      <p:sp>
+        <p:nvSpPr>
+          <p:cNvPr id="2" name="Slide Image Placeholder 1"/>
+          <p:cNvSpPr>
+            <a:spLocks noGrp="1" noRot="1" noChangeAspect="1"/>
+          </p:cNvSpPr>
+          <p:nvPr>
+            <p:ph type="sldImg"/>
+          </p:nvPr>
+        </p:nvSpPr>
+        <p:spPr/>
+      </p:sp>
+      <p:sp>
+        <p:nvSpPr>
+          <p:cNvPr id="3" name="Notes Placeholder 2"/>
+          <p:cNvSpPr>
+            <a:spLocks noGrp="1"/>
+          </p:cNvSpPr>
+          <p:nvPr>
+            <p:ph type="body" idx="1"/>
+          </p:nvPr>
+        </p:nvSpPr>
+        <p:spPr/>
+        <p:txBody>
+          <a:bodyPr/>
+          <a:lstStyle/>
+          <a:p>
+            <a:r>
+              <a:rPr lang="en-US" dirty="0"/>
+              <a:t>Cifras de NGSolve con solver directo a 40³. El von Mises máximo se da a título informativo: no converge con la malla y no debe citarse.</a:t>
+            </a:r>
+            <a:endParaRPr lang="en-US" dirty="0"/>
+          </a:p>
+        </p:txBody>
+      </p:sp>
+      <p:sp>
+        <p:nvSpPr>
+          <p:cNvPr id="4" name="Slide Number Placeholder 3"/>
+          <p:cNvSpPr>
+            <a:spLocks noGrp="1"/>
+          </p:cNvSpPr>
+          <p:nvPr>
+            <p:ph type="sldNum" sz="quarter" idx="10"/>
+          </p:nvPr>
+        </p:nvSpPr>
+        <p:spPr/>
+        <p:txBody>
+          <a:bodyPr/>
+          <a:lstStyle/>
+          <a:p>
+            <a:fld id="{F7021451-1387-4CA6-816F-3879F97B5CBC}" type="slidenum">
+              <a:rPr lang="en-US"/>
+              <a:t>15</a:t>
             </a:fld>
             <a:endParaRPr lang="en-US"/>
           </a:p>
@@ -2066,7 +2246,7 @@
           <a:p>
             <a:r>
               <a:rPr lang="en-US" dirty="0"/>
-              <a:t>El campo de von Mises y el de deformación total no se reescalan entre sí: la deformación total acumula todo lo que se movió la probeta y su máximo está siempre en la cara cargada; von Mises localiza los nudos trabeculares. En un estado uniaxial von Mises vale exactamente la tensión axial.</a:t>
+              <a:t>El campo de von Mises y el de deformación total no se reescalan entre sí: la deformación total acumula lo que se movió la probeta, y su máximo se ubica en la capa superior en la mayoría de los casos; von Mises localiza los nudos trabeculares. La rigidez aparente no usa el máximo de |u|, sino el desplazamiento medio de la cima ponderado por área. En un estado uniaxial von Mises vale exactamente la tensión axial.</a:t>
             </a:r>
             <a:endParaRPr lang="en-US" dirty="0"/>
           </a:p>
@@ -2154,7 +2334,7 @@
           <a:p>
             <a:r>
               <a:rPr lang="en-US" dirty="0"/>
-              <a:t>Revisión de la formulación en el código: en el protocolo de Tapia la base queda con los tres ejes fijos. La cara superior no es un plato rígido: recibe fuerzas nodales iguales en menos z y sus ejes x e y quedan libres, igual que las caras laterales. El apoyo deslizante fija solo uz en la base más los anclajes mínimos contra el movimiento de sólido rígido.</a:t>
+              <a:t>Revisión de la formulación en el código: en el protocolo de Tapia la base queda con los tres ejes fijos. La cara superior no es un plato rígido: recibe una presión uniforme sobre las caras óseas (fuerza igual por cara de elemento) y sus ejes x e y quedan libres, igual que las caras laterales. El VOI de 188 elementos por lado se lleva a 40 por vecino más próximo y los candidatos sintéticos de 96 a 40. El apoyo deslizante fija solo uz en la base más los anclajes mínimos contra el movimiento de sólido rígido.</a:t>
             </a:r>
             <a:endParaRPr lang="en-US" dirty="0"/>
           </a:p>
@@ -2418,7 +2598,7 @@
           <a:p>
             <a:r>
               <a:rPr lang="en-US" dirty="0"/>
-              <a:t>Los ajustes usan el modo completo, la resolución de comparación por omisión (96 elementos por lado), semilla 20260720, sin término mecánico ni réplicas. Los de C2 y C4 reproducen los de la campaña anterior. El error es la función objetivo morfométrica de spinpy.</a:t>
+              <a:t>Los ajustes usan el modo completo, la resolución de comparación por omisión (96 elementos por lado, luego llevada a 40 para el ensayo), semilla 20260720, sin término mecánico ni réplicas. Los de C2 y C4 reproducen los de la campaña anterior. El error es la función objetivo morfométrica de spinpy.</a:t>
             </a:r>
             <a:endParaRPr lang="en-US" dirty="0"/>
           </a:p>
@@ -2506,7 +2686,7 @@
           <a:p>
             <a:r>
               <a:rPr lang="en-US" dirty="0"/>
-              <a:t>Deformación total |u| en milímetros, mapa 3D de cada una de las 15 estructuras con la misma escala por VOI. La rigidez aparente se toma del desplazamiento medio del techo ponderado por área. Las cifras salen de NGSolve con solver directo; la app coincide a 3×10^-12 en E_app.</a:t>
+              <a:t>Deformación total |u| en milímetros, mapa 3D de cada una de las 15 estructuras con la misma escala por VOI. La rigidez aparente se toma del desplazamiento medio del techo ponderado por área. Las cifras salen de NGSolve con solver directo; la app coincide a 3,4 × 10⁻¹² en E_app.</a:t>
             </a:r>
             <a:endParaRPr lang="en-US" dirty="0"/>
           </a:p>
@@ -3526,7 +3706,7 @@
                 <a:ea typeface="Calibri" pitchFamily="34" charset="-122"/>
                 <a:cs typeface="Calibri" pitchFamily="34" charset="-120"/>
               </a:rPr>
-              <a:t>Valores de NGSolve con solver directo, 40³, base empotrada, 100 N. La app da lo mismo hasta 10⁻¹¹. Las cifras completas, con |u| máxima y von Mises máximo, están en el anexo.</a:t>
+              <a:t>Valores de NGSolve con solver directo, 40³, base adherida, 100 N. La app coincide en E_app hasta 3,4 × 10⁻¹² (relativo). No están convergidos con la malla (diapositiva siguiente).</a:t>
             </a:r>
             <a:endParaRPr lang="en-US" sz="1400" dirty="0"/>
           </a:p>
@@ -3591,6 +3771,6019 @@
 <file path=ppt/slides/slide11.xml><?xml version="1.0" encoding="utf-8"?>
 <p:sld xmlns:a="http://schemas.openxmlformats.org/drawingml/2006/main" xmlns:r="http://schemas.openxmlformats.org/officeDocument/2006/relationships" xmlns:p="http://schemas.openxmlformats.org/presentationml/2006/main">
   <p:cSld name="Slide 11">
+    <p:spTree>
+      <p:nvGrpSpPr>
+        <p:cNvPr id="1" name=""/>
+        <p:cNvGrpSpPr/>
+        <p:nvPr/>
+      </p:nvGrpSpPr>
+      <p:grpSpPr>
+        <a:xfrm>
+          <a:off x="0" y="0"/>
+          <a:ext cx="0" cy="0"/>
+          <a:chOff x="0" y="0"/>
+          <a:chExt cx="0" cy="0"/>
+        </a:xfrm>
+      </p:grpSpPr>
+      <p:sp>
+        <p:nvSpPr>
+          <p:cNvPr id="2" name="Text 0"/>
+          <p:cNvSpPr/>
+          <p:nvPr>
+            <p:ph idx="100" type="title" hasCustomPrompt="1"/>
+          </p:nvPr>
+        </p:nvSpPr>
+        <p:spPr>
+          <a:xfrm>
+            <a:off x="548640" y="320040"/>
+            <a:ext cx="11064240" cy="868680"/>
+          </a:xfrm>
+          <a:prstGeom prst="rect">
+            <a:avLst/>
+          </a:prstGeom>
+          <a:noFill/>
+          <a:ln/>
+        </p:spPr>
+        <p:txBody>
+          <a:bodyPr wrap="square" lIns="0" tIns="0" rIns="0" bIns="0" rtlCol="0" anchor="ctr"/>
+          <a:lstStyle/>
+          <a:p>
+            <a:pPr algn="l" indent="0" marL="0">
+              <a:buNone/>
+            </a:pPr>
+            <a:r>
+              <a:rPr lang="en-US" sz="3600" b="1" dirty="0">
+                <a:solidFill>
+                  <a:srgbClr val="1F3A44"/>
+                </a:solidFill>
+                <a:latin typeface="Cambria" pitchFamily="34" charset="0"/>
+                <a:ea typeface="Cambria" pitchFamily="34" charset="-122"/>
+                <a:cs typeface="Cambria" pitchFamily="34" charset="-120"/>
+              </a:rPr>
+              <a:t>Convergencia con la malla</a:t>
+            </a:r>
+            <a:endParaRPr lang="en-US" sz="3600" dirty="0"/>
+          </a:p>
+        </p:txBody>
+      </p:sp>
+      <p:graphicFrame>
+        <p:nvGraphicFramePr>
+          <p:cNvPr id="12" name="Table 0"/>
+          <p:cNvGraphicFramePr>
+            <a:graphicFrameLocks noGrp="1"/>
+          </p:cNvGraphicFramePr>
+          <p:nvPr>
+            <p:extLst>
+              <p:ext uri="{D42A27DB-BD31-4B8C-83A1-F6EECF244321}">
+                <p14:modId xmlns:p14="http://schemas.microsoft.com/office/powerpoint/2010/main" val="1579011935"/>
+              </p:ext>
+            </p:extLst>
+          </p:nvPr>
+        </p:nvGraphicFramePr>
+        <p:xfrm>
+          <a:off x="548640" y="1325880"/>
+          <a:ext cx="11064240" cy="914400"/>
+        </p:xfrm>
+        <a:graphic>
+          <a:graphicData uri="http://schemas.openxmlformats.org/drawingml/2006/table">
+            <a:tbl>
+              <a:tblPr/>
+              <a:tblGrid>
+                <a:gridCol w="1280160"/>
+                <a:gridCol w="1087120"/>
+                <a:gridCol w="1087120"/>
+                <a:gridCol w="1087120"/>
+                <a:gridCol w="1087120"/>
+                <a:gridCol w="1087120"/>
+                <a:gridCol w="1087120"/>
+                <a:gridCol w="1087120"/>
+                <a:gridCol w="1087120"/>
+                <a:gridCol w="1087120"/>
+              </a:tblGrid>
+              <a:tr h="384048">
+                <a:tc>
+                  <a:txBody>
+                    <a:bodyPr/>
+                    <a:lstStyle/>
+                    <a:p>
+                      <a:pPr algn="ctr" indent="0" marL="0">
+                        <a:buNone/>
+                      </a:pPr>
+                      <a:r>
+                        <a:rPr lang="en-US" sz="1300" b="1" dirty="0">
+                          <a:solidFill>
+                            <a:srgbClr val="FFFFFF"/>
+                          </a:solidFill>
+                          <a:latin typeface="Calibri" pitchFamily="34" charset="0"/>
+                          <a:ea typeface="Calibri" pitchFamily="34" charset="-122"/>
+                          <a:cs typeface="Calibri" pitchFamily="34" charset="-120"/>
+                        </a:rPr>
+                        <a:t>VOI</a:t>
+                      </a:r>
+                      <a:endParaRPr lang="en-US" sz="1300" dirty="0">
+                        <a:latin typeface="Calibri" charset="0"/>
+                        <a:ea typeface="Calibri" charset="0"/>
+                        <a:cs typeface="Calibri" charset="0"/>
+                      </a:endParaRPr>
+                    </a:p>
+                  </a:txBody>
+                  <a:tcPr marL="91440" marR="91440" marT="45720" marB="45720" anchor="ctr">
+                    <a:lnL w="12700" cap="flat" cmpd="sng" algn="ctr">
+                      <a:solidFill>
+                        <a:srgbClr val="CFD6D9"/>
+                      </a:solidFill>
+                      <a:prstDash val="solid"/>
+                      <a:round/>
+                      <a:headEnd type="none" w="med" len="med"/>
+                      <a:tailEnd type="none" w="med" len="med"/>
+                    </a:lnL>
+                    <a:lnR w="12700" cap="flat" cmpd="sng" algn="ctr">
+                      <a:solidFill>
+                        <a:srgbClr val="CFD6D9"/>
+                      </a:solidFill>
+                      <a:prstDash val="solid"/>
+                      <a:round/>
+                      <a:headEnd type="none" w="med" len="med"/>
+                      <a:tailEnd type="none" w="med" len="med"/>
+                    </a:lnR>
+                    <a:lnT w="12700" cap="flat" cmpd="sng" algn="ctr">
+                      <a:solidFill>
+                        <a:srgbClr val="CFD6D9"/>
+                      </a:solidFill>
+                      <a:prstDash val="solid"/>
+                      <a:round/>
+                      <a:headEnd type="none" w="med" len="med"/>
+                      <a:tailEnd type="none" w="med" len="med"/>
+                    </a:lnT>
+                    <a:lnB w="12700" cap="flat" cmpd="sng" algn="ctr">
+                      <a:solidFill>
+                        <a:srgbClr val="CFD6D9"/>
+                      </a:solidFill>
+                      <a:prstDash val="solid"/>
+                      <a:round/>
+                      <a:headEnd type="none" w="med" len="med"/>
+                      <a:tailEnd type="none" w="med" len="med"/>
+                    </a:lnB>
+                    <a:solidFill>
+                      <a:srgbClr val="1F3A44"/>
+                    </a:solidFill>
+                  </a:tcPr>
+                </a:tc>
+                <a:tc gridSpan="3">
+                  <a:txBody>
+                    <a:bodyPr/>
+                    <a:lstStyle/>
+                    <a:p>
+                      <a:pPr algn="ctr" indent="0" marL="0">
+                        <a:buNone/>
+                      </a:pPr>
+                      <a:r>
+                        <a:rPr lang="en-US" sz="1300" b="1" dirty="0">
+                          <a:solidFill>
+                            <a:srgbClr val="FFFFFF"/>
+                          </a:solidFill>
+                          <a:latin typeface="Calibri" pitchFamily="34" charset="0"/>
+                          <a:ea typeface="Calibri" pitchFamily="34" charset="-122"/>
+                          <a:cs typeface="Calibri" pitchFamily="34" charset="-120"/>
+                        </a:rPr>
+                        <a:t>Spinodoide / VOI, rigidez [%]</a:t>
+                      </a:r>
+                      <a:endParaRPr lang="en-US" sz="1300" dirty="0">
+                        <a:latin typeface="Calibri" charset="0"/>
+                        <a:ea typeface="Calibri" charset="0"/>
+                        <a:cs typeface="Calibri" charset="0"/>
+                      </a:endParaRPr>
+                    </a:p>
+                  </a:txBody>
+                  <a:tcPr marL="91440" marR="91440" marT="45720" marB="45720" anchor="ctr">
+                    <a:lnL w="12700" cap="flat" cmpd="sng" algn="ctr">
+                      <a:solidFill>
+                        <a:srgbClr val="CFD6D9"/>
+                      </a:solidFill>
+                      <a:prstDash val="solid"/>
+                      <a:round/>
+                      <a:headEnd type="none" w="med" len="med"/>
+                      <a:tailEnd type="none" w="med" len="med"/>
+                    </a:lnL>
+                    <a:lnR w="12700" cap="flat" cmpd="sng" algn="ctr">
+                      <a:solidFill>
+                        <a:srgbClr val="CFD6D9"/>
+                      </a:solidFill>
+                      <a:prstDash val="solid"/>
+                      <a:round/>
+                      <a:headEnd type="none" w="med" len="med"/>
+                      <a:tailEnd type="none" w="med" len="med"/>
+                    </a:lnR>
+                    <a:lnT w="12700" cap="flat" cmpd="sng" algn="ctr">
+                      <a:solidFill>
+                        <a:srgbClr val="CFD6D9"/>
+                      </a:solidFill>
+                      <a:prstDash val="solid"/>
+                      <a:round/>
+                      <a:headEnd type="none" w="med" len="med"/>
+                      <a:tailEnd type="none" w="med" len="med"/>
+                    </a:lnT>
+                    <a:lnB w="12700" cap="flat" cmpd="sng" algn="ctr">
+                      <a:solidFill>
+                        <a:srgbClr val="CFD6D9"/>
+                      </a:solidFill>
+                      <a:prstDash val="solid"/>
+                      <a:round/>
+                      <a:headEnd type="none" w="med" len="med"/>
+                      <a:tailEnd type="none" w="med" len="med"/>
+                    </a:lnB>
+                    <a:solidFill>
+                      <a:srgbClr val="1F3A44"/>
+                    </a:solidFill>
+                  </a:tcPr>
+                </a:tc>
+                <a:tc hMerge="1">
+                  <a:tcPr/>
+                </a:tc>
+                <a:tc hMerge="1">
+                  <a:tcPr/>
+                </a:tc>
+                <a:tc gridSpan="3">
+                  <a:txBody>
+                    <a:bodyPr/>
+                    <a:lstStyle/>
+                    <a:p>
+                      <a:pPr algn="ctr" indent="0" marL="0">
+                        <a:buNone/>
+                      </a:pPr>
+                      <a:r>
+                        <a:rPr lang="en-US" sz="1300" b="1" dirty="0">
+                          <a:solidFill>
+                            <a:srgbClr val="FFFFFF"/>
+                          </a:solidFill>
+                          <a:latin typeface="Calibri" pitchFamily="34" charset="0"/>
+                          <a:ea typeface="Calibri" pitchFamily="34" charset="-122"/>
+                          <a:cs typeface="Calibri" pitchFamily="34" charset="-120"/>
+                        </a:rPr>
+                        <a:t>Dual-lattice / VOI, rigidez [%]</a:t>
+                      </a:r>
+                      <a:endParaRPr lang="en-US" sz="1300" dirty="0">
+                        <a:latin typeface="Calibri" charset="0"/>
+                        <a:ea typeface="Calibri" charset="0"/>
+                        <a:cs typeface="Calibri" charset="0"/>
+                      </a:endParaRPr>
+                    </a:p>
+                  </a:txBody>
+                  <a:tcPr marL="91440" marR="91440" marT="45720" marB="45720" anchor="ctr">
+                    <a:lnL w="12700" cap="flat" cmpd="sng" algn="ctr">
+                      <a:solidFill>
+                        <a:srgbClr val="CFD6D9"/>
+                      </a:solidFill>
+                      <a:prstDash val="solid"/>
+                      <a:round/>
+                      <a:headEnd type="none" w="med" len="med"/>
+                      <a:tailEnd type="none" w="med" len="med"/>
+                    </a:lnL>
+                    <a:lnR w="12700" cap="flat" cmpd="sng" algn="ctr">
+                      <a:solidFill>
+                        <a:srgbClr val="CFD6D9"/>
+                      </a:solidFill>
+                      <a:prstDash val="solid"/>
+                      <a:round/>
+                      <a:headEnd type="none" w="med" len="med"/>
+                      <a:tailEnd type="none" w="med" len="med"/>
+                    </a:lnR>
+                    <a:lnT w="12700" cap="flat" cmpd="sng" algn="ctr">
+                      <a:solidFill>
+                        <a:srgbClr val="CFD6D9"/>
+                      </a:solidFill>
+                      <a:prstDash val="solid"/>
+                      <a:round/>
+                      <a:headEnd type="none" w="med" len="med"/>
+                      <a:tailEnd type="none" w="med" len="med"/>
+                    </a:lnT>
+                    <a:lnB w="12700" cap="flat" cmpd="sng" algn="ctr">
+                      <a:solidFill>
+                        <a:srgbClr val="CFD6D9"/>
+                      </a:solidFill>
+                      <a:prstDash val="solid"/>
+                      <a:round/>
+                      <a:headEnd type="none" w="med" len="med"/>
+                      <a:tailEnd type="none" w="med" len="med"/>
+                    </a:lnB>
+                    <a:solidFill>
+                      <a:srgbClr val="1F3A44"/>
+                    </a:solidFill>
+                  </a:tcPr>
+                </a:tc>
+                <a:tc hMerge="1">
+                  <a:tcPr/>
+                </a:tc>
+                <a:tc hMerge="1">
+                  <a:tcPr/>
+                </a:tc>
+                <a:tc gridSpan="3">
+                  <a:txBody>
+                    <a:bodyPr/>
+                    <a:lstStyle/>
+                    <a:p>
+                      <a:pPr algn="ctr" indent="0" marL="0">
+                        <a:buNone/>
+                      </a:pPr>
+                      <a:r>
+                        <a:rPr lang="en-US" sz="1300" b="1" dirty="0">
+                          <a:solidFill>
+                            <a:srgbClr val="FFFFFF"/>
+                          </a:solidFill>
+                          <a:latin typeface="Calibri" pitchFamily="34" charset="0"/>
+                          <a:ea typeface="Calibri" pitchFamily="34" charset="-122"/>
+                          <a:cs typeface="Calibri" pitchFamily="34" charset="-120"/>
+                        </a:rPr>
+                        <a:t>Spinodoide / VOI, p99 [×]</a:t>
+                      </a:r>
+                      <a:endParaRPr lang="en-US" sz="1300" dirty="0">
+                        <a:latin typeface="Calibri" charset="0"/>
+                        <a:ea typeface="Calibri" charset="0"/>
+                        <a:cs typeface="Calibri" charset="0"/>
+                      </a:endParaRPr>
+                    </a:p>
+                  </a:txBody>
+                  <a:tcPr marL="91440" marR="91440" marT="45720" marB="45720" anchor="ctr">
+                    <a:lnL w="12700" cap="flat" cmpd="sng" algn="ctr">
+                      <a:solidFill>
+                        <a:srgbClr val="CFD6D9"/>
+                      </a:solidFill>
+                      <a:prstDash val="solid"/>
+                      <a:round/>
+                      <a:headEnd type="none" w="med" len="med"/>
+                      <a:tailEnd type="none" w="med" len="med"/>
+                    </a:lnL>
+                    <a:lnR w="12700" cap="flat" cmpd="sng" algn="ctr">
+                      <a:solidFill>
+                        <a:srgbClr val="CFD6D9"/>
+                      </a:solidFill>
+                      <a:prstDash val="solid"/>
+                      <a:round/>
+                      <a:headEnd type="none" w="med" len="med"/>
+                      <a:tailEnd type="none" w="med" len="med"/>
+                    </a:lnR>
+                    <a:lnT w="12700" cap="flat" cmpd="sng" algn="ctr">
+                      <a:solidFill>
+                        <a:srgbClr val="CFD6D9"/>
+                      </a:solidFill>
+                      <a:prstDash val="solid"/>
+                      <a:round/>
+                      <a:headEnd type="none" w="med" len="med"/>
+                      <a:tailEnd type="none" w="med" len="med"/>
+                    </a:lnT>
+                    <a:lnB w="12700" cap="flat" cmpd="sng" algn="ctr">
+                      <a:solidFill>
+                        <a:srgbClr val="CFD6D9"/>
+                      </a:solidFill>
+                      <a:prstDash val="solid"/>
+                      <a:round/>
+                      <a:headEnd type="none" w="med" len="med"/>
+                      <a:tailEnd type="none" w="med" len="med"/>
+                    </a:lnB>
+                    <a:solidFill>
+                      <a:srgbClr val="1F3A44"/>
+                    </a:solidFill>
+                  </a:tcPr>
+                </a:tc>
+                <a:tc hMerge="1">
+                  <a:tcPr/>
+                </a:tc>
+                <a:tc hMerge="1">
+                  <a:tcPr/>
+                </a:tc>
+              </a:tr>
+              <a:tr h="384048">
+                <a:tc>
+                  <a:txBody>
+                    <a:bodyPr/>
+                    <a:lstStyle/>
+                    <a:p>
+                      <a:pPr algn="ctr" indent="0" marL="0">
+                        <a:buNone/>
+                      </a:pPr>
+                      <a:r>
+                        <a:rPr lang="en-US" sz="1300" b="1" dirty="0">
+                          <a:solidFill>
+                            <a:srgbClr val="FFFFFF"/>
+                          </a:solidFill>
+                          <a:latin typeface="Calibri" pitchFamily="34" charset="0"/>
+                          <a:ea typeface="Calibri" pitchFamily="34" charset="-122"/>
+                          <a:cs typeface="Calibri" pitchFamily="34" charset="-120"/>
+                        </a:rPr>
+                        <a:t>n por lado</a:t>
+                      </a:r>
+                      <a:endParaRPr lang="en-US" sz="1300" dirty="0">
+                        <a:latin typeface="Calibri" charset="0"/>
+                        <a:ea typeface="Calibri" charset="0"/>
+                        <a:cs typeface="Calibri" charset="0"/>
+                      </a:endParaRPr>
+                    </a:p>
+                  </a:txBody>
+                  <a:tcPr marL="91440" marR="91440" marT="45720" marB="45720" anchor="ctr">
+                    <a:lnL w="12700" cap="flat" cmpd="sng" algn="ctr">
+                      <a:solidFill>
+                        <a:srgbClr val="CFD6D9"/>
+                      </a:solidFill>
+                      <a:prstDash val="solid"/>
+                      <a:round/>
+                      <a:headEnd type="none" w="med" len="med"/>
+                      <a:tailEnd type="none" w="med" len="med"/>
+                    </a:lnL>
+                    <a:lnR w="12700" cap="flat" cmpd="sng" algn="ctr">
+                      <a:solidFill>
+                        <a:srgbClr val="CFD6D9"/>
+                      </a:solidFill>
+                      <a:prstDash val="solid"/>
+                      <a:round/>
+                      <a:headEnd type="none" w="med" len="med"/>
+                      <a:tailEnd type="none" w="med" len="med"/>
+                    </a:lnR>
+                    <a:lnT w="12700" cap="flat" cmpd="sng" algn="ctr">
+                      <a:solidFill>
+                        <a:srgbClr val="CFD6D9"/>
+                      </a:solidFill>
+                      <a:prstDash val="solid"/>
+                      <a:round/>
+                      <a:headEnd type="none" w="med" len="med"/>
+                      <a:tailEnd type="none" w="med" len="med"/>
+                    </a:lnT>
+                    <a:lnB w="12700" cap="flat" cmpd="sng" algn="ctr">
+                      <a:solidFill>
+                        <a:srgbClr val="CFD6D9"/>
+                      </a:solidFill>
+                      <a:prstDash val="solid"/>
+                      <a:round/>
+                      <a:headEnd type="none" w="med" len="med"/>
+                      <a:tailEnd type="none" w="med" len="med"/>
+                    </a:lnB>
+                    <a:solidFill>
+                      <a:srgbClr val="1F3A44"/>
+                    </a:solidFill>
+                  </a:tcPr>
+                </a:tc>
+                <a:tc>
+                  <a:txBody>
+                    <a:bodyPr/>
+                    <a:lstStyle/>
+                    <a:p>
+                      <a:pPr algn="ctr" indent="0" marL="0">
+                        <a:buNone/>
+                      </a:pPr>
+                      <a:r>
+                        <a:rPr lang="en-US" sz="1300" b="1" dirty="0">
+                          <a:solidFill>
+                            <a:srgbClr val="FFFFFF"/>
+                          </a:solidFill>
+                          <a:latin typeface="Calibri" pitchFamily="34" charset="0"/>
+                          <a:ea typeface="Calibri" pitchFamily="34" charset="-122"/>
+                          <a:cs typeface="Calibri" pitchFamily="34" charset="-120"/>
+                        </a:rPr>
+                        <a:t>40</a:t>
+                      </a:r>
+                      <a:endParaRPr lang="en-US" sz="1300" dirty="0">
+                        <a:latin typeface="Calibri" charset="0"/>
+                        <a:ea typeface="Calibri" charset="0"/>
+                        <a:cs typeface="Calibri" charset="0"/>
+                      </a:endParaRPr>
+                    </a:p>
+                  </a:txBody>
+                  <a:tcPr marL="91440" marR="91440" marT="45720" marB="45720" anchor="ctr">
+                    <a:lnL w="12700" cap="flat" cmpd="sng" algn="ctr">
+                      <a:solidFill>
+                        <a:srgbClr val="CFD6D9"/>
+                      </a:solidFill>
+                      <a:prstDash val="solid"/>
+                      <a:round/>
+                      <a:headEnd type="none" w="med" len="med"/>
+                      <a:tailEnd type="none" w="med" len="med"/>
+                    </a:lnL>
+                    <a:lnR w="12700" cap="flat" cmpd="sng" algn="ctr">
+                      <a:solidFill>
+                        <a:srgbClr val="CFD6D9"/>
+                      </a:solidFill>
+                      <a:prstDash val="solid"/>
+                      <a:round/>
+                      <a:headEnd type="none" w="med" len="med"/>
+                      <a:tailEnd type="none" w="med" len="med"/>
+                    </a:lnR>
+                    <a:lnT w="12700" cap="flat" cmpd="sng" algn="ctr">
+                      <a:solidFill>
+                        <a:srgbClr val="CFD6D9"/>
+                      </a:solidFill>
+                      <a:prstDash val="solid"/>
+                      <a:round/>
+                      <a:headEnd type="none" w="med" len="med"/>
+                      <a:tailEnd type="none" w="med" len="med"/>
+                    </a:lnT>
+                    <a:lnB w="12700" cap="flat" cmpd="sng" algn="ctr">
+                      <a:solidFill>
+                        <a:srgbClr val="CFD6D9"/>
+                      </a:solidFill>
+                      <a:prstDash val="solid"/>
+                      <a:round/>
+                      <a:headEnd type="none" w="med" len="med"/>
+                      <a:tailEnd type="none" w="med" len="med"/>
+                    </a:lnB>
+                    <a:solidFill>
+                      <a:srgbClr val="1F3A44"/>
+                    </a:solidFill>
+                  </a:tcPr>
+                </a:tc>
+                <a:tc>
+                  <a:txBody>
+                    <a:bodyPr/>
+                    <a:lstStyle/>
+                    <a:p>
+                      <a:pPr algn="ctr" indent="0" marL="0">
+                        <a:buNone/>
+                      </a:pPr>
+                      <a:r>
+                        <a:rPr lang="en-US" sz="1300" b="1" dirty="0">
+                          <a:solidFill>
+                            <a:srgbClr val="FFFFFF"/>
+                          </a:solidFill>
+                          <a:latin typeface="Calibri" pitchFamily="34" charset="0"/>
+                          <a:ea typeface="Calibri" pitchFamily="34" charset="-122"/>
+                          <a:cs typeface="Calibri" pitchFamily="34" charset="-120"/>
+                        </a:rPr>
+                        <a:t>56</a:t>
+                      </a:r>
+                      <a:endParaRPr lang="en-US" sz="1300" dirty="0">
+                        <a:latin typeface="Calibri" charset="0"/>
+                        <a:ea typeface="Calibri" charset="0"/>
+                        <a:cs typeface="Calibri" charset="0"/>
+                      </a:endParaRPr>
+                    </a:p>
+                  </a:txBody>
+                  <a:tcPr marL="91440" marR="91440" marT="45720" marB="45720" anchor="ctr">
+                    <a:lnL w="12700" cap="flat" cmpd="sng" algn="ctr">
+                      <a:solidFill>
+                        <a:srgbClr val="CFD6D9"/>
+                      </a:solidFill>
+                      <a:prstDash val="solid"/>
+                      <a:round/>
+                      <a:headEnd type="none" w="med" len="med"/>
+                      <a:tailEnd type="none" w="med" len="med"/>
+                    </a:lnL>
+                    <a:lnR w="12700" cap="flat" cmpd="sng" algn="ctr">
+                      <a:solidFill>
+                        <a:srgbClr val="CFD6D9"/>
+                      </a:solidFill>
+                      <a:prstDash val="solid"/>
+                      <a:round/>
+                      <a:headEnd type="none" w="med" len="med"/>
+                      <a:tailEnd type="none" w="med" len="med"/>
+                    </a:lnR>
+                    <a:lnT w="12700" cap="flat" cmpd="sng" algn="ctr">
+                      <a:solidFill>
+                        <a:srgbClr val="CFD6D9"/>
+                      </a:solidFill>
+                      <a:prstDash val="solid"/>
+                      <a:round/>
+                      <a:headEnd type="none" w="med" len="med"/>
+                      <a:tailEnd type="none" w="med" len="med"/>
+                    </a:lnT>
+                    <a:lnB w="12700" cap="flat" cmpd="sng" algn="ctr">
+                      <a:solidFill>
+                        <a:srgbClr val="CFD6D9"/>
+                      </a:solidFill>
+                      <a:prstDash val="solid"/>
+                      <a:round/>
+                      <a:headEnd type="none" w="med" len="med"/>
+                      <a:tailEnd type="none" w="med" len="med"/>
+                    </a:lnB>
+                    <a:solidFill>
+                      <a:srgbClr val="1F3A44"/>
+                    </a:solidFill>
+                  </a:tcPr>
+                </a:tc>
+                <a:tc>
+                  <a:txBody>
+                    <a:bodyPr/>
+                    <a:lstStyle/>
+                    <a:p>
+                      <a:pPr algn="ctr" indent="0" marL="0">
+                        <a:buNone/>
+                      </a:pPr>
+                      <a:r>
+                        <a:rPr lang="en-US" sz="1300" b="1" dirty="0">
+                          <a:solidFill>
+                            <a:srgbClr val="FFFFFF"/>
+                          </a:solidFill>
+                          <a:latin typeface="Calibri" pitchFamily="34" charset="0"/>
+                          <a:ea typeface="Calibri" pitchFamily="34" charset="-122"/>
+                          <a:cs typeface="Calibri" pitchFamily="34" charset="-120"/>
+                        </a:rPr>
+                        <a:t>64</a:t>
+                      </a:r>
+                      <a:endParaRPr lang="en-US" sz="1300" dirty="0">
+                        <a:latin typeface="Calibri" charset="0"/>
+                        <a:ea typeface="Calibri" charset="0"/>
+                        <a:cs typeface="Calibri" charset="0"/>
+                      </a:endParaRPr>
+                    </a:p>
+                  </a:txBody>
+                  <a:tcPr marL="91440" marR="91440" marT="45720" marB="45720" anchor="ctr">
+                    <a:lnL w="12700" cap="flat" cmpd="sng" algn="ctr">
+                      <a:solidFill>
+                        <a:srgbClr val="CFD6D9"/>
+                      </a:solidFill>
+                      <a:prstDash val="solid"/>
+                      <a:round/>
+                      <a:headEnd type="none" w="med" len="med"/>
+                      <a:tailEnd type="none" w="med" len="med"/>
+                    </a:lnL>
+                    <a:lnR w="12700" cap="flat" cmpd="sng" algn="ctr">
+                      <a:solidFill>
+                        <a:srgbClr val="CFD6D9"/>
+                      </a:solidFill>
+                      <a:prstDash val="solid"/>
+                      <a:round/>
+                      <a:headEnd type="none" w="med" len="med"/>
+                      <a:tailEnd type="none" w="med" len="med"/>
+                    </a:lnR>
+                    <a:lnT w="12700" cap="flat" cmpd="sng" algn="ctr">
+                      <a:solidFill>
+                        <a:srgbClr val="CFD6D9"/>
+                      </a:solidFill>
+                      <a:prstDash val="solid"/>
+                      <a:round/>
+                      <a:headEnd type="none" w="med" len="med"/>
+                      <a:tailEnd type="none" w="med" len="med"/>
+                    </a:lnT>
+                    <a:lnB w="12700" cap="flat" cmpd="sng" algn="ctr">
+                      <a:solidFill>
+                        <a:srgbClr val="CFD6D9"/>
+                      </a:solidFill>
+                      <a:prstDash val="solid"/>
+                      <a:round/>
+                      <a:headEnd type="none" w="med" len="med"/>
+                      <a:tailEnd type="none" w="med" len="med"/>
+                    </a:lnB>
+                    <a:solidFill>
+                      <a:srgbClr val="1F3A44"/>
+                    </a:solidFill>
+                  </a:tcPr>
+                </a:tc>
+                <a:tc>
+                  <a:txBody>
+                    <a:bodyPr/>
+                    <a:lstStyle/>
+                    <a:p>
+                      <a:pPr algn="ctr" indent="0" marL="0">
+                        <a:buNone/>
+                      </a:pPr>
+                      <a:r>
+                        <a:rPr lang="en-US" sz="1300" b="1" dirty="0">
+                          <a:solidFill>
+                            <a:srgbClr val="FFFFFF"/>
+                          </a:solidFill>
+                          <a:latin typeface="Calibri" pitchFamily="34" charset="0"/>
+                          <a:ea typeface="Calibri" pitchFamily="34" charset="-122"/>
+                          <a:cs typeface="Calibri" pitchFamily="34" charset="-120"/>
+                        </a:rPr>
+                        <a:t>40</a:t>
+                      </a:r>
+                      <a:endParaRPr lang="en-US" sz="1300" dirty="0">
+                        <a:latin typeface="Calibri" charset="0"/>
+                        <a:ea typeface="Calibri" charset="0"/>
+                        <a:cs typeface="Calibri" charset="0"/>
+                      </a:endParaRPr>
+                    </a:p>
+                  </a:txBody>
+                  <a:tcPr marL="91440" marR="91440" marT="45720" marB="45720" anchor="ctr">
+                    <a:lnL w="12700" cap="flat" cmpd="sng" algn="ctr">
+                      <a:solidFill>
+                        <a:srgbClr val="CFD6D9"/>
+                      </a:solidFill>
+                      <a:prstDash val="solid"/>
+                      <a:round/>
+                      <a:headEnd type="none" w="med" len="med"/>
+                      <a:tailEnd type="none" w="med" len="med"/>
+                    </a:lnL>
+                    <a:lnR w="12700" cap="flat" cmpd="sng" algn="ctr">
+                      <a:solidFill>
+                        <a:srgbClr val="CFD6D9"/>
+                      </a:solidFill>
+                      <a:prstDash val="solid"/>
+                      <a:round/>
+                      <a:headEnd type="none" w="med" len="med"/>
+                      <a:tailEnd type="none" w="med" len="med"/>
+                    </a:lnR>
+                    <a:lnT w="12700" cap="flat" cmpd="sng" algn="ctr">
+                      <a:solidFill>
+                        <a:srgbClr val="CFD6D9"/>
+                      </a:solidFill>
+                      <a:prstDash val="solid"/>
+                      <a:round/>
+                      <a:headEnd type="none" w="med" len="med"/>
+                      <a:tailEnd type="none" w="med" len="med"/>
+                    </a:lnT>
+                    <a:lnB w="12700" cap="flat" cmpd="sng" algn="ctr">
+                      <a:solidFill>
+                        <a:srgbClr val="CFD6D9"/>
+                      </a:solidFill>
+                      <a:prstDash val="solid"/>
+                      <a:round/>
+                      <a:headEnd type="none" w="med" len="med"/>
+                      <a:tailEnd type="none" w="med" len="med"/>
+                    </a:lnB>
+                    <a:solidFill>
+                      <a:srgbClr val="1F3A44"/>
+                    </a:solidFill>
+                  </a:tcPr>
+                </a:tc>
+                <a:tc>
+                  <a:txBody>
+                    <a:bodyPr/>
+                    <a:lstStyle/>
+                    <a:p>
+                      <a:pPr algn="ctr" indent="0" marL="0">
+                        <a:buNone/>
+                      </a:pPr>
+                      <a:r>
+                        <a:rPr lang="en-US" sz="1300" b="1" dirty="0">
+                          <a:solidFill>
+                            <a:srgbClr val="FFFFFF"/>
+                          </a:solidFill>
+                          <a:latin typeface="Calibri" pitchFamily="34" charset="0"/>
+                          <a:ea typeface="Calibri" pitchFamily="34" charset="-122"/>
+                          <a:cs typeface="Calibri" pitchFamily="34" charset="-120"/>
+                        </a:rPr>
+                        <a:t>56</a:t>
+                      </a:r>
+                      <a:endParaRPr lang="en-US" sz="1300" dirty="0">
+                        <a:latin typeface="Calibri" charset="0"/>
+                        <a:ea typeface="Calibri" charset="0"/>
+                        <a:cs typeface="Calibri" charset="0"/>
+                      </a:endParaRPr>
+                    </a:p>
+                  </a:txBody>
+                  <a:tcPr marL="91440" marR="91440" marT="45720" marB="45720" anchor="ctr">
+                    <a:lnL w="12700" cap="flat" cmpd="sng" algn="ctr">
+                      <a:solidFill>
+                        <a:srgbClr val="CFD6D9"/>
+                      </a:solidFill>
+                      <a:prstDash val="solid"/>
+                      <a:round/>
+                      <a:headEnd type="none" w="med" len="med"/>
+                      <a:tailEnd type="none" w="med" len="med"/>
+                    </a:lnL>
+                    <a:lnR w="12700" cap="flat" cmpd="sng" algn="ctr">
+                      <a:solidFill>
+                        <a:srgbClr val="CFD6D9"/>
+                      </a:solidFill>
+                      <a:prstDash val="solid"/>
+                      <a:round/>
+                      <a:headEnd type="none" w="med" len="med"/>
+                      <a:tailEnd type="none" w="med" len="med"/>
+                    </a:lnR>
+                    <a:lnT w="12700" cap="flat" cmpd="sng" algn="ctr">
+                      <a:solidFill>
+                        <a:srgbClr val="CFD6D9"/>
+                      </a:solidFill>
+                      <a:prstDash val="solid"/>
+                      <a:round/>
+                      <a:headEnd type="none" w="med" len="med"/>
+                      <a:tailEnd type="none" w="med" len="med"/>
+                    </a:lnT>
+                    <a:lnB w="12700" cap="flat" cmpd="sng" algn="ctr">
+                      <a:solidFill>
+                        <a:srgbClr val="CFD6D9"/>
+                      </a:solidFill>
+                      <a:prstDash val="solid"/>
+                      <a:round/>
+                      <a:headEnd type="none" w="med" len="med"/>
+                      <a:tailEnd type="none" w="med" len="med"/>
+                    </a:lnB>
+                    <a:solidFill>
+                      <a:srgbClr val="1F3A44"/>
+                    </a:solidFill>
+                  </a:tcPr>
+                </a:tc>
+                <a:tc>
+                  <a:txBody>
+                    <a:bodyPr/>
+                    <a:lstStyle/>
+                    <a:p>
+                      <a:pPr algn="ctr" indent="0" marL="0">
+                        <a:buNone/>
+                      </a:pPr>
+                      <a:r>
+                        <a:rPr lang="en-US" sz="1300" b="1" dirty="0">
+                          <a:solidFill>
+                            <a:srgbClr val="FFFFFF"/>
+                          </a:solidFill>
+                          <a:latin typeface="Calibri" pitchFamily="34" charset="0"/>
+                          <a:ea typeface="Calibri" pitchFamily="34" charset="-122"/>
+                          <a:cs typeface="Calibri" pitchFamily="34" charset="-120"/>
+                        </a:rPr>
+                        <a:t>64</a:t>
+                      </a:r>
+                      <a:endParaRPr lang="en-US" sz="1300" dirty="0">
+                        <a:latin typeface="Calibri" charset="0"/>
+                        <a:ea typeface="Calibri" charset="0"/>
+                        <a:cs typeface="Calibri" charset="0"/>
+                      </a:endParaRPr>
+                    </a:p>
+                  </a:txBody>
+                  <a:tcPr marL="91440" marR="91440" marT="45720" marB="45720" anchor="ctr">
+                    <a:lnL w="12700" cap="flat" cmpd="sng" algn="ctr">
+                      <a:solidFill>
+                        <a:srgbClr val="CFD6D9"/>
+                      </a:solidFill>
+                      <a:prstDash val="solid"/>
+                      <a:round/>
+                      <a:headEnd type="none" w="med" len="med"/>
+                      <a:tailEnd type="none" w="med" len="med"/>
+                    </a:lnL>
+                    <a:lnR w="12700" cap="flat" cmpd="sng" algn="ctr">
+                      <a:solidFill>
+                        <a:srgbClr val="CFD6D9"/>
+                      </a:solidFill>
+                      <a:prstDash val="solid"/>
+                      <a:round/>
+                      <a:headEnd type="none" w="med" len="med"/>
+                      <a:tailEnd type="none" w="med" len="med"/>
+                    </a:lnR>
+                    <a:lnT w="12700" cap="flat" cmpd="sng" algn="ctr">
+                      <a:solidFill>
+                        <a:srgbClr val="CFD6D9"/>
+                      </a:solidFill>
+                      <a:prstDash val="solid"/>
+                      <a:round/>
+                      <a:headEnd type="none" w="med" len="med"/>
+                      <a:tailEnd type="none" w="med" len="med"/>
+                    </a:lnT>
+                    <a:lnB w="12700" cap="flat" cmpd="sng" algn="ctr">
+                      <a:solidFill>
+                        <a:srgbClr val="CFD6D9"/>
+                      </a:solidFill>
+                      <a:prstDash val="solid"/>
+                      <a:round/>
+                      <a:headEnd type="none" w="med" len="med"/>
+                      <a:tailEnd type="none" w="med" len="med"/>
+                    </a:lnB>
+                    <a:solidFill>
+                      <a:srgbClr val="1F3A44"/>
+                    </a:solidFill>
+                  </a:tcPr>
+                </a:tc>
+                <a:tc>
+                  <a:txBody>
+                    <a:bodyPr/>
+                    <a:lstStyle/>
+                    <a:p>
+                      <a:pPr algn="ctr" indent="0" marL="0">
+                        <a:buNone/>
+                      </a:pPr>
+                      <a:r>
+                        <a:rPr lang="en-US" sz="1300" b="1" dirty="0">
+                          <a:solidFill>
+                            <a:srgbClr val="FFFFFF"/>
+                          </a:solidFill>
+                          <a:latin typeface="Calibri" pitchFamily="34" charset="0"/>
+                          <a:ea typeface="Calibri" pitchFamily="34" charset="-122"/>
+                          <a:cs typeface="Calibri" pitchFamily="34" charset="-120"/>
+                        </a:rPr>
+                        <a:t>40</a:t>
+                      </a:r>
+                      <a:endParaRPr lang="en-US" sz="1300" dirty="0">
+                        <a:latin typeface="Calibri" charset="0"/>
+                        <a:ea typeface="Calibri" charset="0"/>
+                        <a:cs typeface="Calibri" charset="0"/>
+                      </a:endParaRPr>
+                    </a:p>
+                  </a:txBody>
+                  <a:tcPr marL="91440" marR="91440" marT="45720" marB="45720" anchor="ctr">
+                    <a:lnL w="12700" cap="flat" cmpd="sng" algn="ctr">
+                      <a:solidFill>
+                        <a:srgbClr val="CFD6D9"/>
+                      </a:solidFill>
+                      <a:prstDash val="solid"/>
+                      <a:round/>
+                      <a:headEnd type="none" w="med" len="med"/>
+                      <a:tailEnd type="none" w="med" len="med"/>
+                    </a:lnL>
+                    <a:lnR w="12700" cap="flat" cmpd="sng" algn="ctr">
+                      <a:solidFill>
+                        <a:srgbClr val="CFD6D9"/>
+                      </a:solidFill>
+                      <a:prstDash val="solid"/>
+                      <a:round/>
+                      <a:headEnd type="none" w="med" len="med"/>
+                      <a:tailEnd type="none" w="med" len="med"/>
+                    </a:lnR>
+                    <a:lnT w="12700" cap="flat" cmpd="sng" algn="ctr">
+                      <a:solidFill>
+                        <a:srgbClr val="CFD6D9"/>
+                      </a:solidFill>
+                      <a:prstDash val="solid"/>
+                      <a:round/>
+                      <a:headEnd type="none" w="med" len="med"/>
+                      <a:tailEnd type="none" w="med" len="med"/>
+                    </a:lnT>
+                    <a:lnB w="12700" cap="flat" cmpd="sng" algn="ctr">
+                      <a:solidFill>
+                        <a:srgbClr val="CFD6D9"/>
+                      </a:solidFill>
+                      <a:prstDash val="solid"/>
+                      <a:round/>
+                      <a:headEnd type="none" w="med" len="med"/>
+                      <a:tailEnd type="none" w="med" len="med"/>
+                    </a:lnB>
+                    <a:solidFill>
+                      <a:srgbClr val="1F3A44"/>
+                    </a:solidFill>
+                  </a:tcPr>
+                </a:tc>
+                <a:tc>
+                  <a:txBody>
+                    <a:bodyPr/>
+                    <a:lstStyle/>
+                    <a:p>
+                      <a:pPr algn="ctr" indent="0" marL="0">
+                        <a:buNone/>
+                      </a:pPr>
+                      <a:r>
+                        <a:rPr lang="en-US" sz="1300" b="1" dirty="0">
+                          <a:solidFill>
+                            <a:srgbClr val="FFFFFF"/>
+                          </a:solidFill>
+                          <a:latin typeface="Calibri" pitchFamily="34" charset="0"/>
+                          <a:ea typeface="Calibri" pitchFamily="34" charset="-122"/>
+                          <a:cs typeface="Calibri" pitchFamily="34" charset="-120"/>
+                        </a:rPr>
+                        <a:t>56</a:t>
+                      </a:r>
+                      <a:endParaRPr lang="en-US" sz="1300" dirty="0">
+                        <a:latin typeface="Calibri" charset="0"/>
+                        <a:ea typeface="Calibri" charset="0"/>
+                        <a:cs typeface="Calibri" charset="0"/>
+                      </a:endParaRPr>
+                    </a:p>
+                  </a:txBody>
+                  <a:tcPr marL="91440" marR="91440" marT="45720" marB="45720" anchor="ctr">
+                    <a:lnL w="12700" cap="flat" cmpd="sng" algn="ctr">
+                      <a:solidFill>
+                        <a:srgbClr val="CFD6D9"/>
+                      </a:solidFill>
+                      <a:prstDash val="solid"/>
+                      <a:round/>
+                      <a:headEnd type="none" w="med" len="med"/>
+                      <a:tailEnd type="none" w="med" len="med"/>
+                    </a:lnL>
+                    <a:lnR w="12700" cap="flat" cmpd="sng" algn="ctr">
+                      <a:solidFill>
+                        <a:srgbClr val="CFD6D9"/>
+                      </a:solidFill>
+                      <a:prstDash val="solid"/>
+                      <a:round/>
+                      <a:headEnd type="none" w="med" len="med"/>
+                      <a:tailEnd type="none" w="med" len="med"/>
+                    </a:lnR>
+                    <a:lnT w="12700" cap="flat" cmpd="sng" algn="ctr">
+                      <a:solidFill>
+                        <a:srgbClr val="CFD6D9"/>
+                      </a:solidFill>
+                      <a:prstDash val="solid"/>
+                      <a:round/>
+                      <a:headEnd type="none" w="med" len="med"/>
+                      <a:tailEnd type="none" w="med" len="med"/>
+                    </a:lnT>
+                    <a:lnB w="12700" cap="flat" cmpd="sng" algn="ctr">
+                      <a:solidFill>
+                        <a:srgbClr val="CFD6D9"/>
+                      </a:solidFill>
+                      <a:prstDash val="solid"/>
+                      <a:round/>
+                      <a:headEnd type="none" w="med" len="med"/>
+                      <a:tailEnd type="none" w="med" len="med"/>
+                    </a:lnB>
+                    <a:solidFill>
+                      <a:srgbClr val="1F3A44"/>
+                    </a:solidFill>
+                  </a:tcPr>
+                </a:tc>
+                <a:tc>
+                  <a:txBody>
+                    <a:bodyPr/>
+                    <a:lstStyle/>
+                    <a:p>
+                      <a:pPr algn="ctr" indent="0" marL="0">
+                        <a:buNone/>
+                      </a:pPr>
+                      <a:r>
+                        <a:rPr lang="en-US" sz="1300" b="1" dirty="0">
+                          <a:solidFill>
+                            <a:srgbClr val="FFFFFF"/>
+                          </a:solidFill>
+                          <a:latin typeface="Calibri" pitchFamily="34" charset="0"/>
+                          <a:ea typeface="Calibri" pitchFamily="34" charset="-122"/>
+                          <a:cs typeface="Calibri" pitchFamily="34" charset="-120"/>
+                        </a:rPr>
+                        <a:t>64</a:t>
+                      </a:r>
+                      <a:endParaRPr lang="en-US" sz="1300" dirty="0">
+                        <a:latin typeface="Calibri" charset="0"/>
+                        <a:ea typeface="Calibri" charset="0"/>
+                        <a:cs typeface="Calibri" charset="0"/>
+                      </a:endParaRPr>
+                    </a:p>
+                  </a:txBody>
+                  <a:tcPr marL="91440" marR="91440" marT="45720" marB="45720" anchor="ctr">
+                    <a:lnL w="12700" cap="flat" cmpd="sng" algn="ctr">
+                      <a:solidFill>
+                        <a:srgbClr val="CFD6D9"/>
+                      </a:solidFill>
+                      <a:prstDash val="solid"/>
+                      <a:round/>
+                      <a:headEnd type="none" w="med" len="med"/>
+                      <a:tailEnd type="none" w="med" len="med"/>
+                    </a:lnL>
+                    <a:lnR w="12700" cap="flat" cmpd="sng" algn="ctr">
+                      <a:solidFill>
+                        <a:srgbClr val="CFD6D9"/>
+                      </a:solidFill>
+                      <a:prstDash val="solid"/>
+                      <a:round/>
+                      <a:headEnd type="none" w="med" len="med"/>
+                      <a:tailEnd type="none" w="med" len="med"/>
+                    </a:lnR>
+                    <a:lnT w="12700" cap="flat" cmpd="sng" algn="ctr">
+                      <a:solidFill>
+                        <a:srgbClr val="CFD6D9"/>
+                      </a:solidFill>
+                      <a:prstDash val="solid"/>
+                      <a:round/>
+                      <a:headEnd type="none" w="med" len="med"/>
+                      <a:tailEnd type="none" w="med" len="med"/>
+                    </a:lnT>
+                    <a:lnB w="12700" cap="flat" cmpd="sng" algn="ctr">
+                      <a:solidFill>
+                        <a:srgbClr val="CFD6D9"/>
+                      </a:solidFill>
+                      <a:prstDash val="solid"/>
+                      <a:round/>
+                      <a:headEnd type="none" w="med" len="med"/>
+                      <a:tailEnd type="none" w="med" len="med"/>
+                    </a:lnB>
+                    <a:solidFill>
+                      <a:srgbClr val="1F3A44"/>
+                    </a:solidFill>
+                  </a:tcPr>
+                </a:tc>
+              </a:tr>
+              <a:tr h="384048">
+                <a:tc>
+                  <a:txBody>
+                    <a:bodyPr/>
+                    <a:lstStyle/>
+                    <a:p>
+                      <a:pPr algn="ctr" indent="0" marL="0">
+                        <a:buNone/>
+                      </a:pPr>
+                      <a:r>
+                        <a:rPr lang="en-US" sz="1300" b="1" dirty="0">
+                          <a:solidFill>
+                            <a:srgbClr val="000000"/>
+                          </a:solidFill>
+                          <a:latin typeface="Calibri" pitchFamily="34" charset="0"/>
+                          <a:ea typeface="Calibri" pitchFamily="34" charset="-122"/>
+                          <a:cs typeface="Calibri" pitchFamily="34" charset="-120"/>
+                        </a:rPr>
+                        <a:t>C1</a:t>
+                      </a:r>
+                      <a:endParaRPr lang="en-US" sz="1300" dirty="0">
+                        <a:latin typeface="Calibri" charset="0"/>
+                        <a:ea typeface="Calibri" charset="0"/>
+                        <a:cs typeface="Calibri" charset="0"/>
+                      </a:endParaRPr>
+                    </a:p>
+                  </a:txBody>
+                  <a:tcPr marL="91440" marR="91440" marT="45720" marB="45720" anchor="ctr">
+                    <a:lnL w="12700" cap="flat" cmpd="sng" algn="ctr">
+                      <a:solidFill>
+                        <a:srgbClr val="CFD6D9"/>
+                      </a:solidFill>
+                      <a:prstDash val="solid"/>
+                      <a:round/>
+                      <a:headEnd type="none" w="med" len="med"/>
+                      <a:tailEnd type="none" w="med" len="med"/>
+                    </a:lnL>
+                    <a:lnR w="12700" cap="flat" cmpd="sng" algn="ctr">
+                      <a:solidFill>
+                        <a:srgbClr val="CFD6D9"/>
+                      </a:solidFill>
+                      <a:prstDash val="solid"/>
+                      <a:round/>
+                      <a:headEnd type="none" w="med" len="med"/>
+                      <a:tailEnd type="none" w="med" len="med"/>
+                    </a:lnR>
+                    <a:lnT w="12700" cap="flat" cmpd="sng" algn="ctr">
+                      <a:solidFill>
+                        <a:srgbClr val="CFD6D9"/>
+                      </a:solidFill>
+                      <a:prstDash val="solid"/>
+                      <a:round/>
+                      <a:headEnd type="none" w="med" len="med"/>
+                      <a:tailEnd type="none" w="med" len="med"/>
+                    </a:lnT>
+                    <a:lnB w="12700" cap="flat" cmpd="sng" algn="ctr">
+                      <a:solidFill>
+                        <a:srgbClr val="CFD6D9"/>
+                      </a:solidFill>
+                      <a:prstDash val="solid"/>
+                      <a:round/>
+                      <a:headEnd type="none" w="med" len="med"/>
+                      <a:tailEnd type="none" w="med" len="med"/>
+                    </a:lnB>
+                  </a:tcPr>
+                </a:tc>
+                <a:tc>
+                  <a:txBody>
+                    <a:bodyPr/>
+                    <a:lstStyle/>
+                    <a:p>
+                      <a:pPr algn="ctr" indent="0" marL="0">
+                        <a:buNone/>
+                      </a:pPr>
+                      <a:r>
+                        <a:rPr lang="en-US" sz="1300" dirty="0">
+                          <a:solidFill>
+                            <a:srgbClr val="000000"/>
+                          </a:solidFill>
+                          <a:latin typeface="Calibri" pitchFamily="34" charset="0"/>
+                          <a:ea typeface="Calibri" pitchFamily="34" charset="-122"/>
+                          <a:cs typeface="Calibri" pitchFamily="34" charset="-120"/>
+                        </a:rPr>
+                        <a:t>36</a:t>
+                      </a:r>
+                      <a:endParaRPr lang="en-US" sz="1300" dirty="0">
+                        <a:latin typeface="Calibri" charset="0"/>
+                        <a:ea typeface="Calibri" charset="0"/>
+                        <a:cs typeface="Calibri" charset="0"/>
+                      </a:endParaRPr>
+                    </a:p>
+                  </a:txBody>
+                  <a:tcPr marL="91440" marR="91440" marT="45720" marB="45720" anchor="ctr">
+                    <a:lnL w="12700" cap="flat" cmpd="sng" algn="ctr">
+                      <a:solidFill>
+                        <a:srgbClr val="CFD6D9"/>
+                      </a:solidFill>
+                      <a:prstDash val="solid"/>
+                      <a:round/>
+                      <a:headEnd type="none" w="med" len="med"/>
+                      <a:tailEnd type="none" w="med" len="med"/>
+                    </a:lnL>
+                    <a:lnR w="12700" cap="flat" cmpd="sng" algn="ctr">
+                      <a:solidFill>
+                        <a:srgbClr val="CFD6D9"/>
+                      </a:solidFill>
+                      <a:prstDash val="solid"/>
+                      <a:round/>
+                      <a:headEnd type="none" w="med" len="med"/>
+                      <a:tailEnd type="none" w="med" len="med"/>
+                    </a:lnR>
+                    <a:lnT w="12700" cap="flat" cmpd="sng" algn="ctr">
+                      <a:solidFill>
+                        <a:srgbClr val="CFD6D9"/>
+                      </a:solidFill>
+                      <a:prstDash val="solid"/>
+                      <a:round/>
+                      <a:headEnd type="none" w="med" len="med"/>
+                      <a:tailEnd type="none" w="med" len="med"/>
+                    </a:lnT>
+                    <a:lnB w="12700" cap="flat" cmpd="sng" algn="ctr">
+                      <a:solidFill>
+                        <a:srgbClr val="CFD6D9"/>
+                      </a:solidFill>
+                      <a:prstDash val="solid"/>
+                      <a:round/>
+                      <a:headEnd type="none" w="med" len="med"/>
+                      <a:tailEnd type="none" w="med" len="med"/>
+                    </a:lnB>
+                  </a:tcPr>
+                </a:tc>
+                <a:tc>
+                  <a:txBody>
+                    <a:bodyPr/>
+                    <a:lstStyle/>
+                    <a:p>
+                      <a:pPr algn="ctr" indent="0" marL="0">
+                        <a:buNone/>
+                      </a:pPr>
+                      <a:r>
+                        <a:rPr lang="en-US" sz="1300" dirty="0">
+                          <a:solidFill>
+                            <a:srgbClr val="000000"/>
+                          </a:solidFill>
+                          <a:latin typeface="Calibri" pitchFamily="34" charset="0"/>
+                          <a:ea typeface="Calibri" pitchFamily="34" charset="-122"/>
+                          <a:cs typeface="Calibri" pitchFamily="34" charset="-120"/>
+                        </a:rPr>
+                        <a:t>32</a:t>
+                      </a:r>
+                      <a:endParaRPr lang="en-US" sz="1300" dirty="0">
+                        <a:latin typeface="Calibri" charset="0"/>
+                        <a:ea typeface="Calibri" charset="0"/>
+                        <a:cs typeface="Calibri" charset="0"/>
+                      </a:endParaRPr>
+                    </a:p>
+                  </a:txBody>
+                  <a:tcPr marL="91440" marR="91440" marT="45720" marB="45720" anchor="ctr">
+                    <a:lnL w="12700" cap="flat" cmpd="sng" algn="ctr">
+                      <a:solidFill>
+                        <a:srgbClr val="CFD6D9"/>
+                      </a:solidFill>
+                      <a:prstDash val="solid"/>
+                      <a:round/>
+                      <a:headEnd type="none" w="med" len="med"/>
+                      <a:tailEnd type="none" w="med" len="med"/>
+                    </a:lnL>
+                    <a:lnR w="12700" cap="flat" cmpd="sng" algn="ctr">
+                      <a:solidFill>
+                        <a:srgbClr val="CFD6D9"/>
+                      </a:solidFill>
+                      <a:prstDash val="solid"/>
+                      <a:round/>
+                      <a:headEnd type="none" w="med" len="med"/>
+                      <a:tailEnd type="none" w="med" len="med"/>
+                    </a:lnR>
+                    <a:lnT w="12700" cap="flat" cmpd="sng" algn="ctr">
+                      <a:solidFill>
+                        <a:srgbClr val="CFD6D9"/>
+                      </a:solidFill>
+                      <a:prstDash val="solid"/>
+                      <a:round/>
+                      <a:headEnd type="none" w="med" len="med"/>
+                      <a:tailEnd type="none" w="med" len="med"/>
+                    </a:lnT>
+                    <a:lnB w="12700" cap="flat" cmpd="sng" algn="ctr">
+                      <a:solidFill>
+                        <a:srgbClr val="CFD6D9"/>
+                      </a:solidFill>
+                      <a:prstDash val="solid"/>
+                      <a:round/>
+                      <a:headEnd type="none" w="med" len="med"/>
+                      <a:tailEnd type="none" w="med" len="med"/>
+                    </a:lnB>
+                  </a:tcPr>
+                </a:tc>
+                <a:tc>
+                  <a:txBody>
+                    <a:bodyPr/>
+                    <a:lstStyle/>
+                    <a:p>
+                      <a:pPr algn="ctr" indent="0" marL="0">
+                        <a:buNone/>
+                      </a:pPr>
+                      <a:r>
+                        <a:rPr lang="en-US" sz="1300" dirty="0">
+                          <a:solidFill>
+                            <a:srgbClr val="000000"/>
+                          </a:solidFill>
+                          <a:latin typeface="Calibri" pitchFamily="34" charset="0"/>
+                          <a:ea typeface="Calibri" pitchFamily="34" charset="-122"/>
+                          <a:cs typeface="Calibri" pitchFamily="34" charset="-120"/>
+                        </a:rPr>
+                        <a:t>30</a:t>
+                      </a:r>
+                      <a:endParaRPr lang="en-US" sz="1300" dirty="0">
+                        <a:latin typeface="Calibri" charset="0"/>
+                        <a:ea typeface="Calibri" charset="0"/>
+                        <a:cs typeface="Calibri" charset="0"/>
+                      </a:endParaRPr>
+                    </a:p>
+                  </a:txBody>
+                  <a:tcPr marL="91440" marR="91440" marT="45720" marB="45720" anchor="ctr">
+                    <a:lnL w="12700" cap="flat" cmpd="sng" algn="ctr">
+                      <a:solidFill>
+                        <a:srgbClr val="CFD6D9"/>
+                      </a:solidFill>
+                      <a:prstDash val="solid"/>
+                      <a:round/>
+                      <a:headEnd type="none" w="med" len="med"/>
+                      <a:tailEnd type="none" w="med" len="med"/>
+                    </a:lnL>
+                    <a:lnR w="12700" cap="flat" cmpd="sng" algn="ctr">
+                      <a:solidFill>
+                        <a:srgbClr val="CFD6D9"/>
+                      </a:solidFill>
+                      <a:prstDash val="solid"/>
+                      <a:round/>
+                      <a:headEnd type="none" w="med" len="med"/>
+                      <a:tailEnd type="none" w="med" len="med"/>
+                    </a:lnR>
+                    <a:lnT w="12700" cap="flat" cmpd="sng" algn="ctr">
+                      <a:solidFill>
+                        <a:srgbClr val="CFD6D9"/>
+                      </a:solidFill>
+                      <a:prstDash val="solid"/>
+                      <a:round/>
+                      <a:headEnd type="none" w="med" len="med"/>
+                      <a:tailEnd type="none" w="med" len="med"/>
+                    </a:lnT>
+                    <a:lnB w="12700" cap="flat" cmpd="sng" algn="ctr">
+                      <a:solidFill>
+                        <a:srgbClr val="CFD6D9"/>
+                      </a:solidFill>
+                      <a:prstDash val="solid"/>
+                      <a:round/>
+                      <a:headEnd type="none" w="med" len="med"/>
+                      <a:tailEnd type="none" w="med" len="med"/>
+                    </a:lnB>
+                  </a:tcPr>
+                </a:tc>
+                <a:tc>
+                  <a:txBody>
+                    <a:bodyPr/>
+                    <a:lstStyle/>
+                    <a:p>
+                      <a:pPr algn="ctr" indent="0" marL="0">
+                        <a:buNone/>
+                      </a:pPr>
+                      <a:r>
+                        <a:rPr lang="en-US" sz="1300" dirty="0">
+                          <a:solidFill>
+                            <a:srgbClr val="000000"/>
+                          </a:solidFill>
+                          <a:latin typeface="Calibri" pitchFamily="34" charset="0"/>
+                          <a:ea typeface="Calibri" pitchFamily="34" charset="-122"/>
+                          <a:cs typeface="Calibri" pitchFamily="34" charset="-120"/>
+                        </a:rPr>
+                        <a:t>75</a:t>
+                      </a:r>
+                      <a:endParaRPr lang="en-US" sz="1300" dirty="0">
+                        <a:latin typeface="Calibri" charset="0"/>
+                        <a:ea typeface="Calibri" charset="0"/>
+                        <a:cs typeface="Calibri" charset="0"/>
+                      </a:endParaRPr>
+                    </a:p>
+                  </a:txBody>
+                  <a:tcPr marL="91440" marR="91440" marT="45720" marB="45720" anchor="ctr">
+                    <a:lnL w="12700" cap="flat" cmpd="sng" algn="ctr">
+                      <a:solidFill>
+                        <a:srgbClr val="CFD6D9"/>
+                      </a:solidFill>
+                      <a:prstDash val="solid"/>
+                      <a:round/>
+                      <a:headEnd type="none" w="med" len="med"/>
+                      <a:tailEnd type="none" w="med" len="med"/>
+                    </a:lnL>
+                    <a:lnR w="12700" cap="flat" cmpd="sng" algn="ctr">
+                      <a:solidFill>
+                        <a:srgbClr val="CFD6D9"/>
+                      </a:solidFill>
+                      <a:prstDash val="solid"/>
+                      <a:round/>
+                      <a:headEnd type="none" w="med" len="med"/>
+                      <a:tailEnd type="none" w="med" len="med"/>
+                    </a:lnR>
+                    <a:lnT w="12700" cap="flat" cmpd="sng" algn="ctr">
+                      <a:solidFill>
+                        <a:srgbClr val="CFD6D9"/>
+                      </a:solidFill>
+                      <a:prstDash val="solid"/>
+                      <a:round/>
+                      <a:headEnd type="none" w="med" len="med"/>
+                      <a:tailEnd type="none" w="med" len="med"/>
+                    </a:lnT>
+                    <a:lnB w="12700" cap="flat" cmpd="sng" algn="ctr">
+                      <a:solidFill>
+                        <a:srgbClr val="CFD6D9"/>
+                      </a:solidFill>
+                      <a:prstDash val="solid"/>
+                      <a:round/>
+                      <a:headEnd type="none" w="med" len="med"/>
+                      <a:tailEnd type="none" w="med" len="med"/>
+                    </a:lnB>
+                  </a:tcPr>
+                </a:tc>
+                <a:tc>
+                  <a:txBody>
+                    <a:bodyPr/>
+                    <a:lstStyle/>
+                    <a:p>
+                      <a:pPr algn="ctr" indent="0" marL="0">
+                        <a:buNone/>
+                      </a:pPr>
+                      <a:r>
+                        <a:rPr lang="en-US" sz="1300" dirty="0">
+                          <a:solidFill>
+                            <a:srgbClr val="000000"/>
+                          </a:solidFill>
+                          <a:latin typeface="Calibri" pitchFamily="34" charset="0"/>
+                          <a:ea typeface="Calibri" pitchFamily="34" charset="-122"/>
+                          <a:cs typeface="Calibri" pitchFamily="34" charset="-120"/>
+                        </a:rPr>
+                        <a:t>73</a:t>
+                      </a:r>
+                      <a:endParaRPr lang="en-US" sz="1300" dirty="0">
+                        <a:latin typeface="Calibri" charset="0"/>
+                        <a:ea typeface="Calibri" charset="0"/>
+                        <a:cs typeface="Calibri" charset="0"/>
+                      </a:endParaRPr>
+                    </a:p>
+                  </a:txBody>
+                  <a:tcPr marL="91440" marR="91440" marT="45720" marB="45720" anchor="ctr">
+                    <a:lnL w="12700" cap="flat" cmpd="sng" algn="ctr">
+                      <a:solidFill>
+                        <a:srgbClr val="CFD6D9"/>
+                      </a:solidFill>
+                      <a:prstDash val="solid"/>
+                      <a:round/>
+                      <a:headEnd type="none" w="med" len="med"/>
+                      <a:tailEnd type="none" w="med" len="med"/>
+                    </a:lnL>
+                    <a:lnR w="12700" cap="flat" cmpd="sng" algn="ctr">
+                      <a:solidFill>
+                        <a:srgbClr val="CFD6D9"/>
+                      </a:solidFill>
+                      <a:prstDash val="solid"/>
+                      <a:round/>
+                      <a:headEnd type="none" w="med" len="med"/>
+                      <a:tailEnd type="none" w="med" len="med"/>
+                    </a:lnR>
+                    <a:lnT w="12700" cap="flat" cmpd="sng" algn="ctr">
+                      <a:solidFill>
+                        <a:srgbClr val="CFD6D9"/>
+                      </a:solidFill>
+                      <a:prstDash val="solid"/>
+                      <a:round/>
+                      <a:headEnd type="none" w="med" len="med"/>
+                      <a:tailEnd type="none" w="med" len="med"/>
+                    </a:lnT>
+                    <a:lnB w="12700" cap="flat" cmpd="sng" algn="ctr">
+                      <a:solidFill>
+                        <a:srgbClr val="CFD6D9"/>
+                      </a:solidFill>
+                      <a:prstDash val="solid"/>
+                      <a:round/>
+                      <a:headEnd type="none" w="med" len="med"/>
+                      <a:tailEnd type="none" w="med" len="med"/>
+                    </a:lnB>
+                  </a:tcPr>
+                </a:tc>
+                <a:tc>
+                  <a:txBody>
+                    <a:bodyPr/>
+                    <a:lstStyle/>
+                    <a:p>
+                      <a:pPr algn="ctr" indent="0" marL="0">
+                        <a:buNone/>
+                      </a:pPr>
+                      <a:r>
+                        <a:rPr lang="en-US" sz="1300" dirty="0">
+                          <a:solidFill>
+                            <a:srgbClr val="000000"/>
+                          </a:solidFill>
+                          <a:latin typeface="Calibri" pitchFamily="34" charset="0"/>
+                          <a:ea typeface="Calibri" pitchFamily="34" charset="-122"/>
+                          <a:cs typeface="Calibri" pitchFamily="34" charset="-120"/>
+                        </a:rPr>
+                        <a:t>72</a:t>
+                      </a:r>
+                      <a:endParaRPr lang="en-US" sz="1300" dirty="0">
+                        <a:latin typeface="Calibri" charset="0"/>
+                        <a:ea typeface="Calibri" charset="0"/>
+                        <a:cs typeface="Calibri" charset="0"/>
+                      </a:endParaRPr>
+                    </a:p>
+                  </a:txBody>
+                  <a:tcPr marL="91440" marR="91440" marT="45720" marB="45720" anchor="ctr">
+                    <a:lnL w="12700" cap="flat" cmpd="sng" algn="ctr">
+                      <a:solidFill>
+                        <a:srgbClr val="CFD6D9"/>
+                      </a:solidFill>
+                      <a:prstDash val="solid"/>
+                      <a:round/>
+                      <a:headEnd type="none" w="med" len="med"/>
+                      <a:tailEnd type="none" w="med" len="med"/>
+                    </a:lnL>
+                    <a:lnR w="12700" cap="flat" cmpd="sng" algn="ctr">
+                      <a:solidFill>
+                        <a:srgbClr val="CFD6D9"/>
+                      </a:solidFill>
+                      <a:prstDash val="solid"/>
+                      <a:round/>
+                      <a:headEnd type="none" w="med" len="med"/>
+                      <a:tailEnd type="none" w="med" len="med"/>
+                    </a:lnR>
+                    <a:lnT w="12700" cap="flat" cmpd="sng" algn="ctr">
+                      <a:solidFill>
+                        <a:srgbClr val="CFD6D9"/>
+                      </a:solidFill>
+                      <a:prstDash val="solid"/>
+                      <a:round/>
+                      <a:headEnd type="none" w="med" len="med"/>
+                      <a:tailEnd type="none" w="med" len="med"/>
+                    </a:lnT>
+                    <a:lnB w="12700" cap="flat" cmpd="sng" algn="ctr">
+                      <a:solidFill>
+                        <a:srgbClr val="CFD6D9"/>
+                      </a:solidFill>
+                      <a:prstDash val="solid"/>
+                      <a:round/>
+                      <a:headEnd type="none" w="med" len="med"/>
+                      <a:tailEnd type="none" w="med" len="med"/>
+                    </a:lnB>
+                  </a:tcPr>
+                </a:tc>
+                <a:tc>
+                  <a:txBody>
+                    <a:bodyPr/>
+                    <a:lstStyle/>
+                    <a:p>
+                      <a:pPr algn="ctr" indent="0" marL="0">
+                        <a:buNone/>
+                      </a:pPr>
+                      <a:r>
+                        <a:rPr lang="en-US" sz="1300" dirty="0">
+                          <a:solidFill>
+                            <a:srgbClr val="000000"/>
+                          </a:solidFill>
+                          <a:latin typeface="Calibri" pitchFamily="34" charset="0"/>
+                          <a:ea typeface="Calibri" pitchFamily="34" charset="-122"/>
+                          <a:cs typeface="Calibri" pitchFamily="34" charset="-120"/>
+                        </a:rPr>
+                        <a:t>2,1</a:t>
+                      </a:r>
+                      <a:endParaRPr lang="en-US" sz="1300" dirty="0">
+                        <a:latin typeface="Calibri" charset="0"/>
+                        <a:ea typeface="Calibri" charset="0"/>
+                        <a:cs typeface="Calibri" charset="0"/>
+                      </a:endParaRPr>
+                    </a:p>
+                  </a:txBody>
+                  <a:tcPr marL="91440" marR="91440" marT="45720" marB="45720" anchor="ctr">
+                    <a:lnL w="12700" cap="flat" cmpd="sng" algn="ctr">
+                      <a:solidFill>
+                        <a:srgbClr val="CFD6D9"/>
+                      </a:solidFill>
+                      <a:prstDash val="solid"/>
+                      <a:round/>
+                      <a:headEnd type="none" w="med" len="med"/>
+                      <a:tailEnd type="none" w="med" len="med"/>
+                    </a:lnL>
+                    <a:lnR w="12700" cap="flat" cmpd="sng" algn="ctr">
+                      <a:solidFill>
+                        <a:srgbClr val="CFD6D9"/>
+                      </a:solidFill>
+                      <a:prstDash val="solid"/>
+                      <a:round/>
+                      <a:headEnd type="none" w="med" len="med"/>
+                      <a:tailEnd type="none" w="med" len="med"/>
+                    </a:lnR>
+                    <a:lnT w="12700" cap="flat" cmpd="sng" algn="ctr">
+                      <a:solidFill>
+                        <a:srgbClr val="CFD6D9"/>
+                      </a:solidFill>
+                      <a:prstDash val="solid"/>
+                      <a:round/>
+                      <a:headEnd type="none" w="med" len="med"/>
+                      <a:tailEnd type="none" w="med" len="med"/>
+                    </a:lnT>
+                    <a:lnB w="12700" cap="flat" cmpd="sng" algn="ctr">
+                      <a:solidFill>
+                        <a:srgbClr val="CFD6D9"/>
+                      </a:solidFill>
+                      <a:prstDash val="solid"/>
+                      <a:round/>
+                      <a:headEnd type="none" w="med" len="med"/>
+                      <a:tailEnd type="none" w="med" len="med"/>
+                    </a:lnB>
+                  </a:tcPr>
+                </a:tc>
+                <a:tc>
+                  <a:txBody>
+                    <a:bodyPr/>
+                    <a:lstStyle/>
+                    <a:p>
+                      <a:pPr algn="ctr" indent="0" marL="0">
+                        <a:buNone/>
+                      </a:pPr>
+                      <a:r>
+                        <a:rPr lang="en-US" sz="1300" dirty="0">
+                          <a:solidFill>
+                            <a:srgbClr val="000000"/>
+                          </a:solidFill>
+                          <a:latin typeface="Calibri" pitchFamily="34" charset="0"/>
+                          <a:ea typeface="Calibri" pitchFamily="34" charset="-122"/>
+                          <a:cs typeface="Calibri" pitchFamily="34" charset="-120"/>
+                        </a:rPr>
+                        <a:t>2,2</a:t>
+                      </a:r>
+                      <a:endParaRPr lang="en-US" sz="1300" dirty="0">
+                        <a:latin typeface="Calibri" charset="0"/>
+                        <a:ea typeface="Calibri" charset="0"/>
+                        <a:cs typeface="Calibri" charset="0"/>
+                      </a:endParaRPr>
+                    </a:p>
+                  </a:txBody>
+                  <a:tcPr marL="91440" marR="91440" marT="45720" marB="45720" anchor="ctr">
+                    <a:lnL w="12700" cap="flat" cmpd="sng" algn="ctr">
+                      <a:solidFill>
+                        <a:srgbClr val="CFD6D9"/>
+                      </a:solidFill>
+                      <a:prstDash val="solid"/>
+                      <a:round/>
+                      <a:headEnd type="none" w="med" len="med"/>
+                      <a:tailEnd type="none" w="med" len="med"/>
+                    </a:lnL>
+                    <a:lnR w="12700" cap="flat" cmpd="sng" algn="ctr">
+                      <a:solidFill>
+                        <a:srgbClr val="CFD6D9"/>
+                      </a:solidFill>
+                      <a:prstDash val="solid"/>
+                      <a:round/>
+                      <a:headEnd type="none" w="med" len="med"/>
+                      <a:tailEnd type="none" w="med" len="med"/>
+                    </a:lnR>
+                    <a:lnT w="12700" cap="flat" cmpd="sng" algn="ctr">
+                      <a:solidFill>
+                        <a:srgbClr val="CFD6D9"/>
+                      </a:solidFill>
+                      <a:prstDash val="solid"/>
+                      <a:round/>
+                      <a:headEnd type="none" w="med" len="med"/>
+                      <a:tailEnd type="none" w="med" len="med"/>
+                    </a:lnT>
+                    <a:lnB w="12700" cap="flat" cmpd="sng" algn="ctr">
+                      <a:solidFill>
+                        <a:srgbClr val="CFD6D9"/>
+                      </a:solidFill>
+                      <a:prstDash val="solid"/>
+                      <a:round/>
+                      <a:headEnd type="none" w="med" len="med"/>
+                      <a:tailEnd type="none" w="med" len="med"/>
+                    </a:lnB>
+                  </a:tcPr>
+                </a:tc>
+                <a:tc>
+                  <a:txBody>
+                    <a:bodyPr/>
+                    <a:lstStyle/>
+                    <a:p>
+                      <a:pPr algn="ctr" indent="0" marL="0">
+                        <a:buNone/>
+                      </a:pPr>
+                      <a:r>
+                        <a:rPr lang="en-US" sz="1300" dirty="0">
+                          <a:solidFill>
+                            <a:srgbClr val="000000"/>
+                          </a:solidFill>
+                          <a:latin typeface="Calibri" pitchFamily="34" charset="0"/>
+                          <a:ea typeface="Calibri" pitchFamily="34" charset="-122"/>
+                          <a:cs typeface="Calibri" pitchFamily="34" charset="-120"/>
+                        </a:rPr>
+                        <a:t>2,3</a:t>
+                      </a:r>
+                      <a:endParaRPr lang="en-US" sz="1300" dirty="0">
+                        <a:latin typeface="Calibri" charset="0"/>
+                        <a:ea typeface="Calibri" charset="0"/>
+                        <a:cs typeface="Calibri" charset="0"/>
+                      </a:endParaRPr>
+                    </a:p>
+                  </a:txBody>
+                  <a:tcPr marL="91440" marR="91440" marT="45720" marB="45720" anchor="ctr">
+                    <a:lnL w="12700" cap="flat" cmpd="sng" algn="ctr">
+                      <a:solidFill>
+                        <a:srgbClr val="CFD6D9"/>
+                      </a:solidFill>
+                      <a:prstDash val="solid"/>
+                      <a:round/>
+                      <a:headEnd type="none" w="med" len="med"/>
+                      <a:tailEnd type="none" w="med" len="med"/>
+                    </a:lnL>
+                    <a:lnR w="12700" cap="flat" cmpd="sng" algn="ctr">
+                      <a:solidFill>
+                        <a:srgbClr val="CFD6D9"/>
+                      </a:solidFill>
+                      <a:prstDash val="solid"/>
+                      <a:round/>
+                      <a:headEnd type="none" w="med" len="med"/>
+                      <a:tailEnd type="none" w="med" len="med"/>
+                    </a:lnR>
+                    <a:lnT w="12700" cap="flat" cmpd="sng" algn="ctr">
+                      <a:solidFill>
+                        <a:srgbClr val="CFD6D9"/>
+                      </a:solidFill>
+                      <a:prstDash val="solid"/>
+                      <a:round/>
+                      <a:headEnd type="none" w="med" len="med"/>
+                      <a:tailEnd type="none" w="med" len="med"/>
+                    </a:lnT>
+                    <a:lnB w="12700" cap="flat" cmpd="sng" algn="ctr">
+                      <a:solidFill>
+                        <a:srgbClr val="CFD6D9"/>
+                      </a:solidFill>
+                      <a:prstDash val="solid"/>
+                      <a:round/>
+                      <a:headEnd type="none" w="med" len="med"/>
+                      <a:tailEnd type="none" w="med" len="med"/>
+                    </a:lnB>
+                  </a:tcPr>
+                </a:tc>
+              </a:tr>
+              <a:tr h="384048">
+                <a:tc>
+                  <a:txBody>
+                    <a:bodyPr/>
+                    <a:lstStyle/>
+                    <a:p>
+                      <a:pPr algn="ctr" indent="0" marL="0">
+                        <a:buNone/>
+                      </a:pPr>
+                      <a:r>
+                        <a:rPr lang="en-US" sz="1300" b="1" dirty="0">
+                          <a:solidFill>
+                            <a:srgbClr val="000000"/>
+                          </a:solidFill>
+                          <a:latin typeface="Calibri" pitchFamily="34" charset="0"/>
+                          <a:ea typeface="Calibri" pitchFamily="34" charset="-122"/>
+                          <a:cs typeface="Calibri" pitchFamily="34" charset="-120"/>
+                        </a:rPr>
+                        <a:t>C2</a:t>
+                      </a:r>
+                      <a:endParaRPr lang="en-US" sz="1300" dirty="0">
+                        <a:latin typeface="Calibri" charset="0"/>
+                        <a:ea typeface="Calibri" charset="0"/>
+                        <a:cs typeface="Calibri" charset="0"/>
+                      </a:endParaRPr>
+                    </a:p>
+                  </a:txBody>
+                  <a:tcPr marL="91440" marR="91440" marT="45720" marB="45720" anchor="ctr">
+                    <a:lnL w="12700" cap="flat" cmpd="sng" algn="ctr">
+                      <a:solidFill>
+                        <a:srgbClr val="CFD6D9"/>
+                      </a:solidFill>
+                      <a:prstDash val="solid"/>
+                      <a:round/>
+                      <a:headEnd type="none" w="med" len="med"/>
+                      <a:tailEnd type="none" w="med" len="med"/>
+                    </a:lnL>
+                    <a:lnR w="12700" cap="flat" cmpd="sng" algn="ctr">
+                      <a:solidFill>
+                        <a:srgbClr val="CFD6D9"/>
+                      </a:solidFill>
+                      <a:prstDash val="solid"/>
+                      <a:round/>
+                      <a:headEnd type="none" w="med" len="med"/>
+                      <a:tailEnd type="none" w="med" len="med"/>
+                    </a:lnR>
+                    <a:lnT w="12700" cap="flat" cmpd="sng" algn="ctr">
+                      <a:solidFill>
+                        <a:srgbClr val="CFD6D9"/>
+                      </a:solidFill>
+                      <a:prstDash val="solid"/>
+                      <a:round/>
+                      <a:headEnd type="none" w="med" len="med"/>
+                      <a:tailEnd type="none" w="med" len="med"/>
+                    </a:lnT>
+                    <a:lnB w="12700" cap="flat" cmpd="sng" algn="ctr">
+                      <a:solidFill>
+                        <a:srgbClr val="CFD6D9"/>
+                      </a:solidFill>
+                      <a:prstDash val="solid"/>
+                      <a:round/>
+                      <a:headEnd type="none" w="med" len="med"/>
+                      <a:tailEnd type="none" w="med" len="med"/>
+                    </a:lnB>
+                  </a:tcPr>
+                </a:tc>
+                <a:tc>
+                  <a:txBody>
+                    <a:bodyPr/>
+                    <a:lstStyle/>
+                    <a:p>
+                      <a:pPr algn="ctr" indent="0" marL="0">
+                        <a:buNone/>
+                      </a:pPr>
+                      <a:r>
+                        <a:rPr lang="en-US" sz="1300" dirty="0">
+                          <a:solidFill>
+                            <a:srgbClr val="000000"/>
+                          </a:solidFill>
+                          <a:latin typeface="Calibri" pitchFamily="34" charset="0"/>
+                          <a:ea typeface="Calibri" pitchFamily="34" charset="-122"/>
+                          <a:cs typeface="Calibri" pitchFamily="34" charset="-120"/>
+                        </a:rPr>
+                        <a:t>42</a:t>
+                      </a:r>
+                      <a:endParaRPr lang="en-US" sz="1300" dirty="0">
+                        <a:latin typeface="Calibri" charset="0"/>
+                        <a:ea typeface="Calibri" charset="0"/>
+                        <a:cs typeface="Calibri" charset="0"/>
+                      </a:endParaRPr>
+                    </a:p>
+                  </a:txBody>
+                  <a:tcPr marL="91440" marR="91440" marT="45720" marB="45720" anchor="ctr">
+                    <a:lnL w="12700" cap="flat" cmpd="sng" algn="ctr">
+                      <a:solidFill>
+                        <a:srgbClr val="CFD6D9"/>
+                      </a:solidFill>
+                      <a:prstDash val="solid"/>
+                      <a:round/>
+                      <a:headEnd type="none" w="med" len="med"/>
+                      <a:tailEnd type="none" w="med" len="med"/>
+                    </a:lnL>
+                    <a:lnR w="12700" cap="flat" cmpd="sng" algn="ctr">
+                      <a:solidFill>
+                        <a:srgbClr val="CFD6D9"/>
+                      </a:solidFill>
+                      <a:prstDash val="solid"/>
+                      <a:round/>
+                      <a:headEnd type="none" w="med" len="med"/>
+                      <a:tailEnd type="none" w="med" len="med"/>
+                    </a:lnR>
+                    <a:lnT w="12700" cap="flat" cmpd="sng" algn="ctr">
+                      <a:solidFill>
+                        <a:srgbClr val="CFD6D9"/>
+                      </a:solidFill>
+                      <a:prstDash val="solid"/>
+                      <a:round/>
+                      <a:headEnd type="none" w="med" len="med"/>
+                      <a:tailEnd type="none" w="med" len="med"/>
+                    </a:lnT>
+                    <a:lnB w="12700" cap="flat" cmpd="sng" algn="ctr">
+                      <a:solidFill>
+                        <a:srgbClr val="CFD6D9"/>
+                      </a:solidFill>
+                      <a:prstDash val="solid"/>
+                      <a:round/>
+                      <a:headEnd type="none" w="med" len="med"/>
+                      <a:tailEnd type="none" w="med" len="med"/>
+                    </a:lnB>
+                  </a:tcPr>
+                </a:tc>
+                <a:tc>
+                  <a:txBody>
+                    <a:bodyPr/>
+                    <a:lstStyle/>
+                    <a:p>
+                      <a:pPr algn="ctr" indent="0" marL="0">
+                        <a:buNone/>
+                      </a:pPr>
+                      <a:r>
+                        <a:rPr lang="en-US" sz="1300" dirty="0">
+                          <a:solidFill>
+                            <a:srgbClr val="000000"/>
+                          </a:solidFill>
+                          <a:latin typeface="Calibri" pitchFamily="34" charset="0"/>
+                          <a:ea typeface="Calibri" pitchFamily="34" charset="-122"/>
+                          <a:cs typeface="Calibri" pitchFamily="34" charset="-120"/>
+                        </a:rPr>
+                        <a:t>36</a:t>
+                      </a:r>
+                      <a:endParaRPr lang="en-US" sz="1300" dirty="0">
+                        <a:latin typeface="Calibri" charset="0"/>
+                        <a:ea typeface="Calibri" charset="0"/>
+                        <a:cs typeface="Calibri" charset="0"/>
+                      </a:endParaRPr>
+                    </a:p>
+                  </a:txBody>
+                  <a:tcPr marL="91440" marR="91440" marT="45720" marB="45720" anchor="ctr">
+                    <a:lnL w="12700" cap="flat" cmpd="sng" algn="ctr">
+                      <a:solidFill>
+                        <a:srgbClr val="CFD6D9"/>
+                      </a:solidFill>
+                      <a:prstDash val="solid"/>
+                      <a:round/>
+                      <a:headEnd type="none" w="med" len="med"/>
+                      <a:tailEnd type="none" w="med" len="med"/>
+                    </a:lnL>
+                    <a:lnR w="12700" cap="flat" cmpd="sng" algn="ctr">
+                      <a:solidFill>
+                        <a:srgbClr val="CFD6D9"/>
+                      </a:solidFill>
+                      <a:prstDash val="solid"/>
+                      <a:round/>
+                      <a:headEnd type="none" w="med" len="med"/>
+                      <a:tailEnd type="none" w="med" len="med"/>
+                    </a:lnR>
+                    <a:lnT w="12700" cap="flat" cmpd="sng" algn="ctr">
+                      <a:solidFill>
+                        <a:srgbClr val="CFD6D9"/>
+                      </a:solidFill>
+                      <a:prstDash val="solid"/>
+                      <a:round/>
+                      <a:headEnd type="none" w="med" len="med"/>
+                      <a:tailEnd type="none" w="med" len="med"/>
+                    </a:lnT>
+                    <a:lnB w="12700" cap="flat" cmpd="sng" algn="ctr">
+                      <a:solidFill>
+                        <a:srgbClr val="CFD6D9"/>
+                      </a:solidFill>
+                      <a:prstDash val="solid"/>
+                      <a:round/>
+                      <a:headEnd type="none" w="med" len="med"/>
+                      <a:tailEnd type="none" w="med" len="med"/>
+                    </a:lnB>
+                  </a:tcPr>
+                </a:tc>
+                <a:tc>
+                  <a:txBody>
+                    <a:bodyPr/>
+                    <a:lstStyle/>
+                    <a:p>
+                      <a:pPr algn="ctr" indent="0" marL="0">
+                        <a:buNone/>
+                      </a:pPr>
+                      <a:r>
+                        <a:rPr lang="en-US" sz="1300" dirty="0">
+                          <a:solidFill>
+                            <a:srgbClr val="000000"/>
+                          </a:solidFill>
+                          <a:latin typeface="Calibri" pitchFamily="34" charset="0"/>
+                          <a:ea typeface="Calibri" pitchFamily="34" charset="-122"/>
+                          <a:cs typeface="Calibri" pitchFamily="34" charset="-120"/>
+                        </a:rPr>
+                        <a:t>36</a:t>
+                      </a:r>
+                      <a:endParaRPr lang="en-US" sz="1300" dirty="0">
+                        <a:latin typeface="Calibri" charset="0"/>
+                        <a:ea typeface="Calibri" charset="0"/>
+                        <a:cs typeface="Calibri" charset="0"/>
+                      </a:endParaRPr>
+                    </a:p>
+                  </a:txBody>
+                  <a:tcPr marL="91440" marR="91440" marT="45720" marB="45720" anchor="ctr">
+                    <a:lnL w="12700" cap="flat" cmpd="sng" algn="ctr">
+                      <a:solidFill>
+                        <a:srgbClr val="CFD6D9"/>
+                      </a:solidFill>
+                      <a:prstDash val="solid"/>
+                      <a:round/>
+                      <a:headEnd type="none" w="med" len="med"/>
+                      <a:tailEnd type="none" w="med" len="med"/>
+                    </a:lnL>
+                    <a:lnR w="12700" cap="flat" cmpd="sng" algn="ctr">
+                      <a:solidFill>
+                        <a:srgbClr val="CFD6D9"/>
+                      </a:solidFill>
+                      <a:prstDash val="solid"/>
+                      <a:round/>
+                      <a:headEnd type="none" w="med" len="med"/>
+                      <a:tailEnd type="none" w="med" len="med"/>
+                    </a:lnR>
+                    <a:lnT w="12700" cap="flat" cmpd="sng" algn="ctr">
+                      <a:solidFill>
+                        <a:srgbClr val="CFD6D9"/>
+                      </a:solidFill>
+                      <a:prstDash val="solid"/>
+                      <a:round/>
+                      <a:headEnd type="none" w="med" len="med"/>
+                      <a:tailEnd type="none" w="med" len="med"/>
+                    </a:lnT>
+                    <a:lnB w="12700" cap="flat" cmpd="sng" algn="ctr">
+                      <a:solidFill>
+                        <a:srgbClr val="CFD6D9"/>
+                      </a:solidFill>
+                      <a:prstDash val="solid"/>
+                      <a:round/>
+                      <a:headEnd type="none" w="med" len="med"/>
+                      <a:tailEnd type="none" w="med" len="med"/>
+                    </a:lnB>
+                  </a:tcPr>
+                </a:tc>
+                <a:tc>
+                  <a:txBody>
+                    <a:bodyPr/>
+                    <a:lstStyle/>
+                    <a:p>
+                      <a:pPr algn="ctr" indent="0" marL="0">
+                        <a:buNone/>
+                      </a:pPr>
+                      <a:r>
+                        <a:rPr lang="en-US" sz="1300" dirty="0">
+                          <a:solidFill>
+                            <a:srgbClr val="000000"/>
+                          </a:solidFill>
+                          <a:latin typeface="Calibri" pitchFamily="34" charset="0"/>
+                          <a:ea typeface="Calibri" pitchFamily="34" charset="-122"/>
+                          <a:cs typeface="Calibri" pitchFamily="34" charset="-120"/>
+                        </a:rPr>
+                        <a:t>80</a:t>
+                      </a:r>
+                      <a:endParaRPr lang="en-US" sz="1300" dirty="0">
+                        <a:latin typeface="Calibri" charset="0"/>
+                        <a:ea typeface="Calibri" charset="0"/>
+                        <a:cs typeface="Calibri" charset="0"/>
+                      </a:endParaRPr>
+                    </a:p>
+                  </a:txBody>
+                  <a:tcPr marL="91440" marR="91440" marT="45720" marB="45720" anchor="ctr">
+                    <a:lnL w="12700" cap="flat" cmpd="sng" algn="ctr">
+                      <a:solidFill>
+                        <a:srgbClr val="CFD6D9"/>
+                      </a:solidFill>
+                      <a:prstDash val="solid"/>
+                      <a:round/>
+                      <a:headEnd type="none" w="med" len="med"/>
+                      <a:tailEnd type="none" w="med" len="med"/>
+                    </a:lnL>
+                    <a:lnR w="12700" cap="flat" cmpd="sng" algn="ctr">
+                      <a:solidFill>
+                        <a:srgbClr val="CFD6D9"/>
+                      </a:solidFill>
+                      <a:prstDash val="solid"/>
+                      <a:round/>
+                      <a:headEnd type="none" w="med" len="med"/>
+                      <a:tailEnd type="none" w="med" len="med"/>
+                    </a:lnR>
+                    <a:lnT w="12700" cap="flat" cmpd="sng" algn="ctr">
+                      <a:solidFill>
+                        <a:srgbClr val="CFD6D9"/>
+                      </a:solidFill>
+                      <a:prstDash val="solid"/>
+                      <a:round/>
+                      <a:headEnd type="none" w="med" len="med"/>
+                      <a:tailEnd type="none" w="med" len="med"/>
+                    </a:lnT>
+                    <a:lnB w="12700" cap="flat" cmpd="sng" algn="ctr">
+                      <a:solidFill>
+                        <a:srgbClr val="CFD6D9"/>
+                      </a:solidFill>
+                      <a:prstDash val="solid"/>
+                      <a:round/>
+                      <a:headEnd type="none" w="med" len="med"/>
+                      <a:tailEnd type="none" w="med" len="med"/>
+                    </a:lnB>
+                  </a:tcPr>
+                </a:tc>
+                <a:tc>
+                  <a:txBody>
+                    <a:bodyPr/>
+                    <a:lstStyle/>
+                    <a:p>
+                      <a:pPr algn="ctr" indent="0" marL="0">
+                        <a:buNone/>
+                      </a:pPr>
+                      <a:r>
+                        <a:rPr lang="en-US" sz="1300" dirty="0">
+                          <a:solidFill>
+                            <a:srgbClr val="000000"/>
+                          </a:solidFill>
+                          <a:latin typeface="Calibri" pitchFamily="34" charset="0"/>
+                          <a:ea typeface="Calibri" pitchFamily="34" charset="-122"/>
+                          <a:cs typeface="Calibri" pitchFamily="34" charset="-120"/>
+                        </a:rPr>
+                        <a:t>76</a:t>
+                      </a:r>
+                      <a:endParaRPr lang="en-US" sz="1300" dirty="0">
+                        <a:latin typeface="Calibri" charset="0"/>
+                        <a:ea typeface="Calibri" charset="0"/>
+                        <a:cs typeface="Calibri" charset="0"/>
+                      </a:endParaRPr>
+                    </a:p>
+                  </a:txBody>
+                  <a:tcPr marL="91440" marR="91440" marT="45720" marB="45720" anchor="ctr">
+                    <a:lnL w="12700" cap="flat" cmpd="sng" algn="ctr">
+                      <a:solidFill>
+                        <a:srgbClr val="CFD6D9"/>
+                      </a:solidFill>
+                      <a:prstDash val="solid"/>
+                      <a:round/>
+                      <a:headEnd type="none" w="med" len="med"/>
+                      <a:tailEnd type="none" w="med" len="med"/>
+                    </a:lnL>
+                    <a:lnR w="12700" cap="flat" cmpd="sng" algn="ctr">
+                      <a:solidFill>
+                        <a:srgbClr val="CFD6D9"/>
+                      </a:solidFill>
+                      <a:prstDash val="solid"/>
+                      <a:round/>
+                      <a:headEnd type="none" w="med" len="med"/>
+                      <a:tailEnd type="none" w="med" len="med"/>
+                    </a:lnR>
+                    <a:lnT w="12700" cap="flat" cmpd="sng" algn="ctr">
+                      <a:solidFill>
+                        <a:srgbClr val="CFD6D9"/>
+                      </a:solidFill>
+                      <a:prstDash val="solid"/>
+                      <a:round/>
+                      <a:headEnd type="none" w="med" len="med"/>
+                      <a:tailEnd type="none" w="med" len="med"/>
+                    </a:lnT>
+                    <a:lnB w="12700" cap="flat" cmpd="sng" algn="ctr">
+                      <a:solidFill>
+                        <a:srgbClr val="CFD6D9"/>
+                      </a:solidFill>
+                      <a:prstDash val="solid"/>
+                      <a:round/>
+                      <a:headEnd type="none" w="med" len="med"/>
+                      <a:tailEnd type="none" w="med" len="med"/>
+                    </a:lnB>
+                  </a:tcPr>
+                </a:tc>
+                <a:tc>
+                  <a:txBody>
+                    <a:bodyPr/>
+                    <a:lstStyle/>
+                    <a:p>
+                      <a:pPr algn="ctr" indent="0" marL="0">
+                        <a:buNone/>
+                      </a:pPr>
+                      <a:r>
+                        <a:rPr lang="en-US" sz="1300" dirty="0">
+                          <a:solidFill>
+                            <a:srgbClr val="000000"/>
+                          </a:solidFill>
+                          <a:latin typeface="Calibri" pitchFamily="34" charset="0"/>
+                          <a:ea typeface="Calibri" pitchFamily="34" charset="-122"/>
+                          <a:cs typeface="Calibri" pitchFamily="34" charset="-120"/>
+                        </a:rPr>
+                        <a:t>79</a:t>
+                      </a:r>
+                      <a:endParaRPr lang="en-US" sz="1300" dirty="0">
+                        <a:latin typeface="Calibri" charset="0"/>
+                        <a:ea typeface="Calibri" charset="0"/>
+                        <a:cs typeface="Calibri" charset="0"/>
+                      </a:endParaRPr>
+                    </a:p>
+                  </a:txBody>
+                  <a:tcPr marL="91440" marR="91440" marT="45720" marB="45720" anchor="ctr">
+                    <a:lnL w="12700" cap="flat" cmpd="sng" algn="ctr">
+                      <a:solidFill>
+                        <a:srgbClr val="CFD6D9"/>
+                      </a:solidFill>
+                      <a:prstDash val="solid"/>
+                      <a:round/>
+                      <a:headEnd type="none" w="med" len="med"/>
+                      <a:tailEnd type="none" w="med" len="med"/>
+                    </a:lnL>
+                    <a:lnR w="12700" cap="flat" cmpd="sng" algn="ctr">
+                      <a:solidFill>
+                        <a:srgbClr val="CFD6D9"/>
+                      </a:solidFill>
+                      <a:prstDash val="solid"/>
+                      <a:round/>
+                      <a:headEnd type="none" w="med" len="med"/>
+                      <a:tailEnd type="none" w="med" len="med"/>
+                    </a:lnR>
+                    <a:lnT w="12700" cap="flat" cmpd="sng" algn="ctr">
+                      <a:solidFill>
+                        <a:srgbClr val="CFD6D9"/>
+                      </a:solidFill>
+                      <a:prstDash val="solid"/>
+                      <a:round/>
+                      <a:headEnd type="none" w="med" len="med"/>
+                      <a:tailEnd type="none" w="med" len="med"/>
+                    </a:lnT>
+                    <a:lnB w="12700" cap="flat" cmpd="sng" algn="ctr">
+                      <a:solidFill>
+                        <a:srgbClr val="CFD6D9"/>
+                      </a:solidFill>
+                      <a:prstDash val="solid"/>
+                      <a:round/>
+                      <a:headEnd type="none" w="med" len="med"/>
+                      <a:tailEnd type="none" w="med" len="med"/>
+                    </a:lnB>
+                  </a:tcPr>
+                </a:tc>
+                <a:tc>
+                  <a:txBody>
+                    <a:bodyPr/>
+                    <a:lstStyle/>
+                    <a:p>
+                      <a:pPr algn="ctr" indent="0" marL="0">
+                        <a:buNone/>
+                      </a:pPr>
+                      <a:r>
+                        <a:rPr lang="en-US" sz="1300" dirty="0">
+                          <a:solidFill>
+                            <a:srgbClr val="000000"/>
+                          </a:solidFill>
+                          <a:latin typeface="Calibri" pitchFamily="34" charset="0"/>
+                          <a:ea typeface="Calibri" pitchFamily="34" charset="-122"/>
+                          <a:cs typeface="Calibri" pitchFamily="34" charset="-120"/>
+                        </a:rPr>
+                        <a:t>1,8</a:t>
+                      </a:r>
+                      <a:endParaRPr lang="en-US" sz="1300" dirty="0">
+                        <a:latin typeface="Calibri" charset="0"/>
+                        <a:ea typeface="Calibri" charset="0"/>
+                        <a:cs typeface="Calibri" charset="0"/>
+                      </a:endParaRPr>
+                    </a:p>
+                  </a:txBody>
+                  <a:tcPr marL="91440" marR="91440" marT="45720" marB="45720" anchor="ctr">
+                    <a:lnL w="12700" cap="flat" cmpd="sng" algn="ctr">
+                      <a:solidFill>
+                        <a:srgbClr val="CFD6D9"/>
+                      </a:solidFill>
+                      <a:prstDash val="solid"/>
+                      <a:round/>
+                      <a:headEnd type="none" w="med" len="med"/>
+                      <a:tailEnd type="none" w="med" len="med"/>
+                    </a:lnL>
+                    <a:lnR w="12700" cap="flat" cmpd="sng" algn="ctr">
+                      <a:solidFill>
+                        <a:srgbClr val="CFD6D9"/>
+                      </a:solidFill>
+                      <a:prstDash val="solid"/>
+                      <a:round/>
+                      <a:headEnd type="none" w="med" len="med"/>
+                      <a:tailEnd type="none" w="med" len="med"/>
+                    </a:lnR>
+                    <a:lnT w="12700" cap="flat" cmpd="sng" algn="ctr">
+                      <a:solidFill>
+                        <a:srgbClr val="CFD6D9"/>
+                      </a:solidFill>
+                      <a:prstDash val="solid"/>
+                      <a:round/>
+                      <a:headEnd type="none" w="med" len="med"/>
+                      <a:tailEnd type="none" w="med" len="med"/>
+                    </a:lnT>
+                    <a:lnB w="12700" cap="flat" cmpd="sng" algn="ctr">
+                      <a:solidFill>
+                        <a:srgbClr val="CFD6D9"/>
+                      </a:solidFill>
+                      <a:prstDash val="solid"/>
+                      <a:round/>
+                      <a:headEnd type="none" w="med" len="med"/>
+                      <a:tailEnd type="none" w="med" len="med"/>
+                    </a:lnB>
+                  </a:tcPr>
+                </a:tc>
+                <a:tc>
+                  <a:txBody>
+                    <a:bodyPr/>
+                    <a:lstStyle/>
+                    <a:p>
+                      <a:pPr algn="ctr" indent="0" marL="0">
+                        <a:buNone/>
+                      </a:pPr>
+                      <a:r>
+                        <a:rPr lang="en-US" sz="1300" dirty="0">
+                          <a:solidFill>
+                            <a:srgbClr val="000000"/>
+                          </a:solidFill>
+                          <a:latin typeface="Calibri" pitchFamily="34" charset="0"/>
+                          <a:ea typeface="Calibri" pitchFamily="34" charset="-122"/>
+                          <a:cs typeface="Calibri" pitchFamily="34" charset="-120"/>
+                        </a:rPr>
+                        <a:t>2,0</a:t>
+                      </a:r>
+                      <a:endParaRPr lang="en-US" sz="1300" dirty="0">
+                        <a:latin typeface="Calibri" charset="0"/>
+                        <a:ea typeface="Calibri" charset="0"/>
+                        <a:cs typeface="Calibri" charset="0"/>
+                      </a:endParaRPr>
+                    </a:p>
+                  </a:txBody>
+                  <a:tcPr marL="91440" marR="91440" marT="45720" marB="45720" anchor="ctr">
+                    <a:lnL w="12700" cap="flat" cmpd="sng" algn="ctr">
+                      <a:solidFill>
+                        <a:srgbClr val="CFD6D9"/>
+                      </a:solidFill>
+                      <a:prstDash val="solid"/>
+                      <a:round/>
+                      <a:headEnd type="none" w="med" len="med"/>
+                      <a:tailEnd type="none" w="med" len="med"/>
+                    </a:lnL>
+                    <a:lnR w="12700" cap="flat" cmpd="sng" algn="ctr">
+                      <a:solidFill>
+                        <a:srgbClr val="CFD6D9"/>
+                      </a:solidFill>
+                      <a:prstDash val="solid"/>
+                      <a:round/>
+                      <a:headEnd type="none" w="med" len="med"/>
+                      <a:tailEnd type="none" w="med" len="med"/>
+                    </a:lnR>
+                    <a:lnT w="12700" cap="flat" cmpd="sng" algn="ctr">
+                      <a:solidFill>
+                        <a:srgbClr val="CFD6D9"/>
+                      </a:solidFill>
+                      <a:prstDash val="solid"/>
+                      <a:round/>
+                      <a:headEnd type="none" w="med" len="med"/>
+                      <a:tailEnd type="none" w="med" len="med"/>
+                    </a:lnT>
+                    <a:lnB w="12700" cap="flat" cmpd="sng" algn="ctr">
+                      <a:solidFill>
+                        <a:srgbClr val="CFD6D9"/>
+                      </a:solidFill>
+                      <a:prstDash val="solid"/>
+                      <a:round/>
+                      <a:headEnd type="none" w="med" len="med"/>
+                      <a:tailEnd type="none" w="med" len="med"/>
+                    </a:lnB>
+                  </a:tcPr>
+                </a:tc>
+                <a:tc>
+                  <a:txBody>
+                    <a:bodyPr/>
+                    <a:lstStyle/>
+                    <a:p>
+                      <a:pPr algn="ctr" indent="0" marL="0">
+                        <a:buNone/>
+                      </a:pPr>
+                      <a:r>
+                        <a:rPr lang="en-US" sz="1300" dirty="0">
+                          <a:solidFill>
+                            <a:srgbClr val="000000"/>
+                          </a:solidFill>
+                          <a:latin typeface="Calibri" pitchFamily="34" charset="0"/>
+                          <a:ea typeface="Calibri" pitchFamily="34" charset="-122"/>
+                          <a:cs typeface="Calibri" pitchFamily="34" charset="-120"/>
+                        </a:rPr>
+                        <a:t>2,0</a:t>
+                      </a:r>
+                      <a:endParaRPr lang="en-US" sz="1300" dirty="0">
+                        <a:latin typeface="Calibri" charset="0"/>
+                        <a:ea typeface="Calibri" charset="0"/>
+                        <a:cs typeface="Calibri" charset="0"/>
+                      </a:endParaRPr>
+                    </a:p>
+                  </a:txBody>
+                  <a:tcPr marL="91440" marR="91440" marT="45720" marB="45720" anchor="ctr">
+                    <a:lnL w="12700" cap="flat" cmpd="sng" algn="ctr">
+                      <a:solidFill>
+                        <a:srgbClr val="CFD6D9"/>
+                      </a:solidFill>
+                      <a:prstDash val="solid"/>
+                      <a:round/>
+                      <a:headEnd type="none" w="med" len="med"/>
+                      <a:tailEnd type="none" w="med" len="med"/>
+                    </a:lnL>
+                    <a:lnR w="12700" cap="flat" cmpd="sng" algn="ctr">
+                      <a:solidFill>
+                        <a:srgbClr val="CFD6D9"/>
+                      </a:solidFill>
+                      <a:prstDash val="solid"/>
+                      <a:round/>
+                      <a:headEnd type="none" w="med" len="med"/>
+                      <a:tailEnd type="none" w="med" len="med"/>
+                    </a:lnR>
+                    <a:lnT w="12700" cap="flat" cmpd="sng" algn="ctr">
+                      <a:solidFill>
+                        <a:srgbClr val="CFD6D9"/>
+                      </a:solidFill>
+                      <a:prstDash val="solid"/>
+                      <a:round/>
+                      <a:headEnd type="none" w="med" len="med"/>
+                      <a:tailEnd type="none" w="med" len="med"/>
+                    </a:lnT>
+                    <a:lnB w="12700" cap="flat" cmpd="sng" algn="ctr">
+                      <a:solidFill>
+                        <a:srgbClr val="CFD6D9"/>
+                      </a:solidFill>
+                      <a:prstDash val="solid"/>
+                      <a:round/>
+                      <a:headEnd type="none" w="med" len="med"/>
+                      <a:tailEnd type="none" w="med" len="med"/>
+                    </a:lnB>
+                  </a:tcPr>
+                </a:tc>
+              </a:tr>
+              <a:tr h="384048">
+                <a:tc>
+                  <a:txBody>
+                    <a:bodyPr/>
+                    <a:lstStyle/>
+                    <a:p>
+                      <a:pPr algn="ctr" indent="0" marL="0">
+                        <a:buNone/>
+                      </a:pPr>
+                      <a:r>
+                        <a:rPr lang="en-US" sz="1300" b="1" dirty="0">
+                          <a:solidFill>
+                            <a:srgbClr val="000000"/>
+                          </a:solidFill>
+                          <a:latin typeface="Calibri" pitchFamily="34" charset="0"/>
+                          <a:ea typeface="Calibri" pitchFamily="34" charset="-122"/>
+                          <a:cs typeface="Calibri" pitchFamily="34" charset="-120"/>
+                        </a:rPr>
+                        <a:t>C3</a:t>
+                      </a:r>
+                      <a:endParaRPr lang="en-US" sz="1300" dirty="0">
+                        <a:latin typeface="Calibri" charset="0"/>
+                        <a:ea typeface="Calibri" charset="0"/>
+                        <a:cs typeface="Calibri" charset="0"/>
+                      </a:endParaRPr>
+                    </a:p>
+                  </a:txBody>
+                  <a:tcPr marL="91440" marR="91440" marT="45720" marB="45720" anchor="ctr">
+                    <a:lnL w="12700" cap="flat" cmpd="sng" algn="ctr">
+                      <a:solidFill>
+                        <a:srgbClr val="CFD6D9"/>
+                      </a:solidFill>
+                      <a:prstDash val="solid"/>
+                      <a:round/>
+                      <a:headEnd type="none" w="med" len="med"/>
+                      <a:tailEnd type="none" w="med" len="med"/>
+                    </a:lnL>
+                    <a:lnR w="12700" cap="flat" cmpd="sng" algn="ctr">
+                      <a:solidFill>
+                        <a:srgbClr val="CFD6D9"/>
+                      </a:solidFill>
+                      <a:prstDash val="solid"/>
+                      <a:round/>
+                      <a:headEnd type="none" w="med" len="med"/>
+                      <a:tailEnd type="none" w="med" len="med"/>
+                    </a:lnR>
+                    <a:lnT w="12700" cap="flat" cmpd="sng" algn="ctr">
+                      <a:solidFill>
+                        <a:srgbClr val="CFD6D9"/>
+                      </a:solidFill>
+                      <a:prstDash val="solid"/>
+                      <a:round/>
+                      <a:headEnd type="none" w="med" len="med"/>
+                      <a:tailEnd type="none" w="med" len="med"/>
+                    </a:lnT>
+                    <a:lnB w="12700" cap="flat" cmpd="sng" algn="ctr">
+                      <a:solidFill>
+                        <a:srgbClr val="CFD6D9"/>
+                      </a:solidFill>
+                      <a:prstDash val="solid"/>
+                      <a:round/>
+                      <a:headEnd type="none" w="med" len="med"/>
+                      <a:tailEnd type="none" w="med" len="med"/>
+                    </a:lnB>
+                  </a:tcPr>
+                </a:tc>
+                <a:tc>
+                  <a:txBody>
+                    <a:bodyPr/>
+                    <a:lstStyle/>
+                    <a:p>
+                      <a:pPr algn="ctr" indent="0" marL="0">
+                        <a:buNone/>
+                      </a:pPr>
+                      <a:r>
+                        <a:rPr lang="en-US" sz="1300" dirty="0">
+                          <a:solidFill>
+                            <a:srgbClr val="000000"/>
+                          </a:solidFill>
+                          <a:latin typeface="Calibri" pitchFamily="34" charset="0"/>
+                          <a:ea typeface="Calibri" pitchFamily="34" charset="-122"/>
+                          <a:cs typeface="Calibri" pitchFamily="34" charset="-120"/>
+                        </a:rPr>
+                        <a:t>18</a:t>
+                      </a:r>
+                      <a:endParaRPr lang="en-US" sz="1300" dirty="0">
+                        <a:latin typeface="Calibri" charset="0"/>
+                        <a:ea typeface="Calibri" charset="0"/>
+                        <a:cs typeface="Calibri" charset="0"/>
+                      </a:endParaRPr>
+                    </a:p>
+                  </a:txBody>
+                  <a:tcPr marL="91440" marR="91440" marT="45720" marB="45720" anchor="ctr">
+                    <a:lnL w="12700" cap="flat" cmpd="sng" algn="ctr">
+                      <a:solidFill>
+                        <a:srgbClr val="CFD6D9"/>
+                      </a:solidFill>
+                      <a:prstDash val="solid"/>
+                      <a:round/>
+                      <a:headEnd type="none" w="med" len="med"/>
+                      <a:tailEnd type="none" w="med" len="med"/>
+                    </a:lnL>
+                    <a:lnR w="12700" cap="flat" cmpd="sng" algn="ctr">
+                      <a:solidFill>
+                        <a:srgbClr val="CFD6D9"/>
+                      </a:solidFill>
+                      <a:prstDash val="solid"/>
+                      <a:round/>
+                      <a:headEnd type="none" w="med" len="med"/>
+                      <a:tailEnd type="none" w="med" len="med"/>
+                    </a:lnR>
+                    <a:lnT w="12700" cap="flat" cmpd="sng" algn="ctr">
+                      <a:solidFill>
+                        <a:srgbClr val="CFD6D9"/>
+                      </a:solidFill>
+                      <a:prstDash val="solid"/>
+                      <a:round/>
+                      <a:headEnd type="none" w="med" len="med"/>
+                      <a:tailEnd type="none" w="med" len="med"/>
+                    </a:lnT>
+                    <a:lnB w="12700" cap="flat" cmpd="sng" algn="ctr">
+                      <a:solidFill>
+                        <a:srgbClr val="CFD6D9"/>
+                      </a:solidFill>
+                      <a:prstDash val="solid"/>
+                      <a:round/>
+                      <a:headEnd type="none" w="med" len="med"/>
+                      <a:tailEnd type="none" w="med" len="med"/>
+                    </a:lnB>
+                  </a:tcPr>
+                </a:tc>
+                <a:tc>
+                  <a:txBody>
+                    <a:bodyPr/>
+                    <a:lstStyle/>
+                    <a:p>
+                      <a:pPr algn="ctr" indent="0" marL="0">
+                        <a:buNone/>
+                      </a:pPr>
+                      <a:r>
+                        <a:rPr lang="en-US" sz="1300" dirty="0">
+                          <a:solidFill>
+                            <a:srgbClr val="000000"/>
+                          </a:solidFill>
+                          <a:latin typeface="Calibri" pitchFamily="34" charset="0"/>
+                          <a:ea typeface="Calibri" pitchFamily="34" charset="-122"/>
+                          <a:cs typeface="Calibri" pitchFamily="34" charset="-120"/>
+                        </a:rPr>
+                        <a:t>18</a:t>
+                      </a:r>
+                      <a:endParaRPr lang="en-US" sz="1300" dirty="0">
+                        <a:latin typeface="Calibri" charset="0"/>
+                        <a:ea typeface="Calibri" charset="0"/>
+                        <a:cs typeface="Calibri" charset="0"/>
+                      </a:endParaRPr>
+                    </a:p>
+                  </a:txBody>
+                  <a:tcPr marL="91440" marR="91440" marT="45720" marB="45720" anchor="ctr">
+                    <a:lnL w="12700" cap="flat" cmpd="sng" algn="ctr">
+                      <a:solidFill>
+                        <a:srgbClr val="CFD6D9"/>
+                      </a:solidFill>
+                      <a:prstDash val="solid"/>
+                      <a:round/>
+                      <a:headEnd type="none" w="med" len="med"/>
+                      <a:tailEnd type="none" w="med" len="med"/>
+                    </a:lnL>
+                    <a:lnR w="12700" cap="flat" cmpd="sng" algn="ctr">
+                      <a:solidFill>
+                        <a:srgbClr val="CFD6D9"/>
+                      </a:solidFill>
+                      <a:prstDash val="solid"/>
+                      <a:round/>
+                      <a:headEnd type="none" w="med" len="med"/>
+                      <a:tailEnd type="none" w="med" len="med"/>
+                    </a:lnR>
+                    <a:lnT w="12700" cap="flat" cmpd="sng" algn="ctr">
+                      <a:solidFill>
+                        <a:srgbClr val="CFD6D9"/>
+                      </a:solidFill>
+                      <a:prstDash val="solid"/>
+                      <a:round/>
+                      <a:headEnd type="none" w="med" len="med"/>
+                      <a:tailEnd type="none" w="med" len="med"/>
+                    </a:lnT>
+                    <a:lnB w="12700" cap="flat" cmpd="sng" algn="ctr">
+                      <a:solidFill>
+                        <a:srgbClr val="CFD6D9"/>
+                      </a:solidFill>
+                      <a:prstDash val="solid"/>
+                      <a:round/>
+                      <a:headEnd type="none" w="med" len="med"/>
+                      <a:tailEnd type="none" w="med" len="med"/>
+                    </a:lnB>
+                  </a:tcPr>
+                </a:tc>
+                <a:tc>
+                  <a:txBody>
+                    <a:bodyPr/>
+                    <a:lstStyle/>
+                    <a:p>
+                      <a:pPr algn="ctr" indent="0" marL="0">
+                        <a:buNone/>
+                      </a:pPr>
+                      <a:r>
+                        <a:rPr lang="en-US" sz="1300" dirty="0">
+                          <a:solidFill>
+                            <a:srgbClr val="000000"/>
+                          </a:solidFill>
+                          <a:latin typeface="Calibri" pitchFamily="34" charset="0"/>
+                          <a:ea typeface="Calibri" pitchFamily="34" charset="-122"/>
+                          <a:cs typeface="Calibri" pitchFamily="34" charset="-120"/>
+                        </a:rPr>
+                        <a:t>13</a:t>
+                      </a:r>
+                      <a:endParaRPr lang="en-US" sz="1300" dirty="0">
+                        <a:latin typeface="Calibri" charset="0"/>
+                        <a:ea typeface="Calibri" charset="0"/>
+                        <a:cs typeface="Calibri" charset="0"/>
+                      </a:endParaRPr>
+                    </a:p>
+                  </a:txBody>
+                  <a:tcPr marL="91440" marR="91440" marT="45720" marB="45720" anchor="ctr">
+                    <a:lnL w="12700" cap="flat" cmpd="sng" algn="ctr">
+                      <a:solidFill>
+                        <a:srgbClr val="CFD6D9"/>
+                      </a:solidFill>
+                      <a:prstDash val="solid"/>
+                      <a:round/>
+                      <a:headEnd type="none" w="med" len="med"/>
+                      <a:tailEnd type="none" w="med" len="med"/>
+                    </a:lnL>
+                    <a:lnR w="12700" cap="flat" cmpd="sng" algn="ctr">
+                      <a:solidFill>
+                        <a:srgbClr val="CFD6D9"/>
+                      </a:solidFill>
+                      <a:prstDash val="solid"/>
+                      <a:round/>
+                      <a:headEnd type="none" w="med" len="med"/>
+                      <a:tailEnd type="none" w="med" len="med"/>
+                    </a:lnR>
+                    <a:lnT w="12700" cap="flat" cmpd="sng" algn="ctr">
+                      <a:solidFill>
+                        <a:srgbClr val="CFD6D9"/>
+                      </a:solidFill>
+                      <a:prstDash val="solid"/>
+                      <a:round/>
+                      <a:headEnd type="none" w="med" len="med"/>
+                      <a:tailEnd type="none" w="med" len="med"/>
+                    </a:lnT>
+                    <a:lnB w="12700" cap="flat" cmpd="sng" algn="ctr">
+                      <a:solidFill>
+                        <a:srgbClr val="CFD6D9"/>
+                      </a:solidFill>
+                      <a:prstDash val="solid"/>
+                      <a:round/>
+                      <a:headEnd type="none" w="med" len="med"/>
+                      <a:tailEnd type="none" w="med" len="med"/>
+                    </a:lnB>
+                  </a:tcPr>
+                </a:tc>
+                <a:tc>
+                  <a:txBody>
+                    <a:bodyPr/>
+                    <a:lstStyle/>
+                    <a:p>
+                      <a:pPr algn="ctr" indent="0" marL="0">
+                        <a:buNone/>
+                      </a:pPr>
+                      <a:r>
+                        <a:rPr lang="en-US" sz="1300" dirty="0">
+                          <a:solidFill>
+                            <a:srgbClr val="000000"/>
+                          </a:solidFill>
+                          <a:latin typeface="Calibri" pitchFamily="34" charset="0"/>
+                          <a:ea typeface="Calibri" pitchFamily="34" charset="-122"/>
+                          <a:cs typeface="Calibri" pitchFamily="34" charset="-120"/>
+                        </a:rPr>
+                        <a:t>69</a:t>
+                      </a:r>
+                      <a:endParaRPr lang="en-US" sz="1300" dirty="0">
+                        <a:latin typeface="Calibri" charset="0"/>
+                        <a:ea typeface="Calibri" charset="0"/>
+                        <a:cs typeface="Calibri" charset="0"/>
+                      </a:endParaRPr>
+                    </a:p>
+                  </a:txBody>
+                  <a:tcPr marL="91440" marR="91440" marT="45720" marB="45720" anchor="ctr">
+                    <a:lnL w="12700" cap="flat" cmpd="sng" algn="ctr">
+                      <a:solidFill>
+                        <a:srgbClr val="CFD6D9"/>
+                      </a:solidFill>
+                      <a:prstDash val="solid"/>
+                      <a:round/>
+                      <a:headEnd type="none" w="med" len="med"/>
+                      <a:tailEnd type="none" w="med" len="med"/>
+                    </a:lnL>
+                    <a:lnR w="12700" cap="flat" cmpd="sng" algn="ctr">
+                      <a:solidFill>
+                        <a:srgbClr val="CFD6D9"/>
+                      </a:solidFill>
+                      <a:prstDash val="solid"/>
+                      <a:round/>
+                      <a:headEnd type="none" w="med" len="med"/>
+                      <a:tailEnd type="none" w="med" len="med"/>
+                    </a:lnR>
+                    <a:lnT w="12700" cap="flat" cmpd="sng" algn="ctr">
+                      <a:solidFill>
+                        <a:srgbClr val="CFD6D9"/>
+                      </a:solidFill>
+                      <a:prstDash val="solid"/>
+                      <a:round/>
+                      <a:headEnd type="none" w="med" len="med"/>
+                      <a:tailEnd type="none" w="med" len="med"/>
+                    </a:lnT>
+                    <a:lnB w="12700" cap="flat" cmpd="sng" algn="ctr">
+                      <a:solidFill>
+                        <a:srgbClr val="CFD6D9"/>
+                      </a:solidFill>
+                      <a:prstDash val="solid"/>
+                      <a:round/>
+                      <a:headEnd type="none" w="med" len="med"/>
+                      <a:tailEnd type="none" w="med" len="med"/>
+                    </a:lnB>
+                  </a:tcPr>
+                </a:tc>
+                <a:tc>
+                  <a:txBody>
+                    <a:bodyPr/>
+                    <a:lstStyle/>
+                    <a:p>
+                      <a:pPr algn="ctr" indent="0" marL="0">
+                        <a:buNone/>
+                      </a:pPr>
+                      <a:r>
+                        <a:rPr lang="en-US" sz="1300" dirty="0">
+                          <a:solidFill>
+                            <a:srgbClr val="000000"/>
+                          </a:solidFill>
+                          <a:latin typeface="Calibri" pitchFamily="34" charset="0"/>
+                          <a:ea typeface="Calibri" pitchFamily="34" charset="-122"/>
+                          <a:cs typeface="Calibri" pitchFamily="34" charset="-120"/>
+                        </a:rPr>
+                        <a:t>67</a:t>
+                      </a:r>
+                      <a:endParaRPr lang="en-US" sz="1300" dirty="0">
+                        <a:latin typeface="Calibri" charset="0"/>
+                        <a:ea typeface="Calibri" charset="0"/>
+                        <a:cs typeface="Calibri" charset="0"/>
+                      </a:endParaRPr>
+                    </a:p>
+                  </a:txBody>
+                  <a:tcPr marL="91440" marR="91440" marT="45720" marB="45720" anchor="ctr">
+                    <a:lnL w="12700" cap="flat" cmpd="sng" algn="ctr">
+                      <a:solidFill>
+                        <a:srgbClr val="CFD6D9"/>
+                      </a:solidFill>
+                      <a:prstDash val="solid"/>
+                      <a:round/>
+                      <a:headEnd type="none" w="med" len="med"/>
+                      <a:tailEnd type="none" w="med" len="med"/>
+                    </a:lnL>
+                    <a:lnR w="12700" cap="flat" cmpd="sng" algn="ctr">
+                      <a:solidFill>
+                        <a:srgbClr val="CFD6D9"/>
+                      </a:solidFill>
+                      <a:prstDash val="solid"/>
+                      <a:round/>
+                      <a:headEnd type="none" w="med" len="med"/>
+                      <a:tailEnd type="none" w="med" len="med"/>
+                    </a:lnR>
+                    <a:lnT w="12700" cap="flat" cmpd="sng" algn="ctr">
+                      <a:solidFill>
+                        <a:srgbClr val="CFD6D9"/>
+                      </a:solidFill>
+                      <a:prstDash val="solid"/>
+                      <a:round/>
+                      <a:headEnd type="none" w="med" len="med"/>
+                      <a:tailEnd type="none" w="med" len="med"/>
+                    </a:lnT>
+                    <a:lnB w="12700" cap="flat" cmpd="sng" algn="ctr">
+                      <a:solidFill>
+                        <a:srgbClr val="CFD6D9"/>
+                      </a:solidFill>
+                      <a:prstDash val="solid"/>
+                      <a:round/>
+                      <a:headEnd type="none" w="med" len="med"/>
+                      <a:tailEnd type="none" w="med" len="med"/>
+                    </a:lnB>
+                  </a:tcPr>
+                </a:tc>
+                <a:tc>
+                  <a:txBody>
+                    <a:bodyPr/>
+                    <a:lstStyle/>
+                    <a:p>
+                      <a:pPr algn="ctr" indent="0" marL="0">
+                        <a:buNone/>
+                      </a:pPr>
+                      <a:r>
+                        <a:rPr lang="en-US" sz="1300" dirty="0">
+                          <a:solidFill>
+                            <a:srgbClr val="000000"/>
+                          </a:solidFill>
+                          <a:latin typeface="Calibri" pitchFamily="34" charset="0"/>
+                          <a:ea typeface="Calibri" pitchFamily="34" charset="-122"/>
+                          <a:cs typeface="Calibri" pitchFamily="34" charset="-120"/>
+                        </a:rPr>
+                        <a:t>63</a:t>
+                      </a:r>
+                      <a:endParaRPr lang="en-US" sz="1300" dirty="0">
+                        <a:latin typeface="Calibri" charset="0"/>
+                        <a:ea typeface="Calibri" charset="0"/>
+                        <a:cs typeface="Calibri" charset="0"/>
+                      </a:endParaRPr>
+                    </a:p>
+                  </a:txBody>
+                  <a:tcPr marL="91440" marR="91440" marT="45720" marB="45720" anchor="ctr">
+                    <a:lnL w="12700" cap="flat" cmpd="sng" algn="ctr">
+                      <a:solidFill>
+                        <a:srgbClr val="CFD6D9"/>
+                      </a:solidFill>
+                      <a:prstDash val="solid"/>
+                      <a:round/>
+                      <a:headEnd type="none" w="med" len="med"/>
+                      <a:tailEnd type="none" w="med" len="med"/>
+                    </a:lnL>
+                    <a:lnR w="12700" cap="flat" cmpd="sng" algn="ctr">
+                      <a:solidFill>
+                        <a:srgbClr val="CFD6D9"/>
+                      </a:solidFill>
+                      <a:prstDash val="solid"/>
+                      <a:round/>
+                      <a:headEnd type="none" w="med" len="med"/>
+                      <a:tailEnd type="none" w="med" len="med"/>
+                    </a:lnR>
+                    <a:lnT w="12700" cap="flat" cmpd="sng" algn="ctr">
+                      <a:solidFill>
+                        <a:srgbClr val="CFD6D9"/>
+                      </a:solidFill>
+                      <a:prstDash val="solid"/>
+                      <a:round/>
+                      <a:headEnd type="none" w="med" len="med"/>
+                      <a:tailEnd type="none" w="med" len="med"/>
+                    </a:lnT>
+                    <a:lnB w="12700" cap="flat" cmpd="sng" algn="ctr">
+                      <a:solidFill>
+                        <a:srgbClr val="CFD6D9"/>
+                      </a:solidFill>
+                      <a:prstDash val="solid"/>
+                      <a:round/>
+                      <a:headEnd type="none" w="med" len="med"/>
+                      <a:tailEnd type="none" w="med" len="med"/>
+                    </a:lnB>
+                  </a:tcPr>
+                </a:tc>
+                <a:tc>
+                  <a:txBody>
+                    <a:bodyPr/>
+                    <a:lstStyle/>
+                    <a:p>
+                      <a:pPr algn="ctr" indent="0" marL="0">
+                        <a:buNone/>
+                      </a:pPr>
+                      <a:r>
+                        <a:rPr lang="en-US" sz="1300" dirty="0">
+                          <a:solidFill>
+                            <a:srgbClr val="000000"/>
+                          </a:solidFill>
+                          <a:latin typeface="Calibri" pitchFamily="34" charset="0"/>
+                          <a:ea typeface="Calibri" pitchFamily="34" charset="-122"/>
+                          <a:cs typeface="Calibri" pitchFamily="34" charset="-120"/>
+                        </a:rPr>
+                        <a:t>3,1</a:t>
+                      </a:r>
+                      <a:endParaRPr lang="en-US" sz="1300" dirty="0">
+                        <a:latin typeface="Calibri" charset="0"/>
+                        <a:ea typeface="Calibri" charset="0"/>
+                        <a:cs typeface="Calibri" charset="0"/>
+                      </a:endParaRPr>
+                    </a:p>
+                  </a:txBody>
+                  <a:tcPr marL="91440" marR="91440" marT="45720" marB="45720" anchor="ctr">
+                    <a:lnL w="12700" cap="flat" cmpd="sng" algn="ctr">
+                      <a:solidFill>
+                        <a:srgbClr val="CFD6D9"/>
+                      </a:solidFill>
+                      <a:prstDash val="solid"/>
+                      <a:round/>
+                      <a:headEnd type="none" w="med" len="med"/>
+                      <a:tailEnd type="none" w="med" len="med"/>
+                    </a:lnL>
+                    <a:lnR w="12700" cap="flat" cmpd="sng" algn="ctr">
+                      <a:solidFill>
+                        <a:srgbClr val="CFD6D9"/>
+                      </a:solidFill>
+                      <a:prstDash val="solid"/>
+                      <a:round/>
+                      <a:headEnd type="none" w="med" len="med"/>
+                      <a:tailEnd type="none" w="med" len="med"/>
+                    </a:lnR>
+                    <a:lnT w="12700" cap="flat" cmpd="sng" algn="ctr">
+                      <a:solidFill>
+                        <a:srgbClr val="CFD6D9"/>
+                      </a:solidFill>
+                      <a:prstDash val="solid"/>
+                      <a:round/>
+                      <a:headEnd type="none" w="med" len="med"/>
+                      <a:tailEnd type="none" w="med" len="med"/>
+                    </a:lnT>
+                    <a:lnB w="12700" cap="flat" cmpd="sng" algn="ctr">
+                      <a:solidFill>
+                        <a:srgbClr val="CFD6D9"/>
+                      </a:solidFill>
+                      <a:prstDash val="solid"/>
+                      <a:round/>
+                      <a:headEnd type="none" w="med" len="med"/>
+                      <a:tailEnd type="none" w="med" len="med"/>
+                    </a:lnB>
+                  </a:tcPr>
+                </a:tc>
+                <a:tc>
+                  <a:txBody>
+                    <a:bodyPr/>
+                    <a:lstStyle/>
+                    <a:p>
+                      <a:pPr algn="ctr" indent="0" marL="0">
+                        <a:buNone/>
+                      </a:pPr>
+                      <a:r>
+                        <a:rPr lang="en-US" sz="1300" dirty="0">
+                          <a:solidFill>
+                            <a:srgbClr val="000000"/>
+                          </a:solidFill>
+                          <a:latin typeface="Calibri" pitchFamily="34" charset="0"/>
+                          <a:ea typeface="Calibri" pitchFamily="34" charset="-122"/>
+                          <a:cs typeface="Calibri" pitchFamily="34" charset="-120"/>
+                        </a:rPr>
+                        <a:t>3,3</a:t>
+                      </a:r>
+                      <a:endParaRPr lang="en-US" sz="1300" dirty="0">
+                        <a:latin typeface="Calibri" charset="0"/>
+                        <a:ea typeface="Calibri" charset="0"/>
+                        <a:cs typeface="Calibri" charset="0"/>
+                      </a:endParaRPr>
+                    </a:p>
+                  </a:txBody>
+                  <a:tcPr marL="91440" marR="91440" marT="45720" marB="45720" anchor="ctr">
+                    <a:lnL w="12700" cap="flat" cmpd="sng" algn="ctr">
+                      <a:solidFill>
+                        <a:srgbClr val="CFD6D9"/>
+                      </a:solidFill>
+                      <a:prstDash val="solid"/>
+                      <a:round/>
+                      <a:headEnd type="none" w="med" len="med"/>
+                      <a:tailEnd type="none" w="med" len="med"/>
+                    </a:lnL>
+                    <a:lnR w="12700" cap="flat" cmpd="sng" algn="ctr">
+                      <a:solidFill>
+                        <a:srgbClr val="CFD6D9"/>
+                      </a:solidFill>
+                      <a:prstDash val="solid"/>
+                      <a:round/>
+                      <a:headEnd type="none" w="med" len="med"/>
+                      <a:tailEnd type="none" w="med" len="med"/>
+                    </a:lnR>
+                    <a:lnT w="12700" cap="flat" cmpd="sng" algn="ctr">
+                      <a:solidFill>
+                        <a:srgbClr val="CFD6D9"/>
+                      </a:solidFill>
+                      <a:prstDash val="solid"/>
+                      <a:round/>
+                      <a:headEnd type="none" w="med" len="med"/>
+                      <a:tailEnd type="none" w="med" len="med"/>
+                    </a:lnT>
+                    <a:lnB w="12700" cap="flat" cmpd="sng" algn="ctr">
+                      <a:solidFill>
+                        <a:srgbClr val="CFD6D9"/>
+                      </a:solidFill>
+                      <a:prstDash val="solid"/>
+                      <a:round/>
+                      <a:headEnd type="none" w="med" len="med"/>
+                      <a:tailEnd type="none" w="med" len="med"/>
+                    </a:lnB>
+                  </a:tcPr>
+                </a:tc>
+                <a:tc>
+                  <a:txBody>
+                    <a:bodyPr/>
+                    <a:lstStyle/>
+                    <a:p>
+                      <a:pPr algn="ctr" indent="0" marL="0">
+                        <a:buNone/>
+                      </a:pPr>
+                      <a:r>
+                        <a:rPr lang="en-US" sz="1300" dirty="0">
+                          <a:solidFill>
+                            <a:srgbClr val="000000"/>
+                          </a:solidFill>
+                          <a:latin typeface="Calibri" pitchFamily="34" charset="0"/>
+                          <a:ea typeface="Calibri" pitchFamily="34" charset="-122"/>
+                          <a:cs typeface="Calibri" pitchFamily="34" charset="-120"/>
+                        </a:rPr>
+                        <a:t>3,7</a:t>
+                      </a:r>
+                      <a:endParaRPr lang="en-US" sz="1300" dirty="0">
+                        <a:latin typeface="Calibri" charset="0"/>
+                        <a:ea typeface="Calibri" charset="0"/>
+                        <a:cs typeface="Calibri" charset="0"/>
+                      </a:endParaRPr>
+                    </a:p>
+                  </a:txBody>
+                  <a:tcPr marL="91440" marR="91440" marT="45720" marB="45720" anchor="ctr">
+                    <a:lnL w="12700" cap="flat" cmpd="sng" algn="ctr">
+                      <a:solidFill>
+                        <a:srgbClr val="CFD6D9"/>
+                      </a:solidFill>
+                      <a:prstDash val="solid"/>
+                      <a:round/>
+                      <a:headEnd type="none" w="med" len="med"/>
+                      <a:tailEnd type="none" w="med" len="med"/>
+                    </a:lnL>
+                    <a:lnR w="12700" cap="flat" cmpd="sng" algn="ctr">
+                      <a:solidFill>
+                        <a:srgbClr val="CFD6D9"/>
+                      </a:solidFill>
+                      <a:prstDash val="solid"/>
+                      <a:round/>
+                      <a:headEnd type="none" w="med" len="med"/>
+                      <a:tailEnd type="none" w="med" len="med"/>
+                    </a:lnR>
+                    <a:lnT w="12700" cap="flat" cmpd="sng" algn="ctr">
+                      <a:solidFill>
+                        <a:srgbClr val="CFD6D9"/>
+                      </a:solidFill>
+                      <a:prstDash val="solid"/>
+                      <a:round/>
+                      <a:headEnd type="none" w="med" len="med"/>
+                      <a:tailEnd type="none" w="med" len="med"/>
+                    </a:lnT>
+                    <a:lnB w="12700" cap="flat" cmpd="sng" algn="ctr">
+                      <a:solidFill>
+                        <a:srgbClr val="CFD6D9"/>
+                      </a:solidFill>
+                      <a:prstDash val="solid"/>
+                      <a:round/>
+                      <a:headEnd type="none" w="med" len="med"/>
+                      <a:tailEnd type="none" w="med" len="med"/>
+                    </a:lnB>
+                  </a:tcPr>
+                </a:tc>
+              </a:tr>
+              <a:tr h="384048">
+                <a:tc>
+                  <a:txBody>
+                    <a:bodyPr/>
+                    <a:lstStyle/>
+                    <a:p>
+                      <a:pPr algn="ctr" indent="0" marL="0">
+                        <a:buNone/>
+                      </a:pPr>
+                      <a:r>
+                        <a:rPr lang="en-US" sz="1300" b="1" dirty="0">
+                          <a:solidFill>
+                            <a:srgbClr val="000000"/>
+                          </a:solidFill>
+                          <a:latin typeface="Calibri" pitchFamily="34" charset="0"/>
+                          <a:ea typeface="Calibri" pitchFamily="34" charset="-122"/>
+                          <a:cs typeface="Calibri" pitchFamily="34" charset="-120"/>
+                        </a:rPr>
+                        <a:t>C4</a:t>
+                      </a:r>
+                      <a:endParaRPr lang="en-US" sz="1300" dirty="0">
+                        <a:latin typeface="Calibri" charset="0"/>
+                        <a:ea typeface="Calibri" charset="0"/>
+                        <a:cs typeface="Calibri" charset="0"/>
+                      </a:endParaRPr>
+                    </a:p>
+                  </a:txBody>
+                  <a:tcPr marL="91440" marR="91440" marT="45720" marB="45720" anchor="ctr">
+                    <a:lnL w="12700" cap="flat" cmpd="sng" algn="ctr">
+                      <a:solidFill>
+                        <a:srgbClr val="CFD6D9"/>
+                      </a:solidFill>
+                      <a:prstDash val="solid"/>
+                      <a:round/>
+                      <a:headEnd type="none" w="med" len="med"/>
+                      <a:tailEnd type="none" w="med" len="med"/>
+                    </a:lnL>
+                    <a:lnR w="12700" cap="flat" cmpd="sng" algn="ctr">
+                      <a:solidFill>
+                        <a:srgbClr val="CFD6D9"/>
+                      </a:solidFill>
+                      <a:prstDash val="solid"/>
+                      <a:round/>
+                      <a:headEnd type="none" w="med" len="med"/>
+                      <a:tailEnd type="none" w="med" len="med"/>
+                    </a:lnR>
+                    <a:lnT w="12700" cap="flat" cmpd="sng" algn="ctr">
+                      <a:solidFill>
+                        <a:srgbClr val="CFD6D9"/>
+                      </a:solidFill>
+                      <a:prstDash val="solid"/>
+                      <a:round/>
+                      <a:headEnd type="none" w="med" len="med"/>
+                      <a:tailEnd type="none" w="med" len="med"/>
+                    </a:lnT>
+                    <a:lnB w="12700" cap="flat" cmpd="sng" algn="ctr">
+                      <a:solidFill>
+                        <a:srgbClr val="CFD6D9"/>
+                      </a:solidFill>
+                      <a:prstDash val="solid"/>
+                      <a:round/>
+                      <a:headEnd type="none" w="med" len="med"/>
+                      <a:tailEnd type="none" w="med" len="med"/>
+                    </a:lnB>
+                  </a:tcPr>
+                </a:tc>
+                <a:tc>
+                  <a:txBody>
+                    <a:bodyPr/>
+                    <a:lstStyle/>
+                    <a:p>
+                      <a:pPr algn="ctr" indent="0" marL="0">
+                        <a:buNone/>
+                      </a:pPr>
+                      <a:r>
+                        <a:rPr lang="en-US" sz="1300" dirty="0">
+                          <a:solidFill>
+                            <a:srgbClr val="000000"/>
+                          </a:solidFill>
+                          <a:latin typeface="Calibri" pitchFamily="34" charset="0"/>
+                          <a:ea typeface="Calibri" pitchFamily="34" charset="-122"/>
+                          <a:cs typeface="Calibri" pitchFamily="34" charset="-120"/>
+                        </a:rPr>
+                        <a:t>28</a:t>
+                      </a:r>
+                      <a:endParaRPr lang="en-US" sz="1300" dirty="0">
+                        <a:latin typeface="Calibri" charset="0"/>
+                        <a:ea typeface="Calibri" charset="0"/>
+                        <a:cs typeface="Calibri" charset="0"/>
+                      </a:endParaRPr>
+                    </a:p>
+                  </a:txBody>
+                  <a:tcPr marL="91440" marR="91440" marT="45720" marB="45720" anchor="ctr">
+                    <a:lnL w="12700" cap="flat" cmpd="sng" algn="ctr">
+                      <a:solidFill>
+                        <a:srgbClr val="CFD6D9"/>
+                      </a:solidFill>
+                      <a:prstDash val="solid"/>
+                      <a:round/>
+                      <a:headEnd type="none" w="med" len="med"/>
+                      <a:tailEnd type="none" w="med" len="med"/>
+                    </a:lnL>
+                    <a:lnR w="12700" cap="flat" cmpd="sng" algn="ctr">
+                      <a:solidFill>
+                        <a:srgbClr val="CFD6D9"/>
+                      </a:solidFill>
+                      <a:prstDash val="solid"/>
+                      <a:round/>
+                      <a:headEnd type="none" w="med" len="med"/>
+                      <a:tailEnd type="none" w="med" len="med"/>
+                    </a:lnR>
+                    <a:lnT w="12700" cap="flat" cmpd="sng" algn="ctr">
+                      <a:solidFill>
+                        <a:srgbClr val="CFD6D9"/>
+                      </a:solidFill>
+                      <a:prstDash val="solid"/>
+                      <a:round/>
+                      <a:headEnd type="none" w="med" len="med"/>
+                      <a:tailEnd type="none" w="med" len="med"/>
+                    </a:lnT>
+                    <a:lnB w="12700" cap="flat" cmpd="sng" algn="ctr">
+                      <a:solidFill>
+                        <a:srgbClr val="CFD6D9"/>
+                      </a:solidFill>
+                      <a:prstDash val="solid"/>
+                      <a:round/>
+                      <a:headEnd type="none" w="med" len="med"/>
+                      <a:tailEnd type="none" w="med" len="med"/>
+                    </a:lnB>
+                  </a:tcPr>
+                </a:tc>
+                <a:tc>
+                  <a:txBody>
+                    <a:bodyPr/>
+                    <a:lstStyle/>
+                    <a:p>
+                      <a:pPr algn="ctr" indent="0" marL="0">
+                        <a:buNone/>
+                      </a:pPr>
+                      <a:r>
+                        <a:rPr lang="en-US" sz="1300" dirty="0">
+                          <a:solidFill>
+                            <a:srgbClr val="000000"/>
+                          </a:solidFill>
+                          <a:latin typeface="Calibri" pitchFamily="34" charset="0"/>
+                          <a:ea typeface="Calibri" pitchFamily="34" charset="-122"/>
+                          <a:cs typeface="Calibri" pitchFamily="34" charset="-120"/>
+                        </a:rPr>
+                        <a:t>25</a:t>
+                      </a:r>
+                      <a:endParaRPr lang="en-US" sz="1300" dirty="0">
+                        <a:latin typeface="Calibri" charset="0"/>
+                        <a:ea typeface="Calibri" charset="0"/>
+                        <a:cs typeface="Calibri" charset="0"/>
+                      </a:endParaRPr>
+                    </a:p>
+                  </a:txBody>
+                  <a:tcPr marL="91440" marR="91440" marT="45720" marB="45720" anchor="ctr">
+                    <a:lnL w="12700" cap="flat" cmpd="sng" algn="ctr">
+                      <a:solidFill>
+                        <a:srgbClr val="CFD6D9"/>
+                      </a:solidFill>
+                      <a:prstDash val="solid"/>
+                      <a:round/>
+                      <a:headEnd type="none" w="med" len="med"/>
+                      <a:tailEnd type="none" w="med" len="med"/>
+                    </a:lnL>
+                    <a:lnR w="12700" cap="flat" cmpd="sng" algn="ctr">
+                      <a:solidFill>
+                        <a:srgbClr val="CFD6D9"/>
+                      </a:solidFill>
+                      <a:prstDash val="solid"/>
+                      <a:round/>
+                      <a:headEnd type="none" w="med" len="med"/>
+                      <a:tailEnd type="none" w="med" len="med"/>
+                    </a:lnR>
+                    <a:lnT w="12700" cap="flat" cmpd="sng" algn="ctr">
+                      <a:solidFill>
+                        <a:srgbClr val="CFD6D9"/>
+                      </a:solidFill>
+                      <a:prstDash val="solid"/>
+                      <a:round/>
+                      <a:headEnd type="none" w="med" len="med"/>
+                      <a:tailEnd type="none" w="med" len="med"/>
+                    </a:lnT>
+                    <a:lnB w="12700" cap="flat" cmpd="sng" algn="ctr">
+                      <a:solidFill>
+                        <a:srgbClr val="CFD6D9"/>
+                      </a:solidFill>
+                      <a:prstDash val="solid"/>
+                      <a:round/>
+                      <a:headEnd type="none" w="med" len="med"/>
+                      <a:tailEnd type="none" w="med" len="med"/>
+                    </a:lnB>
+                  </a:tcPr>
+                </a:tc>
+                <a:tc>
+                  <a:txBody>
+                    <a:bodyPr/>
+                    <a:lstStyle/>
+                    <a:p>
+                      <a:pPr algn="ctr" indent="0" marL="0">
+                        <a:buNone/>
+                      </a:pPr>
+                      <a:r>
+                        <a:rPr lang="en-US" sz="1300" dirty="0">
+                          <a:solidFill>
+                            <a:srgbClr val="000000"/>
+                          </a:solidFill>
+                          <a:latin typeface="Calibri" pitchFamily="34" charset="0"/>
+                          <a:ea typeface="Calibri" pitchFamily="34" charset="-122"/>
+                          <a:cs typeface="Calibri" pitchFamily="34" charset="-120"/>
+                        </a:rPr>
+                        <a:t>23</a:t>
+                      </a:r>
+                      <a:endParaRPr lang="en-US" sz="1300" dirty="0">
+                        <a:latin typeface="Calibri" charset="0"/>
+                        <a:ea typeface="Calibri" charset="0"/>
+                        <a:cs typeface="Calibri" charset="0"/>
+                      </a:endParaRPr>
+                    </a:p>
+                  </a:txBody>
+                  <a:tcPr marL="91440" marR="91440" marT="45720" marB="45720" anchor="ctr">
+                    <a:lnL w="12700" cap="flat" cmpd="sng" algn="ctr">
+                      <a:solidFill>
+                        <a:srgbClr val="CFD6D9"/>
+                      </a:solidFill>
+                      <a:prstDash val="solid"/>
+                      <a:round/>
+                      <a:headEnd type="none" w="med" len="med"/>
+                      <a:tailEnd type="none" w="med" len="med"/>
+                    </a:lnL>
+                    <a:lnR w="12700" cap="flat" cmpd="sng" algn="ctr">
+                      <a:solidFill>
+                        <a:srgbClr val="CFD6D9"/>
+                      </a:solidFill>
+                      <a:prstDash val="solid"/>
+                      <a:round/>
+                      <a:headEnd type="none" w="med" len="med"/>
+                      <a:tailEnd type="none" w="med" len="med"/>
+                    </a:lnR>
+                    <a:lnT w="12700" cap="flat" cmpd="sng" algn="ctr">
+                      <a:solidFill>
+                        <a:srgbClr val="CFD6D9"/>
+                      </a:solidFill>
+                      <a:prstDash val="solid"/>
+                      <a:round/>
+                      <a:headEnd type="none" w="med" len="med"/>
+                      <a:tailEnd type="none" w="med" len="med"/>
+                    </a:lnT>
+                    <a:lnB w="12700" cap="flat" cmpd="sng" algn="ctr">
+                      <a:solidFill>
+                        <a:srgbClr val="CFD6D9"/>
+                      </a:solidFill>
+                      <a:prstDash val="solid"/>
+                      <a:round/>
+                      <a:headEnd type="none" w="med" len="med"/>
+                      <a:tailEnd type="none" w="med" len="med"/>
+                    </a:lnB>
+                  </a:tcPr>
+                </a:tc>
+                <a:tc>
+                  <a:txBody>
+                    <a:bodyPr/>
+                    <a:lstStyle/>
+                    <a:p>
+                      <a:pPr algn="ctr" indent="0" marL="0">
+                        <a:buNone/>
+                      </a:pPr>
+                      <a:r>
+                        <a:rPr lang="en-US" sz="1300" dirty="0">
+                          <a:solidFill>
+                            <a:srgbClr val="000000"/>
+                          </a:solidFill>
+                          <a:latin typeface="Calibri" pitchFamily="34" charset="0"/>
+                          <a:ea typeface="Calibri" pitchFamily="34" charset="-122"/>
+                          <a:cs typeface="Calibri" pitchFamily="34" charset="-120"/>
+                        </a:rPr>
+                        <a:t>79</a:t>
+                      </a:r>
+                      <a:endParaRPr lang="en-US" sz="1300" dirty="0">
+                        <a:latin typeface="Calibri" charset="0"/>
+                        <a:ea typeface="Calibri" charset="0"/>
+                        <a:cs typeface="Calibri" charset="0"/>
+                      </a:endParaRPr>
+                    </a:p>
+                  </a:txBody>
+                  <a:tcPr marL="91440" marR="91440" marT="45720" marB="45720" anchor="ctr">
+                    <a:lnL w="12700" cap="flat" cmpd="sng" algn="ctr">
+                      <a:solidFill>
+                        <a:srgbClr val="CFD6D9"/>
+                      </a:solidFill>
+                      <a:prstDash val="solid"/>
+                      <a:round/>
+                      <a:headEnd type="none" w="med" len="med"/>
+                      <a:tailEnd type="none" w="med" len="med"/>
+                    </a:lnL>
+                    <a:lnR w="12700" cap="flat" cmpd="sng" algn="ctr">
+                      <a:solidFill>
+                        <a:srgbClr val="CFD6D9"/>
+                      </a:solidFill>
+                      <a:prstDash val="solid"/>
+                      <a:round/>
+                      <a:headEnd type="none" w="med" len="med"/>
+                      <a:tailEnd type="none" w="med" len="med"/>
+                    </a:lnR>
+                    <a:lnT w="12700" cap="flat" cmpd="sng" algn="ctr">
+                      <a:solidFill>
+                        <a:srgbClr val="CFD6D9"/>
+                      </a:solidFill>
+                      <a:prstDash val="solid"/>
+                      <a:round/>
+                      <a:headEnd type="none" w="med" len="med"/>
+                      <a:tailEnd type="none" w="med" len="med"/>
+                    </a:lnT>
+                    <a:lnB w="12700" cap="flat" cmpd="sng" algn="ctr">
+                      <a:solidFill>
+                        <a:srgbClr val="CFD6D9"/>
+                      </a:solidFill>
+                      <a:prstDash val="solid"/>
+                      <a:round/>
+                      <a:headEnd type="none" w="med" len="med"/>
+                      <a:tailEnd type="none" w="med" len="med"/>
+                    </a:lnB>
+                  </a:tcPr>
+                </a:tc>
+                <a:tc>
+                  <a:txBody>
+                    <a:bodyPr/>
+                    <a:lstStyle/>
+                    <a:p>
+                      <a:pPr algn="ctr" indent="0" marL="0">
+                        <a:buNone/>
+                      </a:pPr>
+                      <a:r>
+                        <a:rPr lang="en-US" sz="1300" dirty="0">
+                          <a:solidFill>
+                            <a:srgbClr val="000000"/>
+                          </a:solidFill>
+                          <a:latin typeface="Calibri" pitchFamily="34" charset="0"/>
+                          <a:ea typeface="Calibri" pitchFamily="34" charset="-122"/>
+                          <a:cs typeface="Calibri" pitchFamily="34" charset="-120"/>
+                        </a:rPr>
+                        <a:t>71</a:t>
+                      </a:r>
+                      <a:endParaRPr lang="en-US" sz="1300" dirty="0">
+                        <a:latin typeface="Calibri" charset="0"/>
+                        <a:ea typeface="Calibri" charset="0"/>
+                        <a:cs typeface="Calibri" charset="0"/>
+                      </a:endParaRPr>
+                    </a:p>
+                  </a:txBody>
+                  <a:tcPr marL="91440" marR="91440" marT="45720" marB="45720" anchor="ctr">
+                    <a:lnL w="12700" cap="flat" cmpd="sng" algn="ctr">
+                      <a:solidFill>
+                        <a:srgbClr val="CFD6D9"/>
+                      </a:solidFill>
+                      <a:prstDash val="solid"/>
+                      <a:round/>
+                      <a:headEnd type="none" w="med" len="med"/>
+                      <a:tailEnd type="none" w="med" len="med"/>
+                    </a:lnL>
+                    <a:lnR w="12700" cap="flat" cmpd="sng" algn="ctr">
+                      <a:solidFill>
+                        <a:srgbClr val="CFD6D9"/>
+                      </a:solidFill>
+                      <a:prstDash val="solid"/>
+                      <a:round/>
+                      <a:headEnd type="none" w="med" len="med"/>
+                      <a:tailEnd type="none" w="med" len="med"/>
+                    </a:lnR>
+                    <a:lnT w="12700" cap="flat" cmpd="sng" algn="ctr">
+                      <a:solidFill>
+                        <a:srgbClr val="CFD6D9"/>
+                      </a:solidFill>
+                      <a:prstDash val="solid"/>
+                      <a:round/>
+                      <a:headEnd type="none" w="med" len="med"/>
+                      <a:tailEnd type="none" w="med" len="med"/>
+                    </a:lnT>
+                    <a:lnB w="12700" cap="flat" cmpd="sng" algn="ctr">
+                      <a:solidFill>
+                        <a:srgbClr val="CFD6D9"/>
+                      </a:solidFill>
+                      <a:prstDash val="solid"/>
+                      <a:round/>
+                      <a:headEnd type="none" w="med" len="med"/>
+                      <a:tailEnd type="none" w="med" len="med"/>
+                    </a:lnB>
+                  </a:tcPr>
+                </a:tc>
+                <a:tc>
+                  <a:txBody>
+                    <a:bodyPr/>
+                    <a:lstStyle/>
+                    <a:p>
+                      <a:pPr algn="ctr" indent="0" marL="0">
+                        <a:buNone/>
+                      </a:pPr>
+                      <a:r>
+                        <a:rPr lang="en-US" sz="1300" dirty="0">
+                          <a:solidFill>
+                            <a:srgbClr val="000000"/>
+                          </a:solidFill>
+                          <a:latin typeface="Calibri" pitchFamily="34" charset="0"/>
+                          <a:ea typeface="Calibri" pitchFamily="34" charset="-122"/>
+                          <a:cs typeface="Calibri" pitchFamily="34" charset="-120"/>
+                        </a:rPr>
+                        <a:t>72</a:t>
+                      </a:r>
+                      <a:endParaRPr lang="en-US" sz="1300" dirty="0">
+                        <a:latin typeface="Calibri" charset="0"/>
+                        <a:ea typeface="Calibri" charset="0"/>
+                        <a:cs typeface="Calibri" charset="0"/>
+                      </a:endParaRPr>
+                    </a:p>
+                  </a:txBody>
+                  <a:tcPr marL="91440" marR="91440" marT="45720" marB="45720" anchor="ctr">
+                    <a:lnL w="12700" cap="flat" cmpd="sng" algn="ctr">
+                      <a:solidFill>
+                        <a:srgbClr val="CFD6D9"/>
+                      </a:solidFill>
+                      <a:prstDash val="solid"/>
+                      <a:round/>
+                      <a:headEnd type="none" w="med" len="med"/>
+                      <a:tailEnd type="none" w="med" len="med"/>
+                    </a:lnL>
+                    <a:lnR w="12700" cap="flat" cmpd="sng" algn="ctr">
+                      <a:solidFill>
+                        <a:srgbClr val="CFD6D9"/>
+                      </a:solidFill>
+                      <a:prstDash val="solid"/>
+                      <a:round/>
+                      <a:headEnd type="none" w="med" len="med"/>
+                      <a:tailEnd type="none" w="med" len="med"/>
+                    </a:lnR>
+                    <a:lnT w="12700" cap="flat" cmpd="sng" algn="ctr">
+                      <a:solidFill>
+                        <a:srgbClr val="CFD6D9"/>
+                      </a:solidFill>
+                      <a:prstDash val="solid"/>
+                      <a:round/>
+                      <a:headEnd type="none" w="med" len="med"/>
+                      <a:tailEnd type="none" w="med" len="med"/>
+                    </a:lnT>
+                    <a:lnB w="12700" cap="flat" cmpd="sng" algn="ctr">
+                      <a:solidFill>
+                        <a:srgbClr val="CFD6D9"/>
+                      </a:solidFill>
+                      <a:prstDash val="solid"/>
+                      <a:round/>
+                      <a:headEnd type="none" w="med" len="med"/>
+                      <a:tailEnd type="none" w="med" len="med"/>
+                    </a:lnB>
+                  </a:tcPr>
+                </a:tc>
+                <a:tc>
+                  <a:txBody>
+                    <a:bodyPr/>
+                    <a:lstStyle/>
+                    <a:p>
+                      <a:pPr algn="ctr" indent="0" marL="0">
+                        <a:buNone/>
+                      </a:pPr>
+                      <a:r>
+                        <a:rPr lang="en-US" sz="1300" dirty="0">
+                          <a:solidFill>
+                            <a:srgbClr val="000000"/>
+                          </a:solidFill>
+                          <a:latin typeface="Calibri" pitchFamily="34" charset="0"/>
+                          <a:ea typeface="Calibri" pitchFamily="34" charset="-122"/>
+                          <a:cs typeface="Calibri" pitchFamily="34" charset="-120"/>
+                        </a:rPr>
+                        <a:t>2,5</a:t>
+                      </a:r>
+                      <a:endParaRPr lang="en-US" sz="1300" dirty="0">
+                        <a:latin typeface="Calibri" charset="0"/>
+                        <a:ea typeface="Calibri" charset="0"/>
+                        <a:cs typeface="Calibri" charset="0"/>
+                      </a:endParaRPr>
+                    </a:p>
+                  </a:txBody>
+                  <a:tcPr marL="91440" marR="91440" marT="45720" marB="45720" anchor="ctr">
+                    <a:lnL w="12700" cap="flat" cmpd="sng" algn="ctr">
+                      <a:solidFill>
+                        <a:srgbClr val="CFD6D9"/>
+                      </a:solidFill>
+                      <a:prstDash val="solid"/>
+                      <a:round/>
+                      <a:headEnd type="none" w="med" len="med"/>
+                      <a:tailEnd type="none" w="med" len="med"/>
+                    </a:lnL>
+                    <a:lnR w="12700" cap="flat" cmpd="sng" algn="ctr">
+                      <a:solidFill>
+                        <a:srgbClr val="CFD6D9"/>
+                      </a:solidFill>
+                      <a:prstDash val="solid"/>
+                      <a:round/>
+                      <a:headEnd type="none" w="med" len="med"/>
+                      <a:tailEnd type="none" w="med" len="med"/>
+                    </a:lnR>
+                    <a:lnT w="12700" cap="flat" cmpd="sng" algn="ctr">
+                      <a:solidFill>
+                        <a:srgbClr val="CFD6D9"/>
+                      </a:solidFill>
+                      <a:prstDash val="solid"/>
+                      <a:round/>
+                      <a:headEnd type="none" w="med" len="med"/>
+                      <a:tailEnd type="none" w="med" len="med"/>
+                    </a:lnT>
+                    <a:lnB w="12700" cap="flat" cmpd="sng" algn="ctr">
+                      <a:solidFill>
+                        <a:srgbClr val="CFD6D9"/>
+                      </a:solidFill>
+                      <a:prstDash val="solid"/>
+                      <a:round/>
+                      <a:headEnd type="none" w="med" len="med"/>
+                      <a:tailEnd type="none" w="med" len="med"/>
+                    </a:lnB>
+                  </a:tcPr>
+                </a:tc>
+                <a:tc>
+                  <a:txBody>
+                    <a:bodyPr/>
+                    <a:lstStyle/>
+                    <a:p>
+                      <a:pPr algn="ctr" indent="0" marL="0">
+                        <a:buNone/>
+                      </a:pPr>
+                      <a:r>
+                        <a:rPr lang="en-US" sz="1300" dirty="0">
+                          <a:solidFill>
+                            <a:srgbClr val="000000"/>
+                          </a:solidFill>
+                          <a:latin typeface="Calibri" pitchFamily="34" charset="0"/>
+                          <a:ea typeface="Calibri" pitchFamily="34" charset="-122"/>
+                          <a:cs typeface="Calibri" pitchFamily="34" charset="-120"/>
+                        </a:rPr>
+                        <a:t>2,9</a:t>
+                      </a:r>
+                      <a:endParaRPr lang="en-US" sz="1300" dirty="0">
+                        <a:latin typeface="Calibri" charset="0"/>
+                        <a:ea typeface="Calibri" charset="0"/>
+                        <a:cs typeface="Calibri" charset="0"/>
+                      </a:endParaRPr>
+                    </a:p>
+                  </a:txBody>
+                  <a:tcPr marL="91440" marR="91440" marT="45720" marB="45720" anchor="ctr">
+                    <a:lnL w="12700" cap="flat" cmpd="sng" algn="ctr">
+                      <a:solidFill>
+                        <a:srgbClr val="CFD6D9"/>
+                      </a:solidFill>
+                      <a:prstDash val="solid"/>
+                      <a:round/>
+                      <a:headEnd type="none" w="med" len="med"/>
+                      <a:tailEnd type="none" w="med" len="med"/>
+                    </a:lnL>
+                    <a:lnR w="12700" cap="flat" cmpd="sng" algn="ctr">
+                      <a:solidFill>
+                        <a:srgbClr val="CFD6D9"/>
+                      </a:solidFill>
+                      <a:prstDash val="solid"/>
+                      <a:round/>
+                      <a:headEnd type="none" w="med" len="med"/>
+                      <a:tailEnd type="none" w="med" len="med"/>
+                    </a:lnR>
+                    <a:lnT w="12700" cap="flat" cmpd="sng" algn="ctr">
+                      <a:solidFill>
+                        <a:srgbClr val="CFD6D9"/>
+                      </a:solidFill>
+                      <a:prstDash val="solid"/>
+                      <a:round/>
+                      <a:headEnd type="none" w="med" len="med"/>
+                      <a:tailEnd type="none" w="med" len="med"/>
+                    </a:lnT>
+                    <a:lnB w="12700" cap="flat" cmpd="sng" algn="ctr">
+                      <a:solidFill>
+                        <a:srgbClr val="CFD6D9"/>
+                      </a:solidFill>
+                      <a:prstDash val="solid"/>
+                      <a:round/>
+                      <a:headEnd type="none" w="med" len="med"/>
+                      <a:tailEnd type="none" w="med" len="med"/>
+                    </a:lnB>
+                  </a:tcPr>
+                </a:tc>
+                <a:tc>
+                  <a:txBody>
+                    <a:bodyPr/>
+                    <a:lstStyle/>
+                    <a:p>
+                      <a:pPr algn="ctr" indent="0" marL="0">
+                        <a:buNone/>
+                      </a:pPr>
+                      <a:r>
+                        <a:rPr lang="en-US" sz="1300" dirty="0">
+                          <a:solidFill>
+                            <a:srgbClr val="000000"/>
+                          </a:solidFill>
+                          <a:latin typeface="Calibri" pitchFamily="34" charset="0"/>
+                          <a:ea typeface="Calibri" pitchFamily="34" charset="-122"/>
+                          <a:cs typeface="Calibri" pitchFamily="34" charset="-120"/>
+                        </a:rPr>
+                        <a:t>2,9</a:t>
+                      </a:r>
+                      <a:endParaRPr lang="en-US" sz="1300" dirty="0">
+                        <a:latin typeface="Calibri" charset="0"/>
+                        <a:ea typeface="Calibri" charset="0"/>
+                        <a:cs typeface="Calibri" charset="0"/>
+                      </a:endParaRPr>
+                    </a:p>
+                  </a:txBody>
+                  <a:tcPr marL="91440" marR="91440" marT="45720" marB="45720" anchor="ctr">
+                    <a:lnL w="12700" cap="flat" cmpd="sng" algn="ctr">
+                      <a:solidFill>
+                        <a:srgbClr val="CFD6D9"/>
+                      </a:solidFill>
+                      <a:prstDash val="solid"/>
+                      <a:round/>
+                      <a:headEnd type="none" w="med" len="med"/>
+                      <a:tailEnd type="none" w="med" len="med"/>
+                    </a:lnL>
+                    <a:lnR w="12700" cap="flat" cmpd="sng" algn="ctr">
+                      <a:solidFill>
+                        <a:srgbClr val="CFD6D9"/>
+                      </a:solidFill>
+                      <a:prstDash val="solid"/>
+                      <a:round/>
+                      <a:headEnd type="none" w="med" len="med"/>
+                      <a:tailEnd type="none" w="med" len="med"/>
+                    </a:lnR>
+                    <a:lnT w="12700" cap="flat" cmpd="sng" algn="ctr">
+                      <a:solidFill>
+                        <a:srgbClr val="CFD6D9"/>
+                      </a:solidFill>
+                      <a:prstDash val="solid"/>
+                      <a:round/>
+                      <a:headEnd type="none" w="med" len="med"/>
+                      <a:tailEnd type="none" w="med" len="med"/>
+                    </a:lnT>
+                    <a:lnB w="12700" cap="flat" cmpd="sng" algn="ctr">
+                      <a:solidFill>
+                        <a:srgbClr val="CFD6D9"/>
+                      </a:solidFill>
+                      <a:prstDash val="solid"/>
+                      <a:round/>
+                      <a:headEnd type="none" w="med" len="med"/>
+                      <a:tailEnd type="none" w="med" len="med"/>
+                    </a:lnB>
+                  </a:tcPr>
+                </a:tc>
+              </a:tr>
+              <a:tr h="384048">
+                <a:tc>
+                  <a:txBody>
+                    <a:bodyPr/>
+                    <a:lstStyle/>
+                    <a:p>
+                      <a:pPr algn="ctr" indent="0" marL="0">
+                        <a:buNone/>
+                      </a:pPr>
+                      <a:r>
+                        <a:rPr lang="en-US" sz="1300" b="1" dirty="0">
+                          <a:solidFill>
+                            <a:srgbClr val="000000"/>
+                          </a:solidFill>
+                          <a:latin typeface="Calibri" pitchFamily="34" charset="0"/>
+                          <a:ea typeface="Calibri" pitchFamily="34" charset="-122"/>
+                          <a:cs typeface="Calibri" pitchFamily="34" charset="-120"/>
+                        </a:rPr>
+                        <a:t>C5</a:t>
+                      </a:r>
+                      <a:endParaRPr lang="en-US" sz="1300" dirty="0">
+                        <a:latin typeface="Calibri" charset="0"/>
+                        <a:ea typeface="Calibri" charset="0"/>
+                        <a:cs typeface="Calibri" charset="0"/>
+                      </a:endParaRPr>
+                    </a:p>
+                  </a:txBody>
+                  <a:tcPr marL="91440" marR="91440" marT="45720" marB="45720" anchor="ctr">
+                    <a:lnL w="12700" cap="flat" cmpd="sng" algn="ctr">
+                      <a:solidFill>
+                        <a:srgbClr val="CFD6D9"/>
+                      </a:solidFill>
+                      <a:prstDash val="solid"/>
+                      <a:round/>
+                      <a:headEnd type="none" w="med" len="med"/>
+                      <a:tailEnd type="none" w="med" len="med"/>
+                    </a:lnL>
+                    <a:lnR w="12700" cap="flat" cmpd="sng" algn="ctr">
+                      <a:solidFill>
+                        <a:srgbClr val="CFD6D9"/>
+                      </a:solidFill>
+                      <a:prstDash val="solid"/>
+                      <a:round/>
+                      <a:headEnd type="none" w="med" len="med"/>
+                      <a:tailEnd type="none" w="med" len="med"/>
+                    </a:lnR>
+                    <a:lnT w="12700" cap="flat" cmpd="sng" algn="ctr">
+                      <a:solidFill>
+                        <a:srgbClr val="CFD6D9"/>
+                      </a:solidFill>
+                      <a:prstDash val="solid"/>
+                      <a:round/>
+                      <a:headEnd type="none" w="med" len="med"/>
+                      <a:tailEnd type="none" w="med" len="med"/>
+                    </a:lnT>
+                    <a:lnB w="12700" cap="flat" cmpd="sng" algn="ctr">
+                      <a:solidFill>
+                        <a:srgbClr val="CFD6D9"/>
+                      </a:solidFill>
+                      <a:prstDash val="solid"/>
+                      <a:round/>
+                      <a:headEnd type="none" w="med" len="med"/>
+                      <a:tailEnd type="none" w="med" len="med"/>
+                    </a:lnB>
+                  </a:tcPr>
+                </a:tc>
+                <a:tc>
+                  <a:txBody>
+                    <a:bodyPr/>
+                    <a:lstStyle/>
+                    <a:p>
+                      <a:pPr algn="ctr" indent="0" marL="0">
+                        <a:buNone/>
+                      </a:pPr>
+                      <a:r>
+                        <a:rPr lang="en-US" sz="1300" dirty="0">
+                          <a:solidFill>
+                            <a:srgbClr val="000000"/>
+                          </a:solidFill>
+                          <a:latin typeface="Calibri" pitchFamily="34" charset="0"/>
+                          <a:ea typeface="Calibri" pitchFamily="34" charset="-122"/>
+                          <a:cs typeface="Calibri" pitchFamily="34" charset="-120"/>
+                        </a:rPr>
+                        <a:t>42</a:t>
+                      </a:r>
+                      <a:endParaRPr lang="en-US" sz="1300" dirty="0">
+                        <a:latin typeface="Calibri" charset="0"/>
+                        <a:ea typeface="Calibri" charset="0"/>
+                        <a:cs typeface="Calibri" charset="0"/>
+                      </a:endParaRPr>
+                    </a:p>
+                  </a:txBody>
+                  <a:tcPr marL="91440" marR="91440" marT="45720" marB="45720" anchor="ctr">
+                    <a:lnL w="12700" cap="flat" cmpd="sng" algn="ctr">
+                      <a:solidFill>
+                        <a:srgbClr val="CFD6D9"/>
+                      </a:solidFill>
+                      <a:prstDash val="solid"/>
+                      <a:round/>
+                      <a:headEnd type="none" w="med" len="med"/>
+                      <a:tailEnd type="none" w="med" len="med"/>
+                    </a:lnL>
+                    <a:lnR w="12700" cap="flat" cmpd="sng" algn="ctr">
+                      <a:solidFill>
+                        <a:srgbClr val="CFD6D9"/>
+                      </a:solidFill>
+                      <a:prstDash val="solid"/>
+                      <a:round/>
+                      <a:headEnd type="none" w="med" len="med"/>
+                      <a:tailEnd type="none" w="med" len="med"/>
+                    </a:lnR>
+                    <a:lnT w="12700" cap="flat" cmpd="sng" algn="ctr">
+                      <a:solidFill>
+                        <a:srgbClr val="CFD6D9"/>
+                      </a:solidFill>
+                      <a:prstDash val="solid"/>
+                      <a:round/>
+                      <a:headEnd type="none" w="med" len="med"/>
+                      <a:tailEnd type="none" w="med" len="med"/>
+                    </a:lnT>
+                    <a:lnB w="12700" cap="flat" cmpd="sng" algn="ctr">
+                      <a:solidFill>
+                        <a:srgbClr val="CFD6D9"/>
+                      </a:solidFill>
+                      <a:prstDash val="solid"/>
+                      <a:round/>
+                      <a:headEnd type="none" w="med" len="med"/>
+                      <a:tailEnd type="none" w="med" len="med"/>
+                    </a:lnB>
+                  </a:tcPr>
+                </a:tc>
+                <a:tc>
+                  <a:txBody>
+                    <a:bodyPr/>
+                    <a:lstStyle/>
+                    <a:p>
+                      <a:pPr algn="ctr" indent="0" marL="0">
+                        <a:buNone/>
+                      </a:pPr>
+                      <a:r>
+                        <a:rPr lang="en-US" sz="1300" dirty="0">
+                          <a:solidFill>
+                            <a:srgbClr val="000000"/>
+                          </a:solidFill>
+                          <a:latin typeface="Calibri" pitchFamily="34" charset="0"/>
+                          <a:ea typeface="Calibri" pitchFamily="34" charset="-122"/>
+                          <a:cs typeface="Calibri" pitchFamily="34" charset="-120"/>
+                        </a:rPr>
+                        <a:t>39</a:t>
+                      </a:r>
+                      <a:endParaRPr lang="en-US" sz="1300" dirty="0">
+                        <a:latin typeface="Calibri" charset="0"/>
+                        <a:ea typeface="Calibri" charset="0"/>
+                        <a:cs typeface="Calibri" charset="0"/>
+                      </a:endParaRPr>
+                    </a:p>
+                  </a:txBody>
+                  <a:tcPr marL="91440" marR="91440" marT="45720" marB="45720" anchor="ctr">
+                    <a:lnL w="12700" cap="flat" cmpd="sng" algn="ctr">
+                      <a:solidFill>
+                        <a:srgbClr val="CFD6D9"/>
+                      </a:solidFill>
+                      <a:prstDash val="solid"/>
+                      <a:round/>
+                      <a:headEnd type="none" w="med" len="med"/>
+                      <a:tailEnd type="none" w="med" len="med"/>
+                    </a:lnL>
+                    <a:lnR w="12700" cap="flat" cmpd="sng" algn="ctr">
+                      <a:solidFill>
+                        <a:srgbClr val="CFD6D9"/>
+                      </a:solidFill>
+                      <a:prstDash val="solid"/>
+                      <a:round/>
+                      <a:headEnd type="none" w="med" len="med"/>
+                      <a:tailEnd type="none" w="med" len="med"/>
+                    </a:lnR>
+                    <a:lnT w="12700" cap="flat" cmpd="sng" algn="ctr">
+                      <a:solidFill>
+                        <a:srgbClr val="CFD6D9"/>
+                      </a:solidFill>
+                      <a:prstDash val="solid"/>
+                      <a:round/>
+                      <a:headEnd type="none" w="med" len="med"/>
+                      <a:tailEnd type="none" w="med" len="med"/>
+                    </a:lnT>
+                    <a:lnB w="12700" cap="flat" cmpd="sng" algn="ctr">
+                      <a:solidFill>
+                        <a:srgbClr val="CFD6D9"/>
+                      </a:solidFill>
+                      <a:prstDash val="solid"/>
+                      <a:round/>
+                      <a:headEnd type="none" w="med" len="med"/>
+                      <a:tailEnd type="none" w="med" len="med"/>
+                    </a:lnB>
+                  </a:tcPr>
+                </a:tc>
+                <a:tc>
+                  <a:txBody>
+                    <a:bodyPr/>
+                    <a:lstStyle/>
+                    <a:p>
+                      <a:pPr algn="ctr" indent="0" marL="0">
+                        <a:buNone/>
+                      </a:pPr>
+                      <a:r>
+                        <a:rPr lang="en-US" sz="1300" dirty="0">
+                          <a:solidFill>
+                            <a:srgbClr val="000000"/>
+                          </a:solidFill>
+                          <a:latin typeface="Calibri" pitchFamily="34" charset="0"/>
+                          <a:ea typeface="Calibri" pitchFamily="34" charset="-122"/>
+                          <a:cs typeface="Calibri" pitchFamily="34" charset="-120"/>
+                        </a:rPr>
+                        <a:t>40</a:t>
+                      </a:r>
+                      <a:endParaRPr lang="en-US" sz="1300" dirty="0">
+                        <a:latin typeface="Calibri" charset="0"/>
+                        <a:ea typeface="Calibri" charset="0"/>
+                        <a:cs typeface="Calibri" charset="0"/>
+                      </a:endParaRPr>
+                    </a:p>
+                  </a:txBody>
+                  <a:tcPr marL="91440" marR="91440" marT="45720" marB="45720" anchor="ctr">
+                    <a:lnL w="12700" cap="flat" cmpd="sng" algn="ctr">
+                      <a:solidFill>
+                        <a:srgbClr val="CFD6D9"/>
+                      </a:solidFill>
+                      <a:prstDash val="solid"/>
+                      <a:round/>
+                      <a:headEnd type="none" w="med" len="med"/>
+                      <a:tailEnd type="none" w="med" len="med"/>
+                    </a:lnL>
+                    <a:lnR w="12700" cap="flat" cmpd="sng" algn="ctr">
+                      <a:solidFill>
+                        <a:srgbClr val="CFD6D9"/>
+                      </a:solidFill>
+                      <a:prstDash val="solid"/>
+                      <a:round/>
+                      <a:headEnd type="none" w="med" len="med"/>
+                      <a:tailEnd type="none" w="med" len="med"/>
+                    </a:lnR>
+                    <a:lnT w="12700" cap="flat" cmpd="sng" algn="ctr">
+                      <a:solidFill>
+                        <a:srgbClr val="CFD6D9"/>
+                      </a:solidFill>
+                      <a:prstDash val="solid"/>
+                      <a:round/>
+                      <a:headEnd type="none" w="med" len="med"/>
+                      <a:tailEnd type="none" w="med" len="med"/>
+                    </a:lnT>
+                    <a:lnB w="12700" cap="flat" cmpd="sng" algn="ctr">
+                      <a:solidFill>
+                        <a:srgbClr val="CFD6D9"/>
+                      </a:solidFill>
+                      <a:prstDash val="solid"/>
+                      <a:round/>
+                      <a:headEnd type="none" w="med" len="med"/>
+                      <a:tailEnd type="none" w="med" len="med"/>
+                    </a:lnB>
+                  </a:tcPr>
+                </a:tc>
+                <a:tc>
+                  <a:txBody>
+                    <a:bodyPr/>
+                    <a:lstStyle/>
+                    <a:p>
+                      <a:pPr algn="ctr" indent="0" marL="0">
+                        <a:buNone/>
+                      </a:pPr>
+                      <a:r>
+                        <a:rPr lang="en-US" sz="1300" dirty="0">
+                          <a:solidFill>
+                            <a:srgbClr val="000000"/>
+                          </a:solidFill>
+                          <a:latin typeface="Calibri" pitchFamily="34" charset="0"/>
+                          <a:ea typeface="Calibri" pitchFamily="34" charset="-122"/>
+                          <a:cs typeface="Calibri" pitchFamily="34" charset="-120"/>
+                        </a:rPr>
+                        <a:t>75</a:t>
+                      </a:r>
+                      <a:endParaRPr lang="en-US" sz="1300" dirty="0">
+                        <a:latin typeface="Calibri" charset="0"/>
+                        <a:ea typeface="Calibri" charset="0"/>
+                        <a:cs typeface="Calibri" charset="0"/>
+                      </a:endParaRPr>
+                    </a:p>
+                  </a:txBody>
+                  <a:tcPr marL="91440" marR="91440" marT="45720" marB="45720" anchor="ctr">
+                    <a:lnL w="12700" cap="flat" cmpd="sng" algn="ctr">
+                      <a:solidFill>
+                        <a:srgbClr val="CFD6D9"/>
+                      </a:solidFill>
+                      <a:prstDash val="solid"/>
+                      <a:round/>
+                      <a:headEnd type="none" w="med" len="med"/>
+                      <a:tailEnd type="none" w="med" len="med"/>
+                    </a:lnL>
+                    <a:lnR w="12700" cap="flat" cmpd="sng" algn="ctr">
+                      <a:solidFill>
+                        <a:srgbClr val="CFD6D9"/>
+                      </a:solidFill>
+                      <a:prstDash val="solid"/>
+                      <a:round/>
+                      <a:headEnd type="none" w="med" len="med"/>
+                      <a:tailEnd type="none" w="med" len="med"/>
+                    </a:lnR>
+                    <a:lnT w="12700" cap="flat" cmpd="sng" algn="ctr">
+                      <a:solidFill>
+                        <a:srgbClr val="CFD6D9"/>
+                      </a:solidFill>
+                      <a:prstDash val="solid"/>
+                      <a:round/>
+                      <a:headEnd type="none" w="med" len="med"/>
+                      <a:tailEnd type="none" w="med" len="med"/>
+                    </a:lnT>
+                    <a:lnB w="12700" cap="flat" cmpd="sng" algn="ctr">
+                      <a:solidFill>
+                        <a:srgbClr val="CFD6D9"/>
+                      </a:solidFill>
+                      <a:prstDash val="solid"/>
+                      <a:round/>
+                      <a:headEnd type="none" w="med" len="med"/>
+                      <a:tailEnd type="none" w="med" len="med"/>
+                    </a:lnB>
+                  </a:tcPr>
+                </a:tc>
+                <a:tc>
+                  <a:txBody>
+                    <a:bodyPr/>
+                    <a:lstStyle/>
+                    <a:p>
+                      <a:pPr algn="ctr" indent="0" marL="0">
+                        <a:buNone/>
+                      </a:pPr>
+                      <a:r>
+                        <a:rPr lang="en-US" sz="1300" dirty="0">
+                          <a:solidFill>
+                            <a:srgbClr val="000000"/>
+                          </a:solidFill>
+                          <a:latin typeface="Calibri" pitchFamily="34" charset="0"/>
+                          <a:ea typeface="Calibri" pitchFamily="34" charset="-122"/>
+                          <a:cs typeface="Calibri" pitchFamily="34" charset="-120"/>
+                        </a:rPr>
+                        <a:t>75</a:t>
+                      </a:r>
+                      <a:endParaRPr lang="en-US" sz="1300" dirty="0">
+                        <a:latin typeface="Calibri" charset="0"/>
+                        <a:ea typeface="Calibri" charset="0"/>
+                        <a:cs typeface="Calibri" charset="0"/>
+                      </a:endParaRPr>
+                    </a:p>
+                  </a:txBody>
+                  <a:tcPr marL="91440" marR="91440" marT="45720" marB="45720" anchor="ctr">
+                    <a:lnL w="12700" cap="flat" cmpd="sng" algn="ctr">
+                      <a:solidFill>
+                        <a:srgbClr val="CFD6D9"/>
+                      </a:solidFill>
+                      <a:prstDash val="solid"/>
+                      <a:round/>
+                      <a:headEnd type="none" w="med" len="med"/>
+                      <a:tailEnd type="none" w="med" len="med"/>
+                    </a:lnL>
+                    <a:lnR w="12700" cap="flat" cmpd="sng" algn="ctr">
+                      <a:solidFill>
+                        <a:srgbClr val="CFD6D9"/>
+                      </a:solidFill>
+                      <a:prstDash val="solid"/>
+                      <a:round/>
+                      <a:headEnd type="none" w="med" len="med"/>
+                      <a:tailEnd type="none" w="med" len="med"/>
+                    </a:lnR>
+                    <a:lnT w="12700" cap="flat" cmpd="sng" algn="ctr">
+                      <a:solidFill>
+                        <a:srgbClr val="CFD6D9"/>
+                      </a:solidFill>
+                      <a:prstDash val="solid"/>
+                      <a:round/>
+                      <a:headEnd type="none" w="med" len="med"/>
+                      <a:tailEnd type="none" w="med" len="med"/>
+                    </a:lnT>
+                    <a:lnB w="12700" cap="flat" cmpd="sng" algn="ctr">
+                      <a:solidFill>
+                        <a:srgbClr val="CFD6D9"/>
+                      </a:solidFill>
+                      <a:prstDash val="solid"/>
+                      <a:round/>
+                      <a:headEnd type="none" w="med" len="med"/>
+                      <a:tailEnd type="none" w="med" len="med"/>
+                    </a:lnB>
+                  </a:tcPr>
+                </a:tc>
+                <a:tc>
+                  <a:txBody>
+                    <a:bodyPr/>
+                    <a:lstStyle/>
+                    <a:p>
+                      <a:pPr algn="ctr" indent="0" marL="0">
+                        <a:buNone/>
+                      </a:pPr>
+                      <a:r>
+                        <a:rPr lang="en-US" sz="1300" dirty="0">
+                          <a:solidFill>
+                            <a:srgbClr val="000000"/>
+                          </a:solidFill>
+                          <a:latin typeface="Calibri" pitchFamily="34" charset="0"/>
+                          <a:ea typeface="Calibri" pitchFamily="34" charset="-122"/>
+                          <a:cs typeface="Calibri" pitchFamily="34" charset="-120"/>
+                        </a:rPr>
+                        <a:t>74</a:t>
+                      </a:r>
+                      <a:endParaRPr lang="en-US" sz="1300" dirty="0">
+                        <a:latin typeface="Calibri" charset="0"/>
+                        <a:ea typeface="Calibri" charset="0"/>
+                        <a:cs typeface="Calibri" charset="0"/>
+                      </a:endParaRPr>
+                    </a:p>
+                  </a:txBody>
+                  <a:tcPr marL="91440" marR="91440" marT="45720" marB="45720" anchor="ctr">
+                    <a:lnL w="12700" cap="flat" cmpd="sng" algn="ctr">
+                      <a:solidFill>
+                        <a:srgbClr val="CFD6D9"/>
+                      </a:solidFill>
+                      <a:prstDash val="solid"/>
+                      <a:round/>
+                      <a:headEnd type="none" w="med" len="med"/>
+                      <a:tailEnd type="none" w="med" len="med"/>
+                    </a:lnL>
+                    <a:lnR w="12700" cap="flat" cmpd="sng" algn="ctr">
+                      <a:solidFill>
+                        <a:srgbClr val="CFD6D9"/>
+                      </a:solidFill>
+                      <a:prstDash val="solid"/>
+                      <a:round/>
+                      <a:headEnd type="none" w="med" len="med"/>
+                      <a:tailEnd type="none" w="med" len="med"/>
+                    </a:lnR>
+                    <a:lnT w="12700" cap="flat" cmpd="sng" algn="ctr">
+                      <a:solidFill>
+                        <a:srgbClr val="CFD6D9"/>
+                      </a:solidFill>
+                      <a:prstDash val="solid"/>
+                      <a:round/>
+                      <a:headEnd type="none" w="med" len="med"/>
+                      <a:tailEnd type="none" w="med" len="med"/>
+                    </a:lnT>
+                    <a:lnB w="12700" cap="flat" cmpd="sng" algn="ctr">
+                      <a:solidFill>
+                        <a:srgbClr val="CFD6D9"/>
+                      </a:solidFill>
+                      <a:prstDash val="solid"/>
+                      <a:round/>
+                      <a:headEnd type="none" w="med" len="med"/>
+                      <a:tailEnd type="none" w="med" len="med"/>
+                    </a:lnB>
+                  </a:tcPr>
+                </a:tc>
+                <a:tc>
+                  <a:txBody>
+                    <a:bodyPr/>
+                    <a:lstStyle/>
+                    <a:p>
+                      <a:pPr algn="ctr" indent="0" marL="0">
+                        <a:buNone/>
+                      </a:pPr>
+                      <a:r>
+                        <a:rPr lang="en-US" sz="1300" dirty="0">
+                          <a:solidFill>
+                            <a:srgbClr val="000000"/>
+                          </a:solidFill>
+                          <a:latin typeface="Calibri" pitchFamily="34" charset="0"/>
+                          <a:ea typeface="Calibri" pitchFamily="34" charset="-122"/>
+                          <a:cs typeface="Calibri" pitchFamily="34" charset="-120"/>
+                        </a:rPr>
+                        <a:t>2,2</a:t>
+                      </a:r>
+                      <a:endParaRPr lang="en-US" sz="1300" dirty="0">
+                        <a:latin typeface="Calibri" charset="0"/>
+                        <a:ea typeface="Calibri" charset="0"/>
+                        <a:cs typeface="Calibri" charset="0"/>
+                      </a:endParaRPr>
+                    </a:p>
+                  </a:txBody>
+                  <a:tcPr marL="91440" marR="91440" marT="45720" marB="45720" anchor="ctr">
+                    <a:lnL w="12700" cap="flat" cmpd="sng" algn="ctr">
+                      <a:solidFill>
+                        <a:srgbClr val="CFD6D9"/>
+                      </a:solidFill>
+                      <a:prstDash val="solid"/>
+                      <a:round/>
+                      <a:headEnd type="none" w="med" len="med"/>
+                      <a:tailEnd type="none" w="med" len="med"/>
+                    </a:lnL>
+                    <a:lnR w="12700" cap="flat" cmpd="sng" algn="ctr">
+                      <a:solidFill>
+                        <a:srgbClr val="CFD6D9"/>
+                      </a:solidFill>
+                      <a:prstDash val="solid"/>
+                      <a:round/>
+                      <a:headEnd type="none" w="med" len="med"/>
+                      <a:tailEnd type="none" w="med" len="med"/>
+                    </a:lnR>
+                    <a:lnT w="12700" cap="flat" cmpd="sng" algn="ctr">
+                      <a:solidFill>
+                        <a:srgbClr val="CFD6D9"/>
+                      </a:solidFill>
+                      <a:prstDash val="solid"/>
+                      <a:round/>
+                      <a:headEnd type="none" w="med" len="med"/>
+                      <a:tailEnd type="none" w="med" len="med"/>
+                    </a:lnT>
+                    <a:lnB w="12700" cap="flat" cmpd="sng" algn="ctr">
+                      <a:solidFill>
+                        <a:srgbClr val="CFD6D9"/>
+                      </a:solidFill>
+                      <a:prstDash val="solid"/>
+                      <a:round/>
+                      <a:headEnd type="none" w="med" len="med"/>
+                      <a:tailEnd type="none" w="med" len="med"/>
+                    </a:lnB>
+                  </a:tcPr>
+                </a:tc>
+                <a:tc>
+                  <a:txBody>
+                    <a:bodyPr/>
+                    <a:lstStyle/>
+                    <a:p>
+                      <a:pPr algn="ctr" indent="0" marL="0">
+                        <a:buNone/>
+                      </a:pPr>
+                      <a:r>
+                        <a:rPr lang="en-US" sz="1300" dirty="0">
+                          <a:solidFill>
+                            <a:srgbClr val="000000"/>
+                          </a:solidFill>
+                          <a:latin typeface="Calibri" pitchFamily="34" charset="0"/>
+                          <a:ea typeface="Calibri" pitchFamily="34" charset="-122"/>
+                          <a:cs typeface="Calibri" pitchFamily="34" charset="-120"/>
+                        </a:rPr>
+                        <a:t>2,2</a:t>
+                      </a:r>
+                      <a:endParaRPr lang="en-US" sz="1300" dirty="0">
+                        <a:latin typeface="Calibri" charset="0"/>
+                        <a:ea typeface="Calibri" charset="0"/>
+                        <a:cs typeface="Calibri" charset="0"/>
+                      </a:endParaRPr>
+                    </a:p>
+                  </a:txBody>
+                  <a:tcPr marL="91440" marR="91440" marT="45720" marB="45720" anchor="ctr">
+                    <a:lnL w="12700" cap="flat" cmpd="sng" algn="ctr">
+                      <a:solidFill>
+                        <a:srgbClr val="CFD6D9"/>
+                      </a:solidFill>
+                      <a:prstDash val="solid"/>
+                      <a:round/>
+                      <a:headEnd type="none" w="med" len="med"/>
+                      <a:tailEnd type="none" w="med" len="med"/>
+                    </a:lnL>
+                    <a:lnR w="12700" cap="flat" cmpd="sng" algn="ctr">
+                      <a:solidFill>
+                        <a:srgbClr val="CFD6D9"/>
+                      </a:solidFill>
+                      <a:prstDash val="solid"/>
+                      <a:round/>
+                      <a:headEnd type="none" w="med" len="med"/>
+                      <a:tailEnd type="none" w="med" len="med"/>
+                    </a:lnR>
+                    <a:lnT w="12700" cap="flat" cmpd="sng" algn="ctr">
+                      <a:solidFill>
+                        <a:srgbClr val="CFD6D9"/>
+                      </a:solidFill>
+                      <a:prstDash val="solid"/>
+                      <a:round/>
+                      <a:headEnd type="none" w="med" len="med"/>
+                      <a:tailEnd type="none" w="med" len="med"/>
+                    </a:lnT>
+                    <a:lnB w="12700" cap="flat" cmpd="sng" algn="ctr">
+                      <a:solidFill>
+                        <a:srgbClr val="CFD6D9"/>
+                      </a:solidFill>
+                      <a:prstDash val="solid"/>
+                      <a:round/>
+                      <a:headEnd type="none" w="med" len="med"/>
+                      <a:tailEnd type="none" w="med" len="med"/>
+                    </a:lnB>
+                  </a:tcPr>
+                </a:tc>
+                <a:tc>
+                  <a:txBody>
+                    <a:bodyPr/>
+                    <a:lstStyle/>
+                    <a:p>
+                      <a:pPr algn="ctr" indent="0" marL="0">
+                        <a:buNone/>
+                      </a:pPr>
+                      <a:r>
+                        <a:rPr lang="en-US" sz="1300" dirty="0">
+                          <a:solidFill>
+                            <a:srgbClr val="000000"/>
+                          </a:solidFill>
+                          <a:latin typeface="Calibri" pitchFamily="34" charset="0"/>
+                          <a:ea typeface="Calibri" pitchFamily="34" charset="-122"/>
+                          <a:cs typeface="Calibri" pitchFamily="34" charset="-120"/>
+                        </a:rPr>
+                        <a:t>2,1</a:t>
+                      </a:r>
+                      <a:endParaRPr lang="en-US" sz="1300" dirty="0">
+                        <a:latin typeface="Calibri" charset="0"/>
+                        <a:ea typeface="Calibri" charset="0"/>
+                        <a:cs typeface="Calibri" charset="0"/>
+                      </a:endParaRPr>
+                    </a:p>
+                  </a:txBody>
+                  <a:tcPr marL="91440" marR="91440" marT="45720" marB="45720" anchor="ctr">
+                    <a:lnL w="12700" cap="flat" cmpd="sng" algn="ctr">
+                      <a:solidFill>
+                        <a:srgbClr val="CFD6D9"/>
+                      </a:solidFill>
+                      <a:prstDash val="solid"/>
+                      <a:round/>
+                      <a:headEnd type="none" w="med" len="med"/>
+                      <a:tailEnd type="none" w="med" len="med"/>
+                    </a:lnL>
+                    <a:lnR w="12700" cap="flat" cmpd="sng" algn="ctr">
+                      <a:solidFill>
+                        <a:srgbClr val="CFD6D9"/>
+                      </a:solidFill>
+                      <a:prstDash val="solid"/>
+                      <a:round/>
+                      <a:headEnd type="none" w="med" len="med"/>
+                      <a:tailEnd type="none" w="med" len="med"/>
+                    </a:lnR>
+                    <a:lnT w="12700" cap="flat" cmpd="sng" algn="ctr">
+                      <a:solidFill>
+                        <a:srgbClr val="CFD6D9"/>
+                      </a:solidFill>
+                      <a:prstDash val="solid"/>
+                      <a:round/>
+                      <a:headEnd type="none" w="med" len="med"/>
+                      <a:tailEnd type="none" w="med" len="med"/>
+                    </a:lnT>
+                    <a:lnB w="12700" cap="flat" cmpd="sng" algn="ctr">
+                      <a:solidFill>
+                        <a:srgbClr val="CFD6D9"/>
+                      </a:solidFill>
+                      <a:prstDash val="solid"/>
+                      <a:round/>
+                      <a:headEnd type="none" w="med" len="med"/>
+                      <a:tailEnd type="none" w="med" len="med"/>
+                    </a:lnB>
+                  </a:tcPr>
+                </a:tc>
+              </a:tr>
+            </a:tbl>
+          </a:graphicData>
+        </a:graphic>
+      </p:graphicFrame>
+      <p:sp>
+        <p:nvSpPr>
+          <p:cNvPr id="4" name="conv 0"/>
+          <p:cNvSpPr/>
+          <p:nvPr/>
+        </p:nvSpPr>
+        <p:spPr>
+          <a:xfrm>
+            <a:off x="548640" y="4251960"/>
+            <a:ext cx="3474720" cy="1965960"/>
+          </a:xfrm>
+          <a:prstGeom prst="roundRect">
+            <a:avLst>
+              <a:gd name="adj" fmla="val 3721"/>
+            </a:avLst>
+          </a:prstGeom>
+          <a:solidFill>
+            <a:srgbClr val="EEF2F3"/>
+          </a:solidFill>
+          <a:ln w="12700">
+            <a:solidFill>
+              <a:srgbClr val="EEF2F3"/>
+            </a:solidFill>
+            <a:prstDash val="solid"/>
+          </a:ln>
+        </p:spPr>
+      </p:sp>
+      <p:sp>
+        <p:nvSpPr>
+          <p:cNvPr id="5" name="Text 2"/>
+          <p:cNvSpPr txBox="1"/>
+          <p:nvPr/>
+        </p:nvSpPr>
+        <p:spPr>
+          <a:xfrm>
+            <a:off x="777240" y="4343400"/>
+            <a:ext cx="3017520" cy="640080"/>
+          </a:xfrm>
+          <a:prstGeom prst="rect">
+            <a:avLst/>
+          </a:prstGeom>
+          <a:noFill/>
+          <a:ln/>
+        </p:spPr>
+        <p:txBody>
+          <a:bodyPr wrap="square" lIns="0" tIns="0" rIns="0" bIns="0" rtlCol="0" anchor="ctr"/>
+          <a:lstStyle/>
+          <a:p>
+            <a:pPr indent="0" marL="0">
+              <a:buNone/>
+            </a:pPr>
+            <a:r>
+              <a:rPr lang="en-US" sz="3200" b="1" dirty="0">
+                <a:solidFill>
+                  <a:srgbClr val="2E7D7A"/>
+                </a:solidFill>
+                <a:latin typeface="Cambria" pitchFamily="34" charset="0"/>
+                <a:ea typeface="Cambria" pitchFamily="34" charset="-122"/>
+                <a:cs typeface="Cambria" pitchFamily="34" charset="-120"/>
+              </a:rPr>
+              <a:t>2 %</a:t>
+            </a:r>
+            <a:endParaRPr lang="en-US" sz="3200" dirty="0"/>
+          </a:p>
+        </p:txBody>
+      </p:sp>
+      <p:sp>
+        <p:nvSpPr>
+          <p:cNvPr id="6" name="Text 3"/>
+          <p:cNvSpPr txBox="1"/>
+          <p:nvPr/>
+        </p:nvSpPr>
+        <p:spPr>
+          <a:xfrm>
+            <a:off x="777240" y="5029200"/>
+            <a:ext cx="3063240" cy="1143000"/>
+          </a:xfrm>
+          <a:prstGeom prst="rect">
+            <a:avLst/>
+          </a:prstGeom>
+          <a:noFill/>
+          <a:ln/>
+        </p:spPr>
+        <p:txBody>
+          <a:bodyPr wrap="square" lIns="0" tIns="0" rIns="0" bIns="0" rtlCol="0" anchor="t"/>
+          <a:lstStyle/>
+          <a:p>
+            <a:pPr indent="0" marL="0">
+              <a:buNone/>
+            </a:pPr>
+            <a:r>
+              <a:rPr lang="en-US" sz="1300" dirty="0">
+                <a:solidFill>
+                  <a:srgbClr val="1B2A33"/>
+                </a:solidFill>
+                <a:latin typeface="Calibri" pitchFamily="34" charset="0"/>
+                <a:ea typeface="Calibri" pitchFamily="34" charset="-122"/>
+                <a:cs typeface="Calibri" pitchFamily="34" charset="-120"/>
+              </a:rPr>
+              <a:t>cambio máximo de E_app del VOI entre 40³ y 64³: converge razonablemente</a:t>
+            </a:r>
+            <a:endParaRPr lang="en-US" sz="1300" dirty="0"/>
+          </a:p>
+        </p:txBody>
+      </p:sp>
+      <p:sp>
+        <p:nvSpPr>
+          <p:cNvPr id="7" name="conv 1"/>
+          <p:cNvSpPr/>
+          <p:nvPr/>
+        </p:nvSpPr>
+        <p:spPr>
+          <a:xfrm>
+            <a:off x="4297680" y="4251960"/>
+            <a:ext cx="3474720" cy="1965960"/>
+          </a:xfrm>
+          <a:prstGeom prst="roundRect">
+            <a:avLst>
+              <a:gd name="adj" fmla="val 3721"/>
+            </a:avLst>
+          </a:prstGeom>
+          <a:solidFill>
+            <a:srgbClr val="EEF2F3"/>
+          </a:solidFill>
+          <a:ln w="12700">
+            <a:solidFill>
+              <a:srgbClr val="EEF2F3"/>
+            </a:solidFill>
+            <a:prstDash val="solid"/>
+          </a:ln>
+        </p:spPr>
+      </p:sp>
+      <p:sp>
+        <p:nvSpPr>
+          <p:cNvPr id="8" name="Text 5"/>
+          <p:cNvSpPr txBox="1"/>
+          <p:nvPr/>
+        </p:nvSpPr>
+        <p:spPr>
+          <a:xfrm>
+            <a:off x="4526280" y="4343400"/>
+            <a:ext cx="3017520" cy="640080"/>
+          </a:xfrm>
+          <a:prstGeom prst="rect">
+            <a:avLst/>
+          </a:prstGeom>
+          <a:noFill/>
+          <a:ln/>
+        </p:spPr>
+        <p:txBody>
+          <a:bodyPr wrap="square" lIns="0" tIns="0" rIns="0" bIns="0" rtlCol="0" anchor="ctr"/>
+          <a:lstStyle/>
+          <a:p>
+            <a:pPr indent="0" marL="0">
+              <a:buNone/>
+            </a:pPr>
+            <a:r>
+              <a:rPr lang="en-US" sz="3200" b="1" dirty="0">
+                <a:solidFill>
+                  <a:srgbClr val="C8553D"/>
+                </a:solidFill>
+                <a:latin typeface="Cambria" pitchFamily="34" charset="0"/>
+                <a:ea typeface="Cambria" pitchFamily="34" charset="-122"/>
+                <a:cs typeface="Cambria" pitchFamily="34" charset="-120"/>
+              </a:rPr>
+              <a:t>28 %</a:t>
+            </a:r>
+            <a:endParaRPr lang="en-US" sz="3200" dirty="0"/>
+          </a:p>
+        </p:txBody>
+      </p:sp>
+      <p:sp>
+        <p:nvSpPr>
+          <p:cNvPr id="9" name="Text 6"/>
+          <p:cNvSpPr txBox="1"/>
+          <p:nvPr/>
+        </p:nvSpPr>
+        <p:spPr>
+          <a:xfrm>
+            <a:off x="4526280" y="5029200"/>
+            <a:ext cx="3063240" cy="1143000"/>
+          </a:xfrm>
+          <a:prstGeom prst="rect">
+            <a:avLst/>
+          </a:prstGeom>
+          <a:noFill/>
+          <a:ln/>
+        </p:spPr>
+        <p:txBody>
+          <a:bodyPr wrap="square" lIns="0" tIns="0" rIns="0" bIns="0" rtlCol="0" anchor="t"/>
+          <a:lstStyle/>
+          <a:p>
+            <a:pPr indent="0" marL="0">
+              <a:buNone/>
+            </a:pPr>
+            <a:r>
+              <a:rPr lang="en-US" sz="1300" dirty="0">
+                <a:solidFill>
+                  <a:srgbClr val="1B2A33"/>
+                </a:solidFill>
+                <a:latin typeface="Calibri" pitchFamily="34" charset="0"/>
+                <a:ea typeface="Calibri" pitchFamily="34" charset="-122"/>
+                <a:cs typeface="Calibri" pitchFamily="34" charset="-120"/>
+              </a:rPr>
+              <a:t>cambio máximo en el spinodoide: sus puntales finos siguen resolviéndose, la malla no ha convergido</a:t>
+            </a:r>
+            <a:endParaRPr lang="en-US" sz="1300" dirty="0"/>
+          </a:p>
+        </p:txBody>
+      </p:sp>
+      <p:sp>
+        <p:nvSpPr>
+          <p:cNvPr id="10" name="conv 2"/>
+          <p:cNvSpPr/>
+          <p:nvPr/>
+        </p:nvSpPr>
+        <p:spPr>
+          <a:xfrm>
+            <a:off x="8046720" y="4251960"/>
+            <a:ext cx="3474720" cy="1965960"/>
+          </a:xfrm>
+          <a:prstGeom prst="roundRect">
+            <a:avLst>
+              <a:gd name="adj" fmla="val 3721"/>
+            </a:avLst>
+          </a:prstGeom>
+          <a:solidFill>
+            <a:srgbClr val="EEF2F3"/>
+          </a:solidFill>
+          <a:ln w="12700">
+            <a:solidFill>
+              <a:srgbClr val="EEF2F3"/>
+            </a:solidFill>
+            <a:prstDash val="solid"/>
+          </a:ln>
+        </p:spPr>
+      </p:sp>
+      <p:sp>
+        <p:nvSpPr>
+          <p:cNvPr id="11" name="Text 8"/>
+          <p:cNvSpPr txBox="1"/>
+          <p:nvPr/>
+        </p:nvSpPr>
+        <p:spPr>
+          <a:xfrm>
+            <a:off x="8275320" y="4343400"/>
+            <a:ext cx="3017520" cy="640080"/>
+          </a:xfrm>
+          <a:prstGeom prst="rect">
+            <a:avLst/>
+          </a:prstGeom>
+          <a:noFill/>
+          <a:ln/>
+        </p:spPr>
+        <p:txBody>
+          <a:bodyPr wrap="square" lIns="0" tIns="0" rIns="0" bIns="0" rtlCol="0" anchor="ctr"/>
+          <a:lstStyle/>
+          <a:p>
+            <a:pPr indent="0" marL="0">
+              <a:buNone/>
+            </a:pPr>
+            <a:r>
+              <a:rPr lang="en-US" sz="3200" b="1" dirty="0">
+                <a:solidFill>
+                  <a:srgbClr val="2E7D7A"/>
+                </a:solidFill>
+                <a:latin typeface="Cambria" pitchFamily="34" charset="0"/>
+                <a:ea typeface="Cambria" pitchFamily="34" charset="-122"/>
+                <a:cs typeface="Cambria" pitchFamily="34" charset="-120"/>
+              </a:rPr>
+              <a:t>Orden</a:t>
+            </a:r>
+            <a:endParaRPr lang="en-US" sz="3200" dirty="0"/>
+          </a:p>
+        </p:txBody>
+      </p:sp>
+      <p:sp>
+        <p:nvSpPr>
+          <p:cNvPr id="12" name="Text 9"/>
+          <p:cNvSpPr txBox="1"/>
+          <p:nvPr/>
+        </p:nvSpPr>
+        <p:spPr>
+          <a:xfrm>
+            <a:off x="8275320" y="5029200"/>
+            <a:ext cx="3063240" cy="1143000"/>
+          </a:xfrm>
+          <a:prstGeom prst="rect">
+            <a:avLst/>
+          </a:prstGeom>
+          <a:noFill/>
+          <a:ln/>
+        </p:spPr>
+        <p:txBody>
+          <a:bodyPr wrap="square" lIns="0" tIns="0" rIns="0" bIns="0" rtlCol="0" anchor="t"/>
+          <a:lstStyle/>
+          <a:p>
+            <a:pPr indent="0" marL="0">
+              <a:buNone/>
+            </a:pPr>
+            <a:r>
+              <a:rPr lang="en-US" sz="1300" dirty="0">
+                <a:solidFill>
+                  <a:srgbClr val="1B2A33"/>
+                </a:solidFill>
+                <a:latin typeface="Calibri" pitchFamily="34" charset="0"/>
+                <a:ea typeface="Calibri" pitchFamily="34" charset="-122"/>
+                <a:cs typeface="Calibri" pitchFamily="34" charset="-120"/>
+              </a:rPr>
+              <a:t>VOI &gt; dual-lattice &gt; spinodoide se conserva en cada malla (salvo C5, donde dual y spinodoide quedan cercanos)</a:t>
+            </a:r>
+            <a:endParaRPr lang="en-US" sz="1300" dirty="0"/>
+          </a:p>
+        </p:txBody>
+      </p:sp>
+      <p:sp>
+        <p:nvSpPr>
+          <p:cNvPr id="25" name="Slide Number Placeholder 0"/>
+          <p:cNvSpPr>
+            <a:spLocks noGrp="1"/>
+          </p:cNvSpPr>
+          <p:nvPr>
+            <p:ph type="sldNum" sz="quarter" idx="4294967295"/>
+          </p:nvPr>
+        </p:nvSpPr>
+        <p:spPr>
+          <a:xfrm>
+            <a:off x="11155680" y="6419088"/>
+            <a:ext cx="502920" cy="274320"/>
+          </a:xfrm>
+          <a:prstGeom prst="rect">
+            <a:avLst/>
+          </a:prstGeom>
+          <a:extLst>
+            <a:ext uri="{C572A759-6A51-4108-AA02-DFA0A04FC94B}">
+              <ma14:wrappingTextBoxFlag xmlns:ma14="http://schemas.microsoft.com/office/mac/drawingml/2011/main" val="0"/>
+            </a:ext>
+          </a:extLst>
+        </p:spPr>
+        <p:txBody>
+          <a:bodyPr/>
+          <a:lstStyle>
+            <a:lvl1pPr>
+              <a:defRPr sz="1000">
+                <a:solidFill>
+                  <a:srgbClr val="5B6573"/>
+                </a:solidFill>
+                <a:latin typeface="Calibri"/>
+                <a:ea typeface="Calibri"/>
+                <a:cs typeface="Calibri"/>
+              </a:defRPr>
+            </a:lvl1pPr>
+          </a:lstStyle>
+          <a:p>
+            <a:pPr algn="r"/>
+            <a:fld id="{F7021451-1387-4CA6-816F-3879F97B5CBC}" type="slidenum">
+              <a:rPr b="0" lang="en-US"/>
+              <a:t>11</a:t>
+            </a:fld>
+            <a:endParaRPr lang="en-US"/>
+          </a:p>
+        </p:txBody>
+      </p:sp>
+    </p:spTree>
+  </p:cSld>
+  <p:clrMapOvr>
+    <a:masterClrMapping/>
+  </p:clrMapOvr>
+</p:sld>
+</file>
+
+<file path=ppt/slides/slide12.xml><?xml version="1.0" encoding="utf-8"?>
+<p:sld xmlns:a="http://schemas.openxmlformats.org/drawingml/2006/main" xmlns:r="http://schemas.openxmlformats.org/officeDocument/2006/relationships" xmlns:p="http://schemas.openxmlformats.org/presentationml/2006/main">
+  <p:cSld name="Slide 12">
+    <p:spTree>
+      <p:nvGrpSpPr>
+        <p:cNvPr id="1" name=""/>
+        <p:cNvGrpSpPr/>
+        <p:nvPr/>
+      </p:nvGrpSpPr>
+      <p:grpSpPr>
+        <a:xfrm>
+          <a:off x="0" y="0"/>
+          <a:ext cx="0" cy="0"/>
+          <a:chOff x="0" y="0"/>
+          <a:chExt cx="0" cy="0"/>
+        </a:xfrm>
+      </p:grpSpPr>
+      <p:sp>
+        <p:nvSpPr>
+          <p:cNvPr id="2" name="Text 0"/>
+          <p:cNvSpPr/>
+          <p:nvPr>
+            <p:ph idx="100" type="title" hasCustomPrompt="1"/>
+          </p:nvPr>
+        </p:nvSpPr>
+        <p:spPr>
+          <a:xfrm>
+            <a:off x="548640" y="320040"/>
+            <a:ext cx="11064240" cy="868680"/>
+          </a:xfrm>
+          <a:prstGeom prst="rect">
+            <a:avLst/>
+          </a:prstGeom>
+          <a:noFill/>
+          <a:ln/>
+        </p:spPr>
+        <p:txBody>
+          <a:bodyPr wrap="square" lIns="0" tIns="0" rIns="0" bIns="0" rtlCol="0" anchor="ctr"/>
+          <a:lstStyle/>
+          <a:p>
+            <a:pPr algn="l" indent="0" marL="0">
+              <a:buNone/>
+            </a:pPr>
+            <a:r>
+              <a:rPr lang="en-US" sz="3600" b="1" dirty="0">
+                <a:solidFill>
+                  <a:srgbClr val="1F3A44"/>
+                </a:solidFill>
+                <a:latin typeface="Cambria" pitchFamily="34" charset="0"/>
+                <a:ea typeface="Cambria" pitchFamily="34" charset="-122"/>
+                <a:cs typeface="Cambria" pitchFamily="34" charset="-120"/>
+              </a:rPr>
+              <a:t>Sensibilidad a la carga superior</a:t>
+            </a:r>
+            <a:endParaRPr lang="en-US" sz="3600" dirty="0"/>
+          </a:p>
+        </p:txBody>
+      </p:sp>
+      <p:graphicFrame>
+        <p:nvGraphicFramePr>
+          <p:cNvPr id="13" name="Table 0"/>
+          <p:cNvGraphicFramePr>
+            <a:graphicFrameLocks noGrp="1"/>
+          </p:cNvGraphicFramePr>
+          <p:nvPr>
+            <p:extLst>
+              <p:ext uri="{D42A27DB-BD31-4B8C-83A1-F6EECF244321}">
+                <p14:modId xmlns:p14="http://schemas.microsoft.com/office/powerpoint/2010/main" val="1579011935"/>
+              </p:ext>
+            </p:extLst>
+          </p:nvPr>
+        </p:nvGraphicFramePr>
+        <p:xfrm>
+          <a:off x="548640" y="1371600"/>
+          <a:ext cx="11064240" cy="914400"/>
+        </p:xfrm>
+        <a:graphic>
+          <a:graphicData uri="http://schemas.openxmlformats.org/drawingml/2006/table">
+            <a:tbl>
+              <a:tblPr/>
+              <a:tblGrid>
+                <a:gridCol w="4572000"/>
+                <a:gridCol w="2011680"/>
+                <a:gridCol w="2011680"/>
+                <a:gridCol w="2468880"/>
+              </a:tblGrid>
+              <a:tr h="502920">
+                <a:tc>
+                  <a:txBody>
+                    <a:bodyPr/>
+                    <a:lstStyle/>
+                    <a:p>
+                      <a:pPr algn="ctr" indent="0" marL="0">
+                        <a:buNone/>
+                      </a:pPr>
+                      <a:r>
+                        <a:rPr lang="en-US" sz="1300" b="1" dirty="0">
+                          <a:solidFill>
+                            <a:srgbClr val="FFFFFF"/>
+                          </a:solidFill>
+                          <a:latin typeface="Calibri" pitchFamily="34" charset="0"/>
+                          <a:ea typeface="Calibri" pitchFamily="34" charset="-122"/>
+                          <a:cs typeface="Calibri" pitchFamily="34" charset="-120"/>
+                        </a:rPr>
+                        <a:t>Protocolo de carga en la cima</a:t>
+                      </a:r>
+                      <a:endParaRPr lang="en-US" sz="1300" dirty="0">
+                        <a:latin typeface="Calibri" charset="0"/>
+                        <a:ea typeface="Calibri" charset="0"/>
+                        <a:cs typeface="Calibri" charset="0"/>
+                      </a:endParaRPr>
+                    </a:p>
+                  </a:txBody>
+                  <a:tcPr marL="91440" marR="91440" marT="45720" marB="45720" anchor="ctr">
+                    <a:lnL w="12700" cap="flat" cmpd="sng" algn="ctr">
+                      <a:solidFill>
+                        <a:srgbClr val="CFD6D9"/>
+                      </a:solidFill>
+                      <a:prstDash val="solid"/>
+                      <a:round/>
+                      <a:headEnd type="none" w="med" len="med"/>
+                      <a:tailEnd type="none" w="med" len="med"/>
+                    </a:lnL>
+                    <a:lnR w="12700" cap="flat" cmpd="sng" algn="ctr">
+                      <a:solidFill>
+                        <a:srgbClr val="CFD6D9"/>
+                      </a:solidFill>
+                      <a:prstDash val="solid"/>
+                      <a:round/>
+                      <a:headEnd type="none" w="med" len="med"/>
+                      <a:tailEnd type="none" w="med" len="med"/>
+                    </a:lnR>
+                    <a:lnT w="12700" cap="flat" cmpd="sng" algn="ctr">
+                      <a:solidFill>
+                        <a:srgbClr val="CFD6D9"/>
+                      </a:solidFill>
+                      <a:prstDash val="solid"/>
+                      <a:round/>
+                      <a:headEnd type="none" w="med" len="med"/>
+                      <a:tailEnd type="none" w="med" len="med"/>
+                    </a:lnT>
+                    <a:lnB w="12700" cap="flat" cmpd="sng" algn="ctr">
+                      <a:solidFill>
+                        <a:srgbClr val="CFD6D9"/>
+                      </a:solidFill>
+                      <a:prstDash val="solid"/>
+                      <a:round/>
+                      <a:headEnd type="none" w="med" len="med"/>
+                      <a:tailEnd type="none" w="med" len="med"/>
+                    </a:lnB>
+                    <a:solidFill>
+                      <a:srgbClr val="1F3A44"/>
+                    </a:solidFill>
+                  </a:tcPr>
+                </a:tc>
+                <a:tc>
+                  <a:txBody>
+                    <a:bodyPr/>
+                    <a:lstStyle/>
+                    <a:p>
+                      <a:pPr algn="ctr" indent="0" marL="0">
+                        <a:buNone/>
+                      </a:pPr>
+                      <a:r>
+                        <a:rPr lang="en-US" sz="1300" b="1" dirty="0">
+                          <a:solidFill>
+                            <a:srgbClr val="FFFFFF"/>
+                          </a:solidFill>
+                          <a:latin typeface="Calibri" pitchFamily="34" charset="0"/>
+                          <a:ea typeface="Calibri" pitchFamily="34" charset="-122"/>
+                          <a:cs typeface="Calibri" pitchFamily="34" charset="-120"/>
+                        </a:rPr>
+                        <a:t>Spinodoide / VOI [%]</a:t>
+                      </a:r>
+                      <a:endParaRPr lang="en-US" sz="1300" dirty="0">
+                        <a:latin typeface="Calibri" charset="0"/>
+                        <a:ea typeface="Calibri" charset="0"/>
+                        <a:cs typeface="Calibri" charset="0"/>
+                      </a:endParaRPr>
+                    </a:p>
+                  </a:txBody>
+                  <a:tcPr marL="91440" marR="91440" marT="45720" marB="45720" anchor="ctr">
+                    <a:lnL w="12700" cap="flat" cmpd="sng" algn="ctr">
+                      <a:solidFill>
+                        <a:srgbClr val="CFD6D9"/>
+                      </a:solidFill>
+                      <a:prstDash val="solid"/>
+                      <a:round/>
+                      <a:headEnd type="none" w="med" len="med"/>
+                      <a:tailEnd type="none" w="med" len="med"/>
+                    </a:lnL>
+                    <a:lnR w="12700" cap="flat" cmpd="sng" algn="ctr">
+                      <a:solidFill>
+                        <a:srgbClr val="CFD6D9"/>
+                      </a:solidFill>
+                      <a:prstDash val="solid"/>
+                      <a:round/>
+                      <a:headEnd type="none" w="med" len="med"/>
+                      <a:tailEnd type="none" w="med" len="med"/>
+                    </a:lnR>
+                    <a:lnT w="12700" cap="flat" cmpd="sng" algn="ctr">
+                      <a:solidFill>
+                        <a:srgbClr val="CFD6D9"/>
+                      </a:solidFill>
+                      <a:prstDash val="solid"/>
+                      <a:round/>
+                      <a:headEnd type="none" w="med" len="med"/>
+                      <a:tailEnd type="none" w="med" len="med"/>
+                    </a:lnT>
+                    <a:lnB w="12700" cap="flat" cmpd="sng" algn="ctr">
+                      <a:solidFill>
+                        <a:srgbClr val="CFD6D9"/>
+                      </a:solidFill>
+                      <a:prstDash val="solid"/>
+                      <a:round/>
+                      <a:headEnd type="none" w="med" len="med"/>
+                      <a:tailEnd type="none" w="med" len="med"/>
+                    </a:lnB>
+                    <a:solidFill>
+                      <a:srgbClr val="1F3A44"/>
+                    </a:solidFill>
+                  </a:tcPr>
+                </a:tc>
+                <a:tc>
+                  <a:txBody>
+                    <a:bodyPr/>
+                    <a:lstStyle/>
+                    <a:p>
+                      <a:pPr algn="ctr" indent="0" marL="0">
+                        <a:buNone/>
+                      </a:pPr>
+                      <a:r>
+                        <a:rPr lang="en-US" sz="1300" b="1" dirty="0">
+                          <a:solidFill>
+                            <a:srgbClr val="FFFFFF"/>
+                          </a:solidFill>
+                          <a:latin typeface="Calibri" pitchFamily="34" charset="0"/>
+                          <a:ea typeface="Calibri" pitchFamily="34" charset="-122"/>
+                          <a:cs typeface="Calibri" pitchFamily="34" charset="-120"/>
+                        </a:rPr>
+                        <a:t>Dual-lattice / VOI [%]</a:t>
+                      </a:r>
+                      <a:endParaRPr lang="en-US" sz="1300" dirty="0">
+                        <a:latin typeface="Calibri" charset="0"/>
+                        <a:ea typeface="Calibri" charset="0"/>
+                        <a:cs typeface="Calibri" charset="0"/>
+                      </a:endParaRPr>
+                    </a:p>
+                  </a:txBody>
+                  <a:tcPr marL="91440" marR="91440" marT="45720" marB="45720" anchor="ctr">
+                    <a:lnL w="12700" cap="flat" cmpd="sng" algn="ctr">
+                      <a:solidFill>
+                        <a:srgbClr val="CFD6D9"/>
+                      </a:solidFill>
+                      <a:prstDash val="solid"/>
+                      <a:round/>
+                      <a:headEnd type="none" w="med" len="med"/>
+                      <a:tailEnd type="none" w="med" len="med"/>
+                    </a:lnL>
+                    <a:lnR w="12700" cap="flat" cmpd="sng" algn="ctr">
+                      <a:solidFill>
+                        <a:srgbClr val="CFD6D9"/>
+                      </a:solidFill>
+                      <a:prstDash val="solid"/>
+                      <a:round/>
+                      <a:headEnd type="none" w="med" len="med"/>
+                      <a:tailEnd type="none" w="med" len="med"/>
+                    </a:lnR>
+                    <a:lnT w="12700" cap="flat" cmpd="sng" algn="ctr">
+                      <a:solidFill>
+                        <a:srgbClr val="CFD6D9"/>
+                      </a:solidFill>
+                      <a:prstDash val="solid"/>
+                      <a:round/>
+                      <a:headEnd type="none" w="med" len="med"/>
+                      <a:tailEnd type="none" w="med" len="med"/>
+                    </a:lnT>
+                    <a:lnB w="12700" cap="flat" cmpd="sng" algn="ctr">
+                      <a:solidFill>
+                        <a:srgbClr val="CFD6D9"/>
+                      </a:solidFill>
+                      <a:prstDash val="solid"/>
+                      <a:round/>
+                      <a:headEnd type="none" w="med" len="med"/>
+                      <a:tailEnd type="none" w="med" len="med"/>
+                    </a:lnB>
+                    <a:solidFill>
+                      <a:srgbClr val="1F3A44"/>
+                    </a:solidFill>
+                  </a:tcPr>
+                </a:tc>
+                <a:tc>
+                  <a:txBody>
+                    <a:bodyPr/>
+                    <a:lstStyle/>
+                    <a:p>
+                      <a:pPr algn="ctr" indent="0" marL="0">
+                        <a:buNone/>
+                      </a:pPr>
+                      <a:r>
+                        <a:rPr lang="en-US" sz="1300" b="1" dirty="0">
+                          <a:solidFill>
+                            <a:srgbClr val="FFFFFF"/>
+                          </a:solidFill>
+                          <a:latin typeface="Calibri" pitchFamily="34" charset="0"/>
+                          <a:ea typeface="Calibri" pitchFamily="34" charset="-122"/>
+                          <a:cs typeface="Calibri" pitchFamily="34" charset="-120"/>
+                        </a:rPr>
+                        <a:t>E_app VOI, cambio frente a presión [%]</a:t>
+                      </a:r>
+                      <a:endParaRPr lang="en-US" sz="1300" dirty="0">
+                        <a:latin typeface="Calibri" charset="0"/>
+                        <a:ea typeface="Calibri" charset="0"/>
+                        <a:cs typeface="Calibri" charset="0"/>
+                      </a:endParaRPr>
+                    </a:p>
+                  </a:txBody>
+                  <a:tcPr marL="91440" marR="91440" marT="45720" marB="45720" anchor="ctr">
+                    <a:lnL w="12700" cap="flat" cmpd="sng" algn="ctr">
+                      <a:solidFill>
+                        <a:srgbClr val="CFD6D9"/>
+                      </a:solidFill>
+                      <a:prstDash val="solid"/>
+                      <a:round/>
+                      <a:headEnd type="none" w="med" len="med"/>
+                      <a:tailEnd type="none" w="med" len="med"/>
+                    </a:lnL>
+                    <a:lnR w="12700" cap="flat" cmpd="sng" algn="ctr">
+                      <a:solidFill>
+                        <a:srgbClr val="CFD6D9"/>
+                      </a:solidFill>
+                      <a:prstDash val="solid"/>
+                      <a:round/>
+                      <a:headEnd type="none" w="med" len="med"/>
+                      <a:tailEnd type="none" w="med" len="med"/>
+                    </a:lnR>
+                    <a:lnT w="12700" cap="flat" cmpd="sng" algn="ctr">
+                      <a:solidFill>
+                        <a:srgbClr val="CFD6D9"/>
+                      </a:solidFill>
+                      <a:prstDash val="solid"/>
+                      <a:round/>
+                      <a:headEnd type="none" w="med" len="med"/>
+                      <a:tailEnd type="none" w="med" len="med"/>
+                    </a:lnT>
+                    <a:lnB w="12700" cap="flat" cmpd="sng" algn="ctr">
+                      <a:solidFill>
+                        <a:srgbClr val="CFD6D9"/>
+                      </a:solidFill>
+                      <a:prstDash val="solid"/>
+                      <a:round/>
+                      <a:headEnd type="none" w="med" len="med"/>
+                      <a:tailEnd type="none" w="med" len="med"/>
+                    </a:lnB>
+                    <a:solidFill>
+                      <a:srgbClr val="1F3A44"/>
+                    </a:solidFill>
+                  </a:tcPr>
+                </a:tc>
+              </a:tr>
+              <a:tr h="457200">
+                <a:tc>
+                  <a:txBody>
+                    <a:bodyPr/>
+                    <a:lstStyle/>
+                    <a:p>
+                      <a:pPr algn="l" indent="0" marL="0">
+                        <a:buNone/>
+                      </a:pPr>
+                      <a:r>
+                        <a:rPr lang="en-US" sz="1400" b="1" dirty="0">
+                          <a:solidFill>
+                            <a:srgbClr val="000000"/>
+                          </a:solidFill>
+                          <a:latin typeface="Calibri" pitchFamily="34" charset="0"/>
+                          <a:ea typeface="Calibri" pitchFamily="34" charset="-122"/>
+                          <a:cs typeface="Calibri" pitchFamily="34" charset="-120"/>
+                        </a:rPr>
+                        <a:t>Presión sobre las caras óseas (el aquí usado)</a:t>
+                      </a:r>
+                      <a:endParaRPr lang="en-US" sz="1400" dirty="0">
+                        <a:latin typeface="Calibri" charset="0"/>
+                        <a:ea typeface="Calibri" charset="0"/>
+                        <a:cs typeface="Calibri" charset="0"/>
+                      </a:endParaRPr>
+                    </a:p>
+                  </a:txBody>
+                  <a:tcPr marL="91440" marR="91440" marT="45720" marB="45720" anchor="ctr">
+                    <a:lnL w="12700" cap="flat" cmpd="sng" algn="ctr">
+                      <a:solidFill>
+                        <a:srgbClr val="CFD6D9"/>
+                      </a:solidFill>
+                      <a:prstDash val="solid"/>
+                      <a:round/>
+                      <a:headEnd type="none" w="med" len="med"/>
+                      <a:tailEnd type="none" w="med" len="med"/>
+                    </a:lnL>
+                    <a:lnR w="12700" cap="flat" cmpd="sng" algn="ctr">
+                      <a:solidFill>
+                        <a:srgbClr val="CFD6D9"/>
+                      </a:solidFill>
+                      <a:prstDash val="solid"/>
+                      <a:round/>
+                      <a:headEnd type="none" w="med" len="med"/>
+                      <a:tailEnd type="none" w="med" len="med"/>
+                    </a:lnR>
+                    <a:lnT w="12700" cap="flat" cmpd="sng" algn="ctr">
+                      <a:solidFill>
+                        <a:srgbClr val="CFD6D9"/>
+                      </a:solidFill>
+                      <a:prstDash val="solid"/>
+                      <a:round/>
+                      <a:headEnd type="none" w="med" len="med"/>
+                      <a:tailEnd type="none" w="med" len="med"/>
+                    </a:lnT>
+                    <a:lnB w="12700" cap="flat" cmpd="sng" algn="ctr">
+                      <a:solidFill>
+                        <a:srgbClr val="CFD6D9"/>
+                      </a:solidFill>
+                      <a:prstDash val="solid"/>
+                      <a:round/>
+                      <a:headEnd type="none" w="med" len="med"/>
+                      <a:tailEnd type="none" w="med" len="med"/>
+                    </a:lnB>
+                  </a:tcPr>
+                </a:tc>
+                <a:tc>
+                  <a:txBody>
+                    <a:bodyPr/>
+                    <a:lstStyle/>
+                    <a:p>
+                      <a:pPr algn="ctr" indent="0" marL="0">
+                        <a:buNone/>
+                      </a:pPr>
+                      <a:r>
+                        <a:rPr lang="en-US" sz="1400" dirty="0">
+                          <a:solidFill>
+                            <a:srgbClr val="000000"/>
+                          </a:solidFill>
+                          <a:latin typeface="Calibri" pitchFamily="34" charset="0"/>
+                          <a:ea typeface="Calibri" pitchFamily="34" charset="-122"/>
+                          <a:cs typeface="Calibri" pitchFamily="34" charset="-120"/>
+                        </a:rPr>
+                        <a:t>18 a 42</a:t>
+                      </a:r>
+                      <a:endParaRPr lang="en-US" sz="1400" dirty="0">
+                        <a:latin typeface="Calibri" charset="0"/>
+                        <a:ea typeface="Calibri" charset="0"/>
+                        <a:cs typeface="Calibri" charset="0"/>
+                      </a:endParaRPr>
+                    </a:p>
+                  </a:txBody>
+                  <a:tcPr marL="91440" marR="91440" marT="45720" marB="45720" anchor="ctr">
+                    <a:lnL w="12700" cap="flat" cmpd="sng" algn="ctr">
+                      <a:solidFill>
+                        <a:srgbClr val="CFD6D9"/>
+                      </a:solidFill>
+                      <a:prstDash val="solid"/>
+                      <a:round/>
+                      <a:headEnd type="none" w="med" len="med"/>
+                      <a:tailEnd type="none" w="med" len="med"/>
+                    </a:lnL>
+                    <a:lnR w="12700" cap="flat" cmpd="sng" algn="ctr">
+                      <a:solidFill>
+                        <a:srgbClr val="CFD6D9"/>
+                      </a:solidFill>
+                      <a:prstDash val="solid"/>
+                      <a:round/>
+                      <a:headEnd type="none" w="med" len="med"/>
+                      <a:tailEnd type="none" w="med" len="med"/>
+                    </a:lnR>
+                    <a:lnT w="12700" cap="flat" cmpd="sng" algn="ctr">
+                      <a:solidFill>
+                        <a:srgbClr val="CFD6D9"/>
+                      </a:solidFill>
+                      <a:prstDash val="solid"/>
+                      <a:round/>
+                      <a:headEnd type="none" w="med" len="med"/>
+                      <a:tailEnd type="none" w="med" len="med"/>
+                    </a:lnT>
+                    <a:lnB w="12700" cap="flat" cmpd="sng" algn="ctr">
+                      <a:solidFill>
+                        <a:srgbClr val="CFD6D9"/>
+                      </a:solidFill>
+                      <a:prstDash val="solid"/>
+                      <a:round/>
+                      <a:headEnd type="none" w="med" len="med"/>
+                      <a:tailEnd type="none" w="med" len="med"/>
+                    </a:lnB>
+                  </a:tcPr>
+                </a:tc>
+                <a:tc>
+                  <a:txBody>
+                    <a:bodyPr/>
+                    <a:lstStyle/>
+                    <a:p>
+                      <a:pPr algn="ctr" indent="0" marL="0">
+                        <a:buNone/>
+                      </a:pPr>
+                      <a:r>
+                        <a:rPr lang="en-US" sz="1400" dirty="0">
+                          <a:solidFill>
+                            <a:srgbClr val="000000"/>
+                          </a:solidFill>
+                          <a:latin typeface="Calibri" pitchFamily="34" charset="0"/>
+                          <a:ea typeface="Calibri" pitchFamily="34" charset="-122"/>
+                          <a:cs typeface="Calibri" pitchFamily="34" charset="-120"/>
+                        </a:rPr>
+                        <a:t>69 a 80</a:t>
+                      </a:r>
+                      <a:endParaRPr lang="en-US" sz="1400" dirty="0">
+                        <a:latin typeface="Calibri" charset="0"/>
+                        <a:ea typeface="Calibri" charset="0"/>
+                        <a:cs typeface="Calibri" charset="0"/>
+                      </a:endParaRPr>
+                    </a:p>
+                  </a:txBody>
+                  <a:tcPr marL="91440" marR="91440" marT="45720" marB="45720" anchor="ctr">
+                    <a:lnL w="12700" cap="flat" cmpd="sng" algn="ctr">
+                      <a:solidFill>
+                        <a:srgbClr val="CFD6D9"/>
+                      </a:solidFill>
+                      <a:prstDash val="solid"/>
+                      <a:round/>
+                      <a:headEnd type="none" w="med" len="med"/>
+                      <a:tailEnd type="none" w="med" len="med"/>
+                    </a:lnL>
+                    <a:lnR w="12700" cap="flat" cmpd="sng" algn="ctr">
+                      <a:solidFill>
+                        <a:srgbClr val="CFD6D9"/>
+                      </a:solidFill>
+                      <a:prstDash val="solid"/>
+                      <a:round/>
+                      <a:headEnd type="none" w="med" len="med"/>
+                      <a:tailEnd type="none" w="med" len="med"/>
+                    </a:lnR>
+                    <a:lnT w="12700" cap="flat" cmpd="sng" algn="ctr">
+                      <a:solidFill>
+                        <a:srgbClr val="CFD6D9"/>
+                      </a:solidFill>
+                      <a:prstDash val="solid"/>
+                      <a:round/>
+                      <a:headEnd type="none" w="med" len="med"/>
+                      <a:tailEnd type="none" w="med" len="med"/>
+                    </a:lnT>
+                    <a:lnB w="12700" cap="flat" cmpd="sng" algn="ctr">
+                      <a:solidFill>
+                        <a:srgbClr val="CFD6D9"/>
+                      </a:solidFill>
+                      <a:prstDash val="solid"/>
+                      <a:round/>
+                      <a:headEnd type="none" w="med" len="med"/>
+                      <a:tailEnd type="none" w="med" len="med"/>
+                    </a:lnB>
+                  </a:tcPr>
+                </a:tc>
+                <a:tc>
+                  <a:txBody>
+                    <a:bodyPr/>
+                    <a:lstStyle/>
+                    <a:p>
+                      <a:pPr algn="ctr" indent="0" marL="0">
+                        <a:buNone/>
+                      </a:pPr>
+                      <a:r>
+                        <a:rPr lang="en-US" sz="1400" dirty="0">
+                          <a:solidFill>
+                            <a:srgbClr val="000000"/>
+                          </a:solidFill>
+                          <a:latin typeface="Calibri" pitchFamily="34" charset="0"/>
+                          <a:ea typeface="Calibri" pitchFamily="34" charset="-122"/>
+                          <a:cs typeface="Calibri" pitchFamily="34" charset="-120"/>
+                        </a:rPr>
+                        <a:t>0</a:t>
+                      </a:r>
+                      <a:endParaRPr lang="en-US" sz="1400" dirty="0">
+                        <a:latin typeface="Calibri" charset="0"/>
+                        <a:ea typeface="Calibri" charset="0"/>
+                        <a:cs typeface="Calibri" charset="0"/>
+                      </a:endParaRPr>
+                    </a:p>
+                  </a:txBody>
+                  <a:tcPr marL="91440" marR="91440" marT="45720" marB="45720" anchor="ctr">
+                    <a:lnL w="12700" cap="flat" cmpd="sng" algn="ctr">
+                      <a:solidFill>
+                        <a:srgbClr val="CFD6D9"/>
+                      </a:solidFill>
+                      <a:prstDash val="solid"/>
+                      <a:round/>
+                      <a:headEnd type="none" w="med" len="med"/>
+                      <a:tailEnd type="none" w="med" len="med"/>
+                    </a:lnL>
+                    <a:lnR w="12700" cap="flat" cmpd="sng" algn="ctr">
+                      <a:solidFill>
+                        <a:srgbClr val="CFD6D9"/>
+                      </a:solidFill>
+                      <a:prstDash val="solid"/>
+                      <a:round/>
+                      <a:headEnd type="none" w="med" len="med"/>
+                      <a:tailEnd type="none" w="med" len="med"/>
+                    </a:lnR>
+                    <a:lnT w="12700" cap="flat" cmpd="sng" algn="ctr">
+                      <a:solidFill>
+                        <a:srgbClr val="CFD6D9"/>
+                      </a:solidFill>
+                      <a:prstDash val="solid"/>
+                      <a:round/>
+                      <a:headEnd type="none" w="med" len="med"/>
+                      <a:tailEnd type="none" w="med" len="med"/>
+                    </a:lnT>
+                    <a:lnB w="12700" cap="flat" cmpd="sng" algn="ctr">
+                      <a:solidFill>
+                        <a:srgbClr val="CFD6D9"/>
+                      </a:solidFill>
+                      <a:prstDash val="solid"/>
+                      <a:round/>
+                      <a:headEnd type="none" w="med" len="med"/>
+                      <a:tailEnd type="none" w="med" len="med"/>
+                    </a:lnB>
+                  </a:tcPr>
+                </a:tc>
+              </a:tr>
+              <a:tr h="457200">
+                <a:tc>
+                  <a:txBody>
+                    <a:bodyPr/>
+                    <a:lstStyle/>
+                    <a:p>
+                      <a:pPr algn="l" indent="0" marL="0">
+                        <a:buNone/>
+                      </a:pPr>
+                      <a:r>
+                        <a:rPr lang="en-US" sz="1400" b="1" dirty="0">
+                          <a:solidFill>
+                            <a:srgbClr val="000000"/>
+                          </a:solidFill>
+                          <a:latin typeface="Calibri" pitchFamily="34" charset="0"/>
+                          <a:ea typeface="Calibri" pitchFamily="34" charset="-122"/>
+                          <a:cs typeface="Calibri" pitchFamily="34" charset="-120"/>
+                        </a:rPr>
+                        <a:t>Plato rígido (uz uniforme en la cima)</a:t>
+                      </a:r>
+                      <a:endParaRPr lang="en-US" sz="1400" dirty="0">
+                        <a:latin typeface="Calibri" charset="0"/>
+                        <a:ea typeface="Calibri" charset="0"/>
+                        <a:cs typeface="Calibri" charset="0"/>
+                      </a:endParaRPr>
+                    </a:p>
+                  </a:txBody>
+                  <a:tcPr marL="91440" marR="91440" marT="45720" marB="45720" anchor="ctr">
+                    <a:lnL w="12700" cap="flat" cmpd="sng" algn="ctr">
+                      <a:solidFill>
+                        <a:srgbClr val="CFD6D9"/>
+                      </a:solidFill>
+                      <a:prstDash val="solid"/>
+                      <a:round/>
+                      <a:headEnd type="none" w="med" len="med"/>
+                      <a:tailEnd type="none" w="med" len="med"/>
+                    </a:lnL>
+                    <a:lnR w="12700" cap="flat" cmpd="sng" algn="ctr">
+                      <a:solidFill>
+                        <a:srgbClr val="CFD6D9"/>
+                      </a:solidFill>
+                      <a:prstDash val="solid"/>
+                      <a:round/>
+                      <a:headEnd type="none" w="med" len="med"/>
+                      <a:tailEnd type="none" w="med" len="med"/>
+                    </a:lnR>
+                    <a:lnT w="12700" cap="flat" cmpd="sng" algn="ctr">
+                      <a:solidFill>
+                        <a:srgbClr val="CFD6D9"/>
+                      </a:solidFill>
+                      <a:prstDash val="solid"/>
+                      <a:round/>
+                      <a:headEnd type="none" w="med" len="med"/>
+                      <a:tailEnd type="none" w="med" len="med"/>
+                    </a:lnT>
+                    <a:lnB w="12700" cap="flat" cmpd="sng" algn="ctr">
+                      <a:solidFill>
+                        <a:srgbClr val="CFD6D9"/>
+                      </a:solidFill>
+                      <a:prstDash val="solid"/>
+                      <a:round/>
+                      <a:headEnd type="none" w="med" len="med"/>
+                      <a:tailEnd type="none" w="med" len="med"/>
+                    </a:lnB>
+                  </a:tcPr>
+                </a:tc>
+                <a:tc>
+                  <a:txBody>
+                    <a:bodyPr/>
+                    <a:lstStyle/>
+                    <a:p>
+                      <a:pPr algn="ctr" indent="0" marL="0">
+                        <a:buNone/>
+                      </a:pPr>
+                      <a:r>
+                        <a:rPr lang="en-US" sz="1400" dirty="0">
+                          <a:solidFill>
+                            <a:srgbClr val="000000"/>
+                          </a:solidFill>
+                          <a:latin typeface="Calibri" pitchFamily="34" charset="0"/>
+                          <a:ea typeface="Calibri" pitchFamily="34" charset="-122"/>
+                          <a:cs typeface="Calibri" pitchFamily="34" charset="-120"/>
+                        </a:rPr>
+                        <a:t>28 a 66</a:t>
+                      </a:r>
+                      <a:endParaRPr lang="en-US" sz="1400" dirty="0">
+                        <a:latin typeface="Calibri" charset="0"/>
+                        <a:ea typeface="Calibri" charset="0"/>
+                        <a:cs typeface="Calibri" charset="0"/>
+                      </a:endParaRPr>
+                    </a:p>
+                  </a:txBody>
+                  <a:tcPr marL="91440" marR="91440" marT="45720" marB="45720" anchor="ctr">
+                    <a:lnL w="12700" cap="flat" cmpd="sng" algn="ctr">
+                      <a:solidFill>
+                        <a:srgbClr val="CFD6D9"/>
+                      </a:solidFill>
+                      <a:prstDash val="solid"/>
+                      <a:round/>
+                      <a:headEnd type="none" w="med" len="med"/>
+                      <a:tailEnd type="none" w="med" len="med"/>
+                    </a:lnL>
+                    <a:lnR w="12700" cap="flat" cmpd="sng" algn="ctr">
+                      <a:solidFill>
+                        <a:srgbClr val="CFD6D9"/>
+                      </a:solidFill>
+                      <a:prstDash val="solid"/>
+                      <a:round/>
+                      <a:headEnd type="none" w="med" len="med"/>
+                      <a:tailEnd type="none" w="med" len="med"/>
+                    </a:lnR>
+                    <a:lnT w="12700" cap="flat" cmpd="sng" algn="ctr">
+                      <a:solidFill>
+                        <a:srgbClr val="CFD6D9"/>
+                      </a:solidFill>
+                      <a:prstDash val="solid"/>
+                      <a:round/>
+                      <a:headEnd type="none" w="med" len="med"/>
+                      <a:tailEnd type="none" w="med" len="med"/>
+                    </a:lnT>
+                    <a:lnB w="12700" cap="flat" cmpd="sng" algn="ctr">
+                      <a:solidFill>
+                        <a:srgbClr val="CFD6D9"/>
+                      </a:solidFill>
+                      <a:prstDash val="solid"/>
+                      <a:round/>
+                      <a:headEnd type="none" w="med" len="med"/>
+                      <a:tailEnd type="none" w="med" len="med"/>
+                    </a:lnB>
+                  </a:tcPr>
+                </a:tc>
+                <a:tc>
+                  <a:txBody>
+                    <a:bodyPr/>
+                    <a:lstStyle/>
+                    <a:p>
+                      <a:pPr algn="ctr" indent="0" marL="0">
+                        <a:buNone/>
+                      </a:pPr>
+                      <a:r>
+                        <a:rPr lang="en-US" sz="1400" dirty="0">
+                          <a:solidFill>
+                            <a:srgbClr val="000000"/>
+                          </a:solidFill>
+                          <a:latin typeface="Calibri" pitchFamily="34" charset="0"/>
+                          <a:ea typeface="Calibri" pitchFamily="34" charset="-122"/>
+                          <a:cs typeface="Calibri" pitchFamily="34" charset="-120"/>
+                        </a:rPr>
+                        <a:t>77 a 85</a:t>
+                      </a:r>
+                      <a:endParaRPr lang="en-US" sz="1400" dirty="0">
+                        <a:latin typeface="Calibri" charset="0"/>
+                        <a:ea typeface="Calibri" charset="0"/>
+                        <a:cs typeface="Calibri" charset="0"/>
+                      </a:endParaRPr>
+                    </a:p>
+                  </a:txBody>
+                  <a:tcPr marL="91440" marR="91440" marT="45720" marB="45720" anchor="ctr">
+                    <a:lnL w="12700" cap="flat" cmpd="sng" algn="ctr">
+                      <a:solidFill>
+                        <a:srgbClr val="CFD6D9"/>
+                      </a:solidFill>
+                      <a:prstDash val="solid"/>
+                      <a:round/>
+                      <a:headEnd type="none" w="med" len="med"/>
+                      <a:tailEnd type="none" w="med" len="med"/>
+                    </a:lnL>
+                    <a:lnR w="12700" cap="flat" cmpd="sng" algn="ctr">
+                      <a:solidFill>
+                        <a:srgbClr val="CFD6D9"/>
+                      </a:solidFill>
+                      <a:prstDash val="solid"/>
+                      <a:round/>
+                      <a:headEnd type="none" w="med" len="med"/>
+                      <a:tailEnd type="none" w="med" len="med"/>
+                    </a:lnR>
+                    <a:lnT w="12700" cap="flat" cmpd="sng" algn="ctr">
+                      <a:solidFill>
+                        <a:srgbClr val="CFD6D9"/>
+                      </a:solidFill>
+                      <a:prstDash val="solid"/>
+                      <a:round/>
+                      <a:headEnd type="none" w="med" len="med"/>
+                      <a:tailEnd type="none" w="med" len="med"/>
+                    </a:lnT>
+                    <a:lnB w="12700" cap="flat" cmpd="sng" algn="ctr">
+                      <a:solidFill>
+                        <a:srgbClr val="CFD6D9"/>
+                      </a:solidFill>
+                      <a:prstDash val="solid"/>
+                      <a:round/>
+                      <a:headEnd type="none" w="med" len="med"/>
+                      <a:tailEnd type="none" w="med" len="med"/>
+                    </a:lnB>
+                  </a:tcPr>
+                </a:tc>
+                <a:tc>
+                  <a:txBody>
+                    <a:bodyPr/>
+                    <a:lstStyle/>
+                    <a:p>
+                      <a:pPr algn="ctr" indent="0" marL="0">
+                        <a:buNone/>
+                      </a:pPr>
+                      <a:r>
+                        <a:rPr lang="en-US" sz="1400" dirty="0">
+                          <a:solidFill>
+                            <a:srgbClr val="000000"/>
+                          </a:solidFill>
+                          <a:latin typeface="Calibri" pitchFamily="34" charset="0"/>
+                          <a:ea typeface="Calibri" pitchFamily="34" charset="-122"/>
+                          <a:cs typeface="Calibri" pitchFamily="34" charset="-120"/>
+                        </a:rPr>
+                        <a:t>+5 a 22</a:t>
+                      </a:r>
+                      <a:endParaRPr lang="en-US" sz="1400" dirty="0">
+                        <a:latin typeface="Calibri" charset="0"/>
+                        <a:ea typeface="Calibri" charset="0"/>
+                        <a:cs typeface="Calibri" charset="0"/>
+                      </a:endParaRPr>
+                    </a:p>
+                  </a:txBody>
+                  <a:tcPr marL="91440" marR="91440" marT="45720" marB="45720" anchor="ctr">
+                    <a:lnL w="12700" cap="flat" cmpd="sng" algn="ctr">
+                      <a:solidFill>
+                        <a:srgbClr val="CFD6D9"/>
+                      </a:solidFill>
+                      <a:prstDash val="solid"/>
+                      <a:round/>
+                      <a:headEnd type="none" w="med" len="med"/>
+                      <a:tailEnd type="none" w="med" len="med"/>
+                    </a:lnL>
+                    <a:lnR w="12700" cap="flat" cmpd="sng" algn="ctr">
+                      <a:solidFill>
+                        <a:srgbClr val="CFD6D9"/>
+                      </a:solidFill>
+                      <a:prstDash val="solid"/>
+                      <a:round/>
+                      <a:headEnd type="none" w="med" len="med"/>
+                      <a:tailEnd type="none" w="med" len="med"/>
+                    </a:lnR>
+                    <a:lnT w="12700" cap="flat" cmpd="sng" algn="ctr">
+                      <a:solidFill>
+                        <a:srgbClr val="CFD6D9"/>
+                      </a:solidFill>
+                      <a:prstDash val="solid"/>
+                      <a:round/>
+                      <a:headEnd type="none" w="med" len="med"/>
+                      <a:tailEnd type="none" w="med" len="med"/>
+                    </a:lnT>
+                    <a:lnB w="12700" cap="flat" cmpd="sng" algn="ctr">
+                      <a:solidFill>
+                        <a:srgbClr val="CFD6D9"/>
+                      </a:solidFill>
+                      <a:prstDash val="solid"/>
+                      <a:round/>
+                      <a:headEnd type="none" w="med" len="med"/>
+                      <a:tailEnd type="none" w="med" len="med"/>
+                    </a:lnB>
+                  </a:tcPr>
+                </a:tc>
+              </a:tr>
+              <a:tr h="457200">
+                <a:tc>
+                  <a:txBody>
+                    <a:bodyPr/>
+                    <a:lstStyle/>
+                    <a:p>
+                      <a:pPr algn="l" indent="0" marL="0">
+                        <a:buNone/>
+                      </a:pPr>
+                      <a:r>
+                        <a:rPr lang="en-US" sz="1400" b="1" dirty="0">
+                          <a:solidFill>
+                            <a:srgbClr val="000000"/>
+                          </a:solidFill>
+                          <a:latin typeface="Calibri" pitchFamily="34" charset="0"/>
+                          <a:ea typeface="Calibri" pitchFamily="34" charset="-122"/>
+                          <a:cs typeface="Calibri" pitchFamily="34" charset="-120"/>
+                        </a:rPr>
+                        <a:t>Plato rígido, módulo del núcleo corregido</a:t>
+                      </a:r>
+                      <a:endParaRPr lang="en-US" sz="1400" dirty="0">
+                        <a:latin typeface="Calibri" charset="0"/>
+                        <a:ea typeface="Calibri" charset="0"/>
+                        <a:cs typeface="Calibri" charset="0"/>
+                      </a:endParaRPr>
+                    </a:p>
+                  </a:txBody>
+                  <a:tcPr marL="91440" marR="91440" marT="45720" marB="45720" anchor="ctr">
+                    <a:lnL w="12700" cap="flat" cmpd="sng" algn="ctr">
+                      <a:solidFill>
+                        <a:srgbClr val="CFD6D9"/>
+                      </a:solidFill>
+                      <a:prstDash val="solid"/>
+                      <a:round/>
+                      <a:headEnd type="none" w="med" len="med"/>
+                      <a:tailEnd type="none" w="med" len="med"/>
+                    </a:lnL>
+                    <a:lnR w="12700" cap="flat" cmpd="sng" algn="ctr">
+                      <a:solidFill>
+                        <a:srgbClr val="CFD6D9"/>
+                      </a:solidFill>
+                      <a:prstDash val="solid"/>
+                      <a:round/>
+                      <a:headEnd type="none" w="med" len="med"/>
+                      <a:tailEnd type="none" w="med" len="med"/>
+                    </a:lnR>
+                    <a:lnT w="12700" cap="flat" cmpd="sng" algn="ctr">
+                      <a:solidFill>
+                        <a:srgbClr val="CFD6D9"/>
+                      </a:solidFill>
+                      <a:prstDash val="solid"/>
+                      <a:round/>
+                      <a:headEnd type="none" w="med" len="med"/>
+                      <a:tailEnd type="none" w="med" len="med"/>
+                    </a:lnT>
+                    <a:lnB w="12700" cap="flat" cmpd="sng" algn="ctr">
+                      <a:solidFill>
+                        <a:srgbClr val="CFD6D9"/>
+                      </a:solidFill>
+                      <a:prstDash val="solid"/>
+                      <a:round/>
+                      <a:headEnd type="none" w="med" len="med"/>
+                      <a:tailEnd type="none" w="med" len="med"/>
+                    </a:lnB>
+                  </a:tcPr>
+                </a:tc>
+                <a:tc>
+                  <a:txBody>
+                    <a:bodyPr/>
+                    <a:lstStyle/>
+                    <a:p>
+                      <a:pPr algn="ctr" indent="0" marL="0">
+                        <a:buNone/>
+                      </a:pPr>
+                      <a:r>
+                        <a:rPr lang="en-US" sz="1400" dirty="0">
+                          <a:solidFill>
+                            <a:srgbClr val="000000"/>
+                          </a:solidFill>
+                          <a:latin typeface="Calibri" pitchFamily="34" charset="0"/>
+                          <a:ea typeface="Calibri" pitchFamily="34" charset="-122"/>
+                          <a:cs typeface="Calibri" pitchFamily="34" charset="-120"/>
+                        </a:rPr>
+                        <a:t>28 a 79</a:t>
+                      </a:r>
+                      <a:endParaRPr lang="en-US" sz="1400" dirty="0">
+                        <a:latin typeface="Calibri" charset="0"/>
+                        <a:ea typeface="Calibri" charset="0"/>
+                        <a:cs typeface="Calibri" charset="0"/>
+                      </a:endParaRPr>
+                    </a:p>
+                  </a:txBody>
+                  <a:tcPr marL="91440" marR="91440" marT="45720" marB="45720" anchor="ctr">
+                    <a:lnL w="12700" cap="flat" cmpd="sng" algn="ctr">
+                      <a:solidFill>
+                        <a:srgbClr val="CFD6D9"/>
+                      </a:solidFill>
+                      <a:prstDash val="solid"/>
+                      <a:round/>
+                      <a:headEnd type="none" w="med" len="med"/>
+                      <a:tailEnd type="none" w="med" len="med"/>
+                    </a:lnL>
+                    <a:lnR w="12700" cap="flat" cmpd="sng" algn="ctr">
+                      <a:solidFill>
+                        <a:srgbClr val="CFD6D9"/>
+                      </a:solidFill>
+                      <a:prstDash val="solid"/>
+                      <a:round/>
+                      <a:headEnd type="none" w="med" len="med"/>
+                      <a:tailEnd type="none" w="med" len="med"/>
+                    </a:lnR>
+                    <a:lnT w="12700" cap="flat" cmpd="sng" algn="ctr">
+                      <a:solidFill>
+                        <a:srgbClr val="CFD6D9"/>
+                      </a:solidFill>
+                      <a:prstDash val="solid"/>
+                      <a:round/>
+                      <a:headEnd type="none" w="med" len="med"/>
+                      <a:tailEnd type="none" w="med" len="med"/>
+                    </a:lnT>
+                    <a:lnB w="12700" cap="flat" cmpd="sng" algn="ctr">
+                      <a:solidFill>
+                        <a:srgbClr val="CFD6D9"/>
+                      </a:solidFill>
+                      <a:prstDash val="solid"/>
+                      <a:round/>
+                      <a:headEnd type="none" w="med" len="med"/>
+                      <a:tailEnd type="none" w="med" len="med"/>
+                    </a:lnB>
+                  </a:tcPr>
+                </a:tc>
+                <a:tc>
+                  <a:txBody>
+                    <a:bodyPr/>
+                    <a:lstStyle/>
+                    <a:p>
+                      <a:pPr algn="ctr" indent="0" marL="0">
+                        <a:buNone/>
+                      </a:pPr>
+                      <a:r>
+                        <a:rPr lang="en-US" sz="1400" dirty="0">
+                          <a:solidFill>
+                            <a:srgbClr val="000000"/>
+                          </a:solidFill>
+                          <a:latin typeface="Calibri" pitchFamily="34" charset="0"/>
+                          <a:ea typeface="Calibri" pitchFamily="34" charset="-122"/>
+                          <a:cs typeface="Calibri" pitchFamily="34" charset="-120"/>
+                        </a:rPr>
+                        <a:t>79 a 95</a:t>
+                      </a:r>
+                      <a:endParaRPr lang="en-US" sz="1400" dirty="0">
+                        <a:latin typeface="Calibri" charset="0"/>
+                        <a:ea typeface="Calibri" charset="0"/>
+                        <a:cs typeface="Calibri" charset="0"/>
+                      </a:endParaRPr>
+                    </a:p>
+                  </a:txBody>
+                  <a:tcPr marL="91440" marR="91440" marT="45720" marB="45720" anchor="ctr">
+                    <a:lnL w="12700" cap="flat" cmpd="sng" algn="ctr">
+                      <a:solidFill>
+                        <a:srgbClr val="CFD6D9"/>
+                      </a:solidFill>
+                      <a:prstDash val="solid"/>
+                      <a:round/>
+                      <a:headEnd type="none" w="med" len="med"/>
+                      <a:tailEnd type="none" w="med" len="med"/>
+                    </a:lnL>
+                    <a:lnR w="12700" cap="flat" cmpd="sng" algn="ctr">
+                      <a:solidFill>
+                        <a:srgbClr val="CFD6D9"/>
+                      </a:solidFill>
+                      <a:prstDash val="solid"/>
+                      <a:round/>
+                      <a:headEnd type="none" w="med" len="med"/>
+                      <a:tailEnd type="none" w="med" len="med"/>
+                    </a:lnR>
+                    <a:lnT w="12700" cap="flat" cmpd="sng" algn="ctr">
+                      <a:solidFill>
+                        <a:srgbClr val="CFD6D9"/>
+                      </a:solidFill>
+                      <a:prstDash val="solid"/>
+                      <a:round/>
+                      <a:headEnd type="none" w="med" len="med"/>
+                      <a:tailEnd type="none" w="med" len="med"/>
+                    </a:lnT>
+                    <a:lnB w="12700" cap="flat" cmpd="sng" algn="ctr">
+                      <a:solidFill>
+                        <a:srgbClr val="CFD6D9"/>
+                      </a:solidFill>
+                      <a:prstDash val="solid"/>
+                      <a:round/>
+                      <a:headEnd type="none" w="med" len="med"/>
+                      <a:tailEnd type="none" w="med" len="med"/>
+                    </a:lnB>
+                  </a:tcPr>
+                </a:tc>
+                <a:tc>
+                  <a:txBody>
+                    <a:bodyPr/>
+                    <a:lstStyle/>
+                    <a:p>
+                      <a:pPr algn="ctr" indent="0" marL="0">
+                        <a:buNone/>
+                      </a:pPr>
+                      <a:r>
+                        <a:rPr lang="en-US" sz="1400" dirty="0">
+                          <a:solidFill>
+                            <a:srgbClr val="000000"/>
+                          </a:solidFill>
+                          <a:latin typeface="Calibri" pitchFamily="34" charset="0"/>
+                          <a:ea typeface="Calibri" pitchFamily="34" charset="-122"/>
+                          <a:cs typeface="Calibri" pitchFamily="34" charset="-120"/>
+                        </a:rPr>
+                        <a:t>+5 a 25</a:t>
+                      </a:r>
+                      <a:endParaRPr lang="en-US" sz="1400" dirty="0">
+                        <a:latin typeface="Calibri" charset="0"/>
+                        <a:ea typeface="Calibri" charset="0"/>
+                        <a:cs typeface="Calibri" charset="0"/>
+                      </a:endParaRPr>
+                    </a:p>
+                  </a:txBody>
+                  <a:tcPr marL="91440" marR="91440" marT="45720" marB="45720" anchor="ctr">
+                    <a:lnL w="12700" cap="flat" cmpd="sng" algn="ctr">
+                      <a:solidFill>
+                        <a:srgbClr val="CFD6D9"/>
+                      </a:solidFill>
+                      <a:prstDash val="solid"/>
+                      <a:round/>
+                      <a:headEnd type="none" w="med" len="med"/>
+                      <a:tailEnd type="none" w="med" len="med"/>
+                    </a:lnL>
+                    <a:lnR w="12700" cap="flat" cmpd="sng" algn="ctr">
+                      <a:solidFill>
+                        <a:srgbClr val="CFD6D9"/>
+                      </a:solidFill>
+                      <a:prstDash val="solid"/>
+                      <a:round/>
+                      <a:headEnd type="none" w="med" len="med"/>
+                      <a:tailEnd type="none" w="med" len="med"/>
+                    </a:lnR>
+                    <a:lnT w="12700" cap="flat" cmpd="sng" algn="ctr">
+                      <a:solidFill>
+                        <a:srgbClr val="CFD6D9"/>
+                      </a:solidFill>
+                      <a:prstDash val="solid"/>
+                      <a:round/>
+                      <a:headEnd type="none" w="med" len="med"/>
+                      <a:tailEnd type="none" w="med" len="med"/>
+                    </a:lnT>
+                    <a:lnB w="12700" cap="flat" cmpd="sng" algn="ctr">
+                      <a:solidFill>
+                        <a:srgbClr val="CFD6D9"/>
+                      </a:solidFill>
+                      <a:prstDash val="solid"/>
+                      <a:round/>
+                      <a:headEnd type="none" w="med" len="med"/>
+                      <a:tailEnd type="none" w="med" len="med"/>
+                    </a:lnB>
+                  </a:tcPr>
+                </a:tc>
+              </a:tr>
+            </a:tbl>
+          </a:graphicData>
+        </a:graphic>
+      </p:graphicFrame>
+      <p:sp>
+        <p:nvSpPr>
+          <p:cNvPr id="4" name="Text 1"/>
+          <p:cNvSpPr txBox="1"/>
+          <p:nvPr/>
+        </p:nvSpPr>
+        <p:spPr>
+          <a:xfrm>
+            <a:off x="548640" y="3520440"/>
+            <a:ext cx="11064240" cy="2743200"/>
+          </a:xfrm>
+          <a:prstGeom prst="rect">
+            <a:avLst/>
+          </a:prstGeom>
+          <a:noFill/>
+          <a:ln/>
+        </p:spPr>
+        <p:txBody>
+          <a:bodyPr wrap="square" lIns="0" tIns="0" rIns="0" bIns="0" rtlCol="0" anchor="t"/>
+          <a:lstStyle/>
+          <a:p>
+            <a:pPr marL="342900" indent="-342900">
+              <a:spcAft>
+                <a:spcPts val="800"/>
+              </a:spcAft>
+              <a:buSzPct val="100000"/>
+              <a:buChar char="•"/>
+            </a:pPr>
+            <a:r>
+              <a:rPr lang="en-US" sz="1600" dirty="0">
+                <a:solidFill>
+                  <a:srgbClr val="1B2A33"/>
+                </a:solidFill>
+                <a:latin typeface="Calibri" pitchFamily="34" charset="0"/>
+                <a:ea typeface="Calibri" pitchFamily="34" charset="-122"/>
+                <a:cs typeface="Calibri" pitchFamily="34" charset="-120"/>
+              </a:rPr>
+              <a:t>Solo 26 a 42 % de la sección de la cima es hueso: la presión local sobre el hueso vale 26 a 43 veces 11,1 MPa (26,3 a 42,6 MPa).</a:t>
+            </a:r>
+            <a:endParaRPr lang="en-US" sz="1600" dirty="0"/>
+          </a:p>
+          <a:p>
+            <a:pPr marL="342900" indent="-342900">
+              <a:spcAft>
+                <a:spcPts val="800"/>
+              </a:spcAft>
+              <a:buSzPct val="100000"/>
+              <a:buChar char="•"/>
+            </a:pPr>
+            <a:r>
+              <a:rPr lang="en-US" sz="1600" dirty="0">
+                <a:solidFill>
+                  <a:srgbClr val="1B2A33"/>
+                </a:solidFill>
+                <a:latin typeface="Calibri" pitchFamily="34" charset="0"/>
+                <a:ea typeface="Calibri" pitchFamily="34" charset="-122"/>
+                <a:cs typeface="Calibri" pitchFamily="34" charset="-120"/>
+              </a:rPr>
+              <a:t>El resultado depende de cómo se aplique la carga: cambia el nivel absoluto y también la razón entre estructuras.</a:t>
+            </a:r>
+            <a:endParaRPr lang="en-US" sz="1600" dirty="0"/>
+          </a:p>
+          <a:p>
+            <a:pPr marL="342900" indent="-342900">
+              <a:spcAft>
+                <a:spcPts val="800"/>
+              </a:spcAft>
+              <a:buSzPct val="100000"/>
+              <a:buChar char="•"/>
+            </a:pPr>
+            <a:r>
+              <a:rPr lang="en-US" sz="1600" dirty="0">
+                <a:solidFill>
+                  <a:srgbClr val="1B2A33"/>
+                </a:solidFill>
+                <a:latin typeface="Calibri" pitchFamily="34" charset="0"/>
+                <a:ea typeface="Calibri" pitchFamily="34" charset="-122"/>
+                <a:cs typeface="Calibri" pitchFamily="34" charset="-120"/>
+              </a:rPr>
+              <a:t>El orden VOI &gt; dual-lattice &gt; spinodoide se mantiene en los tres esquemas, salvo C5 con el módulo corregido, donde dual-lattice y spinodoide empatan (79 %).</a:t>
+            </a:r>
+            <a:endParaRPr lang="en-US" sz="1600" dirty="0"/>
+          </a:p>
+          <a:p>
+            <a:pPr marL="342900" indent="-342900">
+              <a:spcAft>
+                <a:spcPts val="800"/>
+              </a:spcAft>
+              <a:buSzPct val="100000"/>
+              <a:buChar char="•"/>
+            </a:pPr>
+            <a:r>
+              <a:rPr lang="en-US" sz="1600" dirty="0">
+                <a:solidFill>
+                  <a:srgbClr val="1B2A33"/>
+                </a:solidFill>
+                <a:latin typeface="Calibri" pitchFamily="34" charset="0"/>
+                <a:ea typeface="Calibri" pitchFamily="34" charset="-122"/>
+                <a:cs typeface="Calibri" pitchFamily="34" charset="-120"/>
+              </a:rPr>
+              <a:t>El protocolo original de Tapia et al. (2026) no está replicado al detalle (elemento, malla y contacto), por lo que no se comparan cifras absolutas.</a:t>
+            </a:r>
+            <a:endParaRPr lang="en-US" sz="1600" dirty="0"/>
+          </a:p>
+        </p:txBody>
+      </p:sp>
+      <p:sp>
+        <p:nvSpPr>
+          <p:cNvPr id="25" name="Slide Number Placeholder 0"/>
+          <p:cNvSpPr>
+            <a:spLocks noGrp="1"/>
+          </p:cNvSpPr>
+          <p:nvPr>
+            <p:ph type="sldNum" sz="quarter" idx="4294967295"/>
+          </p:nvPr>
+        </p:nvSpPr>
+        <p:spPr>
+          <a:xfrm>
+            <a:off x="11155680" y="6419088"/>
+            <a:ext cx="502920" cy="274320"/>
+          </a:xfrm>
+          <a:prstGeom prst="rect">
+            <a:avLst/>
+          </a:prstGeom>
+          <a:extLst>
+            <a:ext uri="{C572A759-6A51-4108-AA02-DFA0A04FC94B}">
+              <ma14:wrappingTextBoxFlag xmlns:ma14="http://schemas.microsoft.com/office/mac/drawingml/2011/main" val="0"/>
+            </a:ext>
+          </a:extLst>
+        </p:spPr>
+        <p:txBody>
+          <a:bodyPr/>
+          <a:lstStyle>
+            <a:lvl1pPr>
+              <a:defRPr sz="1000">
+                <a:solidFill>
+                  <a:srgbClr val="5B6573"/>
+                </a:solidFill>
+                <a:latin typeface="Calibri"/>
+                <a:ea typeface="Calibri"/>
+                <a:cs typeface="Calibri"/>
+              </a:defRPr>
+            </a:lvl1pPr>
+          </a:lstStyle>
+          <a:p>
+            <a:pPr algn="r"/>
+            <a:fld id="{F7021451-1387-4CA6-816F-3879F97B5CBC}" type="slidenum">
+              <a:rPr b="0" lang="en-US"/>
+              <a:t>12</a:t>
+            </a:fld>
+            <a:endParaRPr lang="en-US"/>
+          </a:p>
+        </p:txBody>
+      </p:sp>
+    </p:spTree>
+  </p:cSld>
+  <p:clrMapOvr>
+    <a:masterClrMapping/>
+  </p:clrMapOvr>
+</p:sld>
+</file>
+
+<file path=ppt/slides/slide13.xml><?xml version="1.0" encoding="utf-8"?>
+<p:sld xmlns:a="http://schemas.openxmlformats.org/drawingml/2006/main" xmlns:r="http://schemas.openxmlformats.org/officeDocument/2006/relationships" xmlns:p="http://schemas.openxmlformats.org/presentationml/2006/main">
+  <p:cSld name="Slide 13">
     <p:spTree>
       <p:nvGrpSpPr>
         <p:cNvPr id="1" name=""/>
@@ -3721,7 +9914,7 @@
         <p:spPr>
           <a:xfrm>
             <a:off x="822960" y="2103120"/>
-            <a:ext cx="4937760" cy="3931920"/>
+            <a:ext cx="4937760" cy="3383280"/>
           </a:xfrm>
           <a:prstGeom prst="rect">
             <a:avLst/>
@@ -3735,13 +9928,13 @@
           <a:p>
             <a:pPr marL="342900" indent="-342900">
               <a:spcAft>
-                <a:spcPts val="1200"/>
+                <a:spcPts val="1000"/>
               </a:spcAft>
               <a:buSzPct val="100000"/>
               <a:buChar char="•"/>
             </a:pPr>
             <a:r>
-              <a:rPr lang="en-US" sz="1800" dirty="0">
+              <a:rPr lang="en-US" sz="1600" dirty="0">
                 <a:solidFill>
                   <a:srgbClr val="1B2A33"/>
                 </a:solidFill>
@@ -3749,20 +9942,20 @@
                 <a:ea typeface="Calibri" pitchFamily="34" charset="-122"/>
                 <a:cs typeface="Calibri" pitchFamily="34" charset="-120"/>
               </a:rPr>
-              <a:t>Bajo la misma carga, el spinodoide conserva 18 a 42 % de la rigidez del VOI y su p99 de von Mises es 1,8 a 3,1 veces mayor.</a:t>
+              <a:t>A 40³ y con esta carga, el spinodoide conserva 18 a 42 % de la rigidez del VOI y su p99 de von Mises es 1,8 a 3,1 veces mayor.</a:t>
             </a:r>
-            <a:endParaRPr lang="en-US" sz="1800" dirty="0"/>
+            <a:endParaRPr lang="en-US" sz="1600" dirty="0"/>
           </a:p>
           <a:p>
             <a:pPr marL="342900" indent="-342900">
               <a:spcAft>
-                <a:spcPts val="1200"/>
+                <a:spcPts val="1000"/>
               </a:spcAft>
               <a:buSzPct val="100000"/>
               <a:buChar char="•"/>
             </a:pPr>
             <a:r>
-              <a:rPr lang="en-US" sz="1800" dirty="0">
+              <a:rPr lang="en-US" sz="1600" dirty="0">
                 <a:solidFill>
                   <a:srgbClr val="1B2A33"/>
                 </a:solidFill>
@@ -3772,18 +9965,18 @@
               </a:rPr>
               <a:t>El dual-lattice conserva 69 a 80 % y 1,2 a 1,4 veces.</a:t>
             </a:r>
-            <a:endParaRPr lang="en-US" sz="1800" dirty="0"/>
+            <a:endParaRPr lang="en-US" sz="1600" dirty="0"/>
           </a:p>
           <a:p>
             <a:pPr marL="342900" indent="-342900">
               <a:spcAft>
-                <a:spcPts val="1200"/>
+                <a:spcPts val="1000"/>
               </a:spcAft>
               <a:buSzPct val="100000"/>
               <a:buChar char="•"/>
             </a:pPr>
             <a:r>
-              <a:rPr lang="en-US" sz="1800" dirty="0">
+              <a:rPr lang="en-US" sz="1600" dirty="0">
                 <a:solidFill>
                   <a:srgbClr val="1B2A33"/>
                 </a:solidFill>
@@ -3791,9 +9984,9 @@
                 <a:ea typeface="Calibri" pitchFamily="34" charset="-122"/>
                 <a:cs typeface="Calibri" pitchFamily="34" charset="-120"/>
               </a:rPr>
-              <a:t>La formulación se verificó con un cubo y un prisma macizos: 114 pruebas con respuesta exacta pasan.</a:t>
+              <a:t>La formulación se verificó con cubo, prisma y columnas macizos: 131 pruebas con respuesta exacta pasan.</a:t>
             </a:r>
-            <a:endParaRPr lang="en-US" sz="1800" dirty="0"/>
+            <a:endParaRPr lang="en-US" sz="1600" dirty="0"/>
           </a:p>
         </p:txBody>
       </p:sp>
@@ -3872,7 +10065,7 @@
         <p:spPr>
           <a:xfrm>
             <a:off x="6446520" y="2103120"/>
-            <a:ext cx="4937760" cy="3931920"/>
+            <a:ext cx="4937760" cy="3383280"/>
           </a:xfrm>
           <a:prstGeom prst="rect">
             <a:avLst/>
@@ -3886,13 +10079,13 @@
           <a:p>
             <a:pPr marL="342900" indent="-342900">
               <a:spcAft>
-                <a:spcPts val="1200"/>
+                <a:spcPts val="1000"/>
               </a:spcAft>
               <a:buSzPct val="100000"/>
               <a:buChar char="•"/>
             </a:pPr>
             <a:r>
-              <a:rPr lang="en-US" sz="1800" dirty="0">
+              <a:rPr lang="en-US" sz="1600" dirty="0">
                 <a:solidFill>
                   <a:srgbClr val="1B2A33"/>
                 </a:solidFill>
@@ -3900,20 +10093,20 @@
                 <a:ea typeface="Calibri" pitchFamily="34" charset="-122"/>
                 <a:cs typeface="Calibri" pitchFamily="34" charset="-120"/>
               </a:rPr>
-              <a:t>La base empotrada rigidiza (3,1 % en el cubo) y su von Mises máximo no converge: se cita el p99.</a:t>
+              <a:t>Los resultados a 40³ no están convergidos con la malla, sobre todo los spinodoides; las razones dependen de la resolución y de la carga superior.</a:t>
             </a:r>
-            <a:endParaRPr lang="en-US" sz="1800" dirty="0"/>
+            <a:endParaRPr lang="en-US" sz="1600" dirty="0"/>
           </a:p>
           <a:p>
             <a:pPr marL="342900" indent="-342900">
               <a:spcAft>
-                <a:spcPts val="1200"/>
+                <a:spcPts val="1000"/>
               </a:spcAft>
               <a:buSzPct val="100000"/>
               <a:buChar char="•"/>
             </a:pPr>
             <a:r>
-              <a:rPr lang="en-US" sz="1800" dirty="0">
+              <a:rPr lang="en-US" sz="1600" dirty="0">
                 <a:solidFill>
                   <a:srgbClr val="1B2A33"/>
                 </a:solidFill>
@@ -3921,20 +10114,20 @@
                 <a:ea typeface="Calibri" pitchFamily="34" charset="-122"/>
                 <a:cs typeface="Calibri" pitchFamily="34" charset="-120"/>
               </a:rPr>
-              <a:t>En C3 spinodoide |u| llega a 0,75 mm (25 % del lado): la hipótesis de pequeñas deformaciones no vale.</a:t>
+              <a:t>El p99 supera 126 MPa (0,7 % de deformación crítica de Pistoia con E = 18 GPa) en 6 de las 15 estructuras: la hipótesis lineal es discutible.</a:t>
             </a:r>
-            <a:endParaRPr lang="en-US" sz="1800" dirty="0"/>
+            <a:endParaRPr lang="en-US" sz="1600" dirty="0"/>
           </a:p>
           <a:p>
             <a:pPr marL="342900" indent="-342900">
               <a:spcAft>
-                <a:spcPts val="1200"/>
+                <a:spcPts val="1000"/>
               </a:spcAft>
               <a:buSzPct val="100000"/>
               <a:buChar char="•"/>
             </a:pPr>
             <a:r>
-              <a:rPr lang="en-US" sz="1800" dirty="0">
+              <a:rPr lang="en-US" sz="1600" dirty="0">
                 <a:solidFill>
                   <a:srgbClr val="1B2A33"/>
                 </a:solidFill>
@@ -3942,20 +10135,20 @@
                 <a:ea typeface="Calibri" pitchFamily="34" charset="-122"/>
                 <a:cs typeface="Calibri" pitchFamily="34" charset="-120"/>
               </a:rPr>
-              <a:t>Una semilla por ajuste y cinco VOIs de un mismo estudio.</a:t>
+              <a:t>Remuestreo desigual (VOI 188→40, candidatos 96→40), una semilla por ajuste y cinco VOIs de un mismo estudio.</a:t>
             </a:r>
-            <a:endParaRPr lang="en-US" sz="1800" dirty="0"/>
+            <a:endParaRPr lang="en-US" sz="1600" dirty="0"/>
           </a:p>
           <a:p>
             <a:pPr marL="342900" indent="-342900">
               <a:spcAft>
-                <a:spcPts val="1200"/>
+                <a:spcPts val="1000"/>
               </a:spcAft>
               <a:buSzPct val="100000"/>
               <a:buChar char="•"/>
             </a:pPr>
             <a:r>
-              <a:rPr lang="en-US" sz="1800" dirty="0">
+              <a:rPr lang="en-US" sz="1600" dirty="0">
                 <a:solidFill>
                   <a:srgbClr val="1B2A33"/>
                 </a:solidFill>
@@ -3963,9 +10156,9 @@
                 <a:ea typeface="Calibri" pitchFamily="34" charset="-122"/>
                 <a:cs typeface="Calibri" pitchFamily="34" charset="-120"/>
               </a:rPr>
-              <a:t>Son resultados de simulación: no hay contraste con un ensayo físico de estos huesos.</a:t>
+              <a:t>Es simulación: no hay contraste con un ensayo físico de estos huesos.</a:t>
             </a:r>
-            <a:endParaRPr lang="en-US" sz="1800" dirty="0"/>
+            <a:endParaRPr lang="en-US" sz="1600" dirty="0"/>
           </a:p>
         </p:txBody>
       </p:sp>
@@ -4011,7 +10204,7 @@
             <a:pPr algn="r"/>
             <a:fld id="{F7021451-1387-4CA6-816F-3879F97B5CBC}" type="slidenum">
               <a:rPr b="0" lang="en-US"/>
-              <a:t>11</a:t>
+              <a:t>13</a:t>
             </a:fld>
             <a:endParaRPr lang="en-US"/>
           </a:p>
@@ -4025,9 +10218,9 @@
 </p:sld>
 </file>
 
-<file path=ppt/slides/slide12.xml><?xml version="1.0" encoding="utf-8"?>
+<file path=ppt/slides/slide14.xml><?xml version="1.0" encoding="utf-8"?>
 <p:sld xmlns:a="http://schemas.openxmlformats.org/drawingml/2006/main" xmlns:r="http://schemas.openxmlformats.org/officeDocument/2006/relationships" xmlns:p="http://schemas.openxmlformats.org/presentationml/2006/main">
-  <p:cSld name="Slide 12">
+  <p:cSld name="Slide 14">
     <p:spTree>
       <p:nvGrpSpPr>
         <p:cNvPr id="1" name=""/>
@@ -4180,7 +10373,7 @@
                 <a:ea typeface="Calibri" pitchFamily="34" charset="-122"/>
                 <a:cs typeface="Calibri" pitchFamily="34" charset="-120"/>
               </a:rPr>
-              <a:t>La formulación es la esperada: base empotrada con los tres ejes fijos y cima libre en x e y. Con el cubo macizo es exacta con apoyo deslizante y rigidiza 3,1 % con la base empotrada.</a:t>
+              <a:t>La formulación es la esperada: base adherida con los tres ejes fijos, cima libre en x e y y presión sobre las caras óseas. El cubo macizo es exacto con apoyo deslizante y rigidiza 3,1 % con la base adherida.</a:t>
             </a:r>
             <a:endParaRPr lang="en-US" sz="2000" dirty="0"/>
           </a:p>
@@ -4283,7 +10476,7 @@
                 <a:ea typeface="Calibri" pitchFamily="34" charset="-122"/>
                 <a:cs typeface="Calibri" pitchFamily="34" charset="-120"/>
               </a:rPr>
-              <a:t>El dual-lattice se acerca más al VOI que el spinodoide en rigidez y en tensión, aunque queda 20 a 31 % más blando.</a:t>
+              <a:t>En estos 5 VOIs, a 40³ y con una semilla, el dual-lattice queda más cerca del VOI que el spinodoide en rigidez y en tensión (69 a 80 % frente a 18 a 42 %). Las magnitudes dependen de la malla y de la carga.</a:t>
             </a:r>
             <a:endParaRPr lang="en-US" sz="2000" dirty="0"/>
           </a:p>
@@ -4386,7 +10579,7 @@
                 <a:ea typeface="Calibri" pitchFamily="34" charset="-122"/>
                 <a:cs typeface="Calibri" pitchFamily="34" charset="-120"/>
               </a:rPr>
-              <a:t>Falta el contraste con ensayos mecánicos del mismo hueso. Hasta entonces, son comparaciones relativas.</a:t>
+              <a:t>Falta convergencia con la malla y contraste con ensayos mecánicos del mismo hueso. Hasta entonces, son comparaciones relativas.</a:t>
             </a:r>
             <a:endParaRPr lang="en-US" sz="2000" dirty="0"/>
           </a:p>
@@ -4400,9 +10593,9 @@
 </p:sld>
 </file>
 
-<file path=ppt/slides/slide13.xml><?xml version="1.0" encoding="utf-8"?>
+<file path=ppt/slides/slide15.xml><?xml version="1.0" encoding="utf-8"?>
 <p:sld xmlns:a="http://schemas.openxmlformats.org/drawingml/2006/main" xmlns:r="http://schemas.openxmlformats.org/officeDocument/2006/relationships" xmlns:p="http://schemas.openxmlformats.org/presentationml/2006/main">
-  <p:cSld name="Slide 13">
+  <p:cSld name="Slide 15">
     <p:spTree>
       <p:nvGrpSpPr>
         <p:cNvPr id="1" name=""/>
@@ -4460,7 +10653,7 @@
       </p:sp>
       <p:graphicFrame>
         <p:nvGraphicFramePr>
-          <p:cNvPr id="14" name="Table 0"/>
+          <p:cNvPr id="16" name="Table 0"/>
           <p:cNvGraphicFramePr>
             <a:graphicFrameLocks noGrp="1"/>
           </p:cNvGraphicFramePr>
@@ -4481,13 +10674,14 @@
             <a:tbl>
               <a:tblPr/>
               <a:tblGrid>
-                <a:gridCol w="822960"/>
-                <a:gridCol w="1828800"/>
-                <a:gridCol w="1188720"/>
+                <a:gridCol w="731520"/>
+                <a:gridCol w="1645920"/>
+                <a:gridCol w="1005840"/>
+                <a:gridCol w="1463040"/>
                 <a:gridCol w="1737360"/>
-                <a:gridCol w="1920240"/>
-                <a:gridCol w="1920240"/>
-                <a:gridCol w="1645920"/>
+                <a:gridCol w="2103120"/>
+                <a:gridCol w="1280160"/>
+                <a:gridCol w="1097280"/>
               </a:tblGrid>
               <a:tr h="274320">
                 <a:tc>
@@ -4847,7 +11041,7 @@
                           <a:ea typeface="Calibri" pitchFamily="34" charset="-122"/>
                           <a:cs typeface="Calibri" pitchFamily="34" charset="-120"/>
                         </a:rPr>
-                        <a:t>von Mises máx. [MPa]</a:t>
+                        <a:t>von Mises máx. (no citable) [MPa]</a:t>
                       </a:r>
                       <a:endParaRPr lang="en-US" sz="1200" dirty="0">
                         <a:latin typeface="Calibri" charset="0"/>
@@ -4916,6 +11110,74 @@
                           <a:cs typeface="Calibri" pitchFamily="34" charset="-120"/>
                         </a:rPr>
                         <a:t>|u| máx. [mm]</a:t>
+                      </a:r>
+                      <a:endParaRPr lang="en-US" sz="1200" dirty="0">
+                        <a:latin typeface="Calibri" charset="0"/>
+                        <a:ea typeface="Calibri" charset="0"/>
+                        <a:cs typeface="Calibri" charset="0"/>
+                      </a:endParaRPr>
+                    </a:p>
+                  </a:txBody>
+                  <a:tcPr marL="91440" marR="91440" marT="45720" marB="45720" anchor="ctr">
+                    <a:lnL w="6350" cap="flat" cmpd="sng" algn="ctr">
+                      <a:solidFill>
+                        <a:srgbClr val="CFD6D9"/>
+                      </a:solidFill>
+                      <a:prstDash val="solid"/>
+                      <a:round/>
+                      <a:headEnd type="none" w="med" len="med"/>
+                      <a:tailEnd type="none" w="med" len="med"/>
+                    </a:lnL>
+                    <a:lnR w="6350" cap="flat" cmpd="sng" algn="ctr">
+                      <a:solidFill>
+                        <a:srgbClr val="CFD6D9"/>
+                      </a:solidFill>
+                      <a:prstDash val="solid"/>
+                      <a:round/>
+                      <a:headEnd type="none" w="med" len="med"/>
+                      <a:tailEnd type="none" w="med" len="med"/>
+                    </a:lnR>
+                    <a:lnT w="6350" cap="flat" cmpd="sng" algn="ctr">
+                      <a:solidFill>
+                        <a:srgbClr val="CFD6D9"/>
+                      </a:solidFill>
+                      <a:prstDash val="solid"/>
+                      <a:round/>
+                      <a:headEnd type="none" w="med" len="med"/>
+                      <a:tailEnd type="none" w="med" len="med"/>
+                    </a:lnT>
+                    <a:lnB w="6350" cap="flat" cmpd="sng" algn="ctr">
+                      <a:solidFill>
+                        <a:srgbClr val="CFD6D9"/>
+                      </a:solidFill>
+                      <a:prstDash val="solid"/>
+                      <a:round/>
+                      <a:headEnd type="none" w="med" len="med"/>
+                      <a:tailEnd type="none" w="med" len="med"/>
+                    </a:lnB>
+                    <a:solidFill>
+                      <a:srgbClr val="1F3A44"/>
+                    </a:solidFill>
+                  </a:tcPr>
+                </a:tc>
+                <a:tc>
+                  <a:txBody>
+                    <a:bodyPr/>
+                    <a:lstStyle/>
+                    <a:p>
+                      <a:pPr algn="ctr" indent="0" marL="0">
+                        <a:buNone/>
+                      </a:pPr>
+                      <a:r>
+                        <a:rPr lang="en-US" sz="1200" b="1" dirty="0">
+                          <a:solidFill>
+                            <a:srgbClr val="FFFFFF"/>
+                          </a:solidFill>
+                          <a:latin typeface="Calibri" pitchFamily="34" charset="0"/>
+                          <a:ea typeface="Calibri" pitchFamily="34" charset="-122"/>
+                          <a:cs typeface="Calibri" pitchFamily="34" charset="-120"/>
+                        </a:rPr>
+                        <a:t>|u| p99 [mm]</a:t>
                       </a:r>
                       <a:endParaRPr lang="en-US" sz="1200" dirty="0">
                         <a:latin typeface="Calibri" charset="0"/>
@@ -5444,6 +11706,74 @@
                     </a:solidFill>
                   </a:tcPr>
                 </a:tc>
+                <a:tc>
+                  <a:txBody>
+                    <a:bodyPr/>
+                    <a:lstStyle/>
+                    <a:p>
+                      <a:pPr algn="ctr" indent="0" marL="0">
+                        <a:buNone/>
+                      </a:pPr>
+                      <a:r>
+                        <a:rPr lang="en-US" sz="1200" dirty="0">
+                          <a:solidFill>
+                            <a:srgbClr val="000000"/>
+                          </a:solidFill>
+                          <a:latin typeface="Calibri" pitchFamily="34" charset="0"/>
+                          <a:ea typeface="Calibri" pitchFamily="34" charset="-122"/>
+                          <a:cs typeface="Calibri" pitchFamily="34" charset="-120"/>
+                        </a:rPr>
+                        <a:t>0,0136</a:t>
+                      </a:r>
+                      <a:endParaRPr lang="en-US" sz="1200" dirty="0">
+                        <a:latin typeface="Calibri" charset="0"/>
+                        <a:ea typeface="Calibri" charset="0"/>
+                        <a:cs typeface="Calibri" charset="0"/>
+                      </a:endParaRPr>
+                    </a:p>
+                  </a:txBody>
+                  <a:tcPr marL="91440" marR="91440" marT="45720" marB="45720" anchor="ctr">
+                    <a:lnL w="6350" cap="flat" cmpd="sng" algn="ctr">
+                      <a:solidFill>
+                        <a:srgbClr val="CFD6D9"/>
+                      </a:solidFill>
+                      <a:prstDash val="solid"/>
+                      <a:round/>
+                      <a:headEnd type="none" w="med" len="med"/>
+                      <a:tailEnd type="none" w="med" len="med"/>
+                    </a:lnL>
+                    <a:lnR w="6350" cap="flat" cmpd="sng" algn="ctr">
+                      <a:solidFill>
+                        <a:srgbClr val="CFD6D9"/>
+                      </a:solidFill>
+                      <a:prstDash val="solid"/>
+                      <a:round/>
+                      <a:headEnd type="none" w="med" len="med"/>
+                      <a:tailEnd type="none" w="med" len="med"/>
+                    </a:lnR>
+                    <a:lnT w="6350" cap="flat" cmpd="sng" algn="ctr">
+                      <a:solidFill>
+                        <a:srgbClr val="CFD6D9"/>
+                      </a:solidFill>
+                      <a:prstDash val="solid"/>
+                      <a:round/>
+                      <a:headEnd type="none" w="med" len="med"/>
+                      <a:tailEnd type="none" w="med" len="med"/>
+                    </a:lnT>
+                    <a:lnB w="6350" cap="flat" cmpd="sng" algn="ctr">
+                      <a:solidFill>
+                        <a:srgbClr val="CFD6D9"/>
+                      </a:solidFill>
+                      <a:prstDash val="solid"/>
+                      <a:round/>
+                      <a:headEnd type="none" w="med" len="med"/>
+                      <a:tailEnd type="none" w="med" len="med"/>
+                    </a:lnB>
+                    <a:solidFill>
+                      <a:srgbClr val="EEF2F3"/>
+                    </a:solidFill>
+                  </a:tcPr>
+                </a:tc>
               </a:tr>
               <a:tr h="274320">
                 <a:tc>
@@ -5911,6 +12241,74 @@
                     </a:solidFill>
                   </a:tcPr>
                 </a:tc>
+                <a:tc>
+                  <a:txBody>
+                    <a:bodyPr/>
+                    <a:lstStyle/>
+                    <a:p>
+                      <a:pPr algn="ctr" indent="0" marL="0">
+                        <a:buNone/>
+                      </a:pPr>
+                      <a:r>
+                        <a:rPr lang="en-US" sz="1200" dirty="0">
+                          <a:solidFill>
+                            <a:srgbClr val="000000"/>
+                          </a:solidFill>
+                          <a:latin typeface="Calibri" pitchFamily="34" charset="0"/>
+                          <a:ea typeface="Calibri" pitchFamily="34" charset="-122"/>
+                          <a:cs typeface="Calibri" pitchFamily="34" charset="-120"/>
+                        </a:rPr>
+                        <a:t>0,0407</a:t>
+                      </a:r>
+                      <a:endParaRPr lang="en-US" sz="1200" dirty="0">
+                        <a:latin typeface="Calibri" charset="0"/>
+                        <a:ea typeface="Calibri" charset="0"/>
+                        <a:cs typeface="Calibri" charset="0"/>
+                      </a:endParaRPr>
+                    </a:p>
+                  </a:txBody>
+                  <a:tcPr marL="91440" marR="91440" marT="45720" marB="45720" anchor="ctr">
+                    <a:lnL w="6350" cap="flat" cmpd="sng" algn="ctr">
+                      <a:solidFill>
+                        <a:srgbClr val="CFD6D9"/>
+                      </a:solidFill>
+                      <a:prstDash val="solid"/>
+                      <a:round/>
+                      <a:headEnd type="none" w="med" len="med"/>
+                      <a:tailEnd type="none" w="med" len="med"/>
+                    </a:lnL>
+                    <a:lnR w="6350" cap="flat" cmpd="sng" algn="ctr">
+                      <a:solidFill>
+                        <a:srgbClr val="CFD6D9"/>
+                      </a:solidFill>
+                      <a:prstDash val="solid"/>
+                      <a:round/>
+                      <a:headEnd type="none" w="med" len="med"/>
+                      <a:tailEnd type="none" w="med" len="med"/>
+                    </a:lnR>
+                    <a:lnT w="6350" cap="flat" cmpd="sng" algn="ctr">
+                      <a:solidFill>
+                        <a:srgbClr val="CFD6D9"/>
+                      </a:solidFill>
+                      <a:prstDash val="solid"/>
+                      <a:round/>
+                      <a:headEnd type="none" w="med" len="med"/>
+                      <a:tailEnd type="none" w="med" len="med"/>
+                    </a:lnT>
+                    <a:lnB w="6350" cap="flat" cmpd="sng" algn="ctr">
+                      <a:solidFill>
+                        <a:srgbClr val="CFD6D9"/>
+                      </a:solidFill>
+                      <a:prstDash val="solid"/>
+                      <a:round/>
+                      <a:headEnd type="none" w="med" len="med"/>
+                      <a:tailEnd type="none" w="med" len="med"/>
+                    </a:lnB>
+                    <a:solidFill>
+                      <a:srgbClr val="FFFFFF"/>
+                    </a:solidFill>
+                  </a:tcPr>
+                </a:tc>
               </a:tr>
               <a:tr h="274320">
                 <a:tc>
@@ -6328,6 +12726,74 @@
                           <a:cs typeface="Calibri" pitchFamily="34" charset="-120"/>
                         </a:rPr>
                         <a:t>0,0466</a:t>
+                      </a:r>
+                      <a:endParaRPr lang="en-US" sz="1200" dirty="0">
+                        <a:latin typeface="Calibri" charset="0"/>
+                        <a:ea typeface="Calibri" charset="0"/>
+                        <a:cs typeface="Calibri" charset="0"/>
+                      </a:endParaRPr>
+                    </a:p>
+                  </a:txBody>
+                  <a:tcPr marL="91440" marR="91440" marT="45720" marB="45720" anchor="ctr">
+                    <a:lnL w="6350" cap="flat" cmpd="sng" algn="ctr">
+                      <a:solidFill>
+                        <a:srgbClr val="CFD6D9"/>
+                      </a:solidFill>
+                      <a:prstDash val="solid"/>
+                      <a:round/>
+                      <a:headEnd type="none" w="med" len="med"/>
+                      <a:tailEnd type="none" w="med" len="med"/>
+                    </a:lnL>
+                    <a:lnR w="6350" cap="flat" cmpd="sng" algn="ctr">
+                      <a:solidFill>
+                        <a:srgbClr val="CFD6D9"/>
+                      </a:solidFill>
+                      <a:prstDash val="solid"/>
+                      <a:round/>
+                      <a:headEnd type="none" w="med" len="med"/>
+                      <a:tailEnd type="none" w="med" len="med"/>
+                    </a:lnR>
+                    <a:lnT w="6350" cap="flat" cmpd="sng" algn="ctr">
+                      <a:solidFill>
+                        <a:srgbClr val="CFD6D9"/>
+                      </a:solidFill>
+                      <a:prstDash val="solid"/>
+                      <a:round/>
+                      <a:headEnd type="none" w="med" len="med"/>
+                      <a:tailEnd type="none" w="med" len="med"/>
+                    </a:lnT>
+                    <a:lnB w="6350" cap="flat" cmpd="sng" algn="ctr">
+                      <a:solidFill>
+                        <a:srgbClr val="CFD6D9"/>
+                      </a:solidFill>
+                      <a:prstDash val="solid"/>
+                      <a:round/>
+                      <a:headEnd type="none" w="med" len="med"/>
+                      <a:tailEnd type="none" w="med" len="med"/>
+                    </a:lnB>
+                    <a:solidFill>
+                      <a:srgbClr val="FFFFFF"/>
+                    </a:solidFill>
+                  </a:tcPr>
+                </a:tc>
+                <a:tc>
+                  <a:txBody>
+                    <a:bodyPr/>
+                    <a:lstStyle/>
+                    <a:p>
+                      <a:pPr algn="ctr" indent="0" marL="0">
+                        <a:buNone/>
+                      </a:pPr>
+                      <a:r>
+                        <a:rPr lang="en-US" sz="1200" dirty="0">
+                          <a:solidFill>
+                            <a:srgbClr val="000000"/>
+                          </a:solidFill>
+                          <a:latin typeface="Calibri" pitchFamily="34" charset="0"/>
+                          <a:ea typeface="Calibri" pitchFamily="34" charset="-122"/>
+                          <a:cs typeface="Calibri" pitchFamily="34" charset="-120"/>
+                        </a:rPr>
+                        <a:t>0,0222</a:t>
                       </a:r>
                       <a:endParaRPr lang="en-US" sz="1200" dirty="0">
                         <a:latin typeface="Calibri" charset="0"/>
@@ -6856,6 +13322,74 @@
                     </a:solidFill>
                   </a:tcPr>
                 </a:tc>
+                <a:tc>
+                  <a:txBody>
+                    <a:bodyPr/>
+                    <a:lstStyle/>
+                    <a:p>
+                      <a:pPr algn="ctr" indent="0" marL="0">
+                        <a:buNone/>
+                      </a:pPr>
+                      <a:r>
+                        <a:rPr lang="en-US" sz="1200" dirty="0">
+                          <a:solidFill>
+                            <a:srgbClr val="000000"/>
+                          </a:solidFill>
+                          <a:latin typeface="Calibri" pitchFamily="34" charset="0"/>
+                          <a:ea typeface="Calibri" pitchFamily="34" charset="-122"/>
+                          <a:cs typeface="Calibri" pitchFamily="34" charset="-120"/>
+                        </a:rPr>
+                        <a:t>0,0131</a:t>
+                      </a:r>
+                      <a:endParaRPr lang="en-US" sz="1200" dirty="0">
+                        <a:latin typeface="Calibri" charset="0"/>
+                        <a:ea typeface="Calibri" charset="0"/>
+                        <a:cs typeface="Calibri" charset="0"/>
+                      </a:endParaRPr>
+                    </a:p>
+                  </a:txBody>
+                  <a:tcPr marL="91440" marR="91440" marT="45720" marB="45720" anchor="ctr">
+                    <a:lnL w="6350" cap="flat" cmpd="sng" algn="ctr">
+                      <a:solidFill>
+                        <a:srgbClr val="CFD6D9"/>
+                      </a:solidFill>
+                      <a:prstDash val="solid"/>
+                      <a:round/>
+                      <a:headEnd type="none" w="med" len="med"/>
+                      <a:tailEnd type="none" w="med" len="med"/>
+                    </a:lnL>
+                    <a:lnR w="6350" cap="flat" cmpd="sng" algn="ctr">
+                      <a:solidFill>
+                        <a:srgbClr val="CFD6D9"/>
+                      </a:solidFill>
+                      <a:prstDash val="solid"/>
+                      <a:round/>
+                      <a:headEnd type="none" w="med" len="med"/>
+                      <a:tailEnd type="none" w="med" len="med"/>
+                    </a:lnR>
+                    <a:lnT w="6350" cap="flat" cmpd="sng" algn="ctr">
+                      <a:solidFill>
+                        <a:srgbClr val="CFD6D9"/>
+                      </a:solidFill>
+                      <a:prstDash val="solid"/>
+                      <a:round/>
+                      <a:headEnd type="none" w="med" len="med"/>
+                      <a:tailEnd type="none" w="med" len="med"/>
+                    </a:lnT>
+                    <a:lnB w="6350" cap="flat" cmpd="sng" algn="ctr">
+                      <a:solidFill>
+                        <a:srgbClr val="CFD6D9"/>
+                      </a:solidFill>
+                      <a:prstDash val="solid"/>
+                      <a:round/>
+                      <a:headEnd type="none" w="med" len="med"/>
+                      <a:tailEnd type="none" w="med" len="med"/>
+                    </a:lnB>
+                    <a:solidFill>
+                      <a:srgbClr val="EEF2F3"/>
+                    </a:solidFill>
+                  </a:tcPr>
+                </a:tc>
               </a:tr>
               <a:tr h="274320">
                 <a:tc>
@@ -7323,6 +13857,74 @@
                     </a:solidFill>
                   </a:tcPr>
                 </a:tc>
+                <a:tc>
+                  <a:txBody>
+                    <a:bodyPr/>
+                    <a:lstStyle/>
+                    <a:p>
+                      <a:pPr algn="ctr" indent="0" marL="0">
+                        <a:buNone/>
+                      </a:pPr>
+                      <a:r>
+                        <a:rPr lang="en-US" sz="1200" dirty="0">
+                          <a:solidFill>
+                            <a:srgbClr val="000000"/>
+                          </a:solidFill>
+                          <a:latin typeface="Calibri" pitchFamily="34" charset="0"/>
+                          <a:ea typeface="Calibri" pitchFamily="34" charset="-122"/>
+                          <a:cs typeface="Calibri" pitchFamily="34" charset="-120"/>
+                        </a:rPr>
+                        <a:t>0,0386</a:t>
+                      </a:r>
+                      <a:endParaRPr lang="en-US" sz="1200" dirty="0">
+                        <a:latin typeface="Calibri" charset="0"/>
+                        <a:ea typeface="Calibri" charset="0"/>
+                        <a:cs typeface="Calibri" charset="0"/>
+                      </a:endParaRPr>
+                    </a:p>
+                  </a:txBody>
+                  <a:tcPr marL="91440" marR="91440" marT="45720" marB="45720" anchor="ctr">
+                    <a:lnL w="6350" cap="flat" cmpd="sng" algn="ctr">
+                      <a:solidFill>
+                        <a:srgbClr val="CFD6D9"/>
+                      </a:solidFill>
+                      <a:prstDash val="solid"/>
+                      <a:round/>
+                      <a:headEnd type="none" w="med" len="med"/>
+                      <a:tailEnd type="none" w="med" len="med"/>
+                    </a:lnL>
+                    <a:lnR w="6350" cap="flat" cmpd="sng" algn="ctr">
+                      <a:solidFill>
+                        <a:srgbClr val="CFD6D9"/>
+                      </a:solidFill>
+                      <a:prstDash val="solid"/>
+                      <a:round/>
+                      <a:headEnd type="none" w="med" len="med"/>
+                      <a:tailEnd type="none" w="med" len="med"/>
+                    </a:lnR>
+                    <a:lnT w="6350" cap="flat" cmpd="sng" algn="ctr">
+                      <a:solidFill>
+                        <a:srgbClr val="CFD6D9"/>
+                      </a:solidFill>
+                      <a:prstDash val="solid"/>
+                      <a:round/>
+                      <a:headEnd type="none" w="med" len="med"/>
+                      <a:tailEnd type="none" w="med" len="med"/>
+                    </a:lnT>
+                    <a:lnB w="6350" cap="flat" cmpd="sng" algn="ctr">
+                      <a:solidFill>
+                        <a:srgbClr val="CFD6D9"/>
+                      </a:solidFill>
+                      <a:prstDash val="solid"/>
+                      <a:round/>
+                      <a:headEnd type="none" w="med" len="med"/>
+                      <a:tailEnd type="none" w="med" len="med"/>
+                    </a:lnB>
+                    <a:solidFill>
+                      <a:srgbClr val="FFFFFF"/>
+                    </a:solidFill>
+                  </a:tcPr>
+                </a:tc>
               </a:tr>
               <a:tr h="274320">
                 <a:tc>
@@ -7740,6 +14342,74 @@
                           <a:cs typeface="Calibri" pitchFamily="34" charset="-120"/>
                         </a:rPr>
                         <a:t>0,1596</a:t>
+                      </a:r>
+                      <a:endParaRPr lang="en-US" sz="1200" dirty="0">
+                        <a:latin typeface="Calibri" charset="0"/>
+                        <a:ea typeface="Calibri" charset="0"/>
+                        <a:cs typeface="Calibri" charset="0"/>
+                      </a:endParaRPr>
+                    </a:p>
+                  </a:txBody>
+                  <a:tcPr marL="91440" marR="91440" marT="45720" marB="45720" anchor="ctr">
+                    <a:lnL w="6350" cap="flat" cmpd="sng" algn="ctr">
+                      <a:solidFill>
+                        <a:srgbClr val="CFD6D9"/>
+                      </a:solidFill>
+                      <a:prstDash val="solid"/>
+                      <a:round/>
+                      <a:headEnd type="none" w="med" len="med"/>
+                      <a:tailEnd type="none" w="med" len="med"/>
+                    </a:lnL>
+                    <a:lnR w="6350" cap="flat" cmpd="sng" algn="ctr">
+                      <a:solidFill>
+                        <a:srgbClr val="CFD6D9"/>
+                      </a:solidFill>
+                      <a:prstDash val="solid"/>
+                      <a:round/>
+                      <a:headEnd type="none" w="med" len="med"/>
+                      <a:tailEnd type="none" w="med" len="med"/>
+                    </a:lnR>
+                    <a:lnT w="6350" cap="flat" cmpd="sng" algn="ctr">
+                      <a:solidFill>
+                        <a:srgbClr val="CFD6D9"/>
+                      </a:solidFill>
+                      <a:prstDash val="solid"/>
+                      <a:round/>
+                      <a:headEnd type="none" w="med" len="med"/>
+                      <a:tailEnd type="none" w="med" len="med"/>
+                    </a:lnT>
+                    <a:lnB w="6350" cap="flat" cmpd="sng" algn="ctr">
+                      <a:solidFill>
+                        <a:srgbClr val="CFD6D9"/>
+                      </a:solidFill>
+                      <a:prstDash val="solid"/>
+                      <a:round/>
+                      <a:headEnd type="none" w="med" len="med"/>
+                      <a:tailEnd type="none" w="med" len="med"/>
+                    </a:lnB>
+                    <a:solidFill>
+                      <a:srgbClr val="FFFFFF"/>
+                    </a:solidFill>
+                  </a:tcPr>
+                </a:tc>
+                <a:tc>
+                  <a:txBody>
+                    <a:bodyPr/>
+                    <a:lstStyle/>
+                    <a:p>
+                      <a:pPr algn="ctr" indent="0" marL="0">
+                        <a:buNone/>
+                      </a:pPr>
+                      <a:r>
+                        <a:rPr lang="en-US" sz="1200" dirty="0">
+                          <a:solidFill>
+                            <a:srgbClr val="000000"/>
+                          </a:solidFill>
+                          <a:latin typeface="Calibri" pitchFamily="34" charset="0"/>
+                          <a:ea typeface="Calibri" pitchFamily="34" charset="-122"/>
+                          <a:cs typeface="Calibri" pitchFamily="34" charset="-120"/>
+                        </a:rPr>
+                        <a:t>0,0184</a:t>
                       </a:r>
                       <a:endParaRPr lang="en-US" sz="1200" dirty="0">
                         <a:latin typeface="Calibri" charset="0"/>
@@ -8268,6 +14938,74 @@
                     </a:solidFill>
                   </a:tcPr>
                 </a:tc>
+                <a:tc>
+                  <a:txBody>
+                    <a:bodyPr/>
+                    <a:lstStyle/>
+                    <a:p>
+                      <a:pPr algn="ctr" indent="0" marL="0">
+                        <a:buNone/>
+                      </a:pPr>
+                      <a:r>
+                        <a:rPr lang="en-US" sz="1200" dirty="0">
+                          <a:solidFill>
+                            <a:srgbClr val="000000"/>
+                          </a:solidFill>
+                          <a:latin typeface="Calibri" pitchFamily="34" charset="0"/>
+                          <a:ea typeface="Calibri" pitchFamily="34" charset="-122"/>
+                          <a:cs typeface="Calibri" pitchFamily="34" charset="-120"/>
+                        </a:rPr>
+                        <a:t>0,0157</a:t>
+                      </a:r>
+                      <a:endParaRPr lang="en-US" sz="1200" dirty="0">
+                        <a:latin typeface="Calibri" charset="0"/>
+                        <a:ea typeface="Calibri" charset="0"/>
+                        <a:cs typeface="Calibri" charset="0"/>
+                      </a:endParaRPr>
+                    </a:p>
+                  </a:txBody>
+                  <a:tcPr marL="91440" marR="91440" marT="45720" marB="45720" anchor="ctr">
+                    <a:lnL w="6350" cap="flat" cmpd="sng" algn="ctr">
+                      <a:solidFill>
+                        <a:srgbClr val="CFD6D9"/>
+                      </a:solidFill>
+                      <a:prstDash val="solid"/>
+                      <a:round/>
+                      <a:headEnd type="none" w="med" len="med"/>
+                      <a:tailEnd type="none" w="med" len="med"/>
+                    </a:lnL>
+                    <a:lnR w="6350" cap="flat" cmpd="sng" algn="ctr">
+                      <a:solidFill>
+                        <a:srgbClr val="CFD6D9"/>
+                      </a:solidFill>
+                      <a:prstDash val="solid"/>
+                      <a:round/>
+                      <a:headEnd type="none" w="med" len="med"/>
+                      <a:tailEnd type="none" w="med" len="med"/>
+                    </a:lnR>
+                    <a:lnT w="6350" cap="flat" cmpd="sng" algn="ctr">
+                      <a:solidFill>
+                        <a:srgbClr val="CFD6D9"/>
+                      </a:solidFill>
+                      <a:prstDash val="solid"/>
+                      <a:round/>
+                      <a:headEnd type="none" w="med" len="med"/>
+                      <a:tailEnd type="none" w="med" len="med"/>
+                    </a:lnT>
+                    <a:lnB w="6350" cap="flat" cmpd="sng" algn="ctr">
+                      <a:solidFill>
+                        <a:srgbClr val="CFD6D9"/>
+                      </a:solidFill>
+                      <a:prstDash val="solid"/>
+                      <a:round/>
+                      <a:headEnd type="none" w="med" len="med"/>
+                      <a:tailEnd type="none" w="med" len="med"/>
+                    </a:lnB>
+                    <a:solidFill>
+                      <a:srgbClr val="EEF2F3"/>
+                    </a:solidFill>
+                  </a:tcPr>
+                </a:tc>
               </a:tr>
               <a:tr h="274320">
                 <a:tc>
@@ -8735,6 +15473,74 @@
                     </a:solidFill>
                   </a:tcPr>
                 </a:tc>
+                <a:tc>
+                  <a:txBody>
+                    <a:bodyPr/>
+                    <a:lstStyle/>
+                    <a:p>
+                      <a:pPr algn="ctr" indent="0" marL="0">
+                        <a:buNone/>
+                      </a:pPr>
+                      <a:r>
+                        <a:rPr lang="en-US" sz="1200" dirty="0">
+                          <a:solidFill>
+                            <a:srgbClr val="000000"/>
+                          </a:solidFill>
+                          <a:latin typeface="Calibri" pitchFamily="34" charset="0"/>
+                          <a:ea typeface="Calibri" pitchFamily="34" charset="-122"/>
+                          <a:cs typeface="Calibri" pitchFamily="34" charset="-120"/>
+                        </a:rPr>
+                        <a:t>0,2522</a:t>
+                      </a:r>
+                      <a:endParaRPr lang="en-US" sz="1200" dirty="0">
+                        <a:latin typeface="Calibri" charset="0"/>
+                        <a:ea typeface="Calibri" charset="0"/>
+                        <a:cs typeface="Calibri" charset="0"/>
+                      </a:endParaRPr>
+                    </a:p>
+                  </a:txBody>
+                  <a:tcPr marL="91440" marR="91440" marT="45720" marB="45720" anchor="ctr">
+                    <a:lnL w="6350" cap="flat" cmpd="sng" algn="ctr">
+                      <a:solidFill>
+                        <a:srgbClr val="CFD6D9"/>
+                      </a:solidFill>
+                      <a:prstDash val="solid"/>
+                      <a:round/>
+                      <a:headEnd type="none" w="med" len="med"/>
+                      <a:tailEnd type="none" w="med" len="med"/>
+                    </a:lnL>
+                    <a:lnR w="6350" cap="flat" cmpd="sng" algn="ctr">
+                      <a:solidFill>
+                        <a:srgbClr val="CFD6D9"/>
+                      </a:solidFill>
+                      <a:prstDash val="solid"/>
+                      <a:round/>
+                      <a:headEnd type="none" w="med" len="med"/>
+                      <a:tailEnd type="none" w="med" len="med"/>
+                    </a:lnR>
+                    <a:lnT w="6350" cap="flat" cmpd="sng" algn="ctr">
+                      <a:solidFill>
+                        <a:srgbClr val="CFD6D9"/>
+                      </a:solidFill>
+                      <a:prstDash val="solid"/>
+                      <a:round/>
+                      <a:headEnd type="none" w="med" len="med"/>
+                      <a:tailEnd type="none" w="med" len="med"/>
+                    </a:lnT>
+                    <a:lnB w="6350" cap="flat" cmpd="sng" algn="ctr">
+                      <a:solidFill>
+                        <a:srgbClr val="CFD6D9"/>
+                      </a:solidFill>
+                      <a:prstDash val="solid"/>
+                      <a:round/>
+                      <a:headEnd type="none" w="med" len="med"/>
+                      <a:tailEnd type="none" w="med" len="med"/>
+                    </a:lnB>
+                    <a:solidFill>
+                      <a:srgbClr val="FFFFFF"/>
+                    </a:solidFill>
+                  </a:tcPr>
+                </a:tc>
               </a:tr>
               <a:tr h="274320">
                 <a:tc>
@@ -9152,6 +15958,74 @@
                           <a:cs typeface="Calibri" pitchFamily="34" charset="-120"/>
                         </a:rPr>
                         <a:t>0,1536</a:t>
+                      </a:r>
+                      <a:endParaRPr lang="en-US" sz="1200" dirty="0">
+                        <a:latin typeface="Calibri" charset="0"/>
+                        <a:ea typeface="Calibri" charset="0"/>
+                        <a:cs typeface="Calibri" charset="0"/>
+                      </a:endParaRPr>
+                    </a:p>
+                  </a:txBody>
+                  <a:tcPr marL="91440" marR="91440" marT="45720" marB="45720" anchor="ctr">
+                    <a:lnL w="6350" cap="flat" cmpd="sng" algn="ctr">
+                      <a:solidFill>
+                        <a:srgbClr val="CFD6D9"/>
+                      </a:solidFill>
+                      <a:prstDash val="solid"/>
+                      <a:round/>
+                      <a:headEnd type="none" w="med" len="med"/>
+                      <a:tailEnd type="none" w="med" len="med"/>
+                    </a:lnL>
+                    <a:lnR w="6350" cap="flat" cmpd="sng" algn="ctr">
+                      <a:solidFill>
+                        <a:srgbClr val="CFD6D9"/>
+                      </a:solidFill>
+                      <a:prstDash val="solid"/>
+                      <a:round/>
+                      <a:headEnd type="none" w="med" len="med"/>
+                      <a:tailEnd type="none" w="med" len="med"/>
+                    </a:lnR>
+                    <a:lnT w="6350" cap="flat" cmpd="sng" algn="ctr">
+                      <a:solidFill>
+                        <a:srgbClr val="CFD6D9"/>
+                      </a:solidFill>
+                      <a:prstDash val="solid"/>
+                      <a:round/>
+                      <a:headEnd type="none" w="med" len="med"/>
+                      <a:tailEnd type="none" w="med" len="med"/>
+                    </a:lnT>
+                    <a:lnB w="6350" cap="flat" cmpd="sng" algn="ctr">
+                      <a:solidFill>
+                        <a:srgbClr val="CFD6D9"/>
+                      </a:solidFill>
+                      <a:prstDash val="solid"/>
+                      <a:round/>
+                      <a:headEnd type="none" w="med" len="med"/>
+                      <a:tailEnd type="none" w="med" len="med"/>
+                    </a:lnB>
+                    <a:solidFill>
+                      <a:srgbClr val="FFFFFF"/>
+                    </a:solidFill>
+                  </a:tcPr>
+                </a:tc>
+                <a:tc>
+                  <a:txBody>
+                    <a:bodyPr/>
+                    <a:lstStyle/>
+                    <a:p>
+                      <a:pPr algn="ctr" indent="0" marL="0">
+                        <a:buNone/>
+                      </a:pPr>
+                      <a:r>
+                        <a:rPr lang="en-US" sz="1200" dirty="0">
+                          <a:solidFill>
+                            <a:srgbClr val="000000"/>
+                          </a:solidFill>
+                          <a:latin typeface="Calibri" pitchFamily="34" charset="0"/>
+                          <a:ea typeface="Calibri" pitchFamily="34" charset="-122"/>
+                          <a:cs typeface="Calibri" pitchFamily="34" charset="-120"/>
+                        </a:rPr>
+                        <a:t>0,0292</a:t>
                       </a:r>
                       <a:endParaRPr lang="en-US" sz="1200" dirty="0">
                         <a:latin typeface="Calibri" charset="0"/>
@@ -9680,6 +16554,74 @@
                     </a:solidFill>
                   </a:tcPr>
                 </a:tc>
+                <a:tc>
+                  <a:txBody>
+                    <a:bodyPr/>
+                    <a:lstStyle/>
+                    <a:p>
+                      <a:pPr algn="ctr" indent="0" marL="0">
+                        <a:buNone/>
+                      </a:pPr>
+                      <a:r>
+                        <a:rPr lang="en-US" sz="1200" dirty="0">
+                          <a:solidFill>
+                            <a:srgbClr val="000000"/>
+                          </a:solidFill>
+                          <a:latin typeface="Calibri" pitchFamily="34" charset="0"/>
+                          <a:ea typeface="Calibri" pitchFamily="34" charset="-122"/>
+                          <a:cs typeface="Calibri" pitchFamily="34" charset="-120"/>
+                        </a:rPr>
+                        <a:t>0,0136</a:t>
+                      </a:r>
+                      <a:endParaRPr lang="en-US" sz="1200" dirty="0">
+                        <a:latin typeface="Calibri" charset="0"/>
+                        <a:ea typeface="Calibri" charset="0"/>
+                        <a:cs typeface="Calibri" charset="0"/>
+                      </a:endParaRPr>
+                    </a:p>
+                  </a:txBody>
+                  <a:tcPr marL="91440" marR="91440" marT="45720" marB="45720" anchor="ctr">
+                    <a:lnL w="6350" cap="flat" cmpd="sng" algn="ctr">
+                      <a:solidFill>
+                        <a:srgbClr val="CFD6D9"/>
+                      </a:solidFill>
+                      <a:prstDash val="solid"/>
+                      <a:round/>
+                      <a:headEnd type="none" w="med" len="med"/>
+                      <a:tailEnd type="none" w="med" len="med"/>
+                    </a:lnL>
+                    <a:lnR w="6350" cap="flat" cmpd="sng" algn="ctr">
+                      <a:solidFill>
+                        <a:srgbClr val="CFD6D9"/>
+                      </a:solidFill>
+                      <a:prstDash val="solid"/>
+                      <a:round/>
+                      <a:headEnd type="none" w="med" len="med"/>
+                      <a:tailEnd type="none" w="med" len="med"/>
+                    </a:lnR>
+                    <a:lnT w="6350" cap="flat" cmpd="sng" algn="ctr">
+                      <a:solidFill>
+                        <a:srgbClr val="CFD6D9"/>
+                      </a:solidFill>
+                      <a:prstDash val="solid"/>
+                      <a:round/>
+                      <a:headEnd type="none" w="med" len="med"/>
+                      <a:tailEnd type="none" w="med" len="med"/>
+                    </a:lnT>
+                    <a:lnB w="6350" cap="flat" cmpd="sng" algn="ctr">
+                      <a:solidFill>
+                        <a:srgbClr val="CFD6D9"/>
+                      </a:solidFill>
+                      <a:prstDash val="solid"/>
+                      <a:round/>
+                      <a:headEnd type="none" w="med" len="med"/>
+                      <a:tailEnd type="none" w="med" len="med"/>
+                    </a:lnB>
+                    <a:solidFill>
+                      <a:srgbClr val="EEF2F3"/>
+                    </a:solidFill>
+                  </a:tcPr>
+                </a:tc>
               </a:tr>
               <a:tr h="274320">
                 <a:tc>
@@ -10147,6 +17089,74 @@
                     </a:solidFill>
                   </a:tcPr>
                 </a:tc>
+                <a:tc>
+                  <a:txBody>
+                    <a:bodyPr/>
+                    <a:lstStyle/>
+                    <a:p>
+                      <a:pPr algn="ctr" indent="0" marL="0">
+                        <a:buNone/>
+                      </a:pPr>
+                      <a:r>
+                        <a:rPr lang="en-US" sz="1200" dirty="0">
+                          <a:solidFill>
+                            <a:srgbClr val="000000"/>
+                          </a:solidFill>
+                          <a:latin typeface="Calibri" pitchFamily="34" charset="0"/>
+                          <a:ea typeface="Calibri" pitchFamily="34" charset="-122"/>
+                          <a:cs typeface="Calibri" pitchFamily="34" charset="-120"/>
+                        </a:rPr>
+                        <a:t>0,0581</a:t>
+                      </a:r>
+                      <a:endParaRPr lang="en-US" sz="1200" dirty="0">
+                        <a:latin typeface="Calibri" charset="0"/>
+                        <a:ea typeface="Calibri" charset="0"/>
+                        <a:cs typeface="Calibri" charset="0"/>
+                      </a:endParaRPr>
+                    </a:p>
+                  </a:txBody>
+                  <a:tcPr marL="91440" marR="91440" marT="45720" marB="45720" anchor="ctr">
+                    <a:lnL w="6350" cap="flat" cmpd="sng" algn="ctr">
+                      <a:solidFill>
+                        <a:srgbClr val="CFD6D9"/>
+                      </a:solidFill>
+                      <a:prstDash val="solid"/>
+                      <a:round/>
+                      <a:headEnd type="none" w="med" len="med"/>
+                      <a:tailEnd type="none" w="med" len="med"/>
+                    </a:lnL>
+                    <a:lnR w="6350" cap="flat" cmpd="sng" algn="ctr">
+                      <a:solidFill>
+                        <a:srgbClr val="CFD6D9"/>
+                      </a:solidFill>
+                      <a:prstDash val="solid"/>
+                      <a:round/>
+                      <a:headEnd type="none" w="med" len="med"/>
+                      <a:tailEnd type="none" w="med" len="med"/>
+                    </a:lnR>
+                    <a:lnT w="6350" cap="flat" cmpd="sng" algn="ctr">
+                      <a:solidFill>
+                        <a:srgbClr val="CFD6D9"/>
+                      </a:solidFill>
+                      <a:prstDash val="solid"/>
+                      <a:round/>
+                      <a:headEnd type="none" w="med" len="med"/>
+                      <a:tailEnd type="none" w="med" len="med"/>
+                    </a:lnT>
+                    <a:lnB w="6350" cap="flat" cmpd="sng" algn="ctr">
+                      <a:solidFill>
+                        <a:srgbClr val="CFD6D9"/>
+                      </a:solidFill>
+                      <a:prstDash val="solid"/>
+                      <a:round/>
+                      <a:headEnd type="none" w="med" len="med"/>
+                      <a:tailEnd type="none" w="med" len="med"/>
+                    </a:lnB>
+                    <a:solidFill>
+                      <a:srgbClr val="FFFFFF"/>
+                    </a:solidFill>
+                  </a:tcPr>
+                </a:tc>
               </a:tr>
               <a:tr h="274320">
                 <a:tc>
@@ -10564,6 +17574,74 @@
                           <a:cs typeface="Calibri" pitchFamily="34" charset="-120"/>
                         </a:rPr>
                         <a:t>0,0350</a:t>
+                      </a:r>
+                      <a:endParaRPr lang="en-US" sz="1200" dirty="0">
+                        <a:latin typeface="Calibri" charset="0"/>
+                        <a:ea typeface="Calibri" charset="0"/>
+                        <a:cs typeface="Calibri" charset="0"/>
+                      </a:endParaRPr>
+                    </a:p>
+                  </a:txBody>
+                  <a:tcPr marL="91440" marR="91440" marT="45720" marB="45720" anchor="ctr">
+                    <a:lnL w="6350" cap="flat" cmpd="sng" algn="ctr">
+                      <a:solidFill>
+                        <a:srgbClr val="CFD6D9"/>
+                      </a:solidFill>
+                      <a:prstDash val="solid"/>
+                      <a:round/>
+                      <a:headEnd type="none" w="med" len="med"/>
+                      <a:tailEnd type="none" w="med" len="med"/>
+                    </a:lnL>
+                    <a:lnR w="6350" cap="flat" cmpd="sng" algn="ctr">
+                      <a:solidFill>
+                        <a:srgbClr val="CFD6D9"/>
+                      </a:solidFill>
+                      <a:prstDash val="solid"/>
+                      <a:round/>
+                      <a:headEnd type="none" w="med" len="med"/>
+                      <a:tailEnd type="none" w="med" len="med"/>
+                    </a:lnR>
+                    <a:lnT w="6350" cap="flat" cmpd="sng" algn="ctr">
+                      <a:solidFill>
+                        <a:srgbClr val="CFD6D9"/>
+                      </a:solidFill>
+                      <a:prstDash val="solid"/>
+                      <a:round/>
+                      <a:headEnd type="none" w="med" len="med"/>
+                      <a:tailEnd type="none" w="med" len="med"/>
+                    </a:lnT>
+                    <a:lnB w="6350" cap="flat" cmpd="sng" algn="ctr">
+                      <a:solidFill>
+                        <a:srgbClr val="CFD6D9"/>
+                      </a:solidFill>
+                      <a:prstDash val="solid"/>
+                      <a:round/>
+                      <a:headEnd type="none" w="med" len="med"/>
+                      <a:tailEnd type="none" w="med" len="med"/>
+                    </a:lnB>
+                    <a:solidFill>
+                      <a:srgbClr val="FFFFFF"/>
+                    </a:solidFill>
+                  </a:tcPr>
+                </a:tc>
+                <a:tc>
+                  <a:txBody>
+                    <a:bodyPr/>
+                    <a:lstStyle/>
+                    <a:p>
+                      <a:pPr algn="ctr" indent="0" marL="0">
+                        <a:buNone/>
+                      </a:pPr>
+                      <a:r>
+                        <a:rPr lang="en-US" sz="1200" dirty="0">
+                          <a:solidFill>
+                            <a:srgbClr val="000000"/>
+                          </a:solidFill>
+                          <a:latin typeface="Calibri" pitchFamily="34" charset="0"/>
+                          <a:ea typeface="Calibri" pitchFamily="34" charset="-122"/>
+                          <a:cs typeface="Calibri" pitchFamily="34" charset="-120"/>
+                        </a:rPr>
+                        <a:t>0,0182</a:t>
                       </a:r>
                       <a:endParaRPr lang="en-US" sz="1200" dirty="0">
                         <a:latin typeface="Calibri" charset="0"/>
@@ -11092,6 +18170,74 @@
                     </a:solidFill>
                   </a:tcPr>
                 </a:tc>
+                <a:tc>
+                  <a:txBody>
+                    <a:bodyPr/>
+                    <a:lstStyle/>
+                    <a:p>
+                      <a:pPr algn="ctr" indent="0" marL="0">
+                        <a:buNone/>
+                      </a:pPr>
+                      <a:r>
+                        <a:rPr lang="en-US" sz="1200" dirty="0">
+                          <a:solidFill>
+                            <a:srgbClr val="000000"/>
+                          </a:solidFill>
+                          <a:latin typeface="Calibri" pitchFamily="34" charset="0"/>
+                          <a:ea typeface="Calibri" pitchFamily="34" charset="-122"/>
+                          <a:cs typeface="Calibri" pitchFamily="34" charset="-120"/>
+                        </a:rPr>
+                        <a:t>0,0125</a:t>
+                      </a:r>
+                      <a:endParaRPr lang="en-US" sz="1200" dirty="0">
+                        <a:latin typeface="Calibri" charset="0"/>
+                        <a:ea typeface="Calibri" charset="0"/>
+                        <a:cs typeface="Calibri" charset="0"/>
+                      </a:endParaRPr>
+                    </a:p>
+                  </a:txBody>
+                  <a:tcPr marL="91440" marR="91440" marT="45720" marB="45720" anchor="ctr">
+                    <a:lnL w="6350" cap="flat" cmpd="sng" algn="ctr">
+                      <a:solidFill>
+                        <a:srgbClr val="CFD6D9"/>
+                      </a:solidFill>
+                      <a:prstDash val="solid"/>
+                      <a:round/>
+                      <a:headEnd type="none" w="med" len="med"/>
+                      <a:tailEnd type="none" w="med" len="med"/>
+                    </a:lnL>
+                    <a:lnR w="6350" cap="flat" cmpd="sng" algn="ctr">
+                      <a:solidFill>
+                        <a:srgbClr val="CFD6D9"/>
+                      </a:solidFill>
+                      <a:prstDash val="solid"/>
+                      <a:round/>
+                      <a:headEnd type="none" w="med" len="med"/>
+                      <a:tailEnd type="none" w="med" len="med"/>
+                    </a:lnR>
+                    <a:lnT w="6350" cap="flat" cmpd="sng" algn="ctr">
+                      <a:solidFill>
+                        <a:srgbClr val="CFD6D9"/>
+                      </a:solidFill>
+                      <a:prstDash val="solid"/>
+                      <a:round/>
+                      <a:headEnd type="none" w="med" len="med"/>
+                      <a:tailEnd type="none" w="med" len="med"/>
+                    </a:lnT>
+                    <a:lnB w="6350" cap="flat" cmpd="sng" algn="ctr">
+                      <a:solidFill>
+                        <a:srgbClr val="CFD6D9"/>
+                      </a:solidFill>
+                      <a:prstDash val="solid"/>
+                      <a:round/>
+                      <a:headEnd type="none" w="med" len="med"/>
+                      <a:tailEnd type="none" w="med" len="med"/>
+                    </a:lnB>
+                    <a:solidFill>
+                      <a:srgbClr val="EEF2F3"/>
+                    </a:solidFill>
+                  </a:tcPr>
+                </a:tc>
               </a:tr>
               <a:tr h="274320">
                 <a:tc>
@@ -11559,6 +18705,74 @@
                     </a:solidFill>
                   </a:tcPr>
                 </a:tc>
+                <a:tc>
+                  <a:txBody>
+                    <a:bodyPr/>
+                    <a:lstStyle/>
+                    <a:p>
+                      <a:pPr algn="ctr" indent="0" marL="0">
+                        <a:buNone/>
+                      </a:pPr>
+                      <a:r>
+                        <a:rPr lang="en-US" sz="1200" dirty="0">
+                          <a:solidFill>
+                            <a:srgbClr val="000000"/>
+                          </a:solidFill>
+                          <a:latin typeface="Calibri" pitchFamily="34" charset="0"/>
+                          <a:ea typeface="Calibri" pitchFamily="34" charset="-122"/>
+                          <a:cs typeface="Calibri" pitchFamily="34" charset="-120"/>
+                        </a:rPr>
+                        <a:t>0,0356</a:t>
+                      </a:r>
+                      <a:endParaRPr lang="en-US" sz="1200" dirty="0">
+                        <a:latin typeface="Calibri" charset="0"/>
+                        <a:ea typeface="Calibri" charset="0"/>
+                        <a:cs typeface="Calibri" charset="0"/>
+                      </a:endParaRPr>
+                    </a:p>
+                  </a:txBody>
+                  <a:tcPr marL="91440" marR="91440" marT="45720" marB="45720" anchor="ctr">
+                    <a:lnL w="6350" cap="flat" cmpd="sng" algn="ctr">
+                      <a:solidFill>
+                        <a:srgbClr val="CFD6D9"/>
+                      </a:solidFill>
+                      <a:prstDash val="solid"/>
+                      <a:round/>
+                      <a:headEnd type="none" w="med" len="med"/>
+                      <a:tailEnd type="none" w="med" len="med"/>
+                    </a:lnL>
+                    <a:lnR w="6350" cap="flat" cmpd="sng" algn="ctr">
+                      <a:solidFill>
+                        <a:srgbClr val="CFD6D9"/>
+                      </a:solidFill>
+                      <a:prstDash val="solid"/>
+                      <a:round/>
+                      <a:headEnd type="none" w="med" len="med"/>
+                      <a:tailEnd type="none" w="med" len="med"/>
+                    </a:lnR>
+                    <a:lnT w="6350" cap="flat" cmpd="sng" algn="ctr">
+                      <a:solidFill>
+                        <a:srgbClr val="CFD6D9"/>
+                      </a:solidFill>
+                      <a:prstDash val="solid"/>
+                      <a:round/>
+                      <a:headEnd type="none" w="med" len="med"/>
+                      <a:tailEnd type="none" w="med" len="med"/>
+                    </a:lnT>
+                    <a:lnB w="6350" cap="flat" cmpd="sng" algn="ctr">
+                      <a:solidFill>
+                        <a:srgbClr val="CFD6D9"/>
+                      </a:solidFill>
+                      <a:prstDash val="solid"/>
+                      <a:round/>
+                      <a:headEnd type="none" w="med" len="med"/>
+                      <a:tailEnd type="none" w="med" len="med"/>
+                    </a:lnB>
+                    <a:solidFill>
+                      <a:srgbClr val="FFFFFF"/>
+                    </a:solidFill>
+                  </a:tcPr>
+                </a:tc>
               </a:tr>
               <a:tr h="274320">
                 <a:tc>
@@ -11976,6 +19190,74 @@
                           <a:cs typeface="Calibri" pitchFamily="34" charset="-120"/>
                         </a:rPr>
                         <a:t>0,0919</a:t>
+                      </a:r>
+                      <a:endParaRPr lang="en-US" sz="1200" dirty="0">
+                        <a:latin typeface="Calibri" charset="0"/>
+                        <a:ea typeface="Calibri" charset="0"/>
+                        <a:cs typeface="Calibri" charset="0"/>
+                      </a:endParaRPr>
+                    </a:p>
+                  </a:txBody>
+                  <a:tcPr marL="91440" marR="91440" marT="45720" marB="45720" anchor="ctr">
+                    <a:lnL w="6350" cap="flat" cmpd="sng" algn="ctr">
+                      <a:solidFill>
+                        <a:srgbClr val="CFD6D9"/>
+                      </a:solidFill>
+                      <a:prstDash val="solid"/>
+                      <a:round/>
+                      <a:headEnd type="none" w="med" len="med"/>
+                      <a:tailEnd type="none" w="med" len="med"/>
+                    </a:lnL>
+                    <a:lnR w="6350" cap="flat" cmpd="sng" algn="ctr">
+                      <a:solidFill>
+                        <a:srgbClr val="CFD6D9"/>
+                      </a:solidFill>
+                      <a:prstDash val="solid"/>
+                      <a:round/>
+                      <a:headEnd type="none" w="med" len="med"/>
+                      <a:tailEnd type="none" w="med" len="med"/>
+                    </a:lnR>
+                    <a:lnT w="6350" cap="flat" cmpd="sng" algn="ctr">
+                      <a:solidFill>
+                        <a:srgbClr val="CFD6D9"/>
+                      </a:solidFill>
+                      <a:prstDash val="solid"/>
+                      <a:round/>
+                      <a:headEnd type="none" w="med" len="med"/>
+                      <a:tailEnd type="none" w="med" len="med"/>
+                    </a:lnT>
+                    <a:lnB w="6350" cap="flat" cmpd="sng" algn="ctr">
+                      <a:solidFill>
+                        <a:srgbClr val="CFD6D9"/>
+                      </a:solidFill>
+                      <a:prstDash val="solid"/>
+                      <a:round/>
+                      <a:headEnd type="none" w="med" len="med"/>
+                      <a:tailEnd type="none" w="med" len="med"/>
+                    </a:lnB>
+                    <a:solidFill>
+                      <a:srgbClr val="FFFFFF"/>
+                    </a:solidFill>
+                  </a:tcPr>
+                </a:tc>
+                <a:tc>
+                  <a:txBody>
+                    <a:bodyPr/>
+                    <a:lstStyle/>
+                    <a:p>
+                      <a:pPr algn="ctr" indent="0" marL="0">
+                        <a:buNone/>
+                      </a:pPr>
+                      <a:r>
+                        <a:rPr lang="en-US" sz="1200" dirty="0">
+                          <a:solidFill>
+                            <a:srgbClr val="000000"/>
+                          </a:solidFill>
+                          <a:latin typeface="Calibri" pitchFamily="34" charset="0"/>
+                          <a:ea typeface="Calibri" pitchFamily="34" charset="-122"/>
+                          <a:cs typeface="Calibri" pitchFamily="34" charset="-120"/>
+                        </a:rPr>
+                        <a:t>0,0136</a:t>
                       </a:r>
                       <a:endParaRPr lang="en-US" sz="1200" dirty="0">
                         <a:latin typeface="Calibri" charset="0"/>
@@ -12073,7 +19355,7 @@
             <a:pPr algn="r"/>
             <a:fld id="{F7021451-1387-4CA6-816F-3879F97B5CBC}" type="slidenum">
               <a:rPr b="0" lang="en-US"/>
-              <a:t>13</a:t>
+              <a:t>15</a:t>
             </a:fld>
             <a:endParaRPr lang="en-US"/>
           </a:p>
@@ -13057,7 +20339,7 @@
                 <a:ea typeface="Calibri" pitchFamily="34" charset="-122"/>
                 <a:cs typeface="Calibri" pitchFamily="34" charset="-120"/>
               </a:rPr>
-              <a:t>base empotrada, 100 N</a:t>
+              <a:t>base adherida, 100 N</a:t>
             </a:r>
             <a:endParaRPr lang="en-US" sz="1500" dirty="0"/>
           </a:p>
@@ -14024,7 +21306,7 @@
                 <a:ea typeface="Calibri" pitchFamily="34" charset="-122"/>
                 <a:cs typeface="Calibri" pitchFamily="34" charset="-120"/>
               </a:rPr>
-              <a:t>Es un desplazamiento, no una deformación unitaria. Mide la rigidez global.</a:t>
+              <a:t>Es un desplazamiento, no una deformación unitaria. Su máximo es local; la rigidez global sale del desplazamiento medio de la cima.</a:t>
             </a:r>
             <a:endParaRPr lang="en-US" sz="1400" dirty="0"/>
           </a:p>
@@ -14821,7 +22103,7 @@
                 <a:ea typeface="Calibri" pitchFamily="34" charset="-122"/>
                 <a:cs typeface="Calibri" pitchFamily="34" charset="-120"/>
               </a:rPr>
-              <a:t>100 N en −z, cargas nodales iguales</a:t>
+              <a:t>100 N en −z sobre las caras óseas</a:t>
             </a:r>
             <a:endParaRPr lang="en-US" sz="1400" dirty="0"/>
           </a:p>
@@ -15892,7 +23174,7 @@
                           <a:ea typeface="Calibri" pitchFamily="34" charset="-122"/>
                           <a:cs typeface="Calibri" pitchFamily="34" charset="-120"/>
                         </a:rPr>
-                        <a:t>100 N repartidos, sin plato rígido</a:t>
+                        <a:t>100 N como presión uniforme sobre las caras óseas, sin plato</a:t>
                       </a:r>
                       <a:endParaRPr lang="en-US" sz="1400" dirty="0">
                         <a:latin typeface="Calibri" charset="0"/>
@@ -16280,8 +23562,8 @@
         </p:nvSpPr>
         <p:spPr>
           <a:xfrm>
-            <a:off x="4937760" y="3749040"/>
-            <a:ext cx="6675120" cy="2286000"/>
+            <a:off x="4937760" y="3657600"/>
+            <a:ext cx="6675120" cy="2651760"/>
           </a:xfrm>
           <a:prstGeom prst="rect">
             <a:avLst/>
@@ -16295,13 +23577,13 @@
           <a:p>
             <a:pPr marL="342900" indent="-342900">
               <a:spcAft>
-                <a:spcPts val="800"/>
+                <a:spcPts val="500"/>
               </a:spcAft>
               <a:buSzPct val="100000"/>
               <a:buChar char="•"/>
             </a:pPr>
             <a:r>
-              <a:rPr lang="en-US" sz="1600" dirty="0">
+              <a:rPr lang="en-US" sz="1400" dirty="0">
                 <a:solidFill>
                   <a:srgbClr val="1B2A33"/>
                 </a:solidFill>
@@ -16309,20 +23591,20 @@
                 <a:ea typeface="Calibri" pitchFamily="34" charset="-122"/>
                 <a:cs typeface="Calibri" pitchFamily="34" charset="-120"/>
               </a:rPr>
-              <a:t>Base empotrada: es la condición del protocolo de Tapia y reproduce la fricción con los platos.</a:t>
+              <a:t>Base empotrada: adherida, con fricción infinita contra el plato. Es la condición del protocolo de Tapia aquí replicado.</a:t>
             </a:r>
-            <a:endParaRPr lang="en-US" sz="1600" dirty="0"/>
+            <a:endParaRPr lang="en-US" sz="1400" dirty="0"/>
           </a:p>
           <a:p>
             <a:pPr marL="342900" indent="-342900">
               <a:spcAft>
-                <a:spcPts val="800"/>
+                <a:spcPts val="500"/>
               </a:spcAft>
               <a:buSzPct val="100000"/>
               <a:buChar char="•"/>
             </a:pPr>
             <a:r>
-              <a:rPr lang="en-US" sz="1600" dirty="0">
+              <a:rPr lang="en-US" sz="1400" dirty="0">
                 <a:solidFill>
                   <a:srgbClr val="1B2A33"/>
                 </a:solidFill>
@@ -16330,20 +23612,20 @@
                 <a:ea typeface="Calibri" pitchFamily="34" charset="-122"/>
                 <a:cs typeface="Calibri" pitchFamily="34" charset="-120"/>
               </a:rPr>
-              <a:t>Contraste, apoyo deslizante (el de la app): uz = 0 en la base y solo lo mínimo contra el movimiento rígido.</a:t>
+              <a:t>Carga: presión uniforme σ·A_bruta/A_ósea sobre las caras óseas de la cima, no un plato rígido. Con un plato la rigidez sube (ver sensibilidad).</a:t>
             </a:r>
-            <a:endParaRPr lang="en-US" sz="1600" dirty="0"/>
+            <a:endParaRPr lang="en-US" sz="1400" dirty="0"/>
           </a:p>
           <a:p>
             <a:pPr marL="342900" indent="-342900">
               <a:spcAft>
-                <a:spcPts val="800"/>
+                <a:spcPts val="500"/>
               </a:spcAft>
               <a:buSzPct val="100000"/>
               <a:buChar char="•"/>
             </a:pPr>
             <a:r>
-              <a:rPr lang="en-US" sz="1600" dirty="0">
+              <a:rPr lang="en-US" sz="1400" dirty="0">
                 <a:solidFill>
                   <a:srgbClr val="1B2A33"/>
                 </a:solidFill>
@@ -16351,9 +23633,30 @@
                 <a:ea typeface="Calibri" pitchFamily="34" charset="-122"/>
                 <a:cs typeface="Calibri" pitchFamily="34" charset="-120"/>
               </a:rPr>
-              <a:t>Malla de 40³ hexaedros; NGSolve con solver directo y la app como control independiente.</a:t>
+              <a:t>Contraste, apoyo deslizante: uz = 0 en la base y solo anclajes contra el movimiento rígido.</a:t>
             </a:r>
-            <a:endParaRPr lang="en-US" sz="1600" dirty="0"/>
+            <a:endParaRPr lang="en-US" sz="1400" dirty="0"/>
+          </a:p>
+          <a:p>
+            <a:pPr marL="342900" indent="-342900">
+              <a:spcAft>
+                <a:spcPts val="500"/>
+              </a:spcAft>
+              <a:buSzPct val="100000"/>
+              <a:buChar char="•"/>
+            </a:pPr>
+            <a:r>
+              <a:rPr lang="en-US" sz="1400" dirty="0">
+                <a:solidFill>
+                  <a:srgbClr val="1B2A33"/>
+                </a:solidFill>
+                <a:latin typeface="Calibri" pitchFamily="34" charset="0"/>
+                <a:ea typeface="Calibri" pitchFamily="34" charset="-122"/>
+                <a:cs typeface="Calibri" pitchFamily="34" charset="-120"/>
+              </a:rPr>
+              <a:t>Malla de 40³ hexaedros (h = 75 µm); NGSolve con solver directo. La app solo actúa como control del solver. Tapia usa otro elemento y 50 µm.</a:t>
+            </a:r>
+            <a:endParaRPr lang="en-US" sz="1400" dirty="0"/>
           </a:p>
         </p:txBody>
       </p:sp>
@@ -16699,7 +24002,7 @@
                 <a:ea typeface="Calibri" pitchFamily="34" charset="-122"/>
                 <a:cs typeface="Calibri" pitchFamily="34" charset="-120"/>
               </a:rPr>
-              <a:t>E_app es 3,1 % mayor. Von Mises máximo = 1,76 σ en las esquinas de la base. El borde superior se expande 51 % de lo libre.</a:t>
+              <a:t>E_app es 3,1 % mayor. Von Mises máximo = 1,76 σ en las esquinas de la base (a 40³; con 16³ era 1,27 σ: crece al refinar). El borde superior se expande 51 % de lo libre.</a:t>
             </a:r>
             <a:endParaRPr lang="en-US" sz="1400" dirty="0"/>
           </a:p>
@@ -16939,7 +24242,7 @@
           </p:nvPr>
         </p:nvGraphicFramePr>
         <p:xfrm>
-          <a:off x="548640" y="1325880"/>
+          <a:off x="548640" y="1280160"/>
           <a:ext cx="11064240" cy="914400"/>
         </p:xfrm>
         <a:graphic>
@@ -16947,9 +24250,9 @@
             <a:tbl>
               <a:tblPr/>
               <a:tblGrid>
-                <a:gridCol w="8138160"/>
-                <a:gridCol w="1371600"/>
-                <a:gridCol w="1554480"/>
+                <a:gridCol w="7955280"/>
+                <a:gridCol w="1280160"/>
+                <a:gridCol w="1828800"/>
               </a:tblGrid>
               <a:tr h="384048">
                 <a:tc>
@@ -16969,7 +24272,7 @@
                           <a:ea typeface="Calibri" pitchFamily="34" charset="-122"/>
                           <a:cs typeface="Calibri" pitchFamily="34" charset="-120"/>
                         </a:rPr>
-                        <a:t>Análisis, comparado con la solución exacta del cubo</a:t>
+                        <a:t>Análisis (solución exacta o equilibrio)</a:t>
                       </a:r>
                       <a:endParaRPr lang="en-US" sz="1300" dirty="0">
                         <a:latin typeface="Calibri" charset="0"/>
@@ -17105,7 +24408,7 @@
                           <a:ea typeface="Calibri" pitchFamily="34" charset="-122"/>
                           <a:cs typeface="Calibri" pitchFamily="34" charset="-120"/>
                         </a:rPr>
-                        <a:t>Error máx.</a:t>
+                        <a:t>Error máx. frente a lo exacto</a:t>
                       </a:r>
                       <a:endParaRPr lang="en-US" sz="1300" dirty="0">
                         <a:latin typeface="Calibri" charset="0"/>
@@ -17157,7 +24460,7 @@
                   </a:tcPr>
                 </a:tc>
               </a:tr>
-              <a:tr h="731520">
+              <a:tr h="685800">
                 <a:tc>
                   <a:txBody>
                     <a:bodyPr/>
@@ -17354,7 +24657,7 @@
                   </a:tcPr>
                 </a:tc>
               </a:tr>
-              <a:tr h="411480">
+              <a:tr h="365760">
                 <a:tc>
                   <a:txBody>
                     <a:bodyPr/>
@@ -17551,7 +24854,7 @@
                   </a:tcPr>
                 </a:tc>
               </a:tr>
-              <a:tr h="411480">
+              <a:tr h="365760">
                 <a:tc>
                   <a:txBody>
                     <a:bodyPr/>
@@ -17748,7 +25051,7 @@
                   </a:tcPr>
                 </a:tc>
               </a:tr>
-              <a:tr h="411480">
+              <a:tr h="365760">
                 <a:tc>
                   <a:txBody>
                     <a:bodyPr/>
@@ -17945,7 +25248,7 @@
                   </a:tcPr>
                 </a:tc>
               </a:tr>
-              <a:tr h="411480">
+              <a:tr h="365760">
                 <a:tc>
                   <a:txBody>
                     <a:bodyPr/>
@@ -18142,7 +25445,7 @@
                   </a:tcPr>
                 </a:tc>
               </a:tr>
-              <a:tr h="411480">
+              <a:tr h="365760">
                 <a:tc>
                   <a:txBody>
                     <a:bodyPr/>
@@ -18339,6 +25642,203 @@
                   </a:tcPr>
                 </a:tc>
               </a:tr>
+              <a:tr h="365760">
+                <a:tc>
+                  <a:txBody>
+                    <a:bodyPr/>
+                    <a:lstStyle/>
+                    <a:p>
+                      <a:pPr algn="l" indent="0" marL="0">
+                        <a:buNone/>
+                      </a:pPr>
+                      <a:r>
+                        <a:rPr lang="en-US" sz="1300" dirty="0">
+                          <a:solidFill>
+                            <a:srgbClr val="000000"/>
+                          </a:solidFill>
+                          <a:latin typeface="Calibri" pitchFamily="34" charset="0"/>
+                          <a:ea typeface="Calibri" pitchFamily="34" charset="-122"/>
+                          <a:cs typeface="Calibri" pitchFamily="34" charset="-120"/>
+                        </a:rPr>
+                        <a:t>Columnas aisladas (E_app = φ·E del tejido) y malla 24 × 16 × 20 cargada en X, Y y Z; fragmentos flotantes</a:t>
+                      </a:r>
+                      <a:endParaRPr lang="en-US" sz="1300" dirty="0">
+                        <a:latin typeface="Calibri" charset="0"/>
+                        <a:ea typeface="Calibri" charset="0"/>
+                        <a:cs typeface="Calibri" charset="0"/>
+                      </a:endParaRPr>
+                    </a:p>
+                  </a:txBody>
+                  <a:tcPr marL="91440" marR="91440" marT="45720" marB="45720" anchor="ctr">
+                    <a:lnL w="12700" cap="flat" cmpd="sng" algn="ctr">
+                      <a:solidFill>
+                        <a:srgbClr val="CFD6D9"/>
+                      </a:solidFill>
+                      <a:prstDash val="solid"/>
+                      <a:round/>
+                      <a:headEnd type="none" w="med" len="med"/>
+                      <a:tailEnd type="none" w="med" len="med"/>
+                    </a:lnL>
+                    <a:lnR w="12700" cap="flat" cmpd="sng" algn="ctr">
+                      <a:solidFill>
+                        <a:srgbClr val="CFD6D9"/>
+                      </a:solidFill>
+                      <a:prstDash val="solid"/>
+                      <a:round/>
+                      <a:headEnd type="none" w="med" len="med"/>
+                      <a:tailEnd type="none" w="med" len="med"/>
+                    </a:lnR>
+                    <a:lnT w="12700" cap="flat" cmpd="sng" algn="ctr">
+                      <a:solidFill>
+                        <a:srgbClr val="CFD6D9"/>
+                      </a:solidFill>
+                      <a:prstDash val="solid"/>
+                      <a:round/>
+                      <a:headEnd type="none" w="med" len="med"/>
+                      <a:tailEnd type="none" w="med" len="med"/>
+                    </a:lnT>
+                    <a:lnB w="12700" cap="flat" cmpd="sng" algn="ctr">
+                      <a:solidFill>
+                        <a:srgbClr val="CFD6D9"/>
+                      </a:solidFill>
+                      <a:prstDash val="solid"/>
+                      <a:round/>
+                      <a:headEnd type="none" w="med" len="med"/>
+                      <a:tailEnd type="none" w="med" len="med"/>
+                    </a:lnB>
+                  </a:tcPr>
+                </a:tc>
+                <a:tc>
+                  <a:txBody>
+                    <a:bodyPr/>
+                    <a:lstStyle/>
+                    <a:p>
+                      <a:pPr algn="ctr" indent="0" marL="0">
+                        <a:buNone/>
+                      </a:pPr>
+                      <a:r>
+                        <a:rPr lang="en-US" sz="1300" dirty="0">
+                          <a:solidFill>
+                            <a:srgbClr val="000000"/>
+                          </a:solidFill>
+                          <a:latin typeface="Calibri" pitchFamily="34" charset="0"/>
+                          <a:ea typeface="Calibri" pitchFamily="34" charset="-122"/>
+                          <a:cs typeface="Calibri" pitchFamily="34" charset="-120"/>
+                        </a:rPr>
+                        <a:t>17</a:t>
+                      </a:r>
+                      <a:endParaRPr lang="en-US" sz="1300" dirty="0">
+                        <a:latin typeface="Calibri" charset="0"/>
+                        <a:ea typeface="Calibri" charset="0"/>
+                        <a:cs typeface="Calibri" charset="0"/>
+                      </a:endParaRPr>
+                    </a:p>
+                  </a:txBody>
+                  <a:tcPr marL="91440" marR="91440" marT="45720" marB="45720" anchor="ctr">
+                    <a:lnL w="12700" cap="flat" cmpd="sng" algn="ctr">
+                      <a:solidFill>
+                        <a:srgbClr val="CFD6D9"/>
+                      </a:solidFill>
+                      <a:prstDash val="solid"/>
+                      <a:round/>
+                      <a:headEnd type="none" w="med" len="med"/>
+                      <a:tailEnd type="none" w="med" len="med"/>
+                    </a:lnL>
+                    <a:lnR w="12700" cap="flat" cmpd="sng" algn="ctr">
+                      <a:solidFill>
+                        <a:srgbClr val="CFD6D9"/>
+                      </a:solidFill>
+                      <a:prstDash val="solid"/>
+                      <a:round/>
+                      <a:headEnd type="none" w="med" len="med"/>
+                      <a:tailEnd type="none" w="med" len="med"/>
+                    </a:lnR>
+                    <a:lnT w="12700" cap="flat" cmpd="sng" algn="ctr">
+                      <a:solidFill>
+                        <a:srgbClr val="CFD6D9"/>
+                      </a:solidFill>
+                      <a:prstDash val="solid"/>
+                      <a:round/>
+                      <a:headEnd type="none" w="med" len="med"/>
+                      <a:tailEnd type="none" w="med" len="med"/>
+                    </a:lnT>
+                    <a:lnB w="12700" cap="flat" cmpd="sng" algn="ctr">
+                      <a:solidFill>
+                        <a:srgbClr val="CFD6D9"/>
+                      </a:solidFill>
+                      <a:prstDash val="solid"/>
+                      <a:round/>
+                      <a:headEnd type="none" w="med" len="med"/>
+                      <a:tailEnd type="none" w="med" len="med"/>
+                    </a:lnB>
+                  </a:tcPr>
+                </a:tc>
+                <a:tc>
+                  <a:txBody>
+                    <a:bodyPr/>
+                    <a:lstStyle/>
+                    <a:p>
+                      <a:pPr algn="ctr" indent="0" marL="0">
+                        <a:buNone/>
+                      </a:pPr>
+                      <a:r>
+                        <a:rPr lang="en-US" sz="1300" dirty="0">
+                          <a:solidFill>
+                            <a:srgbClr val="000000"/>
+                          </a:solidFill>
+                          <a:latin typeface="Calibri" pitchFamily="34" charset="0"/>
+                          <a:ea typeface="Calibri" pitchFamily="34" charset="-122"/>
+                          <a:cs typeface="Calibri" pitchFamily="34" charset="-120"/>
+                        </a:rPr>
+                        <a:t>6,6 × 10⁻⁹</a:t>
+                      </a:r>
+                      <a:endParaRPr lang="en-US" sz="1300" dirty="0">
+                        <a:latin typeface="Calibri" charset="0"/>
+                        <a:ea typeface="Calibri" charset="0"/>
+                        <a:cs typeface="Calibri" charset="0"/>
+                      </a:endParaRPr>
+                    </a:p>
+                  </a:txBody>
+                  <a:tcPr marL="91440" marR="91440" marT="45720" marB="45720" anchor="ctr">
+                    <a:lnL w="12700" cap="flat" cmpd="sng" algn="ctr">
+                      <a:solidFill>
+                        <a:srgbClr val="CFD6D9"/>
+                      </a:solidFill>
+                      <a:prstDash val="solid"/>
+                      <a:round/>
+                      <a:headEnd type="none" w="med" len="med"/>
+                      <a:tailEnd type="none" w="med" len="med"/>
+                    </a:lnL>
+                    <a:lnR w="12700" cap="flat" cmpd="sng" algn="ctr">
+                      <a:solidFill>
+                        <a:srgbClr val="CFD6D9"/>
+                      </a:solidFill>
+                      <a:prstDash val="solid"/>
+                      <a:round/>
+                      <a:headEnd type="none" w="med" len="med"/>
+                      <a:tailEnd type="none" w="med" len="med"/>
+                    </a:lnR>
+                    <a:lnT w="12700" cap="flat" cmpd="sng" algn="ctr">
+                      <a:solidFill>
+                        <a:srgbClr val="CFD6D9"/>
+                      </a:solidFill>
+                      <a:prstDash val="solid"/>
+                      <a:round/>
+                      <a:headEnd type="none" w="med" len="med"/>
+                      <a:tailEnd type="none" w="med" len="med"/>
+                    </a:lnT>
+                    <a:lnB w="12700" cap="flat" cmpd="sng" algn="ctr">
+                      <a:solidFill>
+                        <a:srgbClr val="CFD6D9"/>
+                      </a:solidFill>
+                      <a:prstDash val="solid"/>
+                      <a:round/>
+                      <a:headEnd type="none" w="med" len="med"/>
+                      <a:tailEnd type="none" w="med" len="med"/>
+                    </a:lnB>
+                  </a:tcPr>
+                </a:tc>
+              </a:tr>
             </a:tbl>
           </a:graphicData>
         </a:graphic>
@@ -18351,7 +25851,7 @@
         </p:nvSpPr>
         <p:spPr>
           <a:xfrm>
-            <a:off x="548640" y="4800600"/>
+            <a:off x="548640" y="4846320"/>
             <a:ext cx="5120640" cy="1417320"/>
           </a:xfrm>
           <a:prstGeom prst="roundRect">
@@ -18378,7 +25878,7 @@
         </p:nvSpPr>
         <p:spPr>
           <a:xfrm>
-            <a:off x="777240" y="4892040"/>
+            <a:off x="777240" y="4919472"/>
             <a:ext cx="4663440" cy="685800"/>
           </a:xfrm>
           <a:prstGeom prst="rect">
@@ -18403,7 +25903,7 @@
                 <a:ea typeface="Cambria" pitchFamily="34" charset="-122"/>
                 <a:cs typeface="Cambria" pitchFamily="34" charset="-120"/>
               </a:rPr>
-              <a:t>114 de 114</a:t>
+              <a:t>131 de 131</a:t>
             </a:r>
             <a:endParaRPr lang="en-US" sz="4000" dirty="0"/>
           </a:p>
@@ -18417,7 +25917,7 @@
         </p:nvSpPr>
         <p:spPr>
           <a:xfrm>
-            <a:off x="777240" y="5577840"/>
+            <a:off x="777240" y="5605272"/>
             <a:ext cx="4663440" cy="594360"/>
           </a:xfrm>
           <a:prstGeom prst="rect">
@@ -18456,8 +25956,8 @@
         </p:nvSpPr>
         <p:spPr>
           <a:xfrm>
-            <a:off x="5943600" y="4754880"/>
-            <a:ext cx="5669280" cy="1554480"/>
+            <a:off x="5943600" y="4846320"/>
+            <a:ext cx="5669280" cy="1508760"/>
           </a:xfrm>
           <a:prstGeom prst="rect">
             <a:avLst/>
@@ -18471,7 +25971,7 @@
           <a:p>
             <a:pPr marL="342900" indent="-342900">
               <a:spcAft>
-                <a:spcPts val="400"/>
+                <a:spcPts val="300"/>
               </a:spcAft>
               <a:buSzPct val="100000"/>
               <a:buChar char="•"/>
@@ -18492,7 +25992,7 @@
           <a:p>
             <a:pPr marL="342900" indent="-342900">
               <a:spcAft>
-                <a:spcPts val="400"/>
+                <a:spcPts val="300"/>
               </a:spcAft>
               <a:buSzPct val="100000"/>
               <a:buChar char="•"/>
@@ -18513,7 +26013,7 @@
           <a:p>
             <a:pPr marL="342900" indent="-342900">
               <a:spcAft>
-                <a:spcPts val="400"/>
+                <a:spcPts val="300"/>
               </a:spcAft>
               <a:buSzPct val="100000"/>
               <a:buChar char="•"/>
@@ -18534,7 +26034,7 @@
           <a:p>
             <a:pPr marL="342900" indent="-342900">
               <a:spcAft>
-                <a:spcPts val="400"/>
+                <a:spcPts val="300"/>
               </a:spcAft>
               <a:buSzPct val="100000"/>
               <a:buChar char="•"/>
@@ -18784,7 +26284,7 @@
                           <a:ea typeface="Calibri" pitchFamily="34" charset="-122"/>
                           <a:cs typeface="Calibri" pitchFamily="34" charset="-120"/>
                         </a:rPr>
-                        <a:t>BV/TV del VOI</a:t>
+                        <a:t>BV/TV nativo del VOI</a:t>
                       </a:r>
                       <a:endParaRPr lang="en-US" sz="1400" dirty="0">
                         <a:latin typeface="Calibri" charset="0"/>
@@ -21237,7 +28737,7 @@
                 <a:ea typeface="Cambria" pitchFamily="34" charset="-122"/>
                 <a:cs typeface="Cambria" pitchFamily="34" charset="-120"/>
               </a:rPr>
-              <a:t>&lt; 1 %</a:t>
+              <a:t>0,87 pp</a:t>
             </a:r>
             <a:endParaRPr lang="en-US" sz="3400" dirty="0"/>
           </a:p>
@@ -21276,7 +28776,7 @@
                 <a:ea typeface="Calibri" pitchFamily="34" charset="-122"/>
                 <a:cs typeface="Calibri" pitchFamily="34" charset="-120"/>
               </a:rPr>
-              <a:t>diferencia de BV/TV entre cada candidato y su VOI</a:t>
+              <a:t>diferencia máxima de BV/TV entre un candidato y su VOI (puntos porcentuales)</a:t>
             </a:r>
             <a:endParaRPr lang="en-US" sz="1400" dirty="0"/>
           </a:p>
@@ -21624,7 +29124,7 @@
                 <a:ea typeface="Calibri" pitchFamily="34" charset="-122"/>
                 <a:cs typeface="Calibri" pitchFamily="34" charset="-120"/>
               </a:rPr>
-              <a:t>de la rigidez del VOI tiene el spinodoide: se deforma mucho más</a:t>
+              <a:t>de la rigidez del VOI conserva el spinodoide a 40³: se deforma más (ver convergencia)</a:t>
             </a:r>
             <a:endParaRPr lang="en-US" sz="1300" dirty="0"/>
           </a:p>
@@ -21873,7 +29373,7 @@
                 <a:ea typeface="Calibri" pitchFamily="34" charset="-122"/>
                 <a:cs typeface="Calibri" pitchFamily="34" charset="-120"/>
               </a:rPr>
-              <a:t>Escala común por columna: de 0 al p99 de la estructura más tensionada de cada VOI.</a:t>
+              <a:t>Escala común por columna: de 0 al p99 de la estructura más exigida de cada VOI. Amarillo = zona más deformada o tensionada.</a:t>
             </a:r>
             <a:endParaRPr lang="en-US" sz="1100" dirty="0"/>
           </a:p>
@@ -22116,7 +29616,7 @@
                 <a:ea typeface="Calibri" pitchFamily="34" charset="-122"/>
                 <a:cs typeface="Calibri" pitchFamily="34" charset="-120"/>
               </a:rPr>
-              <a:t>el p99 de von Mises del VOI alcanza el spinodoide</a:t>
+              <a:t>el p99 del VOI alcanza el spinodoide a 40³; sube al refinar</a:t>
             </a:r>
             <a:endParaRPr lang="en-US" sz="1300" dirty="0"/>
           </a:p>
@@ -22365,7 +29865,7 @@
                 <a:ea typeface="Calibri" pitchFamily="34" charset="-122"/>
                 <a:cs typeface="Calibri" pitchFamily="34" charset="-120"/>
               </a:rPr>
-              <a:t>Escala común por columna: de 0 al p99 de la estructura más tensionada de cada VOI.</a:t>
+              <a:t>Escala común por columna: de 0 al p99 de la estructura más exigida de cada VOI. Amarillo = zona más deformada o tensionada.</a:t>
             </a:r>
             <a:endParaRPr lang="en-US" sz="1100" dirty="0"/>
           </a:p>

--- a/comparativa_motores/tapia_c1_c5/Tapia_C1_C5.pptx
+++ b/comparativa_motores/tapia_c1_c5/Tapia_C1_C5.pptx
@@ -121,25 +121,25 @@
   <p:extLst>
     <p:ext uri="{521415D9-36F7-43E2-AB2F-B90AF26B5E84}">
       <p14:sectionLst xmlns:p14="http://schemas.microsoft.com/office/powerpoint/2010/main">
-        <p14:section name="Apertura" id="{a7a1f8ea-65dc-15de-8a7b-459a16700fa1}">
+        <p14:section name="Apertura" id="{c959f835-10c0-07b2-b50c-44d7300f80d1}">
           <p14:sldIdLst>
             <p14:sldId id="256"/>
           </p14:sldIdLst>
         </p14:section>
-        <p14:section name="Experimento y método" id="{499b2d92-e6a1-56a2-d05e-f5903b899861}">
+        <p14:section name="Experimento y método" id="{7cd4e0a9-c519-cc62-9370-30486c934777}">
           <p14:sldIdLst>
             <p14:sldId id="257"/>
             <p14:sldId id="258"/>
             <p14:sldId id="259"/>
           </p14:sldIdLst>
         </p14:section>
-        <p14:section name="Chequeo con el cubo macizo" id="{b7f32af3-7238-a01a-5e7f-5801f03d909c}">
+        <p14:section name="Chequeo con el cubo macizo" id="{57288cb3-3026-7802-001c-6758b98112d4}">
           <p14:sldIdLst>
             <p14:sldId id="260"/>
             <p14:sldId id="261"/>
           </p14:sldIdLst>
         </p14:section>
-        <p14:section name="Resultados" id="{e62a197e-5b54-db1f-1938-5d3ace4413b6}">
+        <p14:section name="Resultados" id="{99709caf-b987-8d4b-4f3e-e081e61ee298}">
           <p14:sldIdLst>
             <p14:sldId id="262"/>
             <p14:sldId id="263"/>
@@ -149,7 +149,7 @@
             <p14:sldId id="267"/>
           </p14:sldIdLst>
         </p14:section>
-        <p14:section name="Cierre" id="{143eff25-00e4-b66d-2395-50d9109e334b}">
+        <p14:section name="Cierre" id="{35e2bf47-5b53-db0b-2b8b-8cda02b6c3f2}">
           <p14:sldIdLst>
             <p14:sldId id="268"/>
             <p14:sldId id="269"/>
@@ -1718,7 +1718,7 @@
           <a:p>
             <a:r>
               <a:rPr lang="en-US" dirty="0"/>
-              <a:t>NGSolve con solver directo, misma carga y misma condición de apoyo, remuestreando cada estructura a distintas mallas. Las razones entre estructuras dependen de la resolución; la que se cita a 40 elementos por lado es una primera aproximación, no un valor convergido. El p99 de von Mises del spinodoide sube con la malla porque los puntales finos quedan mejor resueltos.</a:t>
+              <a:t>NGSolve con solver directo, misma carga y misma condición de apoyo, remuestreando cada estructura a distintas mallas. A 80 elementos por lado se usó CG con pyamg (un proceso por caso) por memoria; a 64 coincide con el directo en 4 cifras (comprobado en C2 spinodoide y C3 dual-lattice) y el equilibrio cierra a 10⁻¹³. Las razones entre estructuras dependen de la resolución; la que se cita a 40 elementos por lado es una primera aproximación, no un valor convergido. El p99 de von Mises del spinodoide sube con la malla porque los puntales finos quedan mejor resueltos.</a:t>
             </a:r>
             <a:endParaRPr lang="en-US" dirty="0"/>
           </a:p>
@@ -3850,15 +3850,18 @@
               <a:tblPr/>
               <a:tblGrid>
                 <a:gridCol w="1280160"/>
-                <a:gridCol w="1087120"/>
-                <a:gridCol w="1087120"/>
-                <a:gridCol w="1087120"/>
-                <a:gridCol w="1087120"/>
-                <a:gridCol w="1087120"/>
-                <a:gridCol w="1087120"/>
-                <a:gridCol w="1087120"/>
-                <a:gridCol w="1087120"/>
-                <a:gridCol w="1087120"/>
+                <a:gridCol w="815340"/>
+                <a:gridCol w="815340"/>
+                <a:gridCol w="815340"/>
+                <a:gridCol w="815340"/>
+                <a:gridCol w="815340"/>
+                <a:gridCol w="815340"/>
+                <a:gridCol w="815340"/>
+                <a:gridCol w="815340"/>
+                <a:gridCol w="815340"/>
+                <a:gridCol w="815340"/>
+                <a:gridCol w="815340"/>
+                <a:gridCol w="815340"/>
               </a:tblGrid>
               <a:tr h="384048">
                 <a:tc>
@@ -3929,7 +3932,7 @@
                     </a:solidFill>
                   </a:tcPr>
                 </a:tc>
-                <a:tc gridSpan="3">
+                <a:tc gridSpan="4">
                   <a:txBody>
                     <a:bodyPr/>
                     <a:lstStyle/>
@@ -4003,7 +4006,10 @@
                 <a:tc hMerge="1">
                   <a:tcPr/>
                 </a:tc>
-                <a:tc gridSpan="3">
+                <a:tc hMerge="1">
+                  <a:tcPr/>
+                </a:tc>
+                <a:tc gridSpan="4">
                   <a:txBody>
                     <a:bodyPr/>
                     <a:lstStyle/>
@@ -4077,7 +4083,10 @@
                 <a:tc hMerge="1">
                   <a:tcPr/>
                 </a:tc>
-                <a:tc gridSpan="3">
+                <a:tc hMerge="1">
+                  <a:tcPr/>
+                </a:tc>
+                <a:tc gridSpan="4">
                   <a:txBody>
                     <a:bodyPr/>
                     <a:lstStyle/>
@@ -4144,6 +4153,9 @@
                       <a:srgbClr val="1F3A44"/>
                     </a:solidFill>
                   </a:tcPr>
+                </a:tc>
+                <a:tc hMerge="1">
+                  <a:tcPr/>
                 </a:tc>
                 <a:tc hMerge="1">
                   <a:tcPr/>
@@ -4442,6 +4454,74 @@
                           <a:ea typeface="Calibri" pitchFamily="34" charset="-122"/>
                           <a:cs typeface="Calibri" pitchFamily="34" charset="-120"/>
                         </a:rPr>
+                        <a:t>80</a:t>
+                      </a:r>
+                      <a:endParaRPr lang="en-US" sz="1300" dirty="0">
+                        <a:latin typeface="Calibri" charset="0"/>
+                        <a:ea typeface="Calibri" charset="0"/>
+                        <a:cs typeface="Calibri" charset="0"/>
+                      </a:endParaRPr>
+                    </a:p>
+                  </a:txBody>
+                  <a:tcPr marL="91440" marR="91440" marT="45720" marB="45720" anchor="ctr">
+                    <a:lnL w="12700" cap="flat" cmpd="sng" algn="ctr">
+                      <a:solidFill>
+                        <a:srgbClr val="CFD6D9"/>
+                      </a:solidFill>
+                      <a:prstDash val="solid"/>
+                      <a:round/>
+                      <a:headEnd type="none" w="med" len="med"/>
+                      <a:tailEnd type="none" w="med" len="med"/>
+                    </a:lnL>
+                    <a:lnR w="12700" cap="flat" cmpd="sng" algn="ctr">
+                      <a:solidFill>
+                        <a:srgbClr val="CFD6D9"/>
+                      </a:solidFill>
+                      <a:prstDash val="solid"/>
+                      <a:round/>
+                      <a:headEnd type="none" w="med" len="med"/>
+                      <a:tailEnd type="none" w="med" len="med"/>
+                    </a:lnR>
+                    <a:lnT w="12700" cap="flat" cmpd="sng" algn="ctr">
+                      <a:solidFill>
+                        <a:srgbClr val="CFD6D9"/>
+                      </a:solidFill>
+                      <a:prstDash val="solid"/>
+                      <a:round/>
+                      <a:headEnd type="none" w="med" len="med"/>
+                      <a:tailEnd type="none" w="med" len="med"/>
+                    </a:lnT>
+                    <a:lnB w="12700" cap="flat" cmpd="sng" algn="ctr">
+                      <a:solidFill>
+                        <a:srgbClr val="CFD6D9"/>
+                      </a:solidFill>
+                      <a:prstDash val="solid"/>
+                      <a:round/>
+                      <a:headEnd type="none" w="med" len="med"/>
+                      <a:tailEnd type="none" w="med" len="med"/>
+                    </a:lnB>
+                    <a:solidFill>
+                      <a:srgbClr val="1F3A44"/>
+                    </a:solidFill>
+                  </a:tcPr>
+                </a:tc>
+                <a:tc>
+                  <a:txBody>
+                    <a:bodyPr/>
+                    <a:lstStyle/>
+                    <a:p>
+                      <a:pPr algn="ctr" indent="0" marL="0">
+                        <a:buNone/>
+                      </a:pPr>
+                      <a:r>
+                        <a:rPr lang="en-US" sz="1300" b="1" dirty="0">
+                          <a:solidFill>
+                            <a:srgbClr val="FFFFFF"/>
+                          </a:solidFill>
+                          <a:latin typeface="Calibri" pitchFamily="34" charset="0"/>
+                          <a:ea typeface="Calibri" pitchFamily="34" charset="-122"/>
+                          <a:cs typeface="Calibri" pitchFamily="34" charset="-120"/>
+                        </a:rPr>
                         <a:t>40</a:t>
                       </a:r>
                       <a:endParaRPr lang="en-US" sz="1300" dirty="0">
@@ -4646,6 +4726,74 @@
                           <a:ea typeface="Calibri" pitchFamily="34" charset="-122"/>
                           <a:cs typeface="Calibri" pitchFamily="34" charset="-120"/>
                         </a:rPr>
+                        <a:t>80</a:t>
+                      </a:r>
+                      <a:endParaRPr lang="en-US" sz="1300" dirty="0">
+                        <a:latin typeface="Calibri" charset="0"/>
+                        <a:ea typeface="Calibri" charset="0"/>
+                        <a:cs typeface="Calibri" charset="0"/>
+                      </a:endParaRPr>
+                    </a:p>
+                  </a:txBody>
+                  <a:tcPr marL="91440" marR="91440" marT="45720" marB="45720" anchor="ctr">
+                    <a:lnL w="12700" cap="flat" cmpd="sng" algn="ctr">
+                      <a:solidFill>
+                        <a:srgbClr val="CFD6D9"/>
+                      </a:solidFill>
+                      <a:prstDash val="solid"/>
+                      <a:round/>
+                      <a:headEnd type="none" w="med" len="med"/>
+                      <a:tailEnd type="none" w="med" len="med"/>
+                    </a:lnL>
+                    <a:lnR w="12700" cap="flat" cmpd="sng" algn="ctr">
+                      <a:solidFill>
+                        <a:srgbClr val="CFD6D9"/>
+                      </a:solidFill>
+                      <a:prstDash val="solid"/>
+                      <a:round/>
+                      <a:headEnd type="none" w="med" len="med"/>
+                      <a:tailEnd type="none" w="med" len="med"/>
+                    </a:lnR>
+                    <a:lnT w="12700" cap="flat" cmpd="sng" algn="ctr">
+                      <a:solidFill>
+                        <a:srgbClr val="CFD6D9"/>
+                      </a:solidFill>
+                      <a:prstDash val="solid"/>
+                      <a:round/>
+                      <a:headEnd type="none" w="med" len="med"/>
+                      <a:tailEnd type="none" w="med" len="med"/>
+                    </a:lnT>
+                    <a:lnB w="12700" cap="flat" cmpd="sng" algn="ctr">
+                      <a:solidFill>
+                        <a:srgbClr val="CFD6D9"/>
+                      </a:solidFill>
+                      <a:prstDash val="solid"/>
+                      <a:round/>
+                      <a:headEnd type="none" w="med" len="med"/>
+                      <a:tailEnd type="none" w="med" len="med"/>
+                    </a:lnB>
+                    <a:solidFill>
+                      <a:srgbClr val="1F3A44"/>
+                    </a:solidFill>
+                  </a:tcPr>
+                </a:tc>
+                <a:tc>
+                  <a:txBody>
+                    <a:bodyPr/>
+                    <a:lstStyle/>
+                    <a:p>
+                      <a:pPr algn="ctr" indent="0" marL="0">
+                        <a:buNone/>
+                      </a:pPr>
+                      <a:r>
+                        <a:rPr lang="en-US" sz="1300" b="1" dirty="0">
+                          <a:solidFill>
+                            <a:srgbClr val="FFFFFF"/>
+                          </a:solidFill>
+                          <a:latin typeface="Calibri" pitchFamily="34" charset="0"/>
+                          <a:ea typeface="Calibri" pitchFamily="34" charset="-122"/>
+                          <a:cs typeface="Calibri" pitchFamily="34" charset="-120"/>
+                        </a:rPr>
                         <a:t>40</a:t>
                       </a:r>
                       <a:endParaRPr lang="en-US" sz="1300" dirty="0">
@@ -4783,6 +4931,74 @@
                           <a:cs typeface="Calibri" pitchFamily="34" charset="-120"/>
                         </a:rPr>
                         <a:t>64</a:t>
+                      </a:r>
+                      <a:endParaRPr lang="en-US" sz="1300" dirty="0">
+                        <a:latin typeface="Calibri" charset="0"/>
+                        <a:ea typeface="Calibri" charset="0"/>
+                        <a:cs typeface="Calibri" charset="0"/>
+                      </a:endParaRPr>
+                    </a:p>
+                  </a:txBody>
+                  <a:tcPr marL="91440" marR="91440" marT="45720" marB="45720" anchor="ctr">
+                    <a:lnL w="12700" cap="flat" cmpd="sng" algn="ctr">
+                      <a:solidFill>
+                        <a:srgbClr val="CFD6D9"/>
+                      </a:solidFill>
+                      <a:prstDash val="solid"/>
+                      <a:round/>
+                      <a:headEnd type="none" w="med" len="med"/>
+                      <a:tailEnd type="none" w="med" len="med"/>
+                    </a:lnL>
+                    <a:lnR w="12700" cap="flat" cmpd="sng" algn="ctr">
+                      <a:solidFill>
+                        <a:srgbClr val="CFD6D9"/>
+                      </a:solidFill>
+                      <a:prstDash val="solid"/>
+                      <a:round/>
+                      <a:headEnd type="none" w="med" len="med"/>
+                      <a:tailEnd type="none" w="med" len="med"/>
+                    </a:lnR>
+                    <a:lnT w="12700" cap="flat" cmpd="sng" algn="ctr">
+                      <a:solidFill>
+                        <a:srgbClr val="CFD6D9"/>
+                      </a:solidFill>
+                      <a:prstDash val="solid"/>
+                      <a:round/>
+                      <a:headEnd type="none" w="med" len="med"/>
+                      <a:tailEnd type="none" w="med" len="med"/>
+                    </a:lnT>
+                    <a:lnB w="12700" cap="flat" cmpd="sng" algn="ctr">
+                      <a:solidFill>
+                        <a:srgbClr val="CFD6D9"/>
+                      </a:solidFill>
+                      <a:prstDash val="solid"/>
+                      <a:round/>
+                      <a:headEnd type="none" w="med" len="med"/>
+                      <a:tailEnd type="none" w="med" len="med"/>
+                    </a:lnB>
+                    <a:solidFill>
+                      <a:srgbClr val="1F3A44"/>
+                    </a:solidFill>
+                  </a:tcPr>
+                </a:tc>
+                <a:tc>
+                  <a:txBody>
+                    <a:bodyPr/>
+                    <a:lstStyle/>
+                    <a:p>
+                      <a:pPr algn="ctr" indent="0" marL="0">
+                        <a:buNone/>
+                      </a:pPr>
+                      <a:r>
+                        <a:rPr lang="en-US" sz="1300" b="1" dirty="0">
+                          <a:solidFill>
+                            <a:srgbClr val="FFFFFF"/>
+                          </a:solidFill>
+                          <a:latin typeface="Calibri" pitchFamily="34" charset="0"/>
+                          <a:ea typeface="Calibri" pitchFamily="34" charset="-122"/>
+                          <a:cs typeface="Calibri" pitchFamily="34" charset="-120"/>
+                        </a:rPr>
+                        <a:t>80</a:t>
                       </a:r>
                       <a:endParaRPr lang="en-US" sz="1300" dirty="0">
                         <a:latin typeface="Calibri" charset="0"/>
@@ -5112,6 +5328,71 @@
                           <a:ea typeface="Calibri" pitchFamily="34" charset="-122"/>
                           <a:cs typeface="Calibri" pitchFamily="34" charset="-120"/>
                         </a:rPr>
+                        <a:t>27</a:t>
+                      </a:r>
+                      <a:endParaRPr lang="en-US" sz="1300" dirty="0">
+                        <a:latin typeface="Calibri" charset="0"/>
+                        <a:ea typeface="Calibri" charset="0"/>
+                        <a:cs typeface="Calibri" charset="0"/>
+                      </a:endParaRPr>
+                    </a:p>
+                  </a:txBody>
+                  <a:tcPr marL="91440" marR="91440" marT="45720" marB="45720" anchor="ctr">
+                    <a:lnL w="12700" cap="flat" cmpd="sng" algn="ctr">
+                      <a:solidFill>
+                        <a:srgbClr val="CFD6D9"/>
+                      </a:solidFill>
+                      <a:prstDash val="solid"/>
+                      <a:round/>
+                      <a:headEnd type="none" w="med" len="med"/>
+                      <a:tailEnd type="none" w="med" len="med"/>
+                    </a:lnL>
+                    <a:lnR w="12700" cap="flat" cmpd="sng" algn="ctr">
+                      <a:solidFill>
+                        <a:srgbClr val="CFD6D9"/>
+                      </a:solidFill>
+                      <a:prstDash val="solid"/>
+                      <a:round/>
+                      <a:headEnd type="none" w="med" len="med"/>
+                      <a:tailEnd type="none" w="med" len="med"/>
+                    </a:lnR>
+                    <a:lnT w="12700" cap="flat" cmpd="sng" algn="ctr">
+                      <a:solidFill>
+                        <a:srgbClr val="CFD6D9"/>
+                      </a:solidFill>
+                      <a:prstDash val="solid"/>
+                      <a:round/>
+                      <a:headEnd type="none" w="med" len="med"/>
+                      <a:tailEnd type="none" w="med" len="med"/>
+                    </a:lnT>
+                    <a:lnB w="12700" cap="flat" cmpd="sng" algn="ctr">
+                      <a:solidFill>
+                        <a:srgbClr val="CFD6D9"/>
+                      </a:solidFill>
+                      <a:prstDash val="solid"/>
+                      <a:round/>
+                      <a:headEnd type="none" w="med" len="med"/>
+                      <a:tailEnd type="none" w="med" len="med"/>
+                    </a:lnB>
+                  </a:tcPr>
+                </a:tc>
+                <a:tc>
+                  <a:txBody>
+                    <a:bodyPr/>
+                    <a:lstStyle/>
+                    <a:p>
+                      <a:pPr algn="ctr" indent="0" marL="0">
+                        <a:buNone/>
+                      </a:pPr>
+                      <a:r>
+                        <a:rPr lang="en-US" sz="1300" dirty="0">
+                          <a:solidFill>
+                            <a:srgbClr val="000000"/>
+                          </a:solidFill>
+                          <a:latin typeface="Calibri" pitchFamily="34" charset="0"/>
+                          <a:ea typeface="Calibri" pitchFamily="34" charset="-122"/>
+                          <a:cs typeface="Calibri" pitchFamily="34" charset="-120"/>
+                        </a:rPr>
                         <a:t>75</a:t>
                       </a:r>
                       <a:endParaRPr lang="en-US" sz="1300" dirty="0">
@@ -5307,6 +5588,71 @@
                           <a:ea typeface="Calibri" pitchFamily="34" charset="-122"/>
                           <a:cs typeface="Calibri" pitchFamily="34" charset="-120"/>
                         </a:rPr>
+                        <a:t>71</a:t>
+                      </a:r>
+                      <a:endParaRPr lang="en-US" sz="1300" dirty="0">
+                        <a:latin typeface="Calibri" charset="0"/>
+                        <a:ea typeface="Calibri" charset="0"/>
+                        <a:cs typeface="Calibri" charset="0"/>
+                      </a:endParaRPr>
+                    </a:p>
+                  </a:txBody>
+                  <a:tcPr marL="91440" marR="91440" marT="45720" marB="45720" anchor="ctr">
+                    <a:lnL w="12700" cap="flat" cmpd="sng" algn="ctr">
+                      <a:solidFill>
+                        <a:srgbClr val="CFD6D9"/>
+                      </a:solidFill>
+                      <a:prstDash val="solid"/>
+                      <a:round/>
+                      <a:headEnd type="none" w="med" len="med"/>
+                      <a:tailEnd type="none" w="med" len="med"/>
+                    </a:lnL>
+                    <a:lnR w="12700" cap="flat" cmpd="sng" algn="ctr">
+                      <a:solidFill>
+                        <a:srgbClr val="CFD6D9"/>
+                      </a:solidFill>
+                      <a:prstDash val="solid"/>
+                      <a:round/>
+                      <a:headEnd type="none" w="med" len="med"/>
+                      <a:tailEnd type="none" w="med" len="med"/>
+                    </a:lnR>
+                    <a:lnT w="12700" cap="flat" cmpd="sng" algn="ctr">
+                      <a:solidFill>
+                        <a:srgbClr val="CFD6D9"/>
+                      </a:solidFill>
+                      <a:prstDash val="solid"/>
+                      <a:round/>
+                      <a:headEnd type="none" w="med" len="med"/>
+                      <a:tailEnd type="none" w="med" len="med"/>
+                    </a:lnT>
+                    <a:lnB w="12700" cap="flat" cmpd="sng" algn="ctr">
+                      <a:solidFill>
+                        <a:srgbClr val="CFD6D9"/>
+                      </a:solidFill>
+                      <a:prstDash val="solid"/>
+                      <a:round/>
+                      <a:headEnd type="none" w="med" len="med"/>
+                      <a:tailEnd type="none" w="med" len="med"/>
+                    </a:lnB>
+                  </a:tcPr>
+                </a:tc>
+                <a:tc>
+                  <a:txBody>
+                    <a:bodyPr/>
+                    <a:lstStyle/>
+                    <a:p>
+                      <a:pPr algn="ctr" indent="0" marL="0">
+                        <a:buNone/>
+                      </a:pPr>
+                      <a:r>
+                        <a:rPr lang="en-US" sz="1300" dirty="0">
+                          <a:solidFill>
+                            <a:srgbClr val="000000"/>
+                          </a:solidFill>
+                          <a:latin typeface="Calibri" pitchFamily="34" charset="0"/>
+                          <a:ea typeface="Calibri" pitchFamily="34" charset="-122"/>
+                          <a:cs typeface="Calibri" pitchFamily="34" charset="-120"/>
+                        </a:rPr>
                         <a:t>2,1</a:t>
                       </a:r>
                       <a:endParaRPr lang="en-US" sz="1300" dirty="0">
@@ -5438,6 +5784,71 @@
                           <a:cs typeface="Calibri" pitchFamily="34" charset="-120"/>
                         </a:rPr>
                         <a:t>2,3</a:t>
+                      </a:r>
+                      <a:endParaRPr lang="en-US" sz="1300" dirty="0">
+                        <a:latin typeface="Calibri" charset="0"/>
+                        <a:ea typeface="Calibri" charset="0"/>
+                        <a:cs typeface="Calibri" charset="0"/>
+                      </a:endParaRPr>
+                    </a:p>
+                  </a:txBody>
+                  <a:tcPr marL="91440" marR="91440" marT="45720" marB="45720" anchor="ctr">
+                    <a:lnL w="12700" cap="flat" cmpd="sng" algn="ctr">
+                      <a:solidFill>
+                        <a:srgbClr val="CFD6D9"/>
+                      </a:solidFill>
+                      <a:prstDash val="solid"/>
+                      <a:round/>
+                      <a:headEnd type="none" w="med" len="med"/>
+                      <a:tailEnd type="none" w="med" len="med"/>
+                    </a:lnL>
+                    <a:lnR w="12700" cap="flat" cmpd="sng" algn="ctr">
+                      <a:solidFill>
+                        <a:srgbClr val="CFD6D9"/>
+                      </a:solidFill>
+                      <a:prstDash val="solid"/>
+                      <a:round/>
+                      <a:headEnd type="none" w="med" len="med"/>
+                      <a:tailEnd type="none" w="med" len="med"/>
+                    </a:lnR>
+                    <a:lnT w="12700" cap="flat" cmpd="sng" algn="ctr">
+                      <a:solidFill>
+                        <a:srgbClr val="CFD6D9"/>
+                      </a:solidFill>
+                      <a:prstDash val="solid"/>
+                      <a:round/>
+                      <a:headEnd type="none" w="med" len="med"/>
+                      <a:tailEnd type="none" w="med" len="med"/>
+                    </a:lnT>
+                    <a:lnB w="12700" cap="flat" cmpd="sng" algn="ctr">
+                      <a:solidFill>
+                        <a:srgbClr val="CFD6D9"/>
+                      </a:solidFill>
+                      <a:prstDash val="solid"/>
+                      <a:round/>
+                      <a:headEnd type="none" w="med" len="med"/>
+                      <a:tailEnd type="none" w="med" len="med"/>
+                    </a:lnB>
+                  </a:tcPr>
+                </a:tc>
+                <a:tc>
+                  <a:txBody>
+                    <a:bodyPr/>
+                    <a:lstStyle/>
+                    <a:p>
+                      <a:pPr algn="ctr" indent="0" marL="0">
+                        <a:buNone/>
+                      </a:pPr>
+                      <a:r>
+                        <a:rPr lang="en-US" sz="1300" dirty="0">
+                          <a:solidFill>
+                            <a:srgbClr val="000000"/>
+                          </a:solidFill>
+                          <a:latin typeface="Calibri" pitchFamily="34" charset="0"/>
+                          <a:ea typeface="Calibri" pitchFamily="34" charset="-122"/>
+                          <a:cs typeface="Calibri" pitchFamily="34" charset="-120"/>
+                        </a:rPr>
+                        <a:t>2,4</a:t>
                       </a:r>
                       <a:endParaRPr lang="en-US" sz="1300" dirty="0">
                         <a:latin typeface="Calibri" charset="0"/>
@@ -5764,6 +6175,71 @@
                           <a:ea typeface="Calibri" pitchFamily="34" charset="-122"/>
                           <a:cs typeface="Calibri" pitchFamily="34" charset="-120"/>
                         </a:rPr>
+                        <a:t>13</a:t>
+                      </a:r>
+                      <a:endParaRPr lang="en-US" sz="1300" dirty="0">
+                        <a:latin typeface="Calibri" charset="0"/>
+                        <a:ea typeface="Calibri" charset="0"/>
+                        <a:cs typeface="Calibri" charset="0"/>
+                      </a:endParaRPr>
+                    </a:p>
+                  </a:txBody>
+                  <a:tcPr marL="91440" marR="91440" marT="45720" marB="45720" anchor="ctr">
+                    <a:lnL w="12700" cap="flat" cmpd="sng" algn="ctr">
+                      <a:solidFill>
+                        <a:srgbClr val="CFD6D9"/>
+                      </a:solidFill>
+                      <a:prstDash val="solid"/>
+                      <a:round/>
+                      <a:headEnd type="none" w="med" len="med"/>
+                      <a:tailEnd type="none" w="med" len="med"/>
+                    </a:lnL>
+                    <a:lnR w="12700" cap="flat" cmpd="sng" algn="ctr">
+                      <a:solidFill>
+                        <a:srgbClr val="CFD6D9"/>
+                      </a:solidFill>
+                      <a:prstDash val="solid"/>
+                      <a:round/>
+                      <a:headEnd type="none" w="med" len="med"/>
+                      <a:tailEnd type="none" w="med" len="med"/>
+                    </a:lnR>
+                    <a:lnT w="12700" cap="flat" cmpd="sng" algn="ctr">
+                      <a:solidFill>
+                        <a:srgbClr val="CFD6D9"/>
+                      </a:solidFill>
+                      <a:prstDash val="solid"/>
+                      <a:round/>
+                      <a:headEnd type="none" w="med" len="med"/>
+                      <a:tailEnd type="none" w="med" len="med"/>
+                    </a:lnT>
+                    <a:lnB w="12700" cap="flat" cmpd="sng" algn="ctr">
+                      <a:solidFill>
+                        <a:srgbClr val="CFD6D9"/>
+                      </a:solidFill>
+                      <a:prstDash val="solid"/>
+                      <a:round/>
+                      <a:headEnd type="none" w="med" len="med"/>
+                      <a:tailEnd type="none" w="med" len="med"/>
+                    </a:lnB>
+                  </a:tcPr>
+                </a:tc>
+                <a:tc>
+                  <a:txBody>
+                    <a:bodyPr/>
+                    <a:lstStyle/>
+                    <a:p>
+                      <a:pPr algn="ctr" indent="0" marL="0">
+                        <a:buNone/>
+                      </a:pPr>
+                      <a:r>
+                        <a:rPr lang="en-US" sz="1300" dirty="0">
+                          <a:solidFill>
+                            <a:srgbClr val="000000"/>
+                          </a:solidFill>
+                          <a:latin typeface="Calibri" pitchFamily="34" charset="0"/>
+                          <a:ea typeface="Calibri" pitchFamily="34" charset="-122"/>
+                          <a:cs typeface="Calibri" pitchFamily="34" charset="-120"/>
+                        </a:rPr>
                         <a:t>80</a:t>
                       </a:r>
                       <a:endParaRPr lang="en-US" sz="1300" dirty="0">
@@ -5959,6 +6435,71 @@
                           <a:ea typeface="Calibri" pitchFamily="34" charset="-122"/>
                           <a:cs typeface="Calibri" pitchFamily="34" charset="-120"/>
                         </a:rPr>
+                        <a:t>78</a:t>
+                      </a:r>
+                      <a:endParaRPr lang="en-US" sz="1300" dirty="0">
+                        <a:latin typeface="Calibri" charset="0"/>
+                        <a:ea typeface="Calibri" charset="0"/>
+                        <a:cs typeface="Calibri" charset="0"/>
+                      </a:endParaRPr>
+                    </a:p>
+                  </a:txBody>
+                  <a:tcPr marL="91440" marR="91440" marT="45720" marB="45720" anchor="ctr">
+                    <a:lnL w="12700" cap="flat" cmpd="sng" algn="ctr">
+                      <a:solidFill>
+                        <a:srgbClr val="CFD6D9"/>
+                      </a:solidFill>
+                      <a:prstDash val="solid"/>
+                      <a:round/>
+                      <a:headEnd type="none" w="med" len="med"/>
+                      <a:tailEnd type="none" w="med" len="med"/>
+                    </a:lnL>
+                    <a:lnR w="12700" cap="flat" cmpd="sng" algn="ctr">
+                      <a:solidFill>
+                        <a:srgbClr val="CFD6D9"/>
+                      </a:solidFill>
+                      <a:prstDash val="solid"/>
+                      <a:round/>
+                      <a:headEnd type="none" w="med" len="med"/>
+                      <a:tailEnd type="none" w="med" len="med"/>
+                    </a:lnR>
+                    <a:lnT w="12700" cap="flat" cmpd="sng" algn="ctr">
+                      <a:solidFill>
+                        <a:srgbClr val="CFD6D9"/>
+                      </a:solidFill>
+                      <a:prstDash val="solid"/>
+                      <a:round/>
+                      <a:headEnd type="none" w="med" len="med"/>
+                      <a:tailEnd type="none" w="med" len="med"/>
+                    </a:lnT>
+                    <a:lnB w="12700" cap="flat" cmpd="sng" algn="ctr">
+                      <a:solidFill>
+                        <a:srgbClr val="CFD6D9"/>
+                      </a:solidFill>
+                      <a:prstDash val="solid"/>
+                      <a:round/>
+                      <a:headEnd type="none" w="med" len="med"/>
+                      <a:tailEnd type="none" w="med" len="med"/>
+                    </a:lnB>
+                  </a:tcPr>
+                </a:tc>
+                <a:tc>
+                  <a:txBody>
+                    <a:bodyPr/>
+                    <a:lstStyle/>
+                    <a:p>
+                      <a:pPr algn="ctr" indent="0" marL="0">
+                        <a:buNone/>
+                      </a:pPr>
+                      <a:r>
+                        <a:rPr lang="en-US" sz="1300" dirty="0">
+                          <a:solidFill>
+                            <a:srgbClr val="000000"/>
+                          </a:solidFill>
+                          <a:latin typeface="Calibri" pitchFamily="34" charset="0"/>
+                          <a:ea typeface="Calibri" pitchFamily="34" charset="-122"/>
+                          <a:cs typeface="Calibri" pitchFamily="34" charset="-120"/>
+                        </a:rPr>
                         <a:t>1,8</a:t>
                       </a:r>
                       <a:endParaRPr lang="en-US" sz="1300" dirty="0">
@@ -6090,6 +6631,71 @@
                           <a:cs typeface="Calibri" pitchFamily="34" charset="-120"/>
                         </a:rPr>
                         <a:t>2,0</a:t>
+                      </a:r>
+                      <a:endParaRPr lang="en-US" sz="1300" dirty="0">
+                        <a:latin typeface="Calibri" charset="0"/>
+                        <a:ea typeface="Calibri" charset="0"/>
+                        <a:cs typeface="Calibri" charset="0"/>
+                      </a:endParaRPr>
+                    </a:p>
+                  </a:txBody>
+                  <a:tcPr marL="91440" marR="91440" marT="45720" marB="45720" anchor="ctr">
+                    <a:lnL w="12700" cap="flat" cmpd="sng" algn="ctr">
+                      <a:solidFill>
+                        <a:srgbClr val="CFD6D9"/>
+                      </a:solidFill>
+                      <a:prstDash val="solid"/>
+                      <a:round/>
+                      <a:headEnd type="none" w="med" len="med"/>
+                      <a:tailEnd type="none" w="med" len="med"/>
+                    </a:lnL>
+                    <a:lnR w="12700" cap="flat" cmpd="sng" algn="ctr">
+                      <a:solidFill>
+                        <a:srgbClr val="CFD6D9"/>
+                      </a:solidFill>
+                      <a:prstDash val="solid"/>
+                      <a:round/>
+                      <a:headEnd type="none" w="med" len="med"/>
+                      <a:tailEnd type="none" w="med" len="med"/>
+                    </a:lnR>
+                    <a:lnT w="12700" cap="flat" cmpd="sng" algn="ctr">
+                      <a:solidFill>
+                        <a:srgbClr val="CFD6D9"/>
+                      </a:solidFill>
+                      <a:prstDash val="solid"/>
+                      <a:round/>
+                      <a:headEnd type="none" w="med" len="med"/>
+                      <a:tailEnd type="none" w="med" len="med"/>
+                    </a:lnT>
+                    <a:lnB w="12700" cap="flat" cmpd="sng" algn="ctr">
+                      <a:solidFill>
+                        <a:srgbClr val="CFD6D9"/>
+                      </a:solidFill>
+                      <a:prstDash val="solid"/>
+                      <a:round/>
+                      <a:headEnd type="none" w="med" len="med"/>
+                      <a:tailEnd type="none" w="med" len="med"/>
+                    </a:lnB>
+                  </a:tcPr>
+                </a:tc>
+                <a:tc>
+                  <a:txBody>
+                    <a:bodyPr/>
+                    <a:lstStyle/>
+                    <a:p>
+                      <a:pPr algn="ctr" indent="0" marL="0">
+                        <a:buNone/>
+                      </a:pPr>
+                      <a:r>
+                        <a:rPr lang="en-US" sz="1300" dirty="0">
+                          <a:solidFill>
+                            <a:srgbClr val="000000"/>
+                          </a:solidFill>
+                          <a:latin typeface="Calibri" pitchFamily="34" charset="0"/>
+                          <a:ea typeface="Calibri" pitchFamily="34" charset="-122"/>
+                          <a:cs typeface="Calibri" pitchFamily="34" charset="-120"/>
+                        </a:rPr>
+                        <a:t>2,2</a:t>
                       </a:r>
                       <a:endParaRPr lang="en-US" sz="1300" dirty="0">
                         <a:latin typeface="Calibri" charset="0"/>
@@ -6416,6 +7022,71 @@
                           <a:ea typeface="Calibri" pitchFamily="34" charset="-122"/>
                           <a:cs typeface="Calibri" pitchFamily="34" charset="-120"/>
                         </a:rPr>
+                        <a:t>14</a:t>
+                      </a:r>
+                      <a:endParaRPr lang="en-US" sz="1300" dirty="0">
+                        <a:latin typeface="Calibri" charset="0"/>
+                        <a:ea typeface="Calibri" charset="0"/>
+                        <a:cs typeface="Calibri" charset="0"/>
+                      </a:endParaRPr>
+                    </a:p>
+                  </a:txBody>
+                  <a:tcPr marL="91440" marR="91440" marT="45720" marB="45720" anchor="ctr">
+                    <a:lnL w="12700" cap="flat" cmpd="sng" algn="ctr">
+                      <a:solidFill>
+                        <a:srgbClr val="CFD6D9"/>
+                      </a:solidFill>
+                      <a:prstDash val="solid"/>
+                      <a:round/>
+                      <a:headEnd type="none" w="med" len="med"/>
+                      <a:tailEnd type="none" w="med" len="med"/>
+                    </a:lnL>
+                    <a:lnR w="12700" cap="flat" cmpd="sng" algn="ctr">
+                      <a:solidFill>
+                        <a:srgbClr val="CFD6D9"/>
+                      </a:solidFill>
+                      <a:prstDash val="solid"/>
+                      <a:round/>
+                      <a:headEnd type="none" w="med" len="med"/>
+                      <a:tailEnd type="none" w="med" len="med"/>
+                    </a:lnR>
+                    <a:lnT w="12700" cap="flat" cmpd="sng" algn="ctr">
+                      <a:solidFill>
+                        <a:srgbClr val="CFD6D9"/>
+                      </a:solidFill>
+                      <a:prstDash val="solid"/>
+                      <a:round/>
+                      <a:headEnd type="none" w="med" len="med"/>
+                      <a:tailEnd type="none" w="med" len="med"/>
+                    </a:lnT>
+                    <a:lnB w="12700" cap="flat" cmpd="sng" algn="ctr">
+                      <a:solidFill>
+                        <a:srgbClr val="CFD6D9"/>
+                      </a:solidFill>
+                      <a:prstDash val="solid"/>
+                      <a:round/>
+                      <a:headEnd type="none" w="med" len="med"/>
+                      <a:tailEnd type="none" w="med" len="med"/>
+                    </a:lnB>
+                  </a:tcPr>
+                </a:tc>
+                <a:tc>
+                  <a:txBody>
+                    <a:bodyPr/>
+                    <a:lstStyle/>
+                    <a:p>
+                      <a:pPr algn="ctr" indent="0" marL="0">
+                        <a:buNone/>
+                      </a:pPr>
+                      <a:r>
+                        <a:rPr lang="en-US" sz="1300" dirty="0">
+                          <a:solidFill>
+                            <a:srgbClr val="000000"/>
+                          </a:solidFill>
+                          <a:latin typeface="Calibri" pitchFamily="34" charset="0"/>
+                          <a:ea typeface="Calibri" pitchFamily="34" charset="-122"/>
+                          <a:cs typeface="Calibri" pitchFamily="34" charset="-120"/>
+                        </a:rPr>
                         <a:t>69</a:t>
                       </a:r>
                       <a:endParaRPr lang="en-US" sz="1300" dirty="0">
@@ -6611,6 +7282,71 @@
                           <a:ea typeface="Calibri" pitchFamily="34" charset="-122"/>
                           <a:cs typeface="Calibri" pitchFamily="34" charset="-120"/>
                         </a:rPr>
+                        <a:t>49</a:t>
+                      </a:r>
+                      <a:endParaRPr lang="en-US" sz="1300" dirty="0">
+                        <a:latin typeface="Calibri" charset="0"/>
+                        <a:ea typeface="Calibri" charset="0"/>
+                        <a:cs typeface="Calibri" charset="0"/>
+                      </a:endParaRPr>
+                    </a:p>
+                  </a:txBody>
+                  <a:tcPr marL="91440" marR="91440" marT="45720" marB="45720" anchor="ctr">
+                    <a:lnL w="12700" cap="flat" cmpd="sng" algn="ctr">
+                      <a:solidFill>
+                        <a:srgbClr val="CFD6D9"/>
+                      </a:solidFill>
+                      <a:prstDash val="solid"/>
+                      <a:round/>
+                      <a:headEnd type="none" w="med" len="med"/>
+                      <a:tailEnd type="none" w="med" len="med"/>
+                    </a:lnL>
+                    <a:lnR w="12700" cap="flat" cmpd="sng" algn="ctr">
+                      <a:solidFill>
+                        <a:srgbClr val="CFD6D9"/>
+                      </a:solidFill>
+                      <a:prstDash val="solid"/>
+                      <a:round/>
+                      <a:headEnd type="none" w="med" len="med"/>
+                      <a:tailEnd type="none" w="med" len="med"/>
+                    </a:lnR>
+                    <a:lnT w="12700" cap="flat" cmpd="sng" algn="ctr">
+                      <a:solidFill>
+                        <a:srgbClr val="CFD6D9"/>
+                      </a:solidFill>
+                      <a:prstDash val="solid"/>
+                      <a:round/>
+                      <a:headEnd type="none" w="med" len="med"/>
+                      <a:tailEnd type="none" w="med" len="med"/>
+                    </a:lnT>
+                    <a:lnB w="12700" cap="flat" cmpd="sng" algn="ctr">
+                      <a:solidFill>
+                        <a:srgbClr val="CFD6D9"/>
+                      </a:solidFill>
+                      <a:prstDash val="solid"/>
+                      <a:round/>
+                      <a:headEnd type="none" w="med" len="med"/>
+                      <a:tailEnd type="none" w="med" len="med"/>
+                    </a:lnB>
+                  </a:tcPr>
+                </a:tc>
+                <a:tc>
+                  <a:txBody>
+                    <a:bodyPr/>
+                    <a:lstStyle/>
+                    <a:p>
+                      <a:pPr algn="ctr" indent="0" marL="0">
+                        <a:buNone/>
+                      </a:pPr>
+                      <a:r>
+                        <a:rPr lang="en-US" sz="1300" dirty="0">
+                          <a:solidFill>
+                            <a:srgbClr val="000000"/>
+                          </a:solidFill>
+                          <a:latin typeface="Calibri" pitchFamily="34" charset="0"/>
+                          <a:ea typeface="Calibri" pitchFamily="34" charset="-122"/>
+                          <a:cs typeface="Calibri" pitchFamily="34" charset="-120"/>
+                        </a:rPr>
                         <a:t>3,1</a:t>
                       </a:r>
                       <a:endParaRPr lang="en-US" sz="1300" dirty="0">
@@ -6742,6 +7478,71 @@
                           <a:cs typeface="Calibri" pitchFamily="34" charset="-120"/>
                         </a:rPr>
                         <a:t>3,7</a:t>
+                      </a:r>
+                      <a:endParaRPr lang="en-US" sz="1300" dirty="0">
+                        <a:latin typeface="Calibri" charset="0"/>
+                        <a:ea typeface="Calibri" charset="0"/>
+                        <a:cs typeface="Calibri" charset="0"/>
+                      </a:endParaRPr>
+                    </a:p>
+                  </a:txBody>
+                  <a:tcPr marL="91440" marR="91440" marT="45720" marB="45720" anchor="ctr">
+                    <a:lnL w="12700" cap="flat" cmpd="sng" algn="ctr">
+                      <a:solidFill>
+                        <a:srgbClr val="CFD6D9"/>
+                      </a:solidFill>
+                      <a:prstDash val="solid"/>
+                      <a:round/>
+                      <a:headEnd type="none" w="med" len="med"/>
+                      <a:tailEnd type="none" w="med" len="med"/>
+                    </a:lnL>
+                    <a:lnR w="12700" cap="flat" cmpd="sng" algn="ctr">
+                      <a:solidFill>
+                        <a:srgbClr val="CFD6D9"/>
+                      </a:solidFill>
+                      <a:prstDash val="solid"/>
+                      <a:round/>
+                      <a:headEnd type="none" w="med" len="med"/>
+                      <a:tailEnd type="none" w="med" len="med"/>
+                    </a:lnR>
+                    <a:lnT w="12700" cap="flat" cmpd="sng" algn="ctr">
+                      <a:solidFill>
+                        <a:srgbClr val="CFD6D9"/>
+                      </a:solidFill>
+                      <a:prstDash val="solid"/>
+                      <a:round/>
+                      <a:headEnd type="none" w="med" len="med"/>
+                      <a:tailEnd type="none" w="med" len="med"/>
+                    </a:lnT>
+                    <a:lnB w="12700" cap="flat" cmpd="sng" algn="ctr">
+                      <a:solidFill>
+                        <a:srgbClr val="CFD6D9"/>
+                      </a:solidFill>
+                      <a:prstDash val="solid"/>
+                      <a:round/>
+                      <a:headEnd type="none" w="med" len="med"/>
+                      <a:tailEnd type="none" w="med" len="med"/>
+                    </a:lnB>
+                  </a:tcPr>
+                </a:tc>
+                <a:tc>
+                  <a:txBody>
+                    <a:bodyPr/>
+                    <a:lstStyle/>
+                    <a:p>
+                      <a:pPr algn="ctr" indent="0" marL="0">
+                        <a:buNone/>
+                      </a:pPr>
+                      <a:r>
+                        <a:rPr lang="en-US" sz="1300" dirty="0">
+                          <a:solidFill>
+                            <a:srgbClr val="000000"/>
+                          </a:solidFill>
+                          <a:latin typeface="Calibri" pitchFamily="34" charset="0"/>
+                          <a:ea typeface="Calibri" pitchFamily="34" charset="-122"/>
+                          <a:cs typeface="Calibri" pitchFamily="34" charset="-120"/>
+                        </a:rPr>
+                        <a:t>3,8</a:t>
                       </a:r>
                       <a:endParaRPr lang="en-US" sz="1300" dirty="0">
                         <a:latin typeface="Calibri" charset="0"/>
@@ -7068,6 +7869,71 @@
                           <a:ea typeface="Calibri" pitchFamily="34" charset="-122"/>
                           <a:cs typeface="Calibri" pitchFamily="34" charset="-120"/>
                         </a:rPr>
+                        <a:t>21</a:t>
+                      </a:r>
+                      <a:endParaRPr lang="en-US" sz="1300" dirty="0">
+                        <a:latin typeface="Calibri" charset="0"/>
+                        <a:ea typeface="Calibri" charset="0"/>
+                        <a:cs typeface="Calibri" charset="0"/>
+                      </a:endParaRPr>
+                    </a:p>
+                  </a:txBody>
+                  <a:tcPr marL="91440" marR="91440" marT="45720" marB="45720" anchor="ctr">
+                    <a:lnL w="12700" cap="flat" cmpd="sng" algn="ctr">
+                      <a:solidFill>
+                        <a:srgbClr val="CFD6D9"/>
+                      </a:solidFill>
+                      <a:prstDash val="solid"/>
+                      <a:round/>
+                      <a:headEnd type="none" w="med" len="med"/>
+                      <a:tailEnd type="none" w="med" len="med"/>
+                    </a:lnL>
+                    <a:lnR w="12700" cap="flat" cmpd="sng" algn="ctr">
+                      <a:solidFill>
+                        <a:srgbClr val="CFD6D9"/>
+                      </a:solidFill>
+                      <a:prstDash val="solid"/>
+                      <a:round/>
+                      <a:headEnd type="none" w="med" len="med"/>
+                      <a:tailEnd type="none" w="med" len="med"/>
+                    </a:lnR>
+                    <a:lnT w="12700" cap="flat" cmpd="sng" algn="ctr">
+                      <a:solidFill>
+                        <a:srgbClr val="CFD6D9"/>
+                      </a:solidFill>
+                      <a:prstDash val="solid"/>
+                      <a:round/>
+                      <a:headEnd type="none" w="med" len="med"/>
+                      <a:tailEnd type="none" w="med" len="med"/>
+                    </a:lnT>
+                    <a:lnB w="12700" cap="flat" cmpd="sng" algn="ctr">
+                      <a:solidFill>
+                        <a:srgbClr val="CFD6D9"/>
+                      </a:solidFill>
+                      <a:prstDash val="solid"/>
+                      <a:round/>
+                      <a:headEnd type="none" w="med" len="med"/>
+                      <a:tailEnd type="none" w="med" len="med"/>
+                    </a:lnB>
+                  </a:tcPr>
+                </a:tc>
+                <a:tc>
+                  <a:txBody>
+                    <a:bodyPr/>
+                    <a:lstStyle/>
+                    <a:p>
+                      <a:pPr algn="ctr" indent="0" marL="0">
+                        <a:buNone/>
+                      </a:pPr>
+                      <a:r>
+                        <a:rPr lang="en-US" sz="1300" dirty="0">
+                          <a:solidFill>
+                            <a:srgbClr val="000000"/>
+                          </a:solidFill>
+                          <a:latin typeface="Calibri" pitchFamily="34" charset="0"/>
+                          <a:ea typeface="Calibri" pitchFamily="34" charset="-122"/>
+                          <a:cs typeface="Calibri" pitchFamily="34" charset="-120"/>
+                        </a:rPr>
                         <a:t>79</a:t>
                       </a:r>
                       <a:endParaRPr lang="en-US" sz="1300" dirty="0">
@@ -7263,6 +8129,71 @@
                           <a:ea typeface="Calibri" pitchFamily="34" charset="-122"/>
                           <a:cs typeface="Calibri" pitchFamily="34" charset="-120"/>
                         </a:rPr>
+                        <a:t>69</a:t>
+                      </a:r>
+                      <a:endParaRPr lang="en-US" sz="1300" dirty="0">
+                        <a:latin typeface="Calibri" charset="0"/>
+                        <a:ea typeface="Calibri" charset="0"/>
+                        <a:cs typeface="Calibri" charset="0"/>
+                      </a:endParaRPr>
+                    </a:p>
+                  </a:txBody>
+                  <a:tcPr marL="91440" marR="91440" marT="45720" marB="45720" anchor="ctr">
+                    <a:lnL w="12700" cap="flat" cmpd="sng" algn="ctr">
+                      <a:solidFill>
+                        <a:srgbClr val="CFD6D9"/>
+                      </a:solidFill>
+                      <a:prstDash val="solid"/>
+                      <a:round/>
+                      <a:headEnd type="none" w="med" len="med"/>
+                      <a:tailEnd type="none" w="med" len="med"/>
+                    </a:lnL>
+                    <a:lnR w="12700" cap="flat" cmpd="sng" algn="ctr">
+                      <a:solidFill>
+                        <a:srgbClr val="CFD6D9"/>
+                      </a:solidFill>
+                      <a:prstDash val="solid"/>
+                      <a:round/>
+                      <a:headEnd type="none" w="med" len="med"/>
+                      <a:tailEnd type="none" w="med" len="med"/>
+                    </a:lnR>
+                    <a:lnT w="12700" cap="flat" cmpd="sng" algn="ctr">
+                      <a:solidFill>
+                        <a:srgbClr val="CFD6D9"/>
+                      </a:solidFill>
+                      <a:prstDash val="solid"/>
+                      <a:round/>
+                      <a:headEnd type="none" w="med" len="med"/>
+                      <a:tailEnd type="none" w="med" len="med"/>
+                    </a:lnT>
+                    <a:lnB w="12700" cap="flat" cmpd="sng" algn="ctr">
+                      <a:solidFill>
+                        <a:srgbClr val="CFD6D9"/>
+                      </a:solidFill>
+                      <a:prstDash val="solid"/>
+                      <a:round/>
+                      <a:headEnd type="none" w="med" len="med"/>
+                      <a:tailEnd type="none" w="med" len="med"/>
+                    </a:lnB>
+                  </a:tcPr>
+                </a:tc>
+                <a:tc>
+                  <a:txBody>
+                    <a:bodyPr/>
+                    <a:lstStyle/>
+                    <a:p>
+                      <a:pPr algn="ctr" indent="0" marL="0">
+                        <a:buNone/>
+                      </a:pPr>
+                      <a:r>
+                        <a:rPr lang="en-US" sz="1300" dirty="0">
+                          <a:solidFill>
+                            <a:srgbClr val="000000"/>
+                          </a:solidFill>
+                          <a:latin typeface="Calibri" pitchFamily="34" charset="0"/>
+                          <a:ea typeface="Calibri" pitchFamily="34" charset="-122"/>
+                          <a:cs typeface="Calibri" pitchFamily="34" charset="-120"/>
+                        </a:rPr>
                         <a:t>2,5</a:t>
                       </a:r>
                       <a:endParaRPr lang="en-US" sz="1300" dirty="0">
@@ -7394,6 +8325,71 @@
                           <a:cs typeface="Calibri" pitchFamily="34" charset="-120"/>
                         </a:rPr>
                         <a:t>2,9</a:t>
+                      </a:r>
+                      <a:endParaRPr lang="en-US" sz="1300" dirty="0">
+                        <a:latin typeface="Calibri" charset="0"/>
+                        <a:ea typeface="Calibri" charset="0"/>
+                        <a:cs typeface="Calibri" charset="0"/>
+                      </a:endParaRPr>
+                    </a:p>
+                  </a:txBody>
+                  <a:tcPr marL="91440" marR="91440" marT="45720" marB="45720" anchor="ctr">
+                    <a:lnL w="12700" cap="flat" cmpd="sng" algn="ctr">
+                      <a:solidFill>
+                        <a:srgbClr val="CFD6D9"/>
+                      </a:solidFill>
+                      <a:prstDash val="solid"/>
+                      <a:round/>
+                      <a:headEnd type="none" w="med" len="med"/>
+                      <a:tailEnd type="none" w="med" len="med"/>
+                    </a:lnL>
+                    <a:lnR w="12700" cap="flat" cmpd="sng" algn="ctr">
+                      <a:solidFill>
+                        <a:srgbClr val="CFD6D9"/>
+                      </a:solidFill>
+                      <a:prstDash val="solid"/>
+                      <a:round/>
+                      <a:headEnd type="none" w="med" len="med"/>
+                      <a:tailEnd type="none" w="med" len="med"/>
+                    </a:lnR>
+                    <a:lnT w="12700" cap="flat" cmpd="sng" algn="ctr">
+                      <a:solidFill>
+                        <a:srgbClr val="CFD6D9"/>
+                      </a:solidFill>
+                      <a:prstDash val="solid"/>
+                      <a:round/>
+                      <a:headEnd type="none" w="med" len="med"/>
+                      <a:tailEnd type="none" w="med" len="med"/>
+                    </a:lnT>
+                    <a:lnB w="12700" cap="flat" cmpd="sng" algn="ctr">
+                      <a:solidFill>
+                        <a:srgbClr val="CFD6D9"/>
+                      </a:solidFill>
+                      <a:prstDash val="solid"/>
+                      <a:round/>
+                      <a:headEnd type="none" w="med" len="med"/>
+                      <a:tailEnd type="none" w="med" len="med"/>
+                    </a:lnB>
+                  </a:tcPr>
+                </a:tc>
+                <a:tc>
+                  <a:txBody>
+                    <a:bodyPr/>
+                    <a:lstStyle/>
+                    <a:p>
+                      <a:pPr algn="ctr" indent="0" marL="0">
+                        <a:buNone/>
+                      </a:pPr>
+                      <a:r>
+                        <a:rPr lang="en-US" sz="1300" dirty="0">
+                          <a:solidFill>
+                            <a:srgbClr val="000000"/>
+                          </a:solidFill>
+                          <a:latin typeface="Calibri" pitchFamily="34" charset="0"/>
+                          <a:ea typeface="Calibri" pitchFamily="34" charset="-122"/>
+                          <a:cs typeface="Calibri" pitchFamily="34" charset="-120"/>
+                        </a:rPr>
+                        <a:t>3,1</a:t>
                       </a:r>
                       <a:endParaRPr lang="en-US" sz="1300" dirty="0">
                         <a:latin typeface="Calibri" charset="0"/>
@@ -7720,7 +8716,7 @@
                           <a:ea typeface="Calibri" pitchFamily="34" charset="-122"/>
                           <a:cs typeface="Calibri" pitchFamily="34" charset="-120"/>
                         </a:rPr>
-                        <a:t>75</a:t>
+                        <a:t>41</a:t>
                       </a:r>
                       <a:endParaRPr lang="en-US" sz="1300" dirty="0">
                         <a:latin typeface="Calibri" charset="0"/>
@@ -7850,7 +8846,137 @@
                           <a:ea typeface="Calibri" pitchFamily="34" charset="-122"/>
                           <a:cs typeface="Calibri" pitchFamily="34" charset="-120"/>
                         </a:rPr>
+                        <a:t>75</a:t>
+                      </a:r>
+                      <a:endParaRPr lang="en-US" sz="1300" dirty="0">
+                        <a:latin typeface="Calibri" charset="0"/>
+                        <a:ea typeface="Calibri" charset="0"/>
+                        <a:cs typeface="Calibri" charset="0"/>
+                      </a:endParaRPr>
+                    </a:p>
+                  </a:txBody>
+                  <a:tcPr marL="91440" marR="91440" marT="45720" marB="45720" anchor="ctr">
+                    <a:lnL w="12700" cap="flat" cmpd="sng" algn="ctr">
+                      <a:solidFill>
+                        <a:srgbClr val="CFD6D9"/>
+                      </a:solidFill>
+                      <a:prstDash val="solid"/>
+                      <a:round/>
+                      <a:headEnd type="none" w="med" len="med"/>
+                      <a:tailEnd type="none" w="med" len="med"/>
+                    </a:lnL>
+                    <a:lnR w="12700" cap="flat" cmpd="sng" algn="ctr">
+                      <a:solidFill>
+                        <a:srgbClr val="CFD6D9"/>
+                      </a:solidFill>
+                      <a:prstDash val="solid"/>
+                      <a:round/>
+                      <a:headEnd type="none" w="med" len="med"/>
+                      <a:tailEnd type="none" w="med" len="med"/>
+                    </a:lnR>
+                    <a:lnT w="12700" cap="flat" cmpd="sng" algn="ctr">
+                      <a:solidFill>
+                        <a:srgbClr val="CFD6D9"/>
+                      </a:solidFill>
+                      <a:prstDash val="solid"/>
+                      <a:round/>
+                      <a:headEnd type="none" w="med" len="med"/>
+                      <a:tailEnd type="none" w="med" len="med"/>
+                    </a:lnT>
+                    <a:lnB w="12700" cap="flat" cmpd="sng" algn="ctr">
+                      <a:solidFill>
+                        <a:srgbClr val="CFD6D9"/>
+                      </a:solidFill>
+                      <a:prstDash val="solid"/>
+                      <a:round/>
+                      <a:headEnd type="none" w="med" len="med"/>
+                      <a:tailEnd type="none" w="med" len="med"/>
+                    </a:lnB>
+                  </a:tcPr>
+                </a:tc>
+                <a:tc>
+                  <a:txBody>
+                    <a:bodyPr/>
+                    <a:lstStyle/>
+                    <a:p>
+                      <a:pPr algn="ctr" indent="0" marL="0">
+                        <a:buNone/>
+                      </a:pPr>
+                      <a:r>
+                        <a:rPr lang="en-US" sz="1300" dirty="0">
+                          <a:solidFill>
+                            <a:srgbClr val="000000"/>
+                          </a:solidFill>
+                          <a:latin typeface="Calibri" pitchFamily="34" charset="0"/>
+                          <a:ea typeface="Calibri" pitchFamily="34" charset="-122"/>
+                          <a:cs typeface="Calibri" pitchFamily="34" charset="-120"/>
+                        </a:rPr>
                         <a:t>74</a:t>
+                      </a:r>
+                      <a:endParaRPr lang="en-US" sz="1300" dirty="0">
+                        <a:latin typeface="Calibri" charset="0"/>
+                        <a:ea typeface="Calibri" charset="0"/>
+                        <a:cs typeface="Calibri" charset="0"/>
+                      </a:endParaRPr>
+                    </a:p>
+                  </a:txBody>
+                  <a:tcPr marL="91440" marR="91440" marT="45720" marB="45720" anchor="ctr">
+                    <a:lnL w="12700" cap="flat" cmpd="sng" algn="ctr">
+                      <a:solidFill>
+                        <a:srgbClr val="CFD6D9"/>
+                      </a:solidFill>
+                      <a:prstDash val="solid"/>
+                      <a:round/>
+                      <a:headEnd type="none" w="med" len="med"/>
+                      <a:tailEnd type="none" w="med" len="med"/>
+                    </a:lnL>
+                    <a:lnR w="12700" cap="flat" cmpd="sng" algn="ctr">
+                      <a:solidFill>
+                        <a:srgbClr val="CFD6D9"/>
+                      </a:solidFill>
+                      <a:prstDash val="solid"/>
+                      <a:round/>
+                      <a:headEnd type="none" w="med" len="med"/>
+                      <a:tailEnd type="none" w="med" len="med"/>
+                    </a:lnR>
+                    <a:lnT w="12700" cap="flat" cmpd="sng" algn="ctr">
+                      <a:solidFill>
+                        <a:srgbClr val="CFD6D9"/>
+                      </a:solidFill>
+                      <a:prstDash val="solid"/>
+                      <a:round/>
+                      <a:headEnd type="none" w="med" len="med"/>
+                      <a:tailEnd type="none" w="med" len="med"/>
+                    </a:lnT>
+                    <a:lnB w="12700" cap="flat" cmpd="sng" algn="ctr">
+                      <a:solidFill>
+                        <a:srgbClr val="CFD6D9"/>
+                      </a:solidFill>
+                      <a:prstDash val="solid"/>
+                      <a:round/>
+                      <a:headEnd type="none" w="med" len="med"/>
+                      <a:tailEnd type="none" w="med" len="med"/>
+                    </a:lnB>
+                  </a:tcPr>
+                </a:tc>
+                <a:tc>
+                  <a:txBody>
+                    <a:bodyPr/>
+                    <a:lstStyle/>
+                    <a:p>
+                      <a:pPr algn="ctr" indent="0" marL="0">
+                        <a:buNone/>
+                      </a:pPr>
+                      <a:r>
+                        <a:rPr lang="en-US" sz="1300" dirty="0">
+                          <a:solidFill>
+                            <a:srgbClr val="000000"/>
+                          </a:solidFill>
+                          <a:latin typeface="Calibri" pitchFamily="34" charset="0"/>
+                          <a:ea typeface="Calibri" pitchFamily="34" charset="-122"/>
+                          <a:cs typeface="Calibri" pitchFamily="34" charset="-120"/>
+                        </a:rPr>
+                        <a:t>73</a:t>
                       </a:r>
                       <a:endParaRPr lang="en-US" sz="1300" dirty="0">
                         <a:latin typeface="Calibri" charset="0"/>
@@ -7981,6 +9107,71 @@
                           <a:cs typeface="Calibri" pitchFamily="34" charset="-120"/>
                         </a:rPr>
                         <a:t>2,2</a:t>
+                      </a:r>
+                      <a:endParaRPr lang="en-US" sz="1300" dirty="0">
+                        <a:latin typeface="Calibri" charset="0"/>
+                        <a:ea typeface="Calibri" charset="0"/>
+                        <a:cs typeface="Calibri" charset="0"/>
+                      </a:endParaRPr>
+                    </a:p>
+                  </a:txBody>
+                  <a:tcPr marL="91440" marR="91440" marT="45720" marB="45720" anchor="ctr">
+                    <a:lnL w="12700" cap="flat" cmpd="sng" algn="ctr">
+                      <a:solidFill>
+                        <a:srgbClr val="CFD6D9"/>
+                      </a:solidFill>
+                      <a:prstDash val="solid"/>
+                      <a:round/>
+                      <a:headEnd type="none" w="med" len="med"/>
+                      <a:tailEnd type="none" w="med" len="med"/>
+                    </a:lnL>
+                    <a:lnR w="12700" cap="flat" cmpd="sng" algn="ctr">
+                      <a:solidFill>
+                        <a:srgbClr val="CFD6D9"/>
+                      </a:solidFill>
+                      <a:prstDash val="solid"/>
+                      <a:round/>
+                      <a:headEnd type="none" w="med" len="med"/>
+                      <a:tailEnd type="none" w="med" len="med"/>
+                    </a:lnR>
+                    <a:lnT w="12700" cap="flat" cmpd="sng" algn="ctr">
+                      <a:solidFill>
+                        <a:srgbClr val="CFD6D9"/>
+                      </a:solidFill>
+                      <a:prstDash val="solid"/>
+                      <a:round/>
+                      <a:headEnd type="none" w="med" len="med"/>
+                      <a:tailEnd type="none" w="med" len="med"/>
+                    </a:lnT>
+                    <a:lnB w="12700" cap="flat" cmpd="sng" algn="ctr">
+                      <a:solidFill>
+                        <a:srgbClr val="CFD6D9"/>
+                      </a:solidFill>
+                      <a:prstDash val="solid"/>
+                      <a:round/>
+                      <a:headEnd type="none" w="med" len="med"/>
+                      <a:tailEnd type="none" w="med" len="med"/>
+                    </a:lnB>
+                  </a:tcPr>
+                </a:tc>
+                <a:tc>
+                  <a:txBody>
+                    <a:bodyPr/>
+                    <a:lstStyle/>
+                    <a:p>
+                      <a:pPr algn="ctr" indent="0" marL="0">
+                        <a:buNone/>
+                      </a:pPr>
+                      <a:r>
+                        <a:rPr lang="en-US" sz="1300" dirty="0">
+                          <a:solidFill>
+                            <a:srgbClr val="000000"/>
+                          </a:solidFill>
+                          <a:latin typeface="Calibri" pitchFamily="34" charset="0"/>
+                          <a:ea typeface="Calibri" pitchFamily="34" charset="-122"/>
+                          <a:cs typeface="Calibri" pitchFamily="34" charset="-120"/>
+                        </a:rPr>
+                        <a:t>2,1</a:t>
                       </a:r>
                       <a:endParaRPr lang="en-US" sz="1300" dirty="0">
                         <a:latin typeface="Calibri" charset="0"/>
@@ -8158,7 +9349,7 @@
                 <a:ea typeface="Cambria" pitchFamily="34" charset="-122"/>
                 <a:cs typeface="Cambria" pitchFamily="34" charset="-120"/>
               </a:rPr>
-              <a:t>2 %</a:t>
+              <a:t>3 %</a:t>
             </a:r>
             <a:endParaRPr lang="en-US" sz="3200" dirty="0"/>
           </a:p>
@@ -8197,7 +9388,7 @@
                 <a:ea typeface="Calibri" pitchFamily="34" charset="-122"/>
                 <a:cs typeface="Calibri" pitchFamily="34" charset="-120"/>
               </a:rPr>
-              <a:t>cambio máximo de E_app del VOI entre 40³ y 64³: converge razonablemente</a:t>
+              <a:t>cambio máximo de E_app del VOI entre 40³ y 80³: converge razonablemente</a:t>
             </a:r>
             <a:endParaRPr lang="en-US" sz="1300" dirty="0"/>
           </a:p>
@@ -8263,7 +9454,7 @@
                 <a:ea typeface="Cambria" pitchFamily="34" charset="-122"/>
                 <a:cs typeface="Cambria" pitchFamily="34" charset="-120"/>
               </a:rPr>
-              <a:t>28 %</a:t>
+              <a:t>65 %</a:t>
             </a:r>
             <a:endParaRPr lang="en-US" sz="3200" dirty="0"/>
           </a:p>
@@ -8302,7 +9493,7 @@
                 <a:ea typeface="Calibri" pitchFamily="34" charset="-122"/>
                 <a:cs typeface="Calibri" pitchFamily="34" charset="-120"/>
               </a:rPr>
-              <a:t>cambio máximo en el spinodoide: sus puntales finos siguen resolviéndose, la malla no ha convergido</a:t>
+              <a:t>cambio máximo de E_app del spinodoide entre 64³ y 80³ (dual-lattice: 25 %): no han convergido y hay saltos bruscos</a:t>
             </a:r>
             <a:endParaRPr lang="en-US" sz="1300" dirty="0"/>
           </a:p>
@@ -8407,7 +9598,7 @@
                 <a:ea typeface="Calibri" pitchFamily="34" charset="-122"/>
                 <a:cs typeface="Calibri" pitchFamily="34" charset="-120"/>
               </a:rPr>
-              <a:t>VOI &gt; dual-lattice &gt; spinodoide se conserva en cada malla (salvo C5, donde dual y spinodoide quedan cercanos)</a:t>
+              <a:t>VOI &gt; dual-lattice &gt; spinodoide se conserva en los 5 VOIs y en todas las mallas. A 80³ el spinodoide conserva 13 a 41 % y el dual-lattice 49 a 78 %</a:t>
             </a:r>
             <a:endParaRPr lang="en-US" sz="1300" dirty="0"/>
           </a:p>
